--- a/presentation/insurance fertility.pptx
+++ b/presentation/insurance fertility.pptx
@@ -5,22 +5,21 @@
     <p:sldMasterId id="2147483648" r:id="rId1"/>
   </p:sldMasterIdLst>
   <p:notesMasterIdLst>
-    <p:notesMasterId r:id="rId15"/>
+    <p:notesMasterId r:id="rId14"/>
   </p:notesMasterIdLst>
   <p:sldIdLst>
     <p:sldId id="256" r:id="rId2"/>
-    <p:sldId id="257" r:id="rId3"/>
-    <p:sldId id="258" r:id="rId4"/>
-    <p:sldId id="259" r:id="rId5"/>
-    <p:sldId id="260" r:id="rId6"/>
-    <p:sldId id="261" r:id="rId7"/>
-    <p:sldId id="262" r:id="rId8"/>
-    <p:sldId id="263" r:id="rId9"/>
-    <p:sldId id="264" r:id="rId10"/>
-    <p:sldId id="265" r:id="rId11"/>
-    <p:sldId id="266" r:id="rId12"/>
-    <p:sldId id="267" r:id="rId13"/>
-    <p:sldId id="268" r:id="rId14"/>
+    <p:sldId id="261" r:id="rId3"/>
+    <p:sldId id="257" r:id="rId4"/>
+    <p:sldId id="258" r:id="rId5"/>
+    <p:sldId id="259" r:id="rId6"/>
+    <p:sldId id="262" r:id="rId7"/>
+    <p:sldId id="269" r:id="rId8"/>
+    <p:sldId id="264" r:id="rId9"/>
+    <p:sldId id="265" r:id="rId10"/>
+    <p:sldId id="266" r:id="rId11"/>
+    <p:sldId id="267" r:id="rId12"/>
+    <p:sldId id="268" r:id="rId13"/>
   </p:sldIdLst>
   <p:sldSz cx="9144000" cy="5143500" type="screen16x9"/>
   <p:notesSz cx="5143500" cy="9144000"/>
@@ -122,6 +121,7 @@
         <p14:section name="Introduction" id="{5464C965-4DB0-34D4-9242-4E14FBC25A53}">
           <p14:sldIdLst>
             <p14:sldId id="256"/>
+            <p14:sldId id="261"/>
             <p14:sldId id="257"/>
             <p14:sldId id="258"/>
             <p14:sldId id="259"/>
@@ -129,10 +129,8 @@
         </p14:section>
         <p14:section name="Descriptive results" id="{7B967780-94A7-DC7F-6EFD-2404547D278E}">
           <p14:sldIdLst>
-            <p14:sldId id="260"/>
-            <p14:sldId id="261"/>
             <p14:sldId id="262"/>
-            <p14:sldId id="263"/>
+            <p14:sldId id="269"/>
             <p14:sldId id="264"/>
           </p14:sldIdLst>
         </p14:section>
@@ -327,12 +325,93 @@
           <a:lstStyle/>
           <a:p>
             <a:r>
-              <a:rPr lang="en-US" dirty="0"/>
-              <a:t>My project examines the relationship between current health insurance and whether women report ever receiving medical help to become pregnant.
-I first compare the insurance groups descriptively. Then I examine differences in age, income, and education. Finally, I use logistic regression to see whether the insurance association remains after accounting for those characteristics.
-The main question is whether the initial insurance difference persists after adjustment.
-Time: about 45 seconds.</a:t>
-            </a:r>
+              <a:rPr lang="en-US" sz="1200" b="1" kern="1200" dirty="0">
+                <a:solidFill>
+                  <a:schemeClr val="tx1"/>
+                </a:solidFill>
+                <a:effectLst/>
+                <a:latin typeface="+mn-lt"/>
+                <a:ea typeface="+mn-ea"/>
+                <a:cs typeface="+mn-cs"/>
+              </a:rPr>
+              <a:t>Slide 1: Insurance Coverage and Fertility-Related Medical Help</a:t>
+            </a:r>
+            <a:endParaRPr lang="en-US" sz="1200" kern="1200" dirty="0">
+              <a:solidFill>
+                <a:schemeClr val="tx1"/>
+              </a:solidFill>
+              <a:effectLst/>
+              <a:latin typeface="+mn-lt"/>
+              <a:ea typeface="+mn-ea"/>
+              <a:cs typeface="+mn-cs"/>
+            </a:endParaRPr>
+          </a:p>
+          <a:p>
+            <a:r>
+              <a:rPr lang="en-US" sz="1200" kern="1200" dirty="0">
+                <a:solidFill>
+                  <a:schemeClr val="tx1"/>
+                </a:solidFill>
+                <a:effectLst/>
+                <a:latin typeface="+mn-lt"/>
+                <a:ea typeface="+mn-ea"/>
+                <a:cs typeface="+mn-cs"/>
+              </a:rPr>
+              <a:t>Today, I’m examining the relationship between insurance coverage and receiving medical help to become pregnant.</a:t>
+            </a:r>
+          </a:p>
+          <a:p>
+            <a:br>
+              <a:rPr lang="en-US" sz="1200" kern="1200" dirty="0">
+                <a:solidFill>
+                  <a:schemeClr val="tx1"/>
+                </a:solidFill>
+                <a:effectLst/>
+                <a:latin typeface="+mn-lt"/>
+                <a:ea typeface="+mn-ea"/>
+                <a:cs typeface="+mn-cs"/>
+              </a:rPr>
+            </a:br>
+            <a:endParaRPr lang="en-US" sz="1200" kern="1200" dirty="0">
+              <a:solidFill>
+                <a:schemeClr val="tx1"/>
+              </a:solidFill>
+              <a:effectLst/>
+              <a:latin typeface="+mn-lt"/>
+              <a:ea typeface="+mn-ea"/>
+              <a:cs typeface="+mn-cs"/>
+            </a:endParaRPr>
+          </a:p>
+          <a:p>
+            <a:r>
+              <a:rPr lang="en-US" sz="1200" kern="1200" dirty="0">
+                <a:solidFill>
+                  <a:schemeClr val="tx1"/>
+                </a:solidFill>
+                <a:effectLst/>
+                <a:latin typeface="+mn-lt"/>
+                <a:ea typeface="+mn-ea"/>
+                <a:cs typeface="+mn-cs"/>
+              </a:rPr>
+              <a:t>I use data from the 2022–2023 National Survey of Family Growth.</a:t>
+            </a:r>
+          </a:p>
+          <a:p>
+            <a:r>
+              <a:rPr lang="en-US" sz="1200" kern="1200" dirty="0">
+                <a:solidFill>
+                  <a:schemeClr val="tx1"/>
+                </a:solidFill>
+                <a:effectLst/>
+                <a:latin typeface="+mn-lt"/>
+                <a:ea typeface="+mn-ea"/>
+                <a:cs typeface="+mn-cs"/>
+              </a:rPr>
+              <a:t>I’ll begin with the difference that motivated this analysis. Then I’ll explore possible explanations and show what happens when I account for those characteristics together.</a:t>
+            </a:r>
+          </a:p>
+          <a:p>
+            <a:endParaRPr lang="en-US" dirty="0"/>
           </a:p>
         </p:txBody>
       </p:sp>
@@ -417,15 +496,426 @@
           <a:lstStyle/>
           <a:p>
             <a:r>
-              <a:rPr lang="en-US" dirty="0"/>
-              <a:t>I use logistic regression because the outcome has two possible values: yes or no.
-I first fit an insurance-only model, then a model that includes age, income, and education. This allows me to compare the insurance estimates before and after adjustment.
-The analysis incorporates the survey weights, strata, and clusters when calculating uncertainty.
-I report odds ratios. An odds ratio below one indicates lower odds relative to private coverage.
-Odds are different from probabilities. For example, an odds ratio of 0.54 represents 46% lower odds, not a 46-percentage-point reduction in probability.
-The model estimates an adjusted association under its assumptions.
-Time: about 1 minute 15 seconds.</a:t>
-            </a:r>
+              <a:rPr lang="en-US" sz="1200" b="1" kern="1200" dirty="0">
+                <a:solidFill>
+                  <a:schemeClr val="tx1"/>
+                </a:solidFill>
+                <a:effectLst/>
+                <a:latin typeface="+mn-lt"/>
+                <a:ea typeface="+mn-ea"/>
+                <a:cs typeface="+mn-cs"/>
+              </a:rPr>
+              <a:t>Slide 10: The Insurance Difference Becomes Smaller, but Remains</a:t>
+            </a:r>
+            <a:endParaRPr lang="en-US" sz="1200" kern="1200" dirty="0">
+              <a:solidFill>
+                <a:schemeClr val="tx1"/>
+              </a:solidFill>
+              <a:effectLst/>
+              <a:latin typeface="+mn-lt"/>
+              <a:ea typeface="+mn-ea"/>
+              <a:cs typeface="+mn-cs"/>
+            </a:endParaRPr>
+          </a:p>
+          <a:p>
+            <a:r>
+              <a:rPr lang="en-US" sz="1200" kern="1200" dirty="0">
+                <a:solidFill>
+                  <a:schemeClr val="tx1"/>
+                </a:solidFill>
+                <a:effectLst/>
+                <a:latin typeface="+mn-lt"/>
+                <a:ea typeface="+mn-ea"/>
+                <a:cs typeface="+mn-cs"/>
+              </a:rPr>
+              <a:t>This slide answers our main question: </a:t>
+            </a:r>
+            <a:r>
+              <a:rPr lang="en-US" sz="1200" b="1" kern="1200" dirty="0">
+                <a:solidFill>
+                  <a:schemeClr val="tx1"/>
+                </a:solidFill>
+                <a:effectLst/>
+                <a:latin typeface="+mn-lt"/>
+                <a:ea typeface="+mn-ea"/>
+                <a:cs typeface="+mn-cs"/>
+              </a:rPr>
+              <a:t>does the insurance difference remain after accounting for age, income, and education?</a:t>
+            </a:r>
+            <a:endParaRPr lang="en-US" sz="1200" kern="1200" dirty="0">
+              <a:solidFill>
+                <a:schemeClr val="tx1"/>
+              </a:solidFill>
+              <a:effectLst/>
+              <a:latin typeface="+mn-lt"/>
+              <a:ea typeface="+mn-ea"/>
+              <a:cs typeface="+mn-cs"/>
+            </a:endParaRPr>
+          </a:p>
+          <a:p>
+            <a:r>
+              <a:rPr lang="en-US" sz="1200" kern="1200" dirty="0">
+                <a:solidFill>
+                  <a:schemeClr val="tx1"/>
+                </a:solidFill>
+                <a:effectLst/>
+                <a:latin typeface="+mn-lt"/>
+                <a:ea typeface="+mn-ea"/>
+                <a:cs typeface="+mn-cs"/>
+              </a:rPr>
+              <a:t>First, look at the chart and the upper table.</a:t>
+            </a:r>
+          </a:p>
+          <a:p>
+            <a:r>
+              <a:rPr lang="en-US" sz="1200" kern="1200" dirty="0">
+                <a:solidFill>
+                  <a:schemeClr val="tx1"/>
+                </a:solidFill>
+                <a:effectLst/>
+                <a:latin typeface="+mn-lt"/>
+                <a:ea typeface="+mn-ea"/>
+                <a:cs typeface="+mn-cs"/>
+              </a:rPr>
+              <a:t>Each dot represents an adjusted estimate. The horizontal line shows its 95% confidence interval. The vertical line at one represents equal odds compared with private coverage.</a:t>
+            </a:r>
+          </a:p>
+          <a:p>
+            <a:br>
+              <a:rPr lang="en-US" sz="1200" kern="1200" dirty="0">
+                <a:solidFill>
+                  <a:schemeClr val="tx1"/>
+                </a:solidFill>
+                <a:effectLst/>
+                <a:latin typeface="+mn-lt"/>
+                <a:ea typeface="+mn-ea"/>
+                <a:cs typeface="+mn-cs"/>
+              </a:rPr>
+            </a:br>
+            <a:endParaRPr lang="en-US" sz="1200" kern="1200" dirty="0">
+              <a:solidFill>
+                <a:schemeClr val="tx1"/>
+              </a:solidFill>
+              <a:effectLst/>
+              <a:latin typeface="+mn-lt"/>
+              <a:ea typeface="+mn-ea"/>
+              <a:cs typeface="+mn-cs"/>
+            </a:endParaRPr>
+          </a:p>
+          <a:p>
+            <a:r>
+              <a:rPr lang="en-US" sz="1200" b="1" kern="1200" dirty="0">
+                <a:solidFill>
+                  <a:schemeClr val="tx1"/>
+                </a:solidFill>
+                <a:effectLst/>
+                <a:latin typeface="+mn-lt"/>
+                <a:ea typeface="+mn-ea"/>
+                <a:cs typeface="+mn-cs"/>
+              </a:rPr>
+              <a:t>“If the whole interval is on the left side of the dashed line, that tells us the group is significantly less likely to receive help than the private insurance group.”</a:t>
+            </a:r>
+            <a:endParaRPr lang="en-US" sz="1200" kern="1200" dirty="0">
+              <a:solidFill>
+                <a:schemeClr val="tx1"/>
+              </a:solidFill>
+              <a:effectLst/>
+              <a:latin typeface="+mn-lt"/>
+              <a:ea typeface="+mn-ea"/>
+              <a:cs typeface="+mn-cs"/>
+            </a:endParaRPr>
+          </a:p>
+          <a:p>
+            <a:br>
+              <a:rPr lang="en-US" sz="1200" kern="1200" dirty="0">
+                <a:solidFill>
+                  <a:schemeClr val="tx1"/>
+                </a:solidFill>
+                <a:effectLst/>
+                <a:latin typeface="+mn-lt"/>
+                <a:ea typeface="+mn-ea"/>
+                <a:cs typeface="+mn-cs"/>
+              </a:rPr>
+            </a:br>
+            <a:endParaRPr lang="en-US" sz="1200" kern="1200" dirty="0">
+              <a:solidFill>
+                <a:schemeClr val="tx1"/>
+              </a:solidFill>
+              <a:effectLst/>
+              <a:latin typeface="+mn-lt"/>
+              <a:ea typeface="+mn-ea"/>
+              <a:cs typeface="+mn-cs"/>
+            </a:endParaRPr>
+          </a:p>
+          <a:p>
+            <a:r>
+              <a:rPr lang="en-US" sz="1200" kern="1200" dirty="0">
+                <a:solidFill>
+                  <a:schemeClr val="tx1"/>
+                </a:solidFill>
+                <a:effectLst/>
+                <a:latin typeface="+mn-lt"/>
+                <a:ea typeface="+mn-ea"/>
+                <a:cs typeface="+mn-cs"/>
+              </a:rPr>
+              <a:t>For Medicaid, CHIP, or state coverage, the estimate is </a:t>
+            </a:r>
+            <a:r>
+              <a:rPr lang="en-US" sz="1200" b="1" kern="1200" dirty="0">
+                <a:solidFill>
+                  <a:schemeClr val="tx1"/>
+                </a:solidFill>
+                <a:effectLst/>
+                <a:latin typeface="+mn-lt"/>
+                <a:ea typeface="+mn-ea"/>
+                <a:cs typeface="+mn-cs"/>
+              </a:rPr>
+              <a:t>0.54</a:t>
+            </a:r>
+            <a:r>
+              <a:rPr lang="en-US" sz="1200" kern="1200" dirty="0">
+                <a:solidFill>
+                  <a:schemeClr val="tx1"/>
+                </a:solidFill>
+                <a:effectLst/>
+                <a:latin typeface="+mn-lt"/>
+                <a:ea typeface="+mn-ea"/>
+                <a:cs typeface="+mn-cs"/>
+              </a:rPr>
+              <a:t>, with an interval from approximately </a:t>
+            </a:r>
+            <a:r>
+              <a:rPr lang="en-US" sz="1200" b="1" kern="1200" dirty="0">
+                <a:solidFill>
+                  <a:schemeClr val="tx1"/>
+                </a:solidFill>
+                <a:effectLst/>
+                <a:latin typeface="+mn-lt"/>
+                <a:ea typeface="+mn-ea"/>
+                <a:cs typeface="+mn-cs"/>
+              </a:rPr>
+              <a:t>0.36 to 0.81</a:t>
+            </a:r>
+            <a:r>
+              <a:rPr lang="en-US" sz="1200" kern="1200" dirty="0">
+                <a:solidFill>
+                  <a:schemeClr val="tx1"/>
+                </a:solidFill>
+                <a:effectLst/>
+                <a:latin typeface="+mn-lt"/>
+                <a:ea typeface="+mn-ea"/>
+                <a:cs typeface="+mn-cs"/>
+              </a:rPr>
+              <a:t>.</a:t>
+            </a:r>
+          </a:p>
+          <a:p>
+            <a:r>
+              <a:rPr lang="en-US" sz="1200" kern="1200" dirty="0">
+                <a:solidFill>
+                  <a:schemeClr val="tx1"/>
+                </a:solidFill>
+                <a:effectLst/>
+                <a:latin typeface="+mn-lt"/>
+                <a:ea typeface="+mn-ea"/>
+                <a:cs typeface="+mn-cs"/>
+              </a:rPr>
+              <a:t>In everyday language, the model still shows that Medicaid respondents are less likely to report having received help after accounting for the selected characteristics. The entire interval is below one, which provides statistical evidence of that association.</a:t>
+            </a:r>
+          </a:p>
+          <a:p>
+            <a:r>
+              <a:rPr lang="en-US" sz="1200" kern="1200" dirty="0">
+                <a:solidFill>
+                  <a:schemeClr val="tx1"/>
+                </a:solidFill>
+                <a:effectLst/>
+                <a:latin typeface="+mn-lt"/>
+                <a:ea typeface="+mn-ea"/>
+                <a:cs typeface="+mn-cs"/>
+              </a:rPr>
+              <a:t>The single-service, IHS, or uninsured category also has an estimate below one: </a:t>
+            </a:r>
+            <a:r>
+              <a:rPr lang="en-US" sz="1200" b="1" kern="1200" dirty="0">
+                <a:solidFill>
+                  <a:schemeClr val="tx1"/>
+                </a:solidFill>
+                <a:effectLst/>
+                <a:latin typeface="+mn-lt"/>
+                <a:ea typeface="+mn-ea"/>
+                <a:cs typeface="+mn-cs"/>
+              </a:rPr>
+              <a:t>0.56</a:t>
+            </a:r>
+            <a:r>
+              <a:rPr lang="en-US" sz="1200" kern="1200" dirty="0">
+                <a:solidFill>
+                  <a:schemeClr val="tx1"/>
+                </a:solidFill>
+                <a:effectLst/>
+                <a:latin typeface="+mn-lt"/>
+                <a:ea typeface="+mn-ea"/>
+                <a:cs typeface="+mn-cs"/>
+              </a:rPr>
+              <a:t>, with an interval from </a:t>
+            </a:r>
+            <a:r>
+              <a:rPr lang="en-US" sz="1200" b="1" kern="1200" dirty="0">
+                <a:solidFill>
+                  <a:schemeClr val="tx1"/>
+                </a:solidFill>
+                <a:effectLst/>
+                <a:latin typeface="+mn-lt"/>
+                <a:ea typeface="+mn-ea"/>
+                <a:cs typeface="+mn-cs"/>
+              </a:rPr>
+              <a:t>0.32 to 0.97</a:t>
+            </a:r>
+            <a:r>
+              <a:rPr lang="en-US" sz="1200" kern="1200" dirty="0">
+                <a:solidFill>
+                  <a:schemeClr val="tx1"/>
+                </a:solidFill>
+                <a:effectLst/>
+                <a:latin typeface="+mn-lt"/>
+                <a:ea typeface="+mn-ea"/>
+                <a:cs typeface="+mn-cs"/>
+              </a:rPr>
+              <a:t>. This also provides evidence of an association, although its interval comes closer to one.</a:t>
+            </a:r>
+          </a:p>
+          <a:p>
+            <a:r>
+              <a:rPr lang="en-US" sz="1200" kern="1200" dirty="0">
+                <a:solidFill>
+                  <a:schemeClr val="tx1"/>
+                </a:solidFill>
+                <a:effectLst/>
+                <a:latin typeface="+mn-lt"/>
+                <a:ea typeface="+mn-ea"/>
+                <a:cs typeface="+mn-cs"/>
+              </a:rPr>
+              <a:t>For other-government coverage, the interval crosses one. The evidence does not clearly establish a difference from private coverage.</a:t>
+            </a:r>
+          </a:p>
+          <a:p>
+            <a:r>
+              <a:rPr lang="en-US" sz="1200" kern="1200" dirty="0">
+                <a:solidFill>
+                  <a:schemeClr val="tx1"/>
+                </a:solidFill>
+                <a:effectLst/>
+                <a:latin typeface="+mn-lt"/>
+                <a:ea typeface="+mn-ea"/>
+                <a:cs typeface="+mn-cs"/>
+              </a:rPr>
+              <a:t>Now look at the lower table.</a:t>
+            </a:r>
+          </a:p>
+          <a:p>
+            <a:r>
+              <a:rPr lang="en-US" sz="1200" kern="1200" dirty="0">
+                <a:solidFill>
+                  <a:schemeClr val="tx1"/>
+                </a:solidFill>
+                <a:effectLst/>
+                <a:latin typeface="+mn-lt"/>
+                <a:ea typeface="+mn-ea"/>
+                <a:cs typeface="+mn-cs"/>
+              </a:rPr>
+              <a:t>“Before” means the model includes insurance alone. “After” means it also includes age, income, and education.</a:t>
+            </a:r>
+          </a:p>
+          <a:p>
+            <a:r>
+              <a:rPr lang="en-US" sz="1200" kern="1200" dirty="0">
+                <a:solidFill>
+                  <a:schemeClr val="tx1"/>
+                </a:solidFill>
+                <a:effectLst/>
+                <a:latin typeface="+mn-lt"/>
+                <a:ea typeface="+mn-ea"/>
+                <a:cs typeface="+mn-cs"/>
+              </a:rPr>
+              <a:t>For Medicaid, the estimate moves from </a:t>
+            </a:r>
+            <a:r>
+              <a:rPr lang="en-US" sz="1200" b="1" kern="1200" dirty="0">
+                <a:solidFill>
+                  <a:schemeClr val="tx1"/>
+                </a:solidFill>
+                <a:effectLst/>
+                <a:latin typeface="+mn-lt"/>
+                <a:ea typeface="+mn-ea"/>
+                <a:cs typeface="+mn-cs"/>
+              </a:rPr>
+              <a:t>0.31 to 0.54</a:t>
+            </a:r>
+            <a:r>
+              <a:rPr lang="en-US" sz="1200" kern="1200" dirty="0">
+                <a:solidFill>
+                  <a:schemeClr val="tx1"/>
+                </a:solidFill>
+                <a:effectLst/>
+                <a:latin typeface="+mn-lt"/>
+                <a:ea typeface="+mn-ea"/>
+                <a:cs typeface="+mn-cs"/>
+              </a:rPr>
+              <a:t>. All three estimates move closer to one after adjustment.</a:t>
+            </a:r>
+          </a:p>
+          <a:p>
+            <a:r>
+              <a:rPr lang="en-US" sz="1200" kern="1200" dirty="0">
+                <a:solidFill>
+                  <a:schemeClr val="tx1"/>
+                </a:solidFill>
+                <a:effectLst/>
+                <a:latin typeface="+mn-lt"/>
+                <a:ea typeface="+mn-ea"/>
+                <a:cs typeface="+mn-cs"/>
+              </a:rPr>
+              <a:t>So the main story is: </a:t>
+            </a:r>
+            <a:r>
+              <a:rPr lang="en-US" sz="1200" b="1" kern="1200" dirty="0">
+                <a:solidFill>
+                  <a:schemeClr val="tx1"/>
+                </a:solidFill>
+                <a:effectLst/>
+                <a:latin typeface="+mn-lt"/>
+                <a:ea typeface="+mn-ea"/>
+                <a:cs typeface="+mn-cs"/>
+              </a:rPr>
+              <a:t>the estimated insurance association becomes smaller after adjustment, but it remains for Medicaid and the fourth category.</a:t>
+            </a:r>
+            <a:endParaRPr lang="en-US" sz="1200" kern="1200" dirty="0">
+              <a:solidFill>
+                <a:schemeClr val="tx1"/>
+              </a:solidFill>
+              <a:effectLst/>
+              <a:latin typeface="+mn-lt"/>
+              <a:ea typeface="+mn-ea"/>
+              <a:cs typeface="+mn-cs"/>
+            </a:endParaRPr>
+          </a:p>
+          <a:p>
+            <a:r>
+              <a:rPr lang="en-US" sz="1200" kern="1200" dirty="0">
+                <a:solidFill>
+                  <a:schemeClr val="tx1"/>
+                </a:solidFill>
+                <a:effectLst/>
+                <a:latin typeface="+mn-lt"/>
+                <a:ea typeface="+mn-ea"/>
+                <a:cs typeface="+mn-cs"/>
+              </a:rPr>
+              <a:t>The groups’ different characteristics matter to the comparison. However, this change does not let me calculate an exact percentage of the disparity that those characteristics explain.</a:t>
+            </a:r>
+          </a:p>
+          <a:p>
+            <a:endParaRPr lang="en-US" dirty="0"/>
           </a:p>
         </p:txBody>
       </p:sp>
@@ -510,15 +1000,141 @@
           <a:lstStyle/>
           <a:p>
             <a:r>
-              <a:rPr lang="en-US" dirty="0"/>
-              <a:t>Each point represents an adjusted odds ratio, and each horizontal line shows a 95% confidence interval. The vertical line at one represents equal odds relative to private coverage.
-Medicaid, CHIP, or state-covered respondents have an adjusted odds ratio of 0.54. This corresponds to approximately 46% lower odds of reporting lifetime help receipt, holding the selected control variables constant. Its confidence interval excludes one.
-The single-service, IHS, or uninsured category also has lower adjusted odds, with an odds ratio of 0.56. Its confidence interval is closer to one, so the evidence is less precise.
-The other-government interval crosses one. The data do not identify a clear adjusted difference for that category.
-All three estimates move closer to one after controls. The associations become smaller, but the Medicaid and fourth-category differences remain.
-In the control variables, age and bachelor’s-level education remain associated with help receipt. The adjusted linear income estimate is uncertain, despite its strong descriptive pattern.
-Time: about 2 minutes 15 seconds.</a:t>
-            </a:r>
+              <a:rPr lang="en-US" sz="1200" b="1" kern="1200" dirty="0">
+                <a:solidFill>
+                  <a:schemeClr val="tx1"/>
+                </a:solidFill>
+                <a:effectLst/>
+                <a:latin typeface="+mn-lt"/>
+                <a:ea typeface="+mn-ea"/>
+                <a:cs typeface="+mn-cs"/>
+              </a:rPr>
+              <a:t>Slide 11: Prior Research and Study Limitations</a:t>
+            </a:r>
+            <a:endParaRPr lang="en-US" sz="1200" kern="1200" dirty="0">
+              <a:solidFill>
+                <a:schemeClr val="tx1"/>
+              </a:solidFill>
+              <a:effectLst/>
+              <a:latin typeface="+mn-lt"/>
+              <a:ea typeface="+mn-ea"/>
+              <a:cs typeface="+mn-cs"/>
+            </a:endParaRPr>
+          </a:p>
+          <a:p>
+            <a:r>
+              <a:rPr lang="en-US" sz="1200" kern="1200" dirty="0">
+                <a:solidFill>
+                  <a:schemeClr val="tx1"/>
+                </a:solidFill>
+                <a:effectLst/>
+                <a:latin typeface="+mn-lt"/>
+                <a:ea typeface="+mn-ea"/>
+                <a:cs typeface="+mn-cs"/>
+              </a:rPr>
+              <a:t>The direction of the Medicaid–private association is consistent with the earlier study by Eliason and colleagues.</a:t>
+            </a:r>
+          </a:p>
+          <a:p>
+            <a:r>
+              <a:rPr lang="en-US" sz="1200" kern="1200" dirty="0">
+                <a:solidFill>
+                  <a:schemeClr val="tx1"/>
+                </a:solidFill>
+                <a:effectLst/>
+                <a:latin typeface="+mn-lt"/>
+                <a:ea typeface="+mn-ea"/>
+                <a:cs typeface="+mn-cs"/>
+              </a:rPr>
+              <a:t>However, their primary analysis examined past-year fertility-service use among respondents currently trying to conceive. My analysis examines lifetime help receipt in a broader sample.</a:t>
+            </a:r>
+          </a:p>
+          <a:p>
+            <a:r>
+              <a:rPr lang="en-US" sz="1200" kern="1200" dirty="0">
+                <a:solidFill>
+                  <a:schemeClr val="tx1"/>
+                </a:solidFill>
+                <a:effectLst/>
+                <a:latin typeface="+mn-lt"/>
+                <a:ea typeface="+mn-ea"/>
+                <a:cs typeface="+mn-cs"/>
+              </a:rPr>
+              <a:t>Because the outcomes and populations differ, I cannot interpret the estimates as showing how the disparity changed over time.</a:t>
+            </a:r>
+          </a:p>
+          <a:p>
+            <a:r>
+              <a:rPr lang="en-US" sz="1200" kern="1200" dirty="0">
+                <a:solidFill>
+                  <a:schemeClr val="tx1"/>
+                </a:solidFill>
+                <a:effectLst/>
+                <a:latin typeface="+mn-lt"/>
+                <a:ea typeface="+mn-ea"/>
+                <a:cs typeface="+mn-cs"/>
+              </a:rPr>
+              <a:t>There are also important limits to my findings.</a:t>
+            </a:r>
+          </a:p>
+          <a:p>
+            <a:r>
+              <a:rPr lang="en-US" sz="1200" kern="1200" dirty="0">
+                <a:solidFill>
+                  <a:schemeClr val="tx1"/>
+                </a:solidFill>
+                <a:effectLst/>
+                <a:latin typeface="+mn-lt"/>
+                <a:ea typeface="+mn-ea"/>
+                <a:cs typeface="+mn-cs"/>
+              </a:rPr>
+              <a:t>First, current insurance may differ from coverage at the time someone received care.</a:t>
+            </a:r>
+          </a:p>
+          <a:p>
+            <a:r>
+              <a:rPr lang="en-US" sz="1200" kern="1200" dirty="0">
+                <a:solidFill>
+                  <a:schemeClr val="tx1"/>
+                </a:solidFill>
+                <a:effectLst/>
+                <a:latin typeface="+mn-lt"/>
+                <a:ea typeface="+mn-ea"/>
+                <a:cs typeface="+mn-cs"/>
+              </a:rPr>
+              <a:t>Second, respondents have different fertility needs and intentions. Someone who never received help may never have needed or wanted it.</a:t>
+            </a:r>
+          </a:p>
+          <a:p>
+            <a:r>
+              <a:rPr lang="en-US" sz="1200" kern="1200" dirty="0">
+                <a:solidFill>
+                  <a:schemeClr val="tx1"/>
+                </a:solidFill>
+                <a:effectLst/>
+                <a:latin typeface="+mn-lt"/>
+                <a:ea typeface="+mn-ea"/>
+                <a:cs typeface="+mn-cs"/>
+              </a:rPr>
+              <a:t>Third, the data are observational. Accounting for age, income, and education does not remove every possible alternative explanation.</a:t>
+            </a:r>
+          </a:p>
+          <a:p>
+            <a:r>
+              <a:rPr lang="en-US" sz="1200" kern="1200" dirty="0">
+                <a:solidFill>
+                  <a:schemeClr val="tx1"/>
+                </a:solidFill>
+                <a:effectLst/>
+                <a:latin typeface="+mn-lt"/>
+                <a:ea typeface="+mn-ea"/>
+                <a:cs typeface="+mn-cs"/>
+              </a:rPr>
+              <a:t>The results therefore establish an association in reported care receipt. They cannot establish that insurance caused the difference or directly measure unmet need.</a:t>
+            </a:r>
+          </a:p>
+          <a:p>
+            <a:endParaRPr lang="en-US" dirty="0"/>
           </a:p>
         </p:txBody>
       </p:sp>
@@ -603,14 +1219,161 @@
           <a:lstStyle/>
           <a:p>
             <a:r>
-              <a:rPr lang="en-US" dirty="0"/>
-              <a:t>Eliason and colleagues examined Medicaid and private coverage using earlier NSFG data. Their primary comparison found lower past-year fertility-service use among Medicaid-covered respondents who were currently trying to conceive.
-My findings agree in the direction of the disparity. However, the outcome, population, and model differ. My analysis is a related comparison using newer data, rather than an exact replication. I cannot interpret the differences between the estimates as a time trend.
-My most important limitation is timing. Someone’s current insurance may differ from the insurance they had when they received medical help.
-Respondents also have different needs and intentions. A no response does not establish that someone needed care and could not access it.
-Finally, the model controls for selected characteristics, but other factors, including fertility history and clinical need, could contribute to the association.
-Time: about 1 minute 45 seconds.</a:t>
-            </a:r>
+              <a:rPr lang="en-US" sz="1200" b="1" kern="1200" dirty="0">
+                <a:solidFill>
+                  <a:schemeClr val="tx1"/>
+                </a:solidFill>
+                <a:effectLst/>
+                <a:latin typeface="+mn-lt"/>
+                <a:ea typeface="+mn-ea"/>
+                <a:cs typeface="+mn-cs"/>
+              </a:rPr>
+              <a:t>Slide 12: Insurance Differences Remain After Selected Controls</a:t>
+            </a:r>
+            <a:endParaRPr lang="en-US" sz="1200" kern="1200" dirty="0">
+              <a:solidFill>
+                <a:schemeClr val="tx1"/>
+              </a:solidFill>
+              <a:effectLst/>
+              <a:latin typeface="+mn-lt"/>
+              <a:ea typeface="+mn-ea"/>
+              <a:cs typeface="+mn-cs"/>
+            </a:endParaRPr>
+          </a:p>
+          <a:p>
+            <a:r>
+              <a:rPr lang="en-US" sz="1200" kern="1200" dirty="0">
+                <a:solidFill>
+                  <a:schemeClr val="tx1"/>
+                </a:solidFill>
+                <a:effectLst/>
+                <a:latin typeface="+mn-lt"/>
+                <a:ea typeface="+mn-ea"/>
+                <a:cs typeface="+mn-cs"/>
+              </a:rPr>
+              <a:t>I began with a large descriptive difference: approximately </a:t>
+            </a:r>
+            <a:r>
+              <a:rPr lang="en-US" sz="1200" b="1" kern="1200" dirty="0">
+                <a:solidFill>
+                  <a:schemeClr val="tx1"/>
+                </a:solidFill>
+                <a:effectLst/>
+                <a:latin typeface="+mn-lt"/>
+                <a:ea typeface="+mn-ea"/>
+                <a:cs typeface="+mn-cs"/>
+              </a:rPr>
+              <a:t>13% of privately insured respondents reported receiving help, compared with 4% of Medicaid respondents</a:t>
+            </a:r>
+            <a:r>
+              <a:rPr lang="en-US" sz="1200" kern="1200" dirty="0">
+                <a:solidFill>
+                  <a:schemeClr val="tx1"/>
+                </a:solidFill>
+                <a:effectLst/>
+                <a:latin typeface="+mn-lt"/>
+                <a:ea typeface="+mn-ea"/>
+                <a:cs typeface="+mn-cs"/>
+              </a:rPr>
+              <a:t>.</a:t>
+            </a:r>
+          </a:p>
+          <a:p>
+            <a:r>
+              <a:rPr lang="en-US" sz="1200" kern="1200" dirty="0">
+                <a:solidFill>
+                  <a:schemeClr val="tx1"/>
+                </a:solidFill>
+                <a:effectLst/>
+                <a:latin typeface="+mn-lt"/>
+                <a:ea typeface="+mn-ea"/>
+                <a:cs typeface="+mn-cs"/>
+              </a:rPr>
+              <a:t>Then I asked whether the groups differed in other relevant ways. They did: private respondents were generally older, had higher income, and had more education.</a:t>
+            </a:r>
+          </a:p>
+          <a:p>
+            <a:r>
+              <a:rPr lang="en-US" sz="1200" kern="1200" dirty="0">
+                <a:solidFill>
+                  <a:schemeClr val="tx1"/>
+                </a:solidFill>
+                <a:effectLst/>
+                <a:latin typeface="+mn-lt"/>
+                <a:ea typeface="+mn-ea"/>
+                <a:cs typeface="+mn-cs"/>
+              </a:rPr>
+              <a:t>After accounting for those characteristics, the estimated insurance association became smaller. However, the Medicaid–private difference remained, as did the association for the single-service, IHS, or uninsured category.</a:t>
+            </a:r>
+          </a:p>
+          <a:p>
+            <a:r>
+              <a:rPr lang="en-US" sz="1200" kern="1200" dirty="0">
+                <a:solidFill>
+                  <a:schemeClr val="tx1"/>
+                </a:solidFill>
+                <a:effectLst/>
+                <a:latin typeface="+mn-lt"/>
+                <a:ea typeface="+mn-ea"/>
+                <a:cs typeface="+mn-cs"/>
+              </a:rPr>
+              <a:t>My conclusion is that </a:t>
+            </a:r>
+            <a:r>
+              <a:rPr lang="en-US" sz="1200" b="1" kern="1200" dirty="0">
+                <a:solidFill>
+                  <a:schemeClr val="tx1"/>
+                </a:solidFill>
+                <a:effectLst/>
+                <a:latin typeface="+mn-lt"/>
+                <a:ea typeface="+mn-ea"/>
+                <a:cs typeface="+mn-cs"/>
+              </a:rPr>
+              <a:t>differences in the selected characteristics do not eliminate the insurance association in this model</a:t>
+            </a:r>
+            <a:r>
+              <a:rPr lang="en-US" sz="1200" kern="1200" dirty="0">
+                <a:solidFill>
+                  <a:schemeClr val="tx1"/>
+                </a:solidFill>
+                <a:effectLst/>
+                <a:latin typeface="+mn-lt"/>
+                <a:ea typeface="+mn-ea"/>
+                <a:cs typeface="+mn-cs"/>
+              </a:rPr>
+              <a:t>.</a:t>
+            </a:r>
+          </a:p>
+          <a:p>
+            <a:r>
+              <a:rPr lang="en-US" sz="1200" kern="1200" dirty="0">
+                <a:solidFill>
+                  <a:schemeClr val="tx1"/>
+                </a:solidFill>
+                <a:effectLst/>
+                <a:latin typeface="+mn-lt"/>
+                <a:ea typeface="+mn-ea"/>
+                <a:cs typeface="+mn-cs"/>
+              </a:rPr>
+              <a:t>To understand the reasons behind that association, further research should examine insurance at the time of care and respondents’ fertility needs.</a:t>
+            </a:r>
+          </a:p>
+          <a:p>
+            <a:r>
+              <a:rPr lang="en-US" sz="1200" kern="1200" dirty="0">
+                <a:solidFill>
+                  <a:schemeClr val="tx1"/>
+                </a:solidFill>
+                <a:effectLst/>
+                <a:latin typeface="+mn-lt"/>
+                <a:ea typeface="+mn-ea"/>
+                <a:cs typeface="+mn-cs"/>
+              </a:rPr>
+              <a:t>The remaining association gives researchers a reason to investigate coverage and care receipt more closely. However, these findings alone cannot tell policymakers which coverage change would improve access.</a:t>
+            </a:r>
+          </a:p>
+          <a:p>
+            <a:endParaRPr lang="en-US" dirty="0"/>
           </a:p>
         </p:txBody>
       </p:sp>
@@ -632,99 +1395,6 @@
             <a:fld id="{F7021451-1387-4CA6-816F-3879F97B5CBC}" type="slidenum">
               <a:rPr lang="en-US"/>
               <a:t>12</a:t>
-            </a:fld>
-            <a:endParaRPr lang="en-US"/>
-          </a:p>
-        </p:txBody>
-      </p:sp>
-    </p:spTree>
-    <p:extLst>
-      <p:ext uri="{BB962C8B-B14F-4D97-AF65-F5344CB8AC3E}">
-        <p14:creationId xmlns:p14="http://schemas.microsoft.com/office/powerpoint/2010/main" val="1024086991"/>
-      </p:ext>
-    </p:extLst>
-  </p:cSld>
-  <p:clrMapOvr>
-    <a:masterClrMapping/>
-  </p:clrMapOvr>
-</p:notes>
-</file>
-
-<file path=ppt/notesSlides/notesSlide13.xml><?xml version="1.0" encoding="utf-8"?>
-<p:notes xmlns:a="http://schemas.openxmlformats.org/drawingml/2006/main" xmlns:r="http://schemas.openxmlformats.org/officeDocument/2006/relationships" xmlns:p="http://schemas.openxmlformats.org/presentationml/2006/main">
-  <p:cSld>
-    <p:spTree>
-      <p:nvGrpSpPr>
-        <p:cNvPr id="1" name=""/>
-        <p:cNvGrpSpPr/>
-        <p:nvPr/>
-      </p:nvGrpSpPr>
-      <p:grpSpPr>
-        <a:xfrm>
-          <a:off x="0" y="0"/>
-          <a:ext cx="0" cy="0"/>
-          <a:chOff x="0" y="0"/>
-          <a:chExt cx="0" cy="0"/>
-        </a:xfrm>
-      </p:grpSpPr>
-      <p:sp>
-        <p:nvSpPr>
-          <p:cNvPr id="2" name="Slide Image Placeholder 1"/>
-          <p:cNvSpPr>
-            <a:spLocks noGrp="1" noRot="1" noChangeAspect="1"/>
-          </p:cNvSpPr>
-          <p:nvPr>
-            <p:ph type="sldImg"/>
-          </p:nvPr>
-        </p:nvSpPr>
-        <p:spPr/>
-      </p:sp>
-      <p:sp>
-        <p:nvSpPr>
-          <p:cNvPr id="3" name="Notes Placeholder 2"/>
-          <p:cNvSpPr>
-            <a:spLocks noGrp="1"/>
-          </p:cNvSpPr>
-          <p:nvPr>
-            <p:ph type="body" idx="1"/>
-          </p:nvPr>
-        </p:nvSpPr>
-        <p:spPr/>
-        <p:txBody>
-          <a:bodyPr/>
-          <a:lstStyle/>
-          <a:p>
-            <a:r>
-              <a:rPr lang="en-US" dirty="0"/>
-              <a:t>My research question asked whether current insurance is associated with lifetime medical-help receipt after accounting for age, income, and education.
-The results support an association for Medicaid, CHIP, or state coverage and for the single-service, IHS, or uninsured category, relative to private coverage.
-The initial differences become smaller after adjustment, but they remain for those two categories.
-These findings support further investigation of insurance and fertility-related care use. Stronger conclusions would require better information about coverage when care occurred and respondents’ fertility needs.
-Thank you. I’m happy to take questions.
-Backup slides for questions: the full regression table, age/income distributions, subgroup counts, and a complete reference list.
-Time: about 1 minute.</a:t>
-            </a:r>
-          </a:p>
-        </p:txBody>
-      </p:sp>
-      <p:sp>
-        <p:nvSpPr>
-          <p:cNvPr id="4" name="Slide Number Placeholder 3"/>
-          <p:cNvSpPr>
-            <a:spLocks noGrp="1"/>
-          </p:cNvSpPr>
-          <p:nvPr>
-            <p:ph type="sldNum" sz="quarter" idx="10"/>
-          </p:nvPr>
-        </p:nvSpPr>
-        <p:spPr/>
-        <p:txBody>
-          <a:bodyPr/>
-          <a:lstStyle/>
-          <a:p>
-            <a:fld id="{F7021451-1387-4CA6-816F-3879F97B5CBC}" type="slidenum">
-              <a:rPr lang="en-US"/>
-              <a:t>13</a:t>
             </a:fld>
             <a:endParaRPr lang="en-US"/>
           </a:p>
@@ -788,10 +1458,206 @@
           <a:lstStyle/>
           <a:p>
             <a:r>
-              <a:rPr lang="en-US" dirty="0"/>
-              <a:t>This is the question I set out to answer: is current insurance type associated with ever receiving medical help to become pregnant, after accounting for age, income, and education?
-The key phrase is 'after accounting for.' A simple comparison of insurance groups is not enough, because those groups also differ in age, income, and education.</a:t>
-            </a:r>
+              <a:rPr lang="en-US" sz="1200" b="1" kern="1200" dirty="0">
+                <a:solidFill>
+                  <a:schemeClr val="tx1"/>
+                </a:solidFill>
+                <a:effectLst/>
+                <a:latin typeface="+mn-lt"/>
+                <a:ea typeface="+mn-ea"/>
+                <a:cs typeface="+mn-cs"/>
+              </a:rPr>
+              <a:t>Slide 2: Help Receipt Differs Across Insurance Groups</a:t>
+            </a:r>
+            <a:endParaRPr lang="en-US" sz="1200" kern="1200" dirty="0">
+              <a:solidFill>
+                <a:schemeClr val="tx1"/>
+              </a:solidFill>
+              <a:effectLst/>
+              <a:latin typeface="+mn-lt"/>
+              <a:ea typeface="+mn-ea"/>
+              <a:cs typeface="+mn-cs"/>
+            </a:endParaRPr>
+          </a:p>
+          <a:p>
+            <a:r>
+              <a:rPr lang="en-US" sz="1200" kern="1200" dirty="0">
+                <a:solidFill>
+                  <a:schemeClr val="tx1"/>
+                </a:solidFill>
+                <a:effectLst/>
+                <a:latin typeface="+mn-lt"/>
+                <a:ea typeface="+mn-ea"/>
+                <a:cs typeface="+mn-cs"/>
+              </a:rPr>
+              <a:t>The starting point is this chart. It shows the weighted percentage of respondents who reported ever receiving medical help to become pregnant.</a:t>
+            </a:r>
+          </a:p>
+          <a:p>
+            <a:r>
+              <a:rPr lang="en-US" sz="1200" kern="1200" dirty="0">
+                <a:solidFill>
+                  <a:schemeClr val="tx1"/>
+                </a:solidFill>
+                <a:effectLst/>
+                <a:latin typeface="+mn-lt"/>
+                <a:ea typeface="+mn-ea"/>
+                <a:cs typeface="+mn-cs"/>
+              </a:rPr>
+              <a:t>Approximately </a:t>
+            </a:r>
+            <a:r>
+              <a:rPr lang="en-US" sz="1200" b="1" kern="1200" dirty="0">
+                <a:solidFill>
+                  <a:schemeClr val="tx1"/>
+                </a:solidFill>
+                <a:effectLst/>
+                <a:latin typeface="+mn-lt"/>
+                <a:ea typeface="+mn-ea"/>
+                <a:cs typeface="+mn-cs"/>
+              </a:rPr>
+              <a:t>12.9% of respondents with private coverage</a:t>
+            </a:r>
+            <a:r>
+              <a:rPr lang="en-US" sz="1200" kern="1200" dirty="0">
+                <a:solidFill>
+                  <a:schemeClr val="tx1"/>
+                </a:solidFill>
+                <a:effectLst/>
+                <a:latin typeface="+mn-lt"/>
+                <a:ea typeface="+mn-ea"/>
+                <a:cs typeface="+mn-cs"/>
+              </a:rPr>
+              <a:t> reported receiving help, compared with </a:t>
+            </a:r>
+            <a:r>
+              <a:rPr lang="en-US" sz="1200" b="1" kern="1200" dirty="0">
+                <a:solidFill>
+                  <a:schemeClr val="tx1"/>
+                </a:solidFill>
+                <a:effectLst/>
+                <a:latin typeface="+mn-lt"/>
+                <a:ea typeface="+mn-ea"/>
+                <a:cs typeface="+mn-cs"/>
+              </a:rPr>
+              <a:t>4.3% with Medicaid, CHIP, or state coverage</a:t>
+            </a:r>
+            <a:r>
+              <a:rPr lang="en-US" sz="1200" kern="1200" dirty="0">
+                <a:solidFill>
+                  <a:schemeClr val="tx1"/>
+                </a:solidFill>
+                <a:effectLst/>
+                <a:latin typeface="+mn-lt"/>
+                <a:ea typeface="+mn-ea"/>
+                <a:cs typeface="+mn-cs"/>
+              </a:rPr>
+              <a:t>.</a:t>
+            </a:r>
+          </a:p>
+          <a:p>
+            <a:r>
+              <a:rPr lang="en-US" sz="1200" kern="1200" dirty="0">
+                <a:solidFill>
+                  <a:schemeClr val="tx1"/>
+                </a:solidFill>
+                <a:effectLst/>
+                <a:latin typeface="+mn-lt"/>
+                <a:ea typeface="+mn-ea"/>
+                <a:cs typeface="+mn-cs"/>
+              </a:rPr>
+              <a:t>That is a difference of approximately </a:t>
+            </a:r>
+            <a:r>
+              <a:rPr lang="en-US" sz="1200" b="1" kern="1200" dirty="0">
+                <a:solidFill>
+                  <a:schemeClr val="tx1"/>
+                </a:solidFill>
+                <a:effectLst/>
+                <a:latin typeface="+mn-lt"/>
+                <a:ea typeface="+mn-ea"/>
+                <a:cs typeface="+mn-cs"/>
+              </a:rPr>
+              <a:t>8.5 percentage points</a:t>
+            </a:r>
+            <a:r>
+              <a:rPr lang="en-US" sz="1200" kern="1200" dirty="0">
+                <a:solidFill>
+                  <a:schemeClr val="tx1"/>
+                </a:solidFill>
+                <a:effectLst/>
+                <a:latin typeface="+mn-lt"/>
+                <a:ea typeface="+mn-ea"/>
+                <a:cs typeface="+mn-cs"/>
+              </a:rPr>
+              <a:t>. Put more simply, about 13 out of every 100 privately insured respondents reported receiving help, compared with about 4 out of every 100 Medicaid respondents.</a:t>
+            </a:r>
+          </a:p>
+          <a:p>
+            <a:r>
+              <a:rPr lang="en-US" sz="1200" kern="1200" dirty="0">
+                <a:solidFill>
+                  <a:schemeClr val="tx1"/>
+                </a:solidFill>
+                <a:effectLst/>
+                <a:latin typeface="+mn-lt"/>
+                <a:ea typeface="+mn-ea"/>
+                <a:cs typeface="+mn-cs"/>
+              </a:rPr>
+              <a:t>The other two insurance groups also have lower reported rates than the private group.</a:t>
+            </a:r>
+          </a:p>
+          <a:p>
+            <a:r>
+              <a:rPr lang="en-US" sz="1200" kern="1200" dirty="0">
+                <a:solidFill>
+                  <a:schemeClr val="tx1"/>
+                </a:solidFill>
+                <a:effectLst/>
+                <a:latin typeface="+mn-lt"/>
+                <a:ea typeface="+mn-ea"/>
+                <a:cs typeface="+mn-cs"/>
+              </a:rPr>
+              <a:t>This is a clear descriptive pattern, but it leaves an important question: </a:t>
+            </a:r>
+            <a:r>
+              <a:rPr lang="en-US" sz="1200" b="1" kern="1200" dirty="0">
+                <a:solidFill>
+                  <a:schemeClr val="tx1"/>
+                </a:solidFill>
+                <a:effectLst/>
+                <a:latin typeface="+mn-lt"/>
+                <a:ea typeface="+mn-ea"/>
+                <a:cs typeface="+mn-cs"/>
+              </a:rPr>
+              <a:t>what could explain the difference?</a:t>
+            </a:r>
+            <a:endParaRPr lang="en-US" sz="1200" kern="1200" dirty="0">
+              <a:solidFill>
+                <a:schemeClr val="tx1"/>
+              </a:solidFill>
+              <a:effectLst/>
+              <a:latin typeface="+mn-lt"/>
+              <a:ea typeface="+mn-ea"/>
+              <a:cs typeface="+mn-cs"/>
+            </a:endParaRPr>
+          </a:p>
+          <a:p>
+            <a:r>
+              <a:rPr lang="en-US" sz="1200" kern="1200" dirty="0">
+                <a:solidFill>
+                  <a:schemeClr val="tx1"/>
+                </a:solidFill>
+                <a:effectLst/>
+                <a:latin typeface="+mn-lt"/>
+                <a:ea typeface="+mn-ea"/>
+                <a:cs typeface="+mn-cs"/>
+              </a:rPr>
+              <a:t>Insurance might be relevant, but the people in these groups may also differ in other ways. For example, one group may be older, have higher income, or have more education.</a:t>
+            </a:r>
+          </a:p>
+          <a:p>
+            <a:endParaRPr lang="en-US" dirty="0"/>
           </a:p>
         </p:txBody>
       </p:sp>
@@ -876,13 +1742,108 @@
           <a:lstStyle/>
           <a:p>
             <a:r>
-              <a:rPr lang="en-US" dirty="0"/>
-              <a:t>This project connects to health economics because insurance and household resources may influence healthcare choices.
-However, people with different insurance types also differ in other ways. For example, privately insured respondents may have higher income or more education. Therefore, an initial difference in care receipt could reflect several overlapping characteristics.
-My goal is to examine these relationships using newer NSFG data. The findings may help researchers identify patterns that deserve further investigation.
-I measure reported receipt of medical help. The analysis does not directly measure whether someone needed care but could not obtain it.
-Time: about 1 minute.</a:t>
-            </a:r>
+              <a:rPr lang="en-US" sz="1200" b="1" kern="1200" dirty="0">
+                <a:solidFill>
+                  <a:schemeClr val="tx1"/>
+                </a:solidFill>
+                <a:effectLst/>
+                <a:latin typeface="+mn-lt"/>
+                <a:ea typeface="+mn-ea"/>
+                <a:cs typeface="+mn-cs"/>
+              </a:rPr>
+              <a:t>Slide 3: Research Question</a:t>
+            </a:r>
+            <a:endParaRPr lang="en-US" sz="1200" kern="1200" dirty="0">
+              <a:solidFill>
+                <a:schemeClr val="tx1"/>
+              </a:solidFill>
+              <a:effectLst/>
+              <a:latin typeface="+mn-lt"/>
+              <a:ea typeface="+mn-ea"/>
+              <a:cs typeface="+mn-cs"/>
+            </a:endParaRPr>
+          </a:p>
+          <a:p>
+            <a:r>
+              <a:rPr lang="en-US" sz="1200" kern="1200" dirty="0">
+                <a:solidFill>
+                  <a:schemeClr val="tx1"/>
+                </a:solidFill>
+                <a:effectLst/>
+                <a:latin typeface="+mn-lt"/>
+                <a:ea typeface="+mn-ea"/>
+                <a:cs typeface="+mn-cs"/>
+              </a:rPr>
+              <a:t>That brings us to my research question:</a:t>
+            </a:r>
+          </a:p>
+          <a:p>
+            <a:r>
+              <a:rPr lang="en-US" sz="1200" b="1" kern="1200" dirty="0">
+                <a:solidFill>
+                  <a:schemeClr val="tx1"/>
+                </a:solidFill>
+                <a:effectLst/>
+                <a:latin typeface="+mn-lt"/>
+                <a:ea typeface="+mn-ea"/>
+                <a:cs typeface="+mn-cs"/>
+              </a:rPr>
+              <a:t>Is current insurance type associated with ever receiving medical help to become pregnant, after accounting for age, income, and education?</a:t>
+            </a:r>
+            <a:endParaRPr lang="en-US" sz="1200" kern="1200" dirty="0">
+              <a:solidFill>
+                <a:schemeClr val="tx1"/>
+              </a:solidFill>
+              <a:effectLst/>
+              <a:latin typeface="+mn-lt"/>
+              <a:ea typeface="+mn-ea"/>
+              <a:cs typeface="+mn-cs"/>
+            </a:endParaRPr>
+          </a:p>
+          <a:p>
+            <a:r>
+              <a:rPr lang="en-US" sz="1200" kern="1200" dirty="0">
+                <a:solidFill>
+                  <a:schemeClr val="tx1"/>
+                </a:solidFill>
+                <a:effectLst/>
+                <a:latin typeface="+mn-lt"/>
+                <a:ea typeface="+mn-ea"/>
+                <a:cs typeface="+mn-cs"/>
+              </a:rPr>
+              <a:t>The phrase “after accounting for” is important here.</a:t>
+            </a:r>
+          </a:p>
+          <a:p>
+            <a:r>
+              <a:rPr lang="en-US" sz="1200" kern="1200" dirty="0">
+                <a:solidFill>
+                  <a:schemeClr val="tx1"/>
+                </a:solidFill>
+                <a:effectLst/>
+                <a:latin typeface="+mn-lt"/>
+                <a:ea typeface="+mn-ea"/>
+                <a:cs typeface="+mn-cs"/>
+              </a:rPr>
+              <a:t>I want to know whether the insurance difference remains when the model also considers these other characteristics.</a:t>
+            </a:r>
+          </a:p>
+          <a:p>
+            <a:r>
+              <a:rPr lang="en-US" sz="1200" kern="1200" dirty="0">
+                <a:solidFill>
+                  <a:schemeClr val="tx1"/>
+                </a:solidFill>
+                <a:effectLst/>
+                <a:latin typeface="+mn-lt"/>
+                <a:ea typeface="+mn-ea"/>
+                <a:cs typeface="+mn-cs"/>
+              </a:rPr>
+              <a:t>Throughout the presentation, I’ll focus mainly on the private–Medicaid comparison because it gives us a clear thread to follow. However, the analysis includes all four insurance categories.</a:t>
+            </a:r>
+          </a:p>
+          <a:p>
+            <a:endParaRPr lang="en-US" dirty="0"/>
           </a:p>
         </p:txBody>
       </p:sp>
@@ -967,15 +1928,134 @@
           <a:lstStyle/>
           <a:p>
             <a:r>
-              <a:rPr lang="en-US" dirty="0"/>
-              <a:t>I use the female respondent file from the 2022–2023 National Survey of Family Growth.
-The original file contains 5,586 respondents. After excluding inapplicable, refused, and don’t-know outcome responses, 5,195 respondents remain. There are no additional missing values in the selected analysis variables.
-I code the outcome as one for yes and zero for no. I use the existing four-category insurance variable and combine education into four groups, placing GED with high school completion.
-Income measures household income relative to the poverty threshold. For example, 200% means twice the threshold.
-One important distinction is that insurance refers to current coverage, while the outcome asks about lifetime receipt of medical help.
-Small note: Respondents were eligible at ages 15–49 at screening. One reached age 50 by interview.
-Time: about 1 minute 30 seconds.</a:t>
-            </a:r>
+              <a:rPr lang="en-US" sz="1200" b="1" kern="1200" dirty="0">
+                <a:solidFill>
+                  <a:schemeClr val="tx1"/>
+                </a:solidFill>
+                <a:effectLst/>
+                <a:latin typeface="+mn-lt"/>
+                <a:ea typeface="+mn-ea"/>
+                <a:cs typeface="+mn-cs"/>
+              </a:rPr>
+              <a:t>Slide 4: Why This Question Matters</a:t>
+            </a:r>
+            <a:endParaRPr lang="en-US" sz="1200" kern="1200" dirty="0">
+              <a:solidFill>
+                <a:schemeClr val="tx1"/>
+              </a:solidFill>
+              <a:effectLst/>
+              <a:latin typeface="+mn-lt"/>
+              <a:ea typeface="+mn-ea"/>
+              <a:cs typeface="+mn-cs"/>
+            </a:endParaRPr>
+          </a:p>
+          <a:p>
+            <a:r>
+              <a:rPr lang="en-US" sz="1200" kern="1200" dirty="0">
+                <a:solidFill>
+                  <a:schemeClr val="tx1"/>
+                </a:solidFill>
+                <a:effectLst/>
+                <a:latin typeface="+mn-lt"/>
+                <a:ea typeface="+mn-ea"/>
+                <a:cs typeface="+mn-cs"/>
+              </a:rPr>
+              <a:t>This question matters because insurance coverage may be related to the affordability of medical care.</a:t>
+            </a:r>
+          </a:p>
+          <a:p>
+            <a:r>
+              <a:rPr lang="en-US" sz="1200" kern="1200" dirty="0">
+                <a:solidFill>
+                  <a:schemeClr val="tx1"/>
+                </a:solidFill>
+                <a:effectLst/>
+                <a:latin typeface="+mn-lt"/>
+                <a:ea typeface="+mn-ea"/>
+                <a:cs typeface="+mn-cs"/>
+              </a:rPr>
+              <a:t>However, insurance also connects with other characteristics. Income and education may be related both to the coverage someone has and to their experience of receiving care.</a:t>
+            </a:r>
+          </a:p>
+          <a:p>
+            <a:r>
+              <a:rPr lang="en-US" sz="1200" kern="1200" dirty="0">
+                <a:solidFill>
+                  <a:schemeClr val="tx1"/>
+                </a:solidFill>
+                <a:effectLst/>
+                <a:latin typeface="+mn-lt"/>
+                <a:ea typeface="+mn-ea"/>
+                <a:cs typeface="+mn-cs"/>
+              </a:rPr>
+              <a:t>That makes the initial difference interesting, but also difficult to interpret.</a:t>
+            </a:r>
+          </a:p>
+          <a:p>
+            <a:r>
+              <a:rPr lang="en-US" sz="1200" kern="1200" dirty="0">
+                <a:solidFill>
+                  <a:schemeClr val="tx1"/>
+                </a:solidFill>
+                <a:effectLst/>
+                <a:latin typeface="+mn-lt"/>
+                <a:ea typeface="+mn-ea"/>
+                <a:cs typeface="+mn-cs"/>
+              </a:rPr>
+              <a:t>The goal of this project is to investigate that difference more carefully: </a:t>
+            </a:r>
+            <a:r>
+              <a:rPr lang="en-US" sz="1200" b="1" kern="1200" dirty="0">
+                <a:solidFill>
+                  <a:schemeClr val="tx1"/>
+                </a:solidFill>
+                <a:effectLst/>
+                <a:latin typeface="+mn-lt"/>
+                <a:ea typeface="+mn-ea"/>
+                <a:cs typeface="+mn-cs"/>
+              </a:rPr>
+              <a:t>does the association remain once I account for selected characteristics?</a:t>
+            </a:r>
+            <a:endParaRPr lang="en-US" sz="1200" kern="1200" dirty="0">
+              <a:solidFill>
+                <a:schemeClr val="tx1"/>
+              </a:solidFill>
+              <a:effectLst/>
+              <a:latin typeface="+mn-lt"/>
+              <a:ea typeface="+mn-ea"/>
+              <a:cs typeface="+mn-cs"/>
+            </a:endParaRPr>
+          </a:p>
+          <a:p>
+            <a:r>
+              <a:rPr lang="en-US" sz="1200" kern="1200" dirty="0">
+                <a:solidFill>
+                  <a:schemeClr val="tx1"/>
+                </a:solidFill>
+                <a:effectLst/>
+                <a:latin typeface="+mn-lt"/>
+                <a:ea typeface="+mn-ea"/>
+                <a:cs typeface="+mn-cs"/>
+              </a:rPr>
+              <a:t>One distinction will be important throughout. The outcome measures whether someone reported receiving help. It does not tell us whether they needed help, wanted help, or experienced difficulty obtaining it.</a:t>
+            </a:r>
+          </a:p>
+          <a:p>
+            <a:r>
+              <a:rPr lang="en-US" sz="1200" kern="1200" dirty="0">
+                <a:solidFill>
+                  <a:schemeClr val="tx1"/>
+                </a:solidFill>
+                <a:effectLst/>
+                <a:latin typeface="+mn-lt"/>
+                <a:ea typeface="+mn-ea"/>
+                <a:cs typeface="+mn-cs"/>
+              </a:rPr>
+              <a:t>These findings may interest reproductive-health researchers, healthcare providers, and policymakers examining differences in fertility-related care receipt. They can help identify patterns that deserve further investigation</a:t>
+            </a:r>
+          </a:p>
+          <a:p>
+            <a:endParaRPr lang="en-US" dirty="0"/>
           </a:p>
         </p:txBody>
       </p:sp>
@@ -1060,14 +2140,311 @@
           <a:lstStyle/>
           <a:p>
             <a:r>
-              <a:rPr lang="en-US" dirty="0"/>
-              <a:t>Private coverage is the largest insurance category, representing approximately 61% of the weighted analysis sample. Medicaid, CHIP, or state coverage represents approximately 22%.
-Overall, about one in ten respondents reports ever receiving medical help to become pregnant.
-Throughout the presentation, respondent counts are unweighted, while percentages and means use survey weights. The weights account for respondents representing different numbers of people in the population.
-These percentages describe the analysis sample with valid outcome responses.
-Note: the third insurance slice combines the other-government and single-service/IHS/uninsured groups (the remainder after private and Medicaid).
-Time: about 1 minute.</a:t>
-            </a:r>
+              <a:rPr lang="en-US" sz="1200" b="1" kern="1200" dirty="0">
+                <a:solidFill>
+                  <a:schemeClr val="tx1"/>
+                </a:solidFill>
+                <a:effectLst/>
+                <a:latin typeface="+mn-lt"/>
+                <a:ea typeface="+mn-ea"/>
+                <a:cs typeface="+mn-cs"/>
+              </a:rPr>
+              <a:t>Slide 5: Data and Measures</a:t>
+            </a:r>
+            <a:endParaRPr lang="en-US" sz="1200" kern="1200" dirty="0">
+              <a:solidFill>
+                <a:schemeClr val="tx1"/>
+              </a:solidFill>
+              <a:effectLst/>
+              <a:latin typeface="+mn-lt"/>
+              <a:ea typeface="+mn-ea"/>
+              <a:cs typeface="+mn-cs"/>
+            </a:endParaRPr>
+          </a:p>
+          <a:p>
+            <a:r>
+              <a:rPr lang="en-US" sz="1200" kern="1200" dirty="0">
+                <a:solidFill>
+                  <a:schemeClr val="tx1"/>
+                </a:solidFill>
+                <a:effectLst/>
+                <a:latin typeface="+mn-lt"/>
+                <a:ea typeface="+mn-ea"/>
+                <a:cs typeface="+mn-cs"/>
+              </a:rPr>
+              <a:t>I use the NSFG 2022–2023 female respondent public-use file.</a:t>
+            </a:r>
+          </a:p>
+          <a:p>
+            <a:r>
+              <a:rPr lang="en-US" sz="1200" kern="1200" dirty="0">
+                <a:solidFill>
+                  <a:schemeClr val="tx1"/>
+                </a:solidFill>
+                <a:effectLst/>
+                <a:latin typeface="+mn-lt"/>
+                <a:ea typeface="+mn-ea"/>
+                <a:cs typeface="+mn-cs"/>
+              </a:rPr>
+              <a:t>The original file contains </a:t>
+            </a:r>
+            <a:r>
+              <a:rPr lang="en-US" sz="1200" b="1" kern="1200" dirty="0">
+                <a:solidFill>
+                  <a:schemeClr val="tx1"/>
+                </a:solidFill>
+                <a:effectLst/>
+                <a:latin typeface="+mn-lt"/>
+                <a:ea typeface="+mn-ea"/>
+                <a:cs typeface="+mn-cs"/>
+              </a:rPr>
+              <a:t>5,586 respondents</a:t>
+            </a:r>
+            <a:r>
+              <a:rPr lang="en-US" sz="1200" kern="1200" dirty="0">
+                <a:solidFill>
+                  <a:schemeClr val="tx1"/>
+                </a:solidFill>
+                <a:effectLst/>
+                <a:latin typeface="+mn-lt"/>
+                <a:ea typeface="+mn-ea"/>
+                <a:cs typeface="+mn-cs"/>
+              </a:rPr>
+              <a:t>, and the analysis includes </a:t>
+            </a:r>
+            <a:r>
+              <a:rPr lang="en-US" sz="1200" b="1" kern="1200" dirty="0">
+                <a:solidFill>
+                  <a:schemeClr val="tx1"/>
+                </a:solidFill>
+                <a:effectLst/>
+                <a:latin typeface="+mn-lt"/>
+                <a:ea typeface="+mn-ea"/>
+                <a:cs typeface="+mn-cs"/>
+              </a:rPr>
+              <a:t>5,195 respondents</a:t>
+            </a:r>
+            <a:r>
+              <a:rPr lang="en-US" sz="1200" kern="1200" dirty="0">
+                <a:solidFill>
+                  <a:schemeClr val="tx1"/>
+                </a:solidFill>
+                <a:effectLst/>
+                <a:latin typeface="+mn-lt"/>
+                <a:ea typeface="+mn-ea"/>
+                <a:cs typeface="+mn-cs"/>
+              </a:rPr>
+              <a:t> with valid responses for the variables used. Each observation represents one respondent. I excluded 391 respondents whose outcome response was inapplicable, refused, or ‘don’t know,’ because those responses cannot be treated as ‘no.’</a:t>
+            </a:r>
+          </a:p>
+          <a:p>
+            <a:br>
+              <a:rPr lang="en-US" sz="1200" kern="1200" dirty="0">
+                <a:solidFill>
+                  <a:schemeClr val="tx1"/>
+                </a:solidFill>
+                <a:effectLst/>
+                <a:latin typeface="+mn-lt"/>
+                <a:ea typeface="+mn-ea"/>
+                <a:cs typeface="+mn-cs"/>
+              </a:rPr>
+            </a:br>
+            <a:endParaRPr lang="en-US" sz="1200" kern="1200" dirty="0">
+              <a:solidFill>
+                <a:schemeClr val="tx1"/>
+              </a:solidFill>
+              <a:effectLst/>
+              <a:latin typeface="+mn-lt"/>
+              <a:ea typeface="+mn-ea"/>
+              <a:cs typeface="+mn-cs"/>
+            </a:endParaRPr>
+          </a:p>
+          <a:p>
+            <a:r>
+              <a:rPr lang="en-US" sz="1200" kern="1200" dirty="0">
+                <a:solidFill>
+                  <a:schemeClr val="tx1"/>
+                </a:solidFill>
+                <a:effectLst/>
+                <a:latin typeface="+mn-lt"/>
+                <a:ea typeface="+mn-ea"/>
+                <a:cs typeface="+mn-cs"/>
+              </a:rPr>
+              <a:t>The outcome is whether the respondent </a:t>
+            </a:r>
+            <a:r>
+              <a:rPr lang="en-US" sz="1200" b="1" kern="1200" dirty="0">
+                <a:solidFill>
+                  <a:schemeClr val="tx1"/>
+                </a:solidFill>
+                <a:effectLst/>
+                <a:latin typeface="+mn-lt"/>
+                <a:ea typeface="+mn-ea"/>
+                <a:cs typeface="+mn-cs"/>
+              </a:rPr>
+              <a:t>ever received medical help to become pregnant</a:t>
+            </a:r>
+            <a:r>
+              <a:rPr lang="en-US" sz="1200" kern="1200" dirty="0">
+                <a:solidFill>
+                  <a:schemeClr val="tx1"/>
+                </a:solidFill>
+                <a:effectLst/>
+                <a:latin typeface="+mn-lt"/>
+                <a:ea typeface="+mn-ea"/>
+                <a:cs typeface="+mn-cs"/>
+              </a:rPr>
+              <a:t>. This is a yes-or-no measure of lifetime experience.</a:t>
+            </a:r>
+          </a:p>
+          <a:p>
+            <a:r>
+              <a:rPr lang="en-US" sz="1200" kern="1200" dirty="0">
+                <a:solidFill>
+                  <a:schemeClr val="tx1"/>
+                </a:solidFill>
+                <a:effectLst/>
+                <a:latin typeface="+mn-lt"/>
+                <a:ea typeface="+mn-ea"/>
+                <a:cs typeface="+mn-cs"/>
+              </a:rPr>
+              <a:t>The main predictor is </a:t>
+            </a:r>
+            <a:r>
+              <a:rPr lang="en-US" sz="1200" b="1" kern="1200" dirty="0">
+                <a:solidFill>
+                  <a:schemeClr val="tx1"/>
+                </a:solidFill>
+                <a:effectLst/>
+                <a:latin typeface="+mn-lt"/>
+                <a:ea typeface="+mn-ea"/>
+                <a:cs typeface="+mn-cs"/>
+              </a:rPr>
+              <a:t>current insurance coverage</a:t>
+            </a:r>
+            <a:r>
+              <a:rPr lang="en-US" sz="1200" kern="1200" dirty="0">
+                <a:solidFill>
+                  <a:schemeClr val="tx1"/>
+                </a:solidFill>
+                <a:effectLst/>
+                <a:latin typeface="+mn-lt"/>
+                <a:ea typeface="+mn-ea"/>
+                <a:cs typeface="+mn-cs"/>
+              </a:rPr>
+              <a:t>, divided into four categories. </a:t>
+            </a:r>
+          </a:p>
+          <a:p>
+            <a:r>
+              <a:rPr lang="en-US" sz="1200" kern="1200" dirty="0">
+                <a:solidFill>
+                  <a:schemeClr val="tx1"/>
+                </a:solidFill>
+                <a:effectLst/>
+                <a:latin typeface="+mn-lt"/>
+                <a:ea typeface="+mn-ea"/>
+                <a:cs typeface="+mn-cs"/>
+              </a:rPr>
+              <a:t>The model also includes age, income relative to the poverty threshold, and education.</a:t>
+            </a:r>
+          </a:p>
+          <a:p>
+            <a:r>
+              <a:rPr lang="en-US" sz="1200" kern="1200" dirty="0">
+                <a:solidFill>
+                  <a:schemeClr val="tx1"/>
+                </a:solidFill>
+                <a:effectLst/>
+                <a:latin typeface="+mn-lt"/>
+                <a:ea typeface="+mn-ea"/>
+                <a:cs typeface="+mn-cs"/>
+              </a:rPr>
+              <a:t>I use survey weights to account for unequal representation in the sample. For the statistical model, I also account for the survey’s strata and clusters when calculating uncertainty.</a:t>
+            </a:r>
+          </a:p>
+          <a:p>
+            <a:r>
+              <a:rPr lang="en-US" sz="1200" kern="1200" dirty="0">
+                <a:solidFill>
+                  <a:schemeClr val="tx1"/>
+                </a:solidFill>
+                <a:effectLst/>
+                <a:latin typeface="+mn-lt"/>
+                <a:ea typeface="+mn-ea"/>
+                <a:cs typeface="+mn-cs"/>
+              </a:rPr>
+              <a:t>There is an important timing limitation: </a:t>
+            </a:r>
+            <a:r>
+              <a:rPr lang="en-US" sz="1200" b="1" kern="1200" dirty="0">
+                <a:solidFill>
+                  <a:schemeClr val="tx1"/>
+                </a:solidFill>
+                <a:effectLst/>
+                <a:latin typeface="+mn-lt"/>
+                <a:ea typeface="+mn-ea"/>
+                <a:cs typeface="+mn-cs"/>
+              </a:rPr>
+              <a:t>current insurance may differ from the insurance someone had when they received help</a:t>
+            </a:r>
+            <a:r>
+              <a:rPr lang="en-US" sz="1200" kern="1200" dirty="0">
+                <a:solidFill>
+                  <a:schemeClr val="tx1"/>
+                </a:solidFill>
+                <a:effectLst/>
+                <a:latin typeface="+mn-lt"/>
+                <a:ea typeface="+mn-ea"/>
+                <a:cs typeface="+mn-cs"/>
+              </a:rPr>
+              <a:t>. I’ll return to that when discussing the conclusions.</a:t>
+            </a:r>
+          </a:p>
+          <a:p>
+            <a:r>
+              <a:rPr lang="en-US" sz="1200" kern="1200" dirty="0">
+                <a:solidFill>
+                  <a:schemeClr val="tx1"/>
+                </a:solidFill>
+                <a:effectLst/>
+                <a:latin typeface="+mn-lt"/>
+                <a:ea typeface="+mn-ea"/>
+                <a:cs typeface="+mn-cs"/>
+              </a:rPr>
+              <a:t>CHIP: Children's Health Insurance Program</a:t>
+            </a:r>
+          </a:p>
+          <a:p>
+            <a:r>
+              <a:rPr lang="en-US" sz="1200" kern="1200" dirty="0">
+                <a:solidFill>
+                  <a:schemeClr val="tx1"/>
+                </a:solidFill>
+                <a:effectLst/>
+                <a:latin typeface="+mn-lt"/>
+                <a:ea typeface="+mn-ea"/>
+                <a:cs typeface="+mn-cs"/>
+              </a:rPr>
+              <a:t>IHS: Indian Health Service </a:t>
+            </a:r>
+          </a:p>
+          <a:p>
+            <a:r>
+              <a:rPr lang="en-US" sz="1200" kern="1200" dirty="0">
+                <a:solidFill>
+                  <a:schemeClr val="tx1"/>
+                </a:solidFill>
+                <a:effectLst/>
+                <a:latin typeface="+mn-lt"/>
+                <a:ea typeface="+mn-ea"/>
+                <a:cs typeface="+mn-cs"/>
+              </a:rPr>
+              <a:t>400% of the Federal Poverty Level (FPL) means a household's annual income is four times the base poverty guideline set for their household size</a:t>
+            </a:r>
+          </a:p>
+          <a:p>
+            <a:endParaRPr lang="en-US" dirty="0"/>
           </a:p>
         </p:txBody>
       </p:sp>
@@ -1152,14 +2529,311 @@
           <a:lstStyle/>
           <a:p>
             <a:r>
-              <a:rPr lang="en-US" dirty="0"/>
-              <a:t>This chart shows the central descriptive finding. Privately insured respondents have the highest reported rate of lifetime medical-help receipt, at approximately 12.9%.
-The Medicaid, CHIP, or state-covered group has a rate of approximately 4.3%. Other-government coverage has a rate of 7.8%, and the single-service, IHS, or uninsured group has a rate of 5.1%.
-The private–Medicaid difference is about 8.5 percentage points. The private rate is approximately three times the Medicaid rate.
-However, this is an unadjusted comparison. It does not tell us whether insurance itself explains the difference.
-To investigate further, I next compare the characteristics of the insurance groups.
-Time: about 1 minute 45 seconds.</a:t>
-            </a:r>
+              <a:rPr lang="en-US" sz="1200" b="1" kern="1200" dirty="0">
+                <a:solidFill>
+                  <a:schemeClr val="tx1"/>
+                </a:solidFill>
+                <a:effectLst/>
+                <a:latin typeface="+mn-lt"/>
+                <a:ea typeface="+mn-ea"/>
+                <a:cs typeface="+mn-cs"/>
+              </a:rPr>
+              <a:t>Slide 6: Could Differences in Age, Income, and Education Help Explain the Gap?</a:t>
+            </a:r>
+            <a:endParaRPr lang="en-US" sz="1200" kern="1200" dirty="0">
+              <a:solidFill>
+                <a:schemeClr val="tx1"/>
+              </a:solidFill>
+              <a:effectLst/>
+              <a:latin typeface="+mn-lt"/>
+              <a:ea typeface="+mn-ea"/>
+              <a:cs typeface="+mn-cs"/>
+            </a:endParaRPr>
+          </a:p>
+          <a:p>
+            <a:r>
+              <a:rPr lang="en-US" sz="1200" kern="1200" dirty="0">
+                <a:solidFill>
+                  <a:schemeClr val="tx1"/>
+                </a:solidFill>
+                <a:effectLst/>
+                <a:latin typeface="+mn-lt"/>
+                <a:ea typeface="+mn-ea"/>
+                <a:cs typeface="+mn-cs"/>
+              </a:rPr>
+              <a:t>Earlier, we saw that privately insured respondents reported receiving help more often than Medicaid respondents.</a:t>
+            </a:r>
+          </a:p>
+          <a:p>
+            <a:r>
+              <a:rPr lang="en-US" sz="1200" kern="1200" dirty="0">
+                <a:solidFill>
+                  <a:schemeClr val="tx1"/>
+                </a:solidFill>
+                <a:effectLst/>
+                <a:latin typeface="+mn-lt"/>
+                <a:ea typeface="+mn-ea"/>
+                <a:cs typeface="+mn-cs"/>
+              </a:rPr>
+              <a:t>But insurance is not the only difference between these groups.</a:t>
+            </a:r>
+          </a:p>
+          <a:p>
+            <a:r>
+              <a:rPr lang="en-US" sz="1200" kern="1200" dirty="0">
+                <a:solidFill>
+                  <a:schemeClr val="tx1"/>
+                </a:solidFill>
+                <a:effectLst/>
+                <a:latin typeface="+mn-lt"/>
+                <a:ea typeface="+mn-ea"/>
+                <a:cs typeface="+mn-cs"/>
+              </a:rPr>
+              <a:t>Privately insured respondents are older on average: </a:t>
+            </a:r>
+            <a:r>
+              <a:rPr lang="en-US" sz="1200" b="1" kern="1200" dirty="0">
+                <a:solidFill>
+                  <a:schemeClr val="tx1"/>
+                </a:solidFill>
+                <a:effectLst/>
+                <a:latin typeface="+mn-lt"/>
+                <a:ea typeface="+mn-ea"/>
+                <a:cs typeface="+mn-cs"/>
+              </a:rPr>
+              <a:t>34.1 years, compared with 30.9 years</a:t>
+            </a:r>
+            <a:r>
+              <a:rPr lang="en-US" sz="1200" kern="1200" dirty="0">
+                <a:solidFill>
+                  <a:schemeClr val="tx1"/>
+                </a:solidFill>
+                <a:effectLst/>
+                <a:latin typeface="+mn-lt"/>
+                <a:ea typeface="+mn-ea"/>
+                <a:cs typeface="+mn-cs"/>
+              </a:rPr>
+              <a:t> for Medicaid respondents. They also have higher income and are more likely to have a bachelor’s degree.</a:t>
+            </a:r>
+          </a:p>
+          <a:p>
+            <a:r>
+              <a:rPr lang="en-US" sz="1200" kern="1200" dirty="0">
+                <a:solidFill>
+                  <a:schemeClr val="tx1"/>
+                </a:solidFill>
+                <a:effectLst/>
+                <a:latin typeface="+mn-lt"/>
+                <a:ea typeface="+mn-ea"/>
+                <a:cs typeface="+mn-cs"/>
+              </a:rPr>
+              <a:t>The income numbers need some explanation. </a:t>
+            </a:r>
+            <a:r>
+              <a:rPr lang="en-US" sz="1200" b="1" kern="1200" dirty="0">
+                <a:solidFill>
+                  <a:schemeClr val="tx1"/>
+                </a:solidFill>
+                <a:effectLst/>
+                <a:latin typeface="+mn-lt"/>
+                <a:ea typeface="+mn-ea"/>
+                <a:cs typeface="+mn-cs"/>
+              </a:rPr>
+              <a:t>100% of the poverty threshold means income at that threshold.</a:t>
+            </a:r>
+            <a:r>
+              <a:rPr lang="en-US" sz="1200" kern="1200" dirty="0">
+                <a:solidFill>
+                  <a:schemeClr val="tx1"/>
+                </a:solidFill>
+                <a:effectLst/>
+                <a:latin typeface="+mn-lt"/>
+                <a:ea typeface="+mn-ea"/>
+                <a:cs typeface="+mn-cs"/>
+              </a:rPr>
+              <a:t> The private group’s average is about </a:t>
+            </a:r>
+            <a:r>
+              <a:rPr lang="en-US" sz="1200" b="1" kern="1200" dirty="0">
+                <a:solidFill>
+                  <a:schemeClr val="tx1"/>
+                </a:solidFill>
+                <a:effectLst/>
+                <a:latin typeface="+mn-lt"/>
+                <a:ea typeface="+mn-ea"/>
+                <a:cs typeface="+mn-cs"/>
+              </a:rPr>
+              <a:t>4.1 times the threshold</a:t>
+            </a:r>
+            <a:r>
+              <a:rPr lang="en-US" sz="1200" kern="1200" dirty="0">
+                <a:solidFill>
+                  <a:schemeClr val="tx1"/>
+                </a:solidFill>
+                <a:effectLst/>
+                <a:latin typeface="+mn-lt"/>
+                <a:ea typeface="+mn-ea"/>
+                <a:cs typeface="+mn-cs"/>
+              </a:rPr>
+              <a:t>, compared with about </a:t>
+            </a:r>
+            <a:r>
+              <a:rPr lang="en-US" sz="1200" b="1" kern="1200" dirty="0">
+                <a:solidFill>
+                  <a:schemeClr val="tx1"/>
+                </a:solidFill>
+                <a:effectLst/>
+                <a:latin typeface="+mn-lt"/>
+                <a:ea typeface="+mn-ea"/>
+                <a:cs typeface="+mn-cs"/>
+              </a:rPr>
+              <a:t>1.7 times</a:t>
+            </a:r>
+            <a:r>
+              <a:rPr lang="en-US" sz="1200" kern="1200" dirty="0">
+                <a:solidFill>
+                  <a:schemeClr val="tx1"/>
+                </a:solidFill>
+                <a:effectLst/>
+                <a:latin typeface="+mn-lt"/>
+                <a:ea typeface="+mn-ea"/>
+                <a:cs typeface="+mn-cs"/>
+              </a:rPr>
+              <a:t> for the Medicaid group.</a:t>
+            </a:r>
+          </a:p>
+          <a:p>
+            <a:r>
+              <a:rPr lang="en-US" sz="1200" kern="1200" dirty="0">
+                <a:solidFill>
+                  <a:schemeClr val="tx1"/>
+                </a:solidFill>
+                <a:effectLst/>
+                <a:latin typeface="+mn-lt"/>
+                <a:ea typeface="+mn-ea"/>
+                <a:cs typeface="+mn-cs"/>
+              </a:rPr>
+              <a:t>For education, about </a:t>
+            </a:r>
+            <a:r>
+              <a:rPr lang="en-US" sz="1200" b="1" kern="1200" dirty="0">
+                <a:solidFill>
+                  <a:schemeClr val="tx1"/>
+                </a:solidFill>
+                <a:effectLst/>
+                <a:latin typeface="+mn-lt"/>
+                <a:ea typeface="+mn-ea"/>
+                <a:cs typeface="+mn-cs"/>
+              </a:rPr>
+              <a:t>54% of the private group has a bachelor’s degree or higher</a:t>
+            </a:r>
+            <a:r>
+              <a:rPr lang="en-US" sz="1200" kern="1200" dirty="0">
+                <a:solidFill>
+                  <a:schemeClr val="tx1"/>
+                </a:solidFill>
+                <a:effectLst/>
+                <a:latin typeface="+mn-lt"/>
+                <a:ea typeface="+mn-ea"/>
+                <a:cs typeface="+mn-cs"/>
+              </a:rPr>
+              <a:t>, compared with about </a:t>
+            </a:r>
+            <a:r>
+              <a:rPr lang="en-US" sz="1200" b="1" kern="1200" dirty="0">
+                <a:solidFill>
+                  <a:schemeClr val="tx1"/>
+                </a:solidFill>
+                <a:effectLst/>
+                <a:latin typeface="+mn-lt"/>
+                <a:ea typeface="+mn-ea"/>
+                <a:cs typeface="+mn-cs"/>
+              </a:rPr>
+              <a:t>12% of the Medicaid group</a:t>
+            </a:r>
+            <a:r>
+              <a:rPr lang="en-US" sz="1200" kern="1200" dirty="0">
+                <a:solidFill>
+                  <a:schemeClr val="tx1"/>
+                </a:solidFill>
+                <a:effectLst/>
+                <a:latin typeface="+mn-lt"/>
+                <a:ea typeface="+mn-ea"/>
+                <a:cs typeface="+mn-cs"/>
+              </a:rPr>
+              <a:t>.</a:t>
+            </a:r>
+          </a:p>
+          <a:p>
+            <a:r>
+              <a:rPr lang="en-US" sz="1200" kern="1200" dirty="0">
+                <a:solidFill>
+                  <a:schemeClr val="tx1"/>
+                </a:solidFill>
+                <a:effectLst/>
+                <a:latin typeface="+mn-lt"/>
+                <a:ea typeface="+mn-ea"/>
+                <a:cs typeface="+mn-cs"/>
+              </a:rPr>
+              <a:t>Why does this matter? If age, income, or education also relates to receiving help, then part of the difference we first saw could be related to these characteristics.</a:t>
+            </a:r>
+          </a:p>
+          <a:p>
+            <a:r>
+              <a:rPr lang="en-US" sz="1200" kern="1200" dirty="0">
+                <a:solidFill>
+                  <a:schemeClr val="tx1"/>
+                </a:solidFill>
+                <a:effectLst/>
+                <a:latin typeface="+mn-lt"/>
+                <a:ea typeface="+mn-ea"/>
+                <a:cs typeface="+mn-cs"/>
+              </a:rPr>
+              <a:t>So before interpreting the insurance association, we need to consider these differences.</a:t>
+            </a:r>
+          </a:p>
+          <a:p>
+            <a:r>
+              <a:rPr lang="en-US" sz="1200" kern="1200" dirty="0">
+                <a:solidFill>
+                  <a:schemeClr val="tx1"/>
+                </a:solidFill>
+                <a:effectLst/>
+                <a:latin typeface="+mn-lt"/>
+                <a:ea typeface="+mn-ea"/>
+                <a:cs typeface="+mn-cs"/>
+              </a:rPr>
+              <a:t>The next slide checks whether respondents of different ages, income levels, and education levels report different rates of receiving help.</a:t>
+            </a:r>
+          </a:p>
+          <a:p>
+            <a:r>
+              <a:rPr lang="en-US" sz="1200" b="1" kern="1200" dirty="0">
+                <a:solidFill>
+                  <a:schemeClr val="tx1"/>
+                </a:solidFill>
+                <a:effectLst/>
+                <a:latin typeface="+mn-lt"/>
+                <a:ea typeface="+mn-ea"/>
+                <a:cs typeface="+mn-cs"/>
+              </a:rPr>
+              <a:t>The takeaway:</a:t>
+            </a:r>
+            <a:r>
+              <a:rPr lang="en-US" sz="1200" kern="1200" dirty="0">
+                <a:solidFill>
+                  <a:schemeClr val="tx1"/>
+                </a:solidFill>
+                <a:effectLst/>
+                <a:latin typeface="+mn-lt"/>
+                <a:ea typeface="+mn-ea"/>
+                <a:cs typeface="+mn-cs"/>
+              </a:rPr>
+              <a:t> The initial chart compares groups that differ in several ways. That is why we later include age, income, and education in the model.</a:t>
+            </a:r>
+          </a:p>
+          <a:p>
+            <a:endParaRPr lang="en-US" dirty="0"/>
           </a:p>
         </p:txBody>
       </p:sp>
@@ -1204,7 +2878,13 @@
   <p:cSld>
     <p:spTree>
       <p:nvGrpSpPr>
-        <p:cNvPr id="1" name=""/>
+        <p:cNvPr id="1" name="">
+          <a:extLst>
+            <a:ext uri="{FF2B5EF4-FFF2-40B4-BE49-F238E27FC236}">
+              <a16:creationId xmlns:a16="http://schemas.microsoft.com/office/drawing/2014/main" id="{CF7D81DA-1819-EE97-45DC-AEE94E6156F6}"/>
+            </a:ext>
+          </a:extLst>
+        </p:cNvPr>
         <p:cNvGrpSpPr/>
         <p:nvPr/>
       </p:nvGrpSpPr>
@@ -1218,7 +2898,13 @@
       </p:grpSpPr>
       <p:sp>
         <p:nvSpPr>
-          <p:cNvPr id="2" name="Slide Image Placeholder 1"/>
+          <p:cNvPr id="2" name="Slide Image Placeholder 1">
+            <a:extLst>
+              <a:ext uri="{FF2B5EF4-FFF2-40B4-BE49-F238E27FC236}">
+                <a16:creationId xmlns:a16="http://schemas.microsoft.com/office/drawing/2014/main" id="{595BF436-01CB-CF27-0F5A-F437B55A3467}"/>
+              </a:ext>
+            </a:extLst>
+          </p:cNvPr>
           <p:cNvSpPr>
             <a:spLocks noGrp="1" noRot="1" noChangeAspect="1"/>
           </p:cNvSpPr>
@@ -1230,7 +2916,13 @@
       </p:sp>
       <p:sp>
         <p:nvSpPr>
-          <p:cNvPr id="3" name="Notes Placeholder 2"/>
+          <p:cNvPr id="3" name="Notes Placeholder 2">
+            <a:extLst>
+              <a:ext uri="{FF2B5EF4-FFF2-40B4-BE49-F238E27FC236}">
+                <a16:creationId xmlns:a16="http://schemas.microsoft.com/office/drawing/2014/main" id="{743B60E9-D1B6-9BF6-CD5D-05E3ED79E2D9}"/>
+              </a:ext>
+            </a:extLst>
+          </p:cNvPr>
           <p:cNvSpPr>
             <a:spLocks noGrp="1"/>
           </p:cNvSpPr>
@@ -1244,21 +2936,283 @@
           <a:lstStyle/>
           <a:p>
             <a:r>
-              <a:rPr lang="en-US" dirty="0"/>
-              <a:t>The groups differ substantially in their characteristics.
-Privately insured respondents are approximately three years older than Medicaid respondents, on average. Their mean income relative to the poverty threshold is also considerably higher.
-The education difference is especially large. Approximately 54% of privately insured respondents have a bachelor’s degree or higher, compared with about 12% of Medicaid respondents.
-These differences could contribute to the initial insurance pattern. Older respondents have had more time to receive care, and income and education may be associated with healthcare use.
-This is why a simple comparison of the insurance-group percentages is not enough to answer my research question.
-(Optional: reveal the education-composition chart here as a follow-up visual.)
-Time: about 1 minute 45 seconds.</a:t>
-            </a:r>
+              <a:rPr lang="en-US" sz="1200" b="1" kern="1200" dirty="0">
+                <a:solidFill>
+                  <a:schemeClr val="tx1"/>
+                </a:solidFill>
+                <a:effectLst/>
+                <a:latin typeface="+mn-lt"/>
+                <a:ea typeface="+mn-ea"/>
+                <a:cs typeface="+mn-cs"/>
+              </a:rPr>
+              <a:t>Slide 7: Help Receipt Also Varies with Age, Income, and Education</a:t>
+            </a:r>
+            <a:endParaRPr lang="en-US" sz="1200" kern="1200" dirty="0">
+              <a:solidFill>
+                <a:schemeClr val="tx1"/>
+              </a:solidFill>
+              <a:effectLst/>
+              <a:latin typeface="+mn-lt"/>
+              <a:ea typeface="+mn-ea"/>
+              <a:cs typeface="+mn-cs"/>
+            </a:endParaRPr>
+          </a:p>
+          <a:p>
+            <a:r>
+              <a:rPr lang="en-US" sz="1200" kern="1200" dirty="0">
+                <a:solidFill>
+                  <a:schemeClr val="tx1"/>
+                </a:solidFill>
+                <a:effectLst/>
+                <a:latin typeface="+mn-lt"/>
+                <a:ea typeface="+mn-ea"/>
+                <a:cs typeface="+mn-cs"/>
+              </a:rPr>
+              <a:t>These charts show that help receipt varies with each of the characteristics we just discussed.</a:t>
+            </a:r>
+          </a:p>
+          <a:p>
+            <a:r>
+              <a:rPr lang="en-US" sz="1200" kern="1200" dirty="0">
+                <a:solidFill>
+                  <a:schemeClr val="tx1"/>
+                </a:solidFill>
+                <a:effectLst/>
+                <a:latin typeface="+mn-lt"/>
+                <a:ea typeface="+mn-ea"/>
+                <a:cs typeface="+mn-cs"/>
+              </a:rPr>
+              <a:t>For age, the rate is approximately </a:t>
+            </a:r>
+            <a:r>
+              <a:rPr lang="en-US" sz="1200" b="1" kern="1200" dirty="0">
+                <a:solidFill>
+                  <a:schemeClr val="tx1"/>
+                </a:solidFill>
+                <a:effectLst/>
+                <a:latin typeface="+mn-lt"/>
+                <a:ea typeface="+mn-ea"/>
+                <a:cs typeface="+mn-cs"/>
+              </a:rPr>
+              <a:t>1.5% among respondents aged 15–24</a:t>
+            </a:r>
+            <a:r>
+              <a:rPr lang="en-US" sz="1200" kern="1200" dirty="0">
+                <a:solidFill>
+                  <a:schemeClr val="tx1"/>
+                </a:solidFill>
+                <a:effectLst/>
+                <a:latin typeface="+mn-lt"/>
+                <a:ea typeface="+mn-ea"/>
+                <a:cs typeface="+mn-cs"/>
+              </a:rPr>
+              <a:t>, compared with </a:t>
+            </a:r>
+            <a:r>
+              <a:rPr lang="en-US" sz="1200" b="1" kern="1200" dirty="0">
+                <a:solidFill>
+                  <a:schemeClr val="tx1"/>
+                </a:solidFill>
+                <a:effectLst/>
+                <a:latin typeface="+mn-lt"/>
+                <a:ea typeface="+mn-ea"/>
+                <a:cs typeface="+mn-cs"/>
+              </a:rPr>
+              <a:t>15.5% among those aged 35–44</a:t>
+            </a:r>
+            <a:r>
+              <a:rPr lang="en-US" sz="1200" kern="1200" dirty="0">
+                <a:solidFill>
+                  <a:schemeClr val="tx1"/>
+                </a:solidFill>
+                <a:effectLst/>
+                <a:latin typeface="+mn-lt"/>
+                <a:ea typeface="+mn-ea"/>
+                <a:cs typeface="+mn-cs"/>
+              </a:rPr>
+              <a:t>.</a:t>
+            </a:r>
+          </a:p>
+          <a:p>
+            <a:r>
+              <a:rPr lang="en-US" sz="1200" kern="1200" dirty="0">
+                <a:solidFill>
+                  <a:schemeClr val="tx1"/>
+                </a:solidFill>
+                <a:effectLst/>
+                <a:latin typeface="+mn-lt"/>
+                <a:ea typeface="+mn-ea"/>
+                <a:cs typeface="+mn-cs"/>
+              </a:rPr>
+              <a:t>Age is especially relevant because the outcome asks about lifetime experience. Older respondents have had more time to receive help.</a:t>
+            </a:r>
+          </a:p>
+          <a:p>
+            <a:r>
+              <a:rPr lang="en-US" sz="1200" kern="1200" dirty="0">
+                <a:solidFill>
+                  <a:schemeClr val="tx1"/>
+                </a:solidFill>
+                <a:effectLst/>
+                <a:latin typeface="+mn-lt"/>
+                <a:ea typeface="+mn-ea"/>
+                <a:cs typeface="+mn-cs"/>
+              </a:rPr>
+              <a:t>For income, approximately </a:t>
+            </a:r>
+            <a:r>
+              <a:rPr lang="en-US" sz="1200" b="1" kern="1200" dirty="0">
+                <a:solidFill>
+                  <a:schemeClr val="tx1"/>
+                </a:solidFill>
+                <a:effectLst/>
+                <a:latin typeface="+mn-lt"/>
+                <a:ea typeface="+mn-ea"/>
+                <a:cs typeface="+mn-cs"/>
+              </a:rPr>
+              <a:t>4.5% of respondents at or below the poverty threshold</a:t>
+            </a:r>
+            <a:r>
+              <a:rPr lang="en-US" sz="1200" kern="1200" dirty="0">
+                <a:solidFill>
+                  <a:schemeClr val="tx1"/>
+                </a:solidFill>
+                <a:effectLst/>
+                <a:latin typeface="+mn-lt"/>
+                <a:ea typeface="+mn-ea"/>
+                <a:cs typeface="+mn-cs"/>
+              </a:rPr>
+              <a:t> report receiving help, compared with </a:t>
+            </a:r>
+            <a:r>
+              <a:rPr lang="en-US" sz="1200" b="1" kern="1200" dirty="0">
+                <a:solidFill>
+                  <a:schemeClr val="tx1"/>
+                </a:solidFill>
+                <a:effectLst/>
+                <a:latin typeface="+mn-lt"/>
+                <a:ea typeface="+mn-ea"/>
+                <a:cs typeface="+mn-cs"/>
+              </a:rPr>
+              <a:t>13.9% above 400% of the threshold</a:t>
+            </a:r>
+            <a:r>
+              <a:rPr lang="en-US" sz="1200" kern="1200" dirty="0">
+                <a:solidFill>
+                  <a:schemeClr val="tx1"/>
+                </a:solidFill>
+                <a:effectLst/>
+                <a:latin typeface="+mn-lt"/>
+                <a:ea typeface="+mn-ea"/>
+                <a:cs typeface="+mn-cs"/>
+              </a:rPr>
+              <a:t>.</a:t>
+            </a:r>
+          </a:p>
+          <a:p>
+            <a:r>
+              <a:rPr lang="en-US" sz="1200" kern="1200" dirty="0">
+                <a:solidFill>
+                  <a:schemeClr val="tx1"/>
+                </a:solidFill>
+                <a:effectLst/>
+                <a:latin typeface="+mn-lt"/>
+                <a:ea typeface="+mn-ea"/>
+                <a:cs typeface="+mn-cs"/>
+              </a:rPr>
+              <a:t>For education, the rate is approximately </a:t>
+            </a:r>
+            <a:r>
+              <a:rPr lang="en-US" sz="1200" b="1" kern="1200" dirty="0">
+                <a:solidFill>
+                  <a:schemeClr val="tx1"/>
+                </a:solidFill>
+                <a:effectLst/>
+                <a:latin typeface="+mn-lt"/>
+                <a:ea typeface="+mn-ea"/>
+                <a:cs typeface="+mn-cs"/>
+              </a:rPr>
+              <a:t>4.3% among respondents with less than high school education</a:t>
+            </a:r>
+            <a:r>
+              <a:rPr lang="en-US" sz="1200" kern="1200" dirty="0">
+                <a:solidFill>
+                  <a:schemeClr val="tx1"/>
+                </a:solidFill>
+                <a:effectLst/>
+                <a:latin typeface="+mn-lt"/>
+                <a:ea typeface="+mn-ea"/>
+                <a:cs typeface="+mn-cs"/>
+              </a:rPr>
+              <a:t>, compared with </a:t>
+            </a:r>
+            <a:r>
+              <a:rPr lang="en-US" sz="1200" b="1" kern="1200" dirty="0">
+                <a:solidFill>
+                  <a:schemeClr val="tx1"/>
+                </a:solidFill>
+                <a:effectLst/>
+                <a:latin typeface="+mn-lt"/>
+                <a:ea typeface="+mn-ea"/>
+                <a:cs typeface="+mn-cs"/>
+              </a:rPr>
+              <a:t>15.1% among those with a bachelor’s degree or higher</a:t>
+            </a:r>
+            <a:r>
+              <a:rPr lang="en-US" sz="1200" kern="1200" dirty="0">
+                <a:solidFill>
+                  <a:schemeClr val="tx1"/>
+                </a:solidFill>
+                <a:effectLst/>
+                <a:latin typeface="+mn-lt"/>
+                <a:ea typeface="+mn-ea"/>
+                <a:cs typeface="+mn-cs"/>
+              </a:rPr>
+              <a:t>.</a:t>
+            </a:r>
+          </a:p>
+          <a:p>
+            <a:r>
+              <a:rPr lang="en-US" sz="1200" kern="1200" dirty="0">
+                <a:solidFill>
+                  <a:schemeClr val="tx1"/>
+                </a:solidFill>
+                <a:effectLst/>
+                <a:latin typeface="+mn-lt"/>
+                <a:ea typeface="+mn-ea"/>
+                <a:cs typeface="+mn-cs"/>
+              </a:rPr>
+              <a:t>Together, these charts make the alternative explanation more plausible. Private respondents tend to have characteristics that also correspond with higher reported help receipt.</a:t>
+            </a:r>
+          </a:p>
+          <a:p>
+            <a:r>
+              <a:rPr lang="en-US" sz="1200" kern="1200" dirty="0">
+                <a:solidFill>
+                  <a:schemeClr val="tx1"/>
+                </a:solidFill>
+                <a:effectLst/>
+                <a:latin typeface="+mn-lt"/>
+                <a:ea typeface="+mn-ea"/>
+                <a:cs typeface="+mn-cs"/>
+              </a:rPr>
+              <a:t>These are still descriptive comparisons. To investigate further, I first look within age groups, then account for all three characteristics together.</a:t>
+            </a:r>
+          </a:p>
+          <a:p>
+            <a:endParaRPr lang="en-US" dirty="0"/>
           </a:p>
         </p:txBody>
       </p:sp>
       <p:sp>
         <p:nvSpPr>
-          <p:cNvPr id="4" name="Slide Number Placeholder 3"/>
+          <p:cNvPr id="4" name="Slide Number Placeholder 3">
+            <a:extLst>
+              <a:ext uri="{FF2B5EF4-FFF2-40B4-BE49-F238E27FC236}">
+                <a16:creationId xmlns:a16="http://schemas.microsoft.com/office/drawing/2014/main" id="{F661D4B0-583A-07E2-F8BE-11A9A658308B}"/>
+              </a:ext>
+            </a:extLst>
+          </p:cNvPr>
           <p:cNvSpPr>
             <a:spLocks noGrp="1"/>
           </p:cNvSpPr>
@@ -1282,7 +3236,7 @@
     </p:spTree>
     <p:extLst>
       <p:ext uri="{BB962C8B-B14F-4D97-AF65-F5344CB8AC3E}">
-        <p14:creationId xmlns:p14="http://schemas.microsoft.com/office/powerpoint/2010/main" val="1024086991"/>
+        <p14:creationId xmlns:p14="http://schemas.microsoft.com/office/powerpoint/2010/main" val="1072135300"/>
       </p:ext>
     </p:extLst>
   </p:cSld>
@@ -1337,15 +3291,272 @@
           <a:lstStyle/>
           <a:p>
             <a:r>
-              <a:rPr lang="en-US" dirty="0"/>
-              <a:t>These charts show separate descriptive relationships between help receipt and the three control variables.
-Help receipt rises sharply across the younger age groups, reaching approximately 15.5% among respondents aged 35–44. The oldest group has a similar rate, at approximately 15%.
-Income shows an upward pattern. Respondents at or below the poverty threshold report a rate of 4.5%, compared with 13.9% among those above four times the threshold.
-Education shows a similar pattern, with the highest rate among respondents with a bachelor’s degree or higher.
-These are unadjusted relationships. They support examining these variables together rather than interpreting any one chart as an independent association.
-Age also reflects the cumulative opportunity to receive care because the outcome asks about lifetime experience.
-Time: about 1 minute 45 seconds.</a:t>
-            </a:r>
+              <a:rPr lang="en-US" sz="1200" b="1" kern="1200" dirty="0">
+                <a:solidFill>
+                  <a:schemeClr val="tx1"/>
+                </a:solidFill>
+                <a:effectLst/>
+                <a:latin typeface="+mn-lt"/>
+                <a:ea typeface="+mn-ea"/>
+                <a:cs typeface="+mn-cs"/>
+              </a:rPr>
+              <a:t>Slide 8: The Insurance Pattern Within Age Groups</a:t>
+            </a:r>
+            <a:endParaRPr lang="en-US" sz="1200" kern="1200" dirty="0">
+              <a:solidFill>
+                <a:schemeClr val="tx1"/>
+              </a:solidFill>
+              <a:effectLst/>
+              <a:latin typeface="+mn-lt"/>
+              <a:ea typeface="+mn-ea"/>
+              <a:cs typeface="+mn-cs"/>
+            </a:endParaRPr>
+          </a:p>
+          <a:p>
+            <a:r>
+              <a:rPr lang="en-US" sz="1200" kern="1200" dirty="0">
+                <a:solidFill>
+                  <a:schemeClr val="tx1"/>
+                </a:solidFill>
+                <a:effectLst/>
+                <a:latin typeface="+mn-lt"/>
+                <a:ea typeface="+mn-ea"/>
+                <a:cs typeface="+mn-cs"/>
+              </a:rPr>
+              <a:t>This heatmap asks a narrower question: </a:t>
+            </a:r>
+            <a:r>
+              <a:rPr lang="en-US" sz="1200" b="1" kern="1200" dirty="0">
+                <a:solidFill>
+                  <a:schemeClr val="tx1"/>
+                </a:solidFill>
+                <a:effectLst/>
+                <a:latin typeface="+mn-lt"/>
+                <a:ea typeface="+mn-ea"/>
+                <a:cs typeface="+mn-cs"/>
+              </a:rPr>
+              <a:t>does the insurance pattern remain when we compare respondents within the same broad age group?</a:t>
+            </a:r>
+            <a:endParaRPr lang="en-US" sz="1200" kern="1200" dirty="0">
+              <a:solidFill>
+                <a:schemeClr val="tx1"/>
+              </a:solidFill>
+              <a:effectLst/>
+              <a:latin typeface="+mn-lt"/>
+              <a:ea typeface="+mn-ea"/>
+              <a:cs typeface="+mn-cs"/>
+            </a:endParaRPr>
+          </a:p>
+          <a:p>
+            <a:r>
+              <a:rPr lang="en-US" sz="1200" kern="1200" dirty="0">
+                <a:solidFill>
+                  <a:schemeClr val="tx1"/>
+                </a:solidFill>
+                <a:effectLst/>
+                <a:latin typeface="+mn-lt"/>
+                <a:ea typeface="+mn-ea"/>
+                <a:cs typeface="+mn-cs"/>
+              </a:rPr>
+              <a:t>Rows represent insurance categories, and columns represent age groups. Darker cells indicate higher reported help-receipt rates.</a:t>
+            </a:r>
+          </a:p>
+          <a:p>
+            <a:r>
+              <a:rPr lang="en-US" sz="1200" kern="1200" dirty="0">
+                <a:solidFill>
+                  <a:schemeClr val="tx1"/>
+                </a:solidFill>
+                <a:effectLst/>
+                <a:latin typeface="+mn-lt"/>
+                <a:ea typeface="+mn-ea"/>
+                <a:cs typeface="+mn-cs"/>
+              </a:rPr>
+              <a:t>Focus on the private and Medicaid rows.</a:t>
+            </a:r>
+          </a:p>
+          <a:p>
+            <a:r>
+              <a:rPr lang="en-US" sz="1200" kern="1200" dirty="0">
+                <a:solidFill>
+                  <a:schemeClr val="tx1"/>
+                </a:solidFill>
+                <a:effectLst/>
+                <a:latin typeface="+mn-lt"/>
+                <a:ea typeface="+mn-ea"/>
+                <a:cs typeface="+mn-cs"/>
+              </a:rPr>
+              <a:t>Among respondents aged </a:t>
+            </a:r>
+            <a:r>
+              <a:rPr lang="en-US" sz="1200" b="1" kern="1200" dirty="0">
+                <a:solidFill>
+                  <a:schemeClr val="tx1"/>
+                </a:solidFill>
+                <a:effectLst/>
+                <a:latin typeface="+mn-lt"/>
+                <a:ea typeface="+mn-ea"/>
+                <a:cs typeface="+mn-cs"/>
+              </a:rPr>
+              <a:t>25–34</a:t>
+            </a:r>
+            <a:r>
+              <a:rPr lang="en-US" sz="1200" kern="1200" dirty="0">
+                <a:solidFill>
+                  <a:schemeClr val="tx1"/>
+                </a:solidFill>
+                <a:effectLst/>
+                <a:latin typeface="+mn-lt"/>
+                <a:ea typeface="+mn-ea"/>
+                <a:cs typeface="+mn-cs"/>
+              </a:rPr>
+              <a:t>, the rates are approximately </a:t>
+            </a:r>
+            <a:r>
+              <a:rPr lang="en-US" sz="1200" b="1" kern="1200" dirty="0">
+                <a:solidFill>
+                  <a:schemeClr val="tx1"/>
+                </a:solidFill>
+                <a:effectLst/>
+                <a:latin typeface="+mn-lt"/>
+                <a:ea typeface="+mn-ea"/>
+                <a:cs typeface="+mn-cs"/>
+              </a:rPr>
+              <a:t>11.1% for private coverage and 2.8% for Medicaid</a:t>
+            </a:r>
+            <a:r>
+              <a:rPr lang="en-US" sz="1200" kern="1200" dirty="0">
+                <a:solidFill>
+                  <a:schemeClr val="tx1"/>
+                </a:solidFill>
+                <a:effectLst/>
+                <a:latin typeface="+mn-lt"/>
+                <a:ea typeface="+mn-ea"/>
+                <a:cs typeface="+mn-cs"/>
+              </a:rPr>
+              <a:t>.</a:t>
+            </a:r>
+          </a:p>
+          <a:p>
+            <a:r>
+              <a:rPr lang="en-US" sz="1200" kern="1200" dirty="0">
+                <a:solidFill>
+                  <a:schemeClr val="tx1"/>
+                </a:solidFill>
+                <a:effectLst/>
+                <a:latin typeface="+mn-lt"/>
+                <a:ea typeface="+mn-ea"/>
+                <a:cs typeface="+mn-cs"/>
+              </a:rPr>
+              <a:t>Among those aged </a:t>
+            </a:r>
+            <a:r>
+              <a:rPr lang="en-US" sz="1200" b="1" kern="1200" dirty="0">
+                <a:solidFill>
+                  <a:schemeClr val="tx1"/>
+                </a:solidFill>
+                <a:effectLst/>
+                <a:latin typeface="+mn-lt"/>
+                <a:ea typeface="+mn-ea"/>
+                <a:cs typeface="+mn-cs"/>
+              </a:rPr>
+              <a:t>35–44</a:t>
+            </a:r>
+            <a:r>
+              <a:rPr lang="en-US" sz="1200" kern="1200" dirty="0">
+                <a:solidFill>
+                  <a:schemeClr val="tx1"/>
+                </a:solidFill>
+                <a:effectLst/>
+                <a:latin typeface="+mn-lt"/>
+                <a:ea typeface="+mn-ea"/>
+                <a:cs typeface="+mn-cs"/>
+              </a:rPr>
+              <a:t>, they are approximately </a:t>
+            </a:r>
+            <a:r>
+              <a:rPr lang="en-US" sz="1200" b="1" kern="1200" dirty="0">
+                <a:solidFill>
+                  <a:schemeClr val="tx1"/>
+                </a:solidFill>
+                <a:effectLst/>
+                <a:latin typeface="+mn-lt"/>
+                <a:ea typeface="+mn-ea"/>
+                <a:cs typeface="+mn-cs"/>
+              </a:rPr>
+              <a:t>18.4% and 6.3%</a:t>
+            </a:r>
+            <a:r>
+              <a:rPr lang="en-US" sz="1200" kern="1200" dirty="0">
+                <a:solidFill>
+                  <a:schemeClr val="tx1"/>
+                </a:solidFill>
+                <a:effectLst/>
+                <a:latin typeface="+mn-lt"/>
+                <a:ea typeface="+mn-ea"/>
+                <a:cs typeface="+mn-cs"/>
+              </a:rPr>
+              <a:t>.</a:t>
+            </a:r>
+          </a:p>
+          <a:p>
+            <a:r>
+              <a:rPr lang="en-US" sz="1200" kern="1200" dirty="0">
+                <a:solidFill>
+                  <a:schemeClr val="tx1"/>
+                </a:solidFill>
+                <a:effectLst/>
+                <a:latin typeface="+mn-lt"/>
+                <a:ea typeface="+mn-ea"/>
+                <a:cs typeface="+mn-cs"/>
+              </a:rPr>
+              <a:t>The private group also has a higher rate among respondents aged 45–50.</a:t>
+            </a:r>
+          </a:p>
+          <a:p>
+            <a:r>
+              <a:rPr lang="en-US" sz="1200" kern="1200" dirty="0">
+                <a:solidFill>
+                  <a:schemeClr val="tx1"/>
+                </a:solidFill>
+                <a:effectLst/>
+                <a:latin typeface="+mn-lt"/>
+                <a:ea typeface="+mn-ea"/>
+                <a:cs typeface="+mn-cs"/>
+              </a:rPr>
+              <a:t>There is an exception in the youngest group, where Medicaid has the higher rate. Some cells also contain small samples.</a:t>
+            </a:r>
+          </a:p>
+          <a:p>
+            <a:r>
+              <a:rPr lang="en-US" sz="1200" kern="1200" dirty="0">
+                <a:solidFill>
+                  <a:schemeClr val="tx1"/>
+                </a:solidFill>
+                <a:effectLst/>
+                <a:latin typeface="+mn-lt"/>
+                <a:ea typeface="+mn-ea"/>
+                <a:cs typeface="+mn-cs"/>
+              </a:rPr>
+              <a:t>The takeaway is that the private–Medicaid pattern remains within the older age groups. This suggests that broad age composition alone may not account for the entire pattern.</a:t>
+            </a:r>
+          </a:p>
+          <a:p>
+            <a:r>
+              <a:rPr lang="en-US" sz="1200" kern="1200" dirty="0">
+                <a:solidFill>
+                  <a:schemeClr val="tx1"/>
+                </a:solidFill>
+                <a:effectLst/>
+                <a:latin typeface="+mn-lt"/>
+                <a:ea typeface="+mn-ea"/>
+                <a:cs typeface="+mn-cs"/>
+              </a:rPr>
+              <a:t>However, this comparison does not account for income or education. That is why I use a model next.</a:t>
+            </a:r>
+          </a:p>
+          <a:p>
+            <a:endParaRPr lang="en-US" dirty="0"/>
           </a:p>
         </p:txBody>
       </p:sp>
@@ -1429,15 +3640,222 @@
           <a:bodyPr/>
           <a:lstStyle/>
           <a:p>
-            <a:r>
-              <a:rPr lang="en-US" dirty="0"/>
-              <a:t>The heatmap compares insurance groups within age categories. Rows represent insurance, columns represent age, and darker cells indicate higher help-receipt rates.
-Among respondents aged 25 and older, private coverage has a higher reported rate than Medicaid coverage within every age category.
-This suggests that the overall difference is not explained solely by privately insured respondents being older.
-There is an exception among ages 15–24, where Medicaid respondents have the higher rate. Therefore, the pattern is not identical at every age.
-Some cells also have small samples. I treat this heatmap as exploratory evidence, rather than a formal test of whether insurance associations vary by age.
-Time: about 1 minute 30 seconds.</a:t>
-            </a:r>
+            <a:br>
+              <a:rPr lang="en-US" sz="1200" kern="1200" dirty="0">
+                <a:solidFill>
+                  <a:schemeClr val="tx1"/>
+                </a:solidFill>
+                <a:effectLst/>
+                <a:latin typeface="+mn-lt"/>
+                <a:ea typeface="+mn-ea"/>
+                <a:cs typeface="+mn-cs"/>
+              </a:rPr>
+            </a:br>
+            <a:endParaRPr lang="en-US" sz="1200" kern="1200" dirty="0">
+              <a:solidFill>
+                <a:schemeClr val="tx1"/>
+              </a:solidFill>
+              <a:effectLst/>
+              <a:latin typeface="+mn-lt"/>
+              <a:ea typeface="+mn-ea"/>
+              <a:cs typeface="+mn-cs"/>
+            </a:endParaRPr>
+          </a:p>
+          <a:p>
+            <a:r>
+              <a:rPr lang="en-US" sz="1200" b="1" kern="1200" dirty="0">
+                <a:solidFill>
+                  <a:schemeClr val="tx1"/>
+                </a:solidFill>
+                <a:effectLst/>
+                <a:latin typeface="+mn-lt"/>
+                <a:ea typeface="+mn-ea"/>
+                <a:cs typeface="+mn-cs"/>
+              </a:rPr>
+              <a:t>Slide 9: Statistical Approach</a:t>
+            </a:r>
+            <a:endParaRPr lang="en-US" sz="1200" kern="1200" dirty="0">
+              <a:solidFill>
+                <a:schemeClr val="tx1"/>
+              </a:solidFill>
+              <a:effectLst/>
+              <a:latin typeface="+mn-lt"/>
+              <a:ea typeface="+mn-ea"/>
+              <a:cs typeface="+mn-cs"/>
+            </a:endParaRPr>
+          </a:p>
+          <a:p>
+            <a:r>
+              <a:rPr lang="en-US" sz="1200" kern="1200" dirty="0">
+                <a:solidFill>
+                  <a:schemeClr val="tx1"/>
+                </a:solidFill>
+                <a:effectLst/>
+                <a:latin typeface="+mn-lt"/>
+                <a:ea typeface="+mn-ea"/>
+                <a:cs typeface="+mn-cs"/>
+              </a:rPr>
+              <a:t>The model considers insurance, age, income, and education together.</a:t>
+            </a:r>
+          </a:p>
+          <a:p>
+            <a:r>
+              <a:rPr lang="en-US" sz="1200" kern="1200" dirty="0">
+                <a:solidFill>
+                  <a:schemeClr val="tx1"/>
+                </a:solidFill>
+                <a:effectLst/>
+                <a:latin typeface="+mn-lt"/>
+                <a:ea typeface="+mn-ea"/>
+                <a:cs typeface="+mn-cs"/>
+              </a:rPr>
+              <a:t>I use </a:t>
+            </a:r>
+            <a:r>
+              <a:rPr lang="en-US" sz="1200" b="1" kern="1200" dirty="0">
+                <a:solidFill>
+                  <a:schemeClr val="tx1"/>
+                </a:solidFill>
+                <a:effectLst/>
+                <a:latin typeface="+mn-lt"/>
+                <a:ea typeface="+mn-ea"/>
+                <a:cs typeface="+mn-cs"/>
+              </a:rPr>
+              <a:t>survey-weighted logistic regression</a:t>
+            </a:r>
+            <a:r>
+              <a:rPr lang="en-US" sz="1200" kern="1200" dirty="0">
+                <a:solidFill>
+                  <a:schemeClr val="tx1"/>
+                </a:solidFill>
+                <a:effectLst/>
+                <a:latin typeface="+mn-lt"/>
+                <a:ea typeface="+mn-ea"/>
+                <a:cs typeface="+mn-cs"/>
+              </a:rPr>
+              <a:t> because the outcome is yes or no: whether someone reported ever receiving medical help to become pregnant.</a:t>
+            </a:r>
+          </a:p>
+          <a:p>
+            <a:r>
+              <a:rPr lang="en-US" sz="1200" kern="1200" dirty="0">
+                <a:solidFill>
+                  <a:schemeClr val="tx1"/>
+                </a:solidFill>
+                <a:effectLst/>
+                <a:latin typeface="+mn-lt"/>
+                <a:ea typeface="+mn-ea"/>
+                <a:cs typeface="+mn-cs"/>
+              </a:rPr>
+              <a:t>Private coverage is the reference group. The model compares each other insurance category with that group while accounting for the selected characteristics.</a:t>
+            </a:r>
+          </a:p>
+          <a:p>
+            <a:r>
+              <a:rPr lang="en-US" sz="1200" kern="1200" dirty="0">
+                <a:solidFill>
+                  <a:schemeClr val="tx1"/>
+                </a:solidFill>
+                <a:effectLst/>
+                <a:latin typeface="+mn-lt"/>
+                <a:ea typeface="+mn-ea"/>
+                <a:cs typeface="+mn-cs"/>
+              </a:rPr>
+              <a:t>The results use a measure called an </a:t>
+            </a:r>
+            <a:r>
+              <a:rPr lang="en-US" sz="1200" b="1" kern="1200" dirty="0">
+                <a:solidFill>
+                  <a:schemeClr val="tx1"/>
+                </a:solidFill>
+                <a:effectLst/>
+                <a:latin typeface="+mn-lt"/>
+                <a:ea typeface="+mn-ea"/>
+                <a:cs typeface="+mn-cs"/>
+              </a:rPr>
+              <a:t>odds ratio</a:t>
+            </a:r>
+            <a:r>
+              <a:rPr lang="en-US" sz="1200" kern="1200" dirty="0">
+                <a:solidFill>
+                  <a:schemeClr val="tx1"/>
+                </a:solidFill>
+                <a:effectLst/>
+                <a:latin typeface="+mn-lt"/>
+                <a:ea typeface="+mn-ea"/>
+                <a:cs typeface="+mn-cs"/>
+              </a:rPr>
+              <a:t>.</a:t>
+            </a:r>
+          </a:p>
+          <a:p>
+            <a:r>
+              <a:rPr lang="en-US" sz="1200" kern="1200" dirty="0">
+                <a:solidFill>
+                  <a:schemeClr val="tx1"/>
+                </a:solidFill>
+                <a:effectLst/>
+                <a:latin typeface="+mn-lt"/>
+                <a:ea typeface="+mn-ea"/>
+                <a:cs typeface="+mn-cs"/>
+              </a:rPr>
+              <a:t>For reading the next chart, the main number to remember is </a:t>
+            </a:r>
+            <a:r>
+              <a:rPr lang="en-US" sz="1200" b="1" kern="1200" dirty="0">
+                <a:solidFill>
+                  <a:schemeClr val="tx1"/>
+                </a:solidFill>
+                <a:effectLst/>
+                <a:latin typeface="+mn-lt"/>
+                <a:ea typeface="+mn-ea"/>
+                <a:cs typeface="+mn-cs"/>
+              </a:rPr>
+              <a:t>one</a:t>
+            </a:r>
+            <a:r>
+              <a:rPr lang="en-US" sz="1200" kern="1200" dirty="0">
+                <a:solidFill>
+                  <a:schemeClr val="tx1"/>
+                </a:solidFill>
+                <a:effectLst/>
+                <a:latin typeface="+mn-lt"/>
+                <a:ea typeface="+mn-ea"/>
+                <a:cs typeface="+mn-cs"/>
+              </a:rPr>
+              <a:t>. A value of one means equal odds compared with private coverage. A value below one indicates a lower tendency to report receiving help, and a value above one indicates a higher tendency.</a:t>
+            </a:r>
+          </a:p>
+          <a:p>
+            <a:r>
+              <a:rPr lang="en-US" sz="1200" kern="1200" dirty="0">
+                <a:solidFill>
+                  <a:schemeClr val="tx1"/>
+                </a:solidFill>
+                <a:effectLst/>
+                <a:latin typeface="+mn-lt"/>
+                <a:ea typeface="+mn-ea"/>
+                <a:cs typeface="+mn-cs"/>
+              </a:rPr>
+              <a:t>The confidence interval shows the uncertainty around each estimate.</a:t>
+            </a:r>
+          </a:p>
+          <a:p>
+            <a:r>
+              <a:rPr lang="en-US" sz="1200" kern="1200" dirty="0">
+                <a:solidFill>
+                  <a:schemeClr val="tx1"/>
+                </a:solidFill>
+                <a:effectLst/>
+                <a:latin typeface="+mn-lt"/>
+                <a:ea typeface="+mn-ea"/>
+                <a:cs typeface="+mn-cs"/>
+              </a:rPr>
+              <a:t>These numbers are not percentage-point differences. I’ll use them to explain the direction of the adjusted association and how clear the evidence is.</a:t>
+            </a:r>
+          </a:p>
+          <a:p>
+            <a:endParaRPr lang="en-US" dirty="0"/>
           </a:p>
         </p:txBody>
       </p:sp>
@@ -1741,7 +4159,7 @@
           </a:prstGeom>
           <a:extLst>
             <a:ext uri="{C572A759-6A51-4108-AA02-DFA0A04FC94B}">
-              <ma14:wrappingTextBoxFlag xmlns:ma14="http://schemas.microsoft.com/office/mac/drawingml/2011/main" xmlns="" val="0"/>
+              <ma14:wrappingTextBoxFlag xmlns="" xmlns:ma14="http://schemas.microsoft.com/office/mac/drawingml/2011/main" val="0"/>
             </a:ext>
           </a:extLst>
         </p:spPr>
@@ -1816,7 +4234,7 @@
           </a:prstGeom>
           <a:extLst>
             <a:ext uri="{C572A759-6A51-4108-AA02-DFA0A04FC94B}">
-              <ma14:wrappingTextBoxFlag xmlns:ma14="http://schemas.microsoft.com/office/mac/drawingml/2011/main" xmlns="" val="0"/>
+              <ma14:wrappingTextBoxFlag xmlns="" xmlns:ma14="http://schemas.microsoft.com/office/mac/drawingml/2011/main" val="0"/>
             </a:ext>
           </a:extLst>
         </p:spPr>
@@ -2191,7 +4609,7 @@
                   <a:schemeClr val="accent3"/>
                 </a:solidFill>
               </a:rPr>
-              <a:t>Evidence from the 2022–2023 National Survey of Family Growth</a:t>
+              <a:t>Evidence from the 2022 - 2023 National Survey of Family Growth</a:t>
             </a:r>
             <a:endParaRPr lang="en-US" sz="1400" dirty="0"/>
           </a:p>
@@ -2256,1439 +4674,6 @@
 </file>
 
 <file path=ppt/slides/slide10.xml><?xml version="1.0" encoding="utf-8"?>
-<p:sld xmlns:a="http://schemas.openxmlformats.org/drawingml/2006/main" xmlns:r="http://schemas.openxmlformats.org/officeDocument/2006/relationships" xmlns:p="http://schemas.openxmlformats.org/presentationml/2006/main">
-  <p:cSld name="Slide 10">
-    <p:spTree>
-      <p:nvGrpSpPr>
-        <p:cNvPr id="1" name=""/>
-        <p:cNvGrpSpPr/>
-        <p:nvPr/>
-      </p:nvGrpSpPr>
-      <p:grpSpPr>
-        <a:xfrm>
-          <a:off x="0" y="0"/>
-          <a:ext cx="0" cy="0"/>
-          <a:chOff x="0" y="0"/>
-          <a:chExt cx="0" cy="0"/>
-        </a:xfrm>
-      </p:grpSpPr>
-      <p:sp>
-        <p:nvSpPr>
-          <p:cNvPr id="2" name="Text 0"/>
-          <p:cNvSpPr>
-            <a:spLocks noGrp="1"/>
-          </p:cNvSpPr>
-          <p:nvPr>
-            <p:ph type="title" idx="100" hasCustomPrompt="1"/>
-          </p:nvPr>
-        </p:nvSpPr>
-        <p:spPr>
-          <a:xfrm>
-            <a:off x="457200" y="274320"/>
-            <a:ext cx="8229600" cy="868680"/>
-          </a:xfrm>
-          <a:prstGeom prst="rect">
-            <a:avLst/>
-          </a:prstGeom>
-          <a:noFill/>
-          <a:ln/>
-        </p:spPr>
-        <p:txBody>
-          <a:bodyPr wrap="square" lIns="0" tIns="0" rIns="0" bIns="0" rtlCol="0" anchor="t"/>
-          <a:lstStyle/>
-          <a:p>
-            <a:pPr marL="0" indent="0" algn="l">
-              <a:buNone/>
-            </a:pPr>
-            <a:r>
-              <a:rPr lang="en-US" sz="2800" b="1" dirty="0">
-                <a:solidFill>
-                  <a:schemeClr val="tx2"/>
-                </a:solidFill>
-              </a:rPr>
-              <a:t>Statistical Approach</a:t>
-            </a:r>
-            <a:endParaRPr lang="en-US" sz="2800" dirty="0"/>
-          </a:p>
-        </p:txBody>
-      </p:sp>
-      <p:sp>
-        <p:nvSpPr>
-          <p:cNvPr id="3" name="Method subtitle"/>
-          <p:cNvSpPr txBox="1"/>
-          <p:nvPr/>
-        </p:nvSpPr>
-        <p:spPr>
-          <a:xfrm>
-            <a:off x="457200" y="777240"/>
-            <a:ext cx="8229600" cy="365760"/>
-          </a:xfrm>
-          <a:prstGeom prst="rect">
-            <a:avLst/>
-          </a:prstGeom>
-          <a:noFill/>
-          <a:ln/>
-        </p:spPr>
-        <p:txBody>
-          <a:bodyPr wrap="square" lIns="0" tIns="0" rIns="0" bIns="0" rtlCol="0" anchor="ctr"/>
-          <a:lstStyle/>
-          <a:p>
-            <a:pPr marL="0" indent="0">
-              <a:buNone/>
-            </a:pPr>
-            <a:r>
-              <a:rPr lang="en-US" sz="1400" b="1" dirty="0">
-                <a:solidFill>
-                  <a:schemeClr val="accent1"/>
-                </a:solidFill>
-              </a:rPr>
-              <a:t>Survey-weighted logistic regression</a:t>
-            </a:r>
-            <a:endParaRPr lang="en-US" sz="1400" dirty="0"/>
-          </a:p>
-        </p:txBody>
-      </p:sp>
-      <p:graphicFrame>
-        <p:nvGraphicFramePr>
-          <p:cNvPr id="11" name="Table 0"/>
-          <p:cNvGraphicFramePr>
-            <a:graphicFrameLocks noGrp="1"/>
-          </p:cNvGraphicFramePr>
-          <p:nvPr>
-            <p:extLst>
-              <p:ext uri="{D42A27DB-BD31-4B8C-83A1-F6EECF244321}">
-                <p14:modId xmlns:p14="http://schemas.microsoft.com/office/powerpoint/2010/main" val="1579011935"/>
-              </p:ext>
-            </p:extLst>
-          </p:nvPr>
-        </p:nvGraphicFramePr>
-        <p:xfrm>
-          <a:off x="457200" y="1371600"/>
-          <a:ext cx="5212080" cy="914400"/>
-        </p:xfrm>
-        <a:graphic>
-          <a:graphicData uri="http://schemas.openxmlformats.org/drawingml/2006/table">
-            <a:tbl>
-              <a:tblPr/>
-              <a:tblGrid>
-                <a:gridCol w="1645920">
-                  <a:extLst>
-                    <a:ext uri="{9D8B030D-6E8A-4147-A177-3AD203B41FA5}">
-                      <a16:colId xmlns:a16="http://schemas.microsoft.com/office/drawing/2014/main" val="20000"/>
-                    </a:ext>
-                  </a:extLst>
-                </a:gridCol>
-                <a:gridCol w="3566160">
-                  <a:extLst>
-                    <a:ext uri="{9D8B030D-6E8A-4147-A177-3AD203B41FA5}">
-                      <a16:colId xmlns:a16="http://schemas.microsoft.com/office/drawing/2014/main" val="20001"/>
-                    </a:ext>
-                  </a:extLst>
-                </a:gridCol>
-              </a:tblGrid>
-              <a:tr h="365760">
-                <a:tc>
-                  <a:txBody>
-                    <a:bodyPr/>
-                    <a:lstStyle/>
-                    <a:p>
-                      <a:pPr marL="0" indent="0">
-                        <a:buNone/>
-                      </a:pPr>
-                      <a:r>
-                        <a:rPr lang="en-US" sz="1400" b="1" dirty="0">
-                          <a:solidFill>
-                            <a:srgbClr val="FFFFFF"/>
-                          </a:solidFill>
-                        </a:rPr>
-                        <a:t>Model component</a:t>
-                      </a:r>
-                      <a:endParaRPr lang="en-US" sz="1400" dirty="0"/>
-                    </a:p>
-                  </a:txBody>
-                  <a:tcPr marL="109728" marR="109728" marT="36576" marB="36576" anchor="ctr">
-                    <a:lnL w="9525" cap="flat" cmpd="sng" algn="ctr">
-                      <a:solidFill>
-                        <a:srgbClr val="EBD8CB"/>
-                      </a:solidFill>
-                      <a:prstDash val="solid"/>
-                      <a:round/>
-                      <a:headEnd type="none" w="med" len="med"/>
-                      <a:tailEnd type="none" w="med" len="med"/>
-                    </a:lnL>
-                    <a:lnR w="9525" cap="flat" cmpd="sng" algn="ctr">
-                      <a:solidFill>
-                        <a:srgbClr val="EBD8CB"/>
-                      </a:solidFill>
-                      <a:prstDash val="solid"/>
-                      <a:round/>
-                      <a:headEnd type="none" w="med" len="med"/>
-                      <a:tailEnd type="none" w="med" len="med"/>
-                    </a:lnR>
-                    <a:lnT w="9525" cap="flat" cmpd="sng" algn="ctr">
-                      <a:solidFill>
-                        <a:srgbClr val="EBD8CB"/>
-                      </a:solidFill>
-                      <a:prstDash val="solid"/>
-                      <a:round/>
-                      <a:headEnd type="none" w="med" len="med"/>
-                      <a:tailEnd type="none" w="med" len="med"/>
-                    </a:lnT>
-                    <a:lnB w="9525" cap="flat" cmpd="sng" algn="ctr">
-                      <a:solidFill>
-                        <a:srgbClr val="EBD8CB"/>
-                      </a:solidFill>
-                      <a:prstDash val="solid"/>
-                      <a:round/>
-                      <a:headEnd type="none" w="med" len="med"/>
-                      <a:tailEnd type="none" w="med" len="med"/>
-                    </a:lnB>
-                    <a:solidFill>
-                      <a:srgbClr val="3A1F3D"/>
-                    </a:solidFill>
-                  </a:tcPr>
-                </a:tc>
-                <a:tc>
-                  <a:txBody>
-                    <a:bodyPr/>
-                    <a:lstStyle/>
-                    <a:p>
-                      <a:pPr marL="0" indent="0">
-                        <a:buNone/>
-                      </a:pPr>
-                      <a:r>
-                        <a:rPr lang="en-US" sz="1400" b="1" dirty="0">
-                          <a:solidFill>
-                            <a:srgbClr val="FFFFFF"/>
-                          </a:solidFill>
-                        </a:rPr>
-                        <a:t>Specification</a:t>
-                      </a:r>
-                      <a:endParaRPr lang="en-US" sz="1400" dirty="0"/>
-                    </a:p>
-                  </a:txBody>
-                  <a:tcPr marL="109728" marR="109728" marT="36576" marB="36576" anchor="ctr">
-                    <a:lnL w="9525" cap="flat" cmpd="sng" algn="ctr">
-                      <a:solidFill>
-                        <a:srgbClr val="EBD8CB"/>
-                      </a:solidFill>
-                      <a:prstDash val="solid"/>
-                      <a:round/>
-                      <a:headEnd type="none" w="med" len="med"/>
-                      <a:tailEnd type="none" w="med" len="med"/>
-                    </a:lnL>
-                    <a:lnR w="9525" cap="flat" cmpd="sng" algn="ctr">
-                      <a:solidFill>
-                        <a:srgbClr val="EBD8CB"/>
-                      </a:solidFill>
-                      <a:prstDash val="solid"/>
-                      <a:round/>
-                      <a:headEnd type="none" w="med" len="med"/>
-                      <a:tailEnd type="none" w="med" len="med"/>
-                    </a:lnR>
-                    <a:lnT w="9525" cap="flat" cmpd="sng" algn="ctr">
-                      <a:solidFill>
-                        <a:srgbClr val="EBD8CB"/>
-                      </a:solidFill>
-                      <a:prstDash val="solid"/>
-                      <a:round/>
-                      <a:headEnd type="none" w="med" len="med"/>
-                      <a:tailEnd type="none" w="med" len="med"/>
-                    </a:lnT>
-                    <a:lnB w="9525" cap="flat" cmpd="sng" algn="ctr">
-                      <a:solidFill>
-                        <a:srgbClr val="EBD8CB"/>
-                      </a:solidFill>
-                      <a:prstDash val="solid"/>
-                      <a:round/>
-                      <a:headEnd type="none" w="med" len="med"/>
-                      <a:tailEnd type="none" w="med" len="med"/>
-                    </a:lnB>
-                    <a:solidFill>
-                      <a:srgbClr val="3A1F3D"/>
-                    </a:solidFill>
-                  </a:tcPr>
-                </a:tc>
-                <a:extLst>
-                  <a:ext uri="{0D108BD9-81ED-4DB2-BD59-A6C34878D82A}">
-                    <a16:rowId xmlns:a16="http://schemas.microsoft.com/office/drawing/2014/main" val="10000"/>
-                  </a:ext>
-                </a:extLst>
-              </a:tr>
-              <a:tr h="502920">
-                <a:tc>
-                  <a:txBody>
-                    <a:bodyPr/>
-                    <a:lstStyle/>
-                    <a:p>
-                      <a:pPr marL="0" indent="0">
-                        <a:buNone/>
-                      </a:pPr>
-                      <a:r>
-                        <a:rPr lang="en-US" sz="1400" b="1" dirty="0">
-                          <a:solidFill>
-                            <a:srgbClr val="C8540F"/>
-                          </a:solidFill>
-                        </a:rPr>
-                        <a:t>Outcome</a:t>
-                      </a:r>
-                      <a:endParaRPr lang="en-US" sz="1400" dirty="0"/>
-                    </a:p>
-                  </a:txBody>
-                  <a:tcPr marL="109728" marR="109728" marT="36576" marB="36576" anchor="ctr">
-                    <a:lnL w="9525" cap="flat" cmpd="sng" algn="ctr">
-                      <a:solidFill>
-                        <a:srgbClr val="EBD8CB"/>
-                      </a:solidFill>
-                      <a:prstDash val="solid"/>
-                      <a:round/>
-                      <a:headEnd type="none" w="med" len="med"/>
-                      <a:tailEnd type="none" w="med" len="med"/>
-                    </a:lnL>
-                    <a:lnR w="9525" cap="flat" cmpd="sng" algn="ctr">
-                      <a:solidFill>
-                        <a:srgbClr val="EBD8CB"/>
-                      </a:solidFill>
-                      <a:prstDash val="solid"/>
-                      <a:round/>
-                      <a:headEnd type="none" w="med" len="med"/>
-                      <a:tailEnd type="none" w="med" len="med"/>
-                    </a:lnR>
-                    <a:lnT w="9525" cap="flat" cmpd="sng" algn="ctr">
-                      <a:solidFill>
-                        <a:srgbClr val="EBD8CB"/>
-                      </a:solidFill>
-                      <a:prstDash val="solid"/>
-                      <a:round/>
-                      <a:headEnd type="none" w="med" len="med"/>
-                      <a:tailEnd type="none" w="med" len="med"/>
-                    </a:lnT>
-                    <a:lnB w="9525" cap="flat" cmpd="sng" algn="ctr">
-                      <a:solidFill>
-                        <a:srgbClr val="EBD8CB"/>
-                      </a:solidFill>
-                      <a:prstDash val="solid"/>
-                      <a:round/>
-                      <a:headEnd type="none" w="med" len="med"/>
-                      <a:tailEnd type="none" w="med" len="med"/>
-                    </a:lnB>
-                    <a:solidFill>
-                      <a:srgbClr val="FBEFE6"/>
-                    </a:solidFill>
-                  </a:tcPr>
-                </a:tc>
-                <a:tc>
-                  <a:txBody>
-                    <a:bodyPr/>
-                    <a:lstStyle/>
-                    <a:p>
-                      <a:pPr marL="0" indent="0">
-                        <a:buNone/>
-                      </a:pPr>
-                      <a:r>
-                        <a:rPr lang="en-US" sz="1400" dirty="0">
-                          <a:solidFill>
-                            <a:srgbClr val="2B2330"/>
-                          </a:solidFill>
-                        </a:rPr>
-                        <a:t>Ever received medical help: 1 = yes, 0 = no</a:t>
-                      </a:r>
-                      <a:endParaRPr lang="en-US" sz="1400" dirty="0"/>
-                    </a:p>
-                  </a:txBody>
-                  <a:tcPr marL="109728" marR="109728" marT="36576" marB="36576" anchor="ctr">
-                    <a:lnL w="9525" cap="flat" cmpd="sng" algn="ctr">
-                      <a:solidFill>
-                        <a:srgbClr val="EBD8CB"/>
-                      </a:solidFill>
-                      <a:prstDash val="solid"/>
-                      <a:round/>
-                      <a:headEnd type="none" w="med" len="med"/>
-                      <a:tailEnd type="none" w="med" len="med"/>
-                    </a:lnL>
-                    <a:lnR w="9525" cap="flat" cmpd="sng" algn="ctr">
-                      <a:solidFill>
-                        <a:srgbClr val="EBD8CB"/>
-                      </a:solidFill>
-                      <a:prstDash val="solid"/>
-                      <a:round/>
-                      <a:headEnd type="none" w="med" len="med"/>
-                      <a:tailEnd type="none" w="med" len="med"/>
-                    </a:lnR>
-                    <a:lnT w="9525" cap="flat" cmpd="sng" algn="ctr">
-                      <a:solidFill>
-                        <a:srgbClr val="EBD8CB"/>
-                      </a:solidFill>
-                      <a:prstDash val="solid"/>
-                      <a:round/>
-                      <a:headEnd type="none" w="med" len="med"/>
-                      <a:tailEnd type="none" w="med" len="med"/>
-                    </a:lnT>
-                    <a:lnB w="9525" cap="flat" cmpd="sng" algn="ctr">
-                      <a:solidFill>
-                        <a:srgbClr val="EBD8CB"/>
-                      </a:solidFill>
-                      <a:prstDash val="solid"/>
-                      <a:round/>
-                      <a:headEnd type="none" w="med" len="med"/>
-                      <a:tailEnd type="none" w="med" len="med"/>
-                    </a:lnB>
-                  </a:tcPr>
-                </a:tc>
-                <a:extLst>
-                  <a:ext uri="{0D108BD9-81ED-4DB2-BD59-A6C34878D82A}">
-                    <a16:rowId xmlns:a16="http://schemas.microsoft.com/office/drawing/2014/main" val="10001"/>
-                  </a:ext>
-                </a:extLst>
-              </a:tr>
-              <a:tr h="457200">
-                <a:tc>
-                  <a:txBody>
-                    <a:bodyPr/>
-                    <a:lstStyle/>
-                    <a:p>
-                      <a:pPr marL="0" indent="0">
-                        <a:buNone/>
-                      </a:pPr>
-                      <a:r>
-                        <a:rPr lang="en-US" sz="1400" b="1" dirty="0">
-                          <a:solidFill>
-                            <a:srgbClr val="C8540F"/>
-                          </a:solidFill>
-                        </a:rPr>
-                        <a:t>Main predictor</a:t>
-                      </a:r>
-                      <a:endParaRPr lang="en-US" sz="1400" dirty="0"/>
-                    </a:p>
-                  </a:txBody>
-                  <a:tcPr marL="109728" marR="109728" marT="36576" marB="36576" anchor="ctr">
-                    <a:lnL w="9525" cap="flat" cmpd="sng" algn="ctr">
-                      <a:solidFill>
-                        <a:srgbClr val="EBD8CB"/>
-                      </a:solidFill>
-                      <a:prstDash val="solid"/>
-                      <a:round/>
-                      <a:headEnd type="none" w="med" len="med"/>
-                      <a:tailEnd type="none" w="med" len="med"/>
-                    </a:lnL>
-                    <a:lnR w="9525" cap="flat" cmpd="sng" algn="ctr">
-                      <a:solidFill>
-                        <a:srgbClr val="EBD8CB"/>
-                      </a:solidFill>
-                      <a:prstDash val="solid"/>
-                      <a:round/>
-                      <a:headEnd type="none" w="med" len="med"/>
-                      <a:tailEnd type="none" w="med" len="med"/>
-                    </a:lnR>
-                    <a:lnT w="9525" cap="flat" cmpd="sng" algn="ctr">
-                      <a:solidFill>
-                        <a:srgbClr val="EBD8CB"/>
-                      </a:solidFill>
-                      <a:prstDash val="solid"/>
-                      <a:round/>
-                      <a:headEnd type="none" w="med" len="med"/>
-                      <a:tailEnd type="none" w="med" len="med"/>
-                    </a:lnT>
-                    <a:lnB w="9525" cap="flat" cmpd="sng" algn="ctr">
-                      <a:solidFill>
-                        <a:srgbClr val="EBD8CB"/>
-                      </a:solidFill>
-                      <a:prstDash val="solid"/>
-                      <a:round/>
-                      <a:headEnd type="none" w="med" len="med"/>
-                      <a:tailEnd type="none" w="med" len="med"/>
-                    </a:lnB>
-                    <a:solidFill>
-                      <a:srgbClr val="FBEFE6"/>
-                    </a:solidFill>
-                  </a:tcPr>
-                </a:tc>
-                <a:tc>
-                  <a:txBody>
-                    <a:bodyPr/>
-                    <a:lstStyle/>
-                    <a:p>
-                      <a:pPr marL="0" indent="0">
-                        <a:buNone/>
-                      </a:pPr>
-                      <a:r>
-                        <a:rPr lang="en-US" sz="1400" dirty="0">
-                          <a:solidFill>
-                            <a:srgbClr val="2B2330"/>
-                          </a:solidFill>
-                        </a:rPr>
-                        <a:t>Current insurance category</a:t>
-                      </a:r>
-                      <a:endParaRPr lang="en-US" sz="1400" dirty="0"/>
-                    </a:p>
-                  </a:txBody>
-                  <a:tcPr marL="109728" marR="109728" marT="36576" marB="36576" anchor="ctr">
-                    <a:lnL w="9525" cap="flat" cmpd="sng" algn="ctr">
-                      <a:solidFill>
-                        <a:srgbClr val="EBD8CB"/>
-                      </a:solidFill>
-                      <a:prstDash val="solid"/>
-                      <a:round/>
-                      <a:headEnd type="none" w="med" len="med"/>
-                      <a:tailEnd type="none" w="med" len="med"/>
-                    </a:lnL>
-                    <a:lnR w="9525" cap="flat" cmpd="sng" algn="ctr">
-                      <a:solidFill>
-                        <a:srgbClr val="EBD8CB"/>
-                      </a:solidFill>
-                      <a:prstDash val="solid"/>
-                      <a:round/>
-                      <a:headEnd type="none" w="med" len="med"/>
-                      <a:tailEnd type="none" w="med" len="med"/>
-                    </a:lnR>
-                    <a:lnT w="9525" cap="flat" cmpd="sng" algn="ctr">
-                      <a:solidFill>
-                        <a:srgbClr val="EBD8CB"/>
-                      </a:solidFill>
-                      <a:prstDash val="solid"/>
-                      <a:round/>
-                      <a:headEnd type="none" w="med" len="med"/>
-                      <a:tailEnd type="none" w="med" len="med"/>
-                    </a:lnT>
-                    <a:lnB w="9525" cap="flat" cmpd="sng" algn="ctr">
-                      <a:solidFill>
-                        <a:srgbClr val="EBD8CB"/>
-                      </a:solidFill>
-                      <a:prstDash val="solid"/>
-                      <a:round/>
-                      <a:headEnd type="none" w="med" len="med"/>
-                      <a:tailEnd type="none" w="med" len="med"/>
-                    </a:lnB>
-                  </a:tcPr>
-                </a:tc>
-                <a:extLst>
-                  <a:ext uri="{0D108BD9-81ED-4DB2-BD59-A6C34878D82A}">
-                    <a16:rowId xmlns:a16="http://schemas.microsoft.com/office/drawing/2014/main" val="10002"/>
-                  </a:ext>
-                </a:extLst>
-              </a:tr>
-              <a:tr h="457200">
-                <a:tc>
-                  <a:txBody>
-                    <a:bodyPr/>
-                    <a:lstStyle/>
-                    <a:p>
-                      <a:pPr marL="0" indent="0">
-                        <a:buNone/>
-                      </a:pPr>
-                      <a:r>
-                        <a:rPr lang="en-US" sz="1400" b="1" dirty="0">
-                          <a:solidFill>
-                            <a:srgbClr val="C8540F"/>
-                          </a:solidFill>
-                        </a:rPr>
-                        <a:t>Controls</a:t>
-                      </a:r>
-                      <a:endParaRPr lang="en-US" sz="1400" dirty="0"/>
-                    </a:p>
-                  </a:txBody>
-                  <a:tcPr marL="109728" marR="109728" marT="36576" marB="36576" anchor="ctr">
-                    <a:lnL w="9525" cap="flat" cmpd="sng" algn="ctr">
-                      <a:solidFill>
-                        <a:srgbClr val="EBD8CB"/>
-                      </a:solidFill>
-                      <a:prstDash val="solid"/>
-                      <a:round/>
-                      <a:headEnd type="none" w="med" len="med"/>
-                      <a:tailEnd type="none" w="med" len="med"/>
-                    </a:lnL>
-                    <a:lnR w="9525" cap="flat" cmpd="sng" algn="ctr">
-                      <a:solidFill>
-                        <a:srgbClr val="EBD8CB"/>
-                      </a:solidFill>
-                      <a:prstDash val="solid"/>
-                      <a:round/>
-                      <a:headEnd type="none" w="med" len="med"/>
-                      <a:tailEnd type="none" w="med" len="med"/>
-                    </a:lnR>
-                    <a:lnT w="9525" cap="flat" cmpd="sng" algn="ctr">
-                      <a:solidFill>
-                        <a:srgbClr val="EBD8CB"/>
-                      </a:solidFill>
-                      <a:prstDash val="solid"/>
-                      <a:round/>
-                      <a:headEnd type="none" w="med" len="med"/>
-                      <a:tailEnd type="none" w="med" len="med"/>
-                    </a:lnT>
-                    <a:lnB w="9525" cap="flat" cmpd="sng" algn="ctr">
-                      <a:solidFill>
-                        <a:srgbClr val="EBD8CB"/>
-                      </a:solidFill>
-                      <a:prstDash val="solid"/>
-                      <a:round/>
-                      <a:headEnd type="none" w="med" len="med"/>
-                      <a:tailEnd type="none" w="med" len="med"/>
-                    </a:lnB>
-                    <a:solidFill>
-                      <a:srgbClr val="FBEFE6"/>
-                    </a:solidFill>
-                  </a:tcPr>
-                </a:tc>
-                <a:tc>
-                  <a:txBody>
-                    <a:bodyPr/>
-                    <a:lstStyle/>
-                    <a:p>
-                      <a:pPr marL="0" indent="0">
-                        <a:buNone/>
-                      </a:pPr>
-                      <a:r>
-                        <a:rPr lang="en-US" sz="1400" dirty="0">
-                          <a:solidFill>
-                            <a:srgbClr val="2B2330"/>
-                          </a:solidFill>
-                        </a:rPr>
-                        <a:t>Age, income, education</a:t>
-                      </a:r>
-                      <a:endParaRPr lang="en-US" sz="1400" dirty="0"/>
-                    </a:p>
-                  </a:txBody>
-                  <a:tcPr marL="109728" marR="109728" marT="36576" marB="36576" anchor="ctr">
-                    <a:lnL w="9525" cap="flat" cmpd="sng" algn="ctr">
-                      <a:solidFill>
-                        <a:srgbClr val="EBD8CB"/>
-                      </a:solidFill>
-                      <a:prstDash val="solid"/>
-                      <a:round/>
-                      <a:headEnd type="none" w="med" len="med"/>
-                      <a:tailEnd type="none" w="med" len="med"/>
-                    </a:lnL>
-                    <a:lnR w="9525" cap="flat" cmpd="sng" algn="ctr">
-                      <a:solidFill>
-                        <a:srgbClr val="EBD8CB"/>
-                      </a:solidFill>
-                      <a:prstDash val="solid"/>
-                      <a:round/>
-                      <a:headEnd type="none" w="med" len="med"/>
-                      <a:tailEnd type="none" w="med" len="med"/>
-                    </a:lnR>
-                    <a:lnT w="9525" cap="flat" cmpd="sng" algn="ctr">
-                      <a:solidFill>
-                        <a:srgbClr val="EBD8CB"/>
-                      </a:solidFill>
-                      <a:prstDash val="solid"/>
-                      <a:round/>
-                      <a:headEnd type="none" w="med" len="med"/>
-                      <a:tailEnd type="none" w="med" len="med"/>
-                    </a:lnT>
-                    <a:lnB w="9525" cap="flat" cmpd="sng" algn="ctr">
-                      <a:solidFill>
-                        <a:srgbClr val="EBD8CB"/>
-                      </a:solidFill>
-                      <a:prstDash val="solid"/>
-                      <a:round/>
-                      <a:headEnd type="none" w="med" len="med"/>
-                      <a:tailEnd type="none" w="med" len="med"/>
-                    </a:lnB>
-                  </a:tcPr>
-                </a:tc>
-                <a:extLst>
-                  <a:ext uri="{0D108BD9-81ED-4DB2-BD59-A6C34878D82A}">
-                    <a16:rowId xmlns:a16="http://schemas.microsoft.com/office/drawing/2014/main" val="10003"/>
-                  </a:ext>
-                </a:extLst>
-              </a:tr>
-              <a:tr h="457200">
-                <a:tc>
-                  <a:txBody>
-                    <a:bodyPr/>
-                    <a:lstStyle/>
-                    <a:p>
-                      <a:pPr marL="0" indent="0">
-                        <a:buNone/>
-                      </a:pPr>
-                      <a:r>
-                        <a:rPr lang="en-US" sz="1400" b="1" dirty="0">
-                          <a:solidFill>
-                            <a:srgbClr val="C8540F"/>
-                          </a:solidFill>
-                        </a:rPr>
-                        <a:t>Insurance reference</a:t>
-                      </a:r>
-                      <a:endParaRPr lang="en-US" sz="1400" dirty="0"/>
-                    </a:p>
-                  </a:txBody>
-                  <a:tcPr marL="109728" marR="109728" marT="36576" marB="36576" anchor="ctr">
-                    <a:lnL w="9525" cap="flat" cmpd="sng" algn="ctr">
-                      <a:solidFill>
-                        <a:srgbClr val="EBD8CB"/>
-                      </a:solidFill>
-                      <a:prstDash val="solid"/>
-                      <a:round/>
-                      <a:headEnd type="none" w="med" len="med"/>
-                      <a:tailEnd type="none" w="med" len="med"/>
-                    </a:lnL>
-                    <a:lnR w="9525" cap="flat" cmpd="sng" algn="ctr">
-                      <a:solidFill>
-                        <a:srgbClr val="EBD8CB"/>
-                      </a:solidFill>
-                      <a:prstDash val="solid"/>
-                      <a:round/>
-                      <a:headEnd type="none" w="med" len="med"/>
-                      <a:tailEnd type="none" w="med" len="med"/>
-                    </a:lnR>
-                    <a:lnT w="9525" cap="flat" cmpd="sng" algn="ctr">
-                      <a:solidFill>
-                        <a:srgbClr val="EBD8CB"/>
-                      </a:solidFill>
-                      <a:prstDash val="solid"/>
-                      <a:round/>
-                      <a:headEnd type="none" w="med" len="med"/>
-                      <a:tailEnd type="none" w="med" len="med"/>
-                    </a:lnT>
-                    <a:lnB w="9525" cap="flat" cmpd="sng" algn="ctr">
-                      <a:solidFill>
-                        <a:srgbClr val="EBD8CB"/>
-                      </a:solidFill>
-                      <a:prstDash val="solid"/>
-                      <a:round/>
-                      <a:headEnd type="none" w="med" len="med"/>
-                      <a:tailEnd type="none" w="med" len="med"/>
-                    </a:lnB>
-                    <a:solidFill>
-                      <a:srgbClr val="FBEFE6"/>
-                    </a:solidFill>
-                  </a:tcPr>
-                </a:tc>
-                <a:tc>
-                  <a:txBody>
-                    <a:bodyPr/>
-                    <a:lstStyle/>
-                    <a:p>
-                      <a:pPr marL="0" indent="0">
-                        <a:buNone/>
-                      </a:pPr>
-                      <a:r>
-                        <a:rPr lang="en-US" sz="1400" dirty="0">
-                          <a:solidFill>
-                            <a:srgbClr val="2B2330"/>
-                          </a:solidFill>
-                        </a:rPr>
-                        <a:t>Private/Medi-Gap</a:t>
-                      </a:r>
-                      <a:endParaRPr lang="en-US" sz="1400" dirty="0"/>
-                    </a:p>
-                  </a:txBody>
-                  <a:tcPr marL="109728" marR="109728" marT="36576" marB="36576" anchor="ctr">
-                    <a:lnL w="9525" cap="flat" cmpd="sng" algn="ctr">
-                      <a:solidFill>
-                        <a:srgbClr val="EBD8CB"/>
-                      </a:solidFill>
-                      <a:prstDash val="solid"/>
-                      <a:round/>
-                      <a:headEnd type="none" w="med" len="med"/>
-                      <a:tailEnd type="none" w="med" len="med"/>
-                    </a:lnL>
-                    <a:lnR w="9525" cap="flat" cmpd="sng" algn="ctr">
-                      <a:solidFill>
-                        <a:srgbClr val="EBD8CB"/>
-                      </a:solidFill>
-                      <a:prstDash val="solid"/>
-                      <a:round/>
-                      <a:headEnd type="none" w="med" len="med"/>
-                      <a:tailEnd type="none" w="med" len="med"/>
-                    </a:lnR>
-                    <a:lnT w="9525" cap="flat" cmpd="sng" algn="ctr">
-                      <a:solidFill>
-                        <a:srgbClr val="EBD8CB"/>
-                      </a:solidFill>
-                      <a:prstDash val="solid"/>
-                      <a:round/>
-                      <a:headEnd type="none" w="med" len="med"/>
-                      <a:tailEnd type="none" w="med" len="med"/>
-                    </a:lnT>
-                    <a:lnB w="9525" cap="flat" cmpd="sng" algn="ctr">
-                      <a:solidFill>
-                        <a:srgbClr val="EBD8CB"/>
-                      </a:solidFill>
-                      <a:prstDash val="solid"/>
-                      <a:round/>
-                      <a:headEnd type="none" w="med" len="med"/>
-                      <a:tailEnd type="none" w="med" len="med"/>
-                    </a:lnB>
-                  </a:tcPr>
-                </a:tc>
-                <a:extLst>
-                  <a:ext uri="{0D108BD9-81ED-4DB2-BD59-A6C34878D82A}">
-                    <a16:rowId xmlns:a16="http://schemas.microsoft.com/office/drawing/2014/main" val="10004"/>
-                  </a:ext>
-                </a:extLst>
-              </a:tr>
-              <a:tr h="457200">
-                <a:tc>
-                  <a:txBody>
-                    <a:bodyPr/>
-                    <a:lstStyle/>
-                    <a:p>
-                      <a:pPr marL="0" indent="0">
-                        <a:buNone/>
-                      </a:pPr>
-                      <a:r>
-                        <a:rPr lang="en-US" sz="1400" b="1" dirty="0">
-                          <a:solidFill>
-                            <a:srgbClr val="C8540F"/>
-                          </a:solidFill>
-                        </a:rPr>
-                        <a:t>Education reference</a:t>
-                      </a:r>
-                      <a:endParaRPr lang="en-US" sz="1400" dirty="0"/>
-                    </a:p>
-                  </a:txBody>
-                  <a:tcPr marL="109728" marR="109728" marT="36576" marB="36576" anchor="ctr">
-                    <a:lnL w="9525" cap="flat" cmpd="sng" algn="ctr">
-                      <a:solidFill>
-                        <a:srgbClr val="EBD8CB"/>
-                      </a:solidFill>
-                      <a:prstDash val="solid"/>
-                      <a:round/>
-                      <a:headEnd type="none" w="med" len="med"/>
-                      <a:tailEnd type="none" w="med" len="med"/>
-                    </a:lnL>
-                    <a:lnR w="9525" cap="flat" cmpd="sng" algn="ctr">
-                      <a:solidFill>
-                        <a:srgbClr val="EBD8CB"/>
-                      </a:solidFill>
-                      <a:prstDash val="solid"/>
-                      <a:round/>
-                      <a:headEnd type="none" w="med" len="med"/>
-                      <a:tailEnd type="none" w="med" len="med"/>
-                    </a:lnR>
-                    <a:lnT w="9525" cap="flat" cmpd="sng" algn="ctr">
-                      <a:solidFill>
-                        <a:srgbClr val="EBD8CB"/>
-                      </a:solidFill>
-                      <a:prstDash val="solid"/>
-                      <a:round/>
-                      <a:headEnd type="none" w="med" len="med"/>
-                      <a:tailEnd type="none" w="med" len="med"/>
-                    </a:lnT>
-                    <a:lnB w="9525" cap="flat" cmpd="sng" algn="ctr">
-                      <a:solidFill>
-                        <a:srgbClr val="EBD8CB"/>
-                      </a:solidFill>
-                      <a:prstDash val="solid"/>
-                      <a:round/>
-                      <a:headEnd type="none" w="med" len="med"/>
-                      <a:tailEnd type="none" w="med" len="med"/>
-                    </a:lnB>
-                    <a:solidFill>
-                      <a:srgbClr val="FBEFE6"/>
-                    </a:solidFill>
-                  </a:tcPr>
-                </a:tc>
-                <a:tc>
-                  <a:txBody>
-                    <a:bodyPr/>
-                    <a:lstStyle/>
-                    <a:p>
-                      <a:pPr marL="0" indent="0">
-                        <a:buNone/>
-                      </a:pPr>
-                      <a:r>
-                        <a:rPr lang="en-US" sz="1400" dirty="0">
-                          <a:solidFill>
-                            <a:srgbClr val="2B2330"/>
-                          </a:solidFill>
-                        </a:rPr>
-                        <a:t>Less than high school</a:t>
-                      </a:r>
-                      <a:endParaRPr lang="en-US" sz="1400" dirty="0"/>
-                    </a:p>
-                  </a:txBody>
-                  <a:tcPr marL="109728" marR="109728" marT="36576" marB="36576" anchor="ctr">
-                    <a:lnL w="9525" cap="flat" cmpd="sng" algn="ctr">
-                      <a:solidFill>
-                        <a:srgbClr val="EBD8CB"/>
-                      </a:solidFill>
-                      <a:prstDash val="solid"/>
-                      <a:round/>
-                      <a:headEnd type="none" w="med" len="med"/>
-                      <a:tailEnd type="none" w="med" len="med"/>
-                    </a:lnL>
-                    <a:lnR w="9525" cap="flat" cmpd="sng" algn="ctr">
-                      <a:solidFill>
-                        <a:srgbClr val="EBD8CB"/>
-                      </a:solidFill>
-                      <a:prstDash val="solid"/>
-                      <a:round/>
-                      <a:headEnd type="none" w="med" len="med"/>
-                      <a:tailEnd type="none" w="med" len="med"/>
-                    </a:lnR>
-                    <a:lnT w="9525" cap="flat" cmpd="sng" algn="ctr">
-                      <a:solidFill>
-                        <a:srgbClr val="EBD8CB"/>
-                      </a:solidFill>
-                      <a:prstDash val="solid"/>
-                      <a:round/>
-                      <a:headEnd type="none" w="med" len="med"/>
-                      <a:tailEnd type="none" w="med" len="med"/>
-                    </a:lnT>
-                    <a:lnB w="9525" cap="flat" cmpd="sng" algn="ctr">
-                      <a:solidFill>
-                        <a:srgbClr val="EBD8CB"/>
-                      </a:solidFill>
-                      <a:prstDash val="solid"/>
-                      <a:round/>
-                      <a:headEnd type="none" w="med" len="med"/>
-                      <a:tailEnd type="none" w="med" len="med"/>
-                    </a:lnB>
-                  </a:tcPr>
-                </a:tc>
-                <a:extLst>
-                  <a:ext uri="{0D108BD9-81ED-4DB2-BD59-A6C34878D82A}">
-                    <a16:rowId xmlns:a16="http://schemas.microsoft.com/office/drawing/2014/main" val="10005"/>
-                  </a:ext>
-                </a:extLst>
-              </a:tr>
-            </a:tbl>
-          </a:graphicData>
-        </a:graphic>
-      </p:graphicFrame>
-      <p:sp>
-        <p:nvSpPr>
-          <p:cNvPr id="5" name="OR heading"/>
-          <p:cNvSpPr txBox="1"/>
-          <p:nvPr/>
-        </p:nvSpPr>
-        <p:spPr>
-          <a:xfrm>
-            <a:off x="5989320" y="1371600"/>
-            <a:ext cx="2697480" cy="365760"/>
-          </a:xfrm>
-          <a:prstGeom prst="rect">
-            <a:avLst/>
-          </a:prstGeom>
-          <a:noFill/>
-          <a:ln/>
-        </p:spPr>
-        <p:txBody>
-          <a:bodyPr wrap="square" lIns="0" tIns="0" rIns="0" bIns="0" rtlCol="0" anchor="ctr"/>
-          <a:lstStyle/>
-          <a:p>
-            <a:pPr marL="0" indent="0">
-              <a:buNone/>
-            </a:pPr>
-            <a:r>
-              <a:rPr lang="en-US" sz="1400" b="1" dirty="0">
-                <a:solidFill>
-                  <a:schemeClr val="tx2"/>
-                </a:solidFill>
-              </a:rPr>
-              <a:t>Odds ratio interpretation</a:t>
-            </a:r>
-            <a:endParaRPr lang="en-US" sz="1400" dirty="0"/>
-          </a:p>
-        </p:txBody>
-      </p:sp>
-      <p:sp>
-        <p:nvSpPr>
-          <p:cNvPr id="6" name="OR card 1"/>
-          <p:cNvSpPr/>
-          <p:nvPr/>
-        </p:nvSpPr>
-        <p:spPr>
-          <a:xfrm>
-            <a:off x="5989320" y="1828800"/>
-            <a:ext cx="2697480" cy="731520"/>
-          </a:xfrm>
-          <a:prstGeom prst="roundRect">
-            <a:avLst>
-              <a:gd name="adj" fmla="val 15000"/>
-            </a:avLst>
-          </a:prstGeom>
-          <a:solidFill>
-            <a:schemeClr val="bg2"/>
-          </a:solidFill>
-          <a:ln w="12700">
-            <a:solidFill>
-              <a:schemeClr val="bg2"/>
-            </a:solidFill>
-            <a:prstDash val="solid"/>
-          </a:ln>
-        </p:spPr>
-        <p:txBody>
-          <a:bodyPr/>
-          <a:lstStyle/>
-          <a:p>
-            <a:endParaRPr lang="en-US"/>
-          </a:p>
-        </p:txBody>
-      </p:sp>
-      <p:sp>
-        <p:nvSpPr>
-          <p:cNvPr id="7" name="OR badge 1"/>
-          <p:cNvSpPr/>
-          <p:nvPr/>
-        </p:nvSpPr>
-        <p:spPr>
-          <a:xfrm>
-            <a:off x="6080760" y="1920240"/>
-            <a:ext cx="548640" cy="548640"/>
-          </a:xfrm>
-          <a:prstGeom prst="ellipse">
-            <a:avLst/>
-          </a:prstGeom>
-          <a:solidFill>
-            <a:schemeClr val="accent5"/>
-          </a:solidFill>
-          <a:ln w="12700">
-            <a:solidFill>
-              <a:schemeClr val="accent5"/>
-            </a:solidFill>
-            <a:prstDash val="solid"/>
-          </a:ln>
-        </p:spPr>
-        <p:txBody>
-          <a:bodyPr/>
-          <a:lstStyle/>
-          <a:p>
-            <a:endParaRPr lang="en-US"/>
-          </a:p>
-        </p:txBody>
-      </p:sp>
-      <p:sp>
-        <p:nvSpPr>
-          <p:cNvPr id="8" name="OR badge text 1"/>
-          <p:cNvSpPr txBox="1"/>
-          <p:nvPr/>
-        </p:nvSpPr>
-        <p:spPr>
-          <a:xfrm>
-            <a:off x="6080760" y="1920240"/>
-            <a:ext cx="548640" cy="548640"/>
-          </a:xfrm>
-          <a:prstGeom prst="rect">
-            <a:avLst/>
-          </a:prstGeom>
-          <a:noFill/>
-          <a:ln/>
-        </p:spPr>
-        <p:txBody>
-          <a:bodyPr wrap="square" lIns="0" tIns="0" rIns="0" bIns="0" rtlCol="0" anchor="ctr"/>
-          <a:lstStyle/>
-          <a:p>
-            <a:pPr marL="0" indent="0" algn="ctr">
-              <a:buNone/>
-            </a:pPr>
-            <a:r>
-              <a:rPr lang="en-US" sz="1400" b="1" dirty="0">
-                <a:solidFill>
-                  <a:schemeClr val="bg1"/>
-                </a:solidFill>
-              </a:rPr>
-              <a:t>1</a:t>
-            </a:r>
-            <a:endParaRPr lang="en-US" sz="1400" dirty="0"/>
-          </a:p>
-        </p:txBody>
-      </p:sp>
-      <p:sp>
-        <p:nvSpPr>
-          <p:cNvPr id="9" name="OR text 1"/>
-          <p:cNvSpPr txBox="1"/>
-          <p:nvPr/>
-        </p:nvSpPr>
-        <p:spPr>
-          <a:xfrm>
-            <a:off x="6720840" y="1874520"/>
-            <a:ext cx="1874520" cy="640080"/>
-          </a:xfrm>
-          <a:prstGeom prst="rect">
-            <a:avLst/>
-          </a:prstGeom>
-          <a:noFill/>
-          <a:ln/>
-        </p:spPr>
-        <p:txBody>
-          <a:bodyPr wrap="square" lIns="0" tIns="0" rIns="0" bIns="0" rtlCol="0" anchor="ctr"/>
-          <a:lstStyle/>
-          <a:p>
-            <a:pPr marL="0" indent="0">
-              <a:buNone/>
-            </a:pPr>
-            <a:r>
-              <a:rPr lang="en-US" sz="1400" dirty="0">
-                <a:solidFill>
-                  <a:schemeClr val="tx1"/>
-                </a:solidFill>
-              </a:rPr>
-              <a:t>Equal odds relative to the reference</a:t>
-            </a:r>
-            <a:endParaRPr lang="en-US" sz="1400" dirty="0"/>
-          </a:p>
-        </p:txBody>
-      </p:sp>
-      <p:sp>
-        <p:nvSpPr>
-          <p:cNvPr id="10" name="OR card 2"/>
-          <p:cNvSpPr/>
-          <p:nvPr/>
-        </p:nvSpPr>
-        <p:spPr>
-          <a:xfrm>
-            <a:off x="5989320" y="2697480"/>
-            <a:ext cx="2697480" cy="731520"/>
-          </a:xfrm>
-          <a:prstGeom prst="roundRect">
-            <a:avLst>
-              <a:gd name="adj" fmla="val 15000"/>
-            </a:avLst>
-          </a:prstGeom>
-          <a:solidFill>
-            <a:schemeClr val="bg2"/>
-          </a:solidFill>
-          <a:ln w="12700">
-            <a:solidFill>
-              <a:schemeClr val="bg2"/>
-            </a:solidFill>
-            <a:prstDash val="solid"/>
-          </a:ln>
-        </p:spPr>
-        <p:txBody>
-          <a:bodyPr/>
-          <a:lstStyle/>
-          <a:p>
-            <a:endParaRPr lang="en-US"/>
-          </a:p>
-        </p:txBody>
-      </p:sp>
-      <p:sp>
-        <p:nvSpPr>
-          <p:cNvPr id="4" name="OR badge 2"/>
-          <p:cNvSpPr/>
-          <p:nvPr/>
-        </p:nvSpPr>
-        <p:spPr>
-          <a:xfrm>
-            <a:off x="6080760" y="2788920"/>
-            <a:ext cx="548640" cy="548640"/>
-          </a:xfrm>
-          <a:prstGeom prst="ellipse">
-            <a:avLst/>
-          </a:prstGeom>
-          <a:solidFill>
-            <a:schemeClr val="accent2"/>
-          </a:solidFill>
-          <a:ln w="12700">
-            <a:solidFill>
-              <a:schemeClr val="accent2"/>
-            </a:solidFill>
-            <a:prstDash val="solid"/>
-          </a:ln>
-        </p:spPr>
-        <p:txBody>
-          <a:bodyPr/>
-          <a:lstStyle/>
-          <a:p>
-            <a:endParaRPr lang="en-US"/>
-          </a:p>
-        </p:txBody>
-      </p:sp>
-      <p:sp>
-        <p:nvSpPr>
-          <p:cNvPr id="12" name="OR badge text 2"/>
-          <p:cNvSpPr txBox="1"/>
-          <p:nvPr/>
-        </p:nvSpPr>
-        <p:spPr>
-          <a:xfrm>
-            <a:off x="6080760" y="2788920"/>
-            <a:ext cx="548640" cy="548640"/>
-          </a:xfrm>
-          <a:prstGeom prst="rect">
-            <a:avLst/>
-          </a:prstGeom>
-          <a:noFill/>
-          <a:ln/>
-        </p:spPr>
-        <p:txBody>
-          <a:bodyPr wrap="square" lIns="0" tIns="0" rIns="0" bIns="0" rtlCol="0" anchor="ctr"/>
-          <a:lstStyle/>
-          <a:p>
-            <a:pPr marL="0" indent="0" algn="ctr">
-              <a:buNone/>
-            </a:pPr>
-            <a:r>
-              <a:rPr lang="en-US" sz="1400" b="1" dirty="0">
-                <a:solidFill>
-                  <a:schemeClr val="bg1"/>
-                </a:solidFill>
-              </a:rPr>
-              <a:t>&lt; 1</a:t>
-            </a:r>
-            <a:endParaRPr lang="en-US" sz="1400" dirty="0"/>
-          </a:p>
-        </p:txBody>
-      </p:sp>
-      <p:sp>
-        <p:nvSpPr>
-          <p:cNvPr id="13" name="OR text 2"/>
-          <p:cNvSpPr txBox="1"/>
-          <p:nvPr/>
-        </p:nvSpPr>
-        <p:spPr>
-          <a:xfrm>
-            <a:off x="6720840" y="2743200"/>
-            <a:ext cx="1874520" cy="640080"/>
-          </a:xfrm>
-          <a:prstGeom prst="rect">
-            <a:avLst/>
-          </a:prstGeom>
-          <a:noFill/>
-          <a:ln/>
-        </p:spPr>
-        <p:txBody>
-          <a:bodyPr wrap="square" lIns="0" tIns="0" rIns="0" bIns="0" rtlCol="0" anchor="ctr"/>
-          <a:lstStyle/>
-          <a:p>
-            <a:pPr marL="0" indent="0">
-              <a:buNone/>
-            </a:pPr>
-            <a:r>
-              <a:rPr lang="en-US" sz="1400" dirty="0">
-                <a:solidFill>
-                  <a:schemeClr val="tx1"/>
-                </a:solidFill>
-              </a:rPr>
-              <a:t>Lower odds</a:t>
-            </a:r>
-            <a:endParaRPr lang="en-US" sz="1400" dirty="0"/>
-          </a:p>
-        </p:txBody>
-      </p:sp>
-      <p:sp>
-        <p:nvSpPr>
-          <p:cNvPr id="14" name="OR card 3"/>
-          <p:cNvSpPr/>
-          <p:nvPr/>
-        </p:nvSpPr>
-        <p:spPr>
-          <a:xfrm>
-            <a:off x="5989320" y="3566160"/>
-            <a:ext cx="2697480" cy="731520"/>
-          </a:xfrm>
-          <a:prstGeom prst="roundRect">
-            <a:avLst>
-              <a:gd name="adj" fmla="val 15000"/>
-            </a:avLst>
-          </a:prstGeom>
-          <a:solidFill>
-            <a:schemeClr val="bg2"/>
-          </a:solidFill>
-          <a:ln w="12700">
-            <a:solidFill>
-              <a:schemeClr val="bg2"/>
-            </a:solidFill>
-            <a:prstDash val="solid"/>
-          </a:ln>
-        </p:spPr>
-        <p:txBody>
-          <a:bodyPr/>
-          <a:lstStyle/>
-          <a:p>
-            <a:endParaRPr lang="en-US"/>
-          </a:p>
-        </p:txBody>
-      </p:sp>
-      <p:sp>
-        <p:nvSpPr>
-          <p:cNvPr id="15" name="OR badge 3"/>
-          <p:cNvSpPr/>
-          <p:nvPr/>
-        </p:nvSpPr>
-        <p:spPr>
-          <a:xfrm>
-            <a:off x="6080760" y="3657600"/>
-            <a:ext cx="548640" cy="548640"/>
-          </a:xfrm>
-          <a:prstGeom prst="ellipse">
-            <a:avLst/>
-          </a:prstGeom>
-          <a:solidFill>
-            <a:schemeClr val="accent1"/>
-          </a:solidFill>
-          <a:ln w="12700">
-            <a:solidFill>
-              <a:schemeClr val="accent1"/>
-            </a:solidFill>
-            <a:prstDash val="solid"/>
-          </a:ln>
-        </p:spPr>
-        <p:txBody>
-          <a:bodyPr/>
-          <a:lstStyle/>
-          <a:p>
-            <a:endParaRPr lang="en-US"/>
-          </a:p>
-        </p:txBody>
-      </p:sp>
-      <p:sp>
-        <p:nvSpPr>
-          <p:cNvPr id="16" name="OR badge text 3"/>
-          <p:cNvSpPr txBox="1"/>
-          <p:nvPr/>
-        </p:nvSpPr>
-        <p:spPr>
-          <a:xfrm>
-            <a:off x="6080760" y="3657600"/>
-            <a:ext cx="548640" cy="548640"/>
-          </a:xfrm>
-          <a:prstGeom prst="rect">
-            <a:avLst/>
-          </a:prstGeom>
-          <a:noFill/>
-          <a:ln/>
-        </p:spPr>
-        <p:txBody>
-          <a:bodyPr wrap="square" lIns="0" tIns="0" rIns="0" bIns="0" rtlCol="0" anchor="ctr"/>
-          <a:lstStyle/>
-          <a:p>
-            <a:pPr marL="0" indent="0" algn="ctr">
-              <a:buNone/>
-            </a:pPr>
-            <a:r>
-              <a:rPr lang="en-US" sz="1400" b="1" dirty="0">
-                <a:solidFill>
-                  <a:schemeClr val="bg1"/>
-                </a:solidFill>
-              </a:rPr>
-              <a:t>&gt; 1</a:t>
-            </a:r>
-            <a:endParaRPr lang="en-US" sz="1400" dirty="0"/>
-          </a:p>
-        </p:txBody>
-      </p:sp>
-      <p:sp>
-        <p:nvSpPr>
-          <p:cNvPr id="17" name="OR text 3"/>
-          <p:cNvSpPr txBox="1"/>
-          <p:nvPr/>
-        </p:nvSpPr>
-        <p:spPr>
-          <a:xfrm>
-            <a:off x="6720840" y="3611880"/>
-            <a:ext cx="1874520" cy="640080"/>
-          </a:xfrm>
-          <a:prstGeom prst="rect">
-            <a:avLst/>
-          </a:prstGeom>
-          <a:noFill/>
-          <a:ln/>
-        </p:spPr>
-        <p:txBody>
-          <a:bodyPr wrap="square" lIns="0" tIns="0" rIns="0" bIns="0" rtlCol="0" anchor="ctr"/>
-          <a:lstStyle/>
-          <a:p>
-            <a:pPr marL="0" indent="0">
-              <a:buNone/>
-            </a:pPr>
-            <a:r>
-              <a:rPr lang="en-US" sz="1400" dirty="0">
-                <a:solidFill>
-                  <a:schemeClr val="tx1"/>
-                </a:solidFill>
-              </a:rPr>
-              <a:t>Higher odds</a:t>
-            </a:r>
-            <a:endParaRPr lang="en-US" sz="1400" dirty="0"/>
-          </a:p>
-        </p:txBody>
-      </p:sp>
-      <p:sp>
-        <p:nvSpPr>
-          <p:cNvPr id="18" name="Footer"/>
-          <p:cNvSpPr txBox="1"/>
-          <p:nvPr/>
-        </p:nvSpPr>
-        <p:spPr>
-          <a:xfrm>
-            <a:off x="457200" y="4681728"/>
-            <a:ext cx="7680960" cy="365760"/>
-          </a:xfrm>
-          <a:prstGeom prst="rect">
-            <a:avLst/>
-          </a:prstGeom>
-          <a:noFill/>
-          <a:ln/>
-        </p:spPr>
-        <p:txBody>
-          <a:bodyPr wrap="square" lIns="0" tIns="0" rIns="0" bIns="0" rtlCol="0" anchor="ctr"/>
-          <a:lstStyle/>
-          <a:p>
-            <a:pPr marL="0" indent="0">
-              <a:buNone/>
-            </a:pPr>
-            <a:r>
-              <a:rPr lang="en-US" sz="1100" dirty="0">
-                <a:solidFill>
-                  <a:schemeClr val="accent5"/>
-                </a:solidFill>
-              </a:rPr>
-              <a:t>Confidence intervals account for survey strata and clusters.</a:t>
-            </a:r>
-            <a:endParaRPr lang="en-US" sz="1100" dirty="0"/>
-          </a:p>
-        </p:txBody>
-      </p:sp>
-      <p:sp>
-        <p:nvSpPr>
-          <p:cNvPr id="25" name="Slide Number Placeholder 0"/>
-          <p:cNvSpPr>
-            <a:spLocks noGrp="1"/>
-          </p:cNvSpPr>
-          <p:nvPr>
-            <p:ph type="sldNum" sz="quarter" idx="4294967295"/>
-          </p:nvPr>
-        </p:nvSpPr>
-        <p:spPr>
-          <a:xfrm>
-            <a:off x="8321040" y="4754880"/>
-            <a:ext cx="365760" cy="274320"/>
-          </a:xfrm>
-          <a:prstGeom prst="rect">
-            <a:avLst/>
-          </a:prstGeom>
-          <a:extLst>
-            <a:ext uri="{C572A759-6A51-4108-AA02-DFA0A04FC94B}">
-              <ma14:wrappingTextBoxFlag xmlns:ma14="http://schemas.microsoft.com/office/mac/drawingml/2011/main" xmlns="" val="0"/>
-            </a:ext>
-          </a:extLst>
-        </p:spPr>
-        <p:txBody>
-          <a:bodyPr/>
-          <a:lstStyle>
-            <a:lvl1pPr>
-              <a:defRPr sz="1100">
-                <a:solidFill>
-                  <a:srgbClr val="6B6068"/>
-                </a:solidFill>
-              </a:defRPr>
-            </a:lvl1pPr>
-          </a:lstStyle>
-          <a:p>
-            <a:pPr algn="l"/>
-            <a:fld id="{F7021451-1387-4CA6-816F-3879F97B5CBC}" type="slidenum">
-              <a:rPr lang="en-US" b="0"/>
-              <a:t>10</a:t>
-            </a:fld>
-            <a:endParaRPr lang="en-US"/>
-          </a:p>
-        </p:txBody>
-      </p:sp>
-    </p:spTree>
-  </p:cSld>
-  <p:clrMapOvr>
-    <a:masterClrMapping/>
-  </p:clrMapOvr>
-</p:sld>
-</file>
-
-<file path=ppt/slides/slide11.xml><?xml version="1.0" encoding="utf-8"?>
 <p:sld xmlns:a="http://schemas.openxmlformats.org/drawingml/2006/main" xmlns:r="http://schemas.openxmlformats.org/officeDocument/2006/relationships" xmlns:p="http://schemas.openxmlformats.org/presentationml/2006/main">
   <p:cSld name="Slide 11">
     <p:spTree>
@@ -3717,7 +4702,7 @@
         </p:nvSpPr>
         <p:spPr>
           <a:xfrm>
-            <a:off x="457200" y="274320"/>
+            <a:off x="457200" y="323427"/>
             <a:ext cx="8229600" cy="868680"/>
           </a:xfrm>
           <a:prstGeom prst="rect">
@@ -3730,102 +4715,21 @@
           <a:bodyPr wrap="square" lIns="0" tIns="0" rIns="0" bIns="0" rtlCol="0" anchor="t"/>
           <a:lstStyle/>
           <a:p>
-            <a:pPr marL="0" indent="0" algn="l">
-              <a:buNone/>
-            </a:pPr>
-            <a:r>
-              <a:rPr lang="en-US" sz="2800" b="1" dirty="0">
-                <a:solidFill>
-                  <a:schemeClr val="tx2"/>
-                </a:solidFill>
-              </a:rPr>
-              <a:t>Lower Odds Remain After Adjustment</a:t>
-            </a:r>
+            <a:r>
+              <a:rPr lang="en-US" dirty="0"/>
+              <a:t>Differences Remain After Accounting </a:t>
+            </a:r>
+            <a:br>
+              <a:rPr lang="en-US" dirty="0"/>
+            </a:br>
+            <a:r>
+              <a:rPr lang="en-US" dirty="0"/>
+              <a:t>for Age, Income, and Education</a:t>
+            </a:r>
+            <a:br>
+              <a:rPr lang="en-US" b="0" dirty="0"/>
+            </a:br>
             <a:endParaRPr lang="en-US" sz="2800" dirty="0"/>
-          </a:p>
-        </p:txBody>
-      </p:sp>
-      <p:sp>
-        <p:nvSpPr>
-          <p:cNvPr id="3" name="Chart placeholder adjusted_insurance_odds_ratios.png"/>
-          <p:cNvSpPr/>
-          <p:nvPr/>
-        </p:nvSpPr>
-        <p:spPr>
-          <a:xfrm>
-            <a:off x="457200" y="1188720"/>
-            <a:ext cx="4846320" cy="3291840"/>
-          </a:xfrm>
-          <a:prstGeom prst="roundRect">
-            <a:avLst>
-              <a:gd name="adj" fmla="val 2778"/>
-            </a:avLst>
-          </a:prstGeom>
-          <a:solidFill>
-            <a:schemeClr val="bg2"/>
-          </a:solidFill>
-          <a:ln w="19050">
-            <a:solidFill>
-              <a:schemeClr val="accent1"/>
-            </a:solidFill>
-            <a:prstDash val="dash"/>
-          </a:ln>
-        </p:spPr>
-        <p:txBody>
-          <a:bodyPr/>
-          <a:lstStyle/>
-          <a:p>
-            <a:endParaRPr lang="en-US"/>
-          </a:p>
-        </p:txBody>
-      </p:sp>
-      <p:sp>
-        <p:nvSpPr>
-          <p:cNvPr id="4" name="Placeholder label adjusted_insurance_odds_ratios.png"/>
-          <p:cNvSpPr txBox="1"/>
-          <p:nvPr/>
-        </p:nvSpPr>
-        <p:spPr>
-          <a:xfrm>
-            <a:off x="457200" y="1188720"/>
-            <a:ext cx="4846320" cy="3291840"/>
-          </a:xfrm>
-          <a:prstGeom prst="rect">
-            <a:avLst/>
-          </a:prstGeom>
-          <a:noFill/>
-          <a:ln/>
-        </p:spPr>
-        <p:txBody>
-          <a:bodyPr wrap="square" lIns="1270" tIns="1270" rIns="1270" bIns="1270" rtlCol="0" anchor="ctr"/>
-          <a:lstStyle/>
-          <a:p>
-            <a:pPr marL="0" indent="0" algn="ctr">
-              <a:buNone/>
-            </a:pPr>
-            <a:r>
-              <a:rPr lang="en-US" sz="1400" b="1" dirty="0">
-                <a:solidFill>
-                  <a:schemeClr val="accent1"/>
-                </a:solidFill>
-              </a:rPr>
-              <a:t>adjusted_insurance_odds_ratios.png</a:t>
-            </a:r>
-            <a:endParaRPr lang="en-US" sz="1400" dirty="0"/>
-          </a:p>
-          <a:p>
-            <a:pPr marL="0" indent="0" algn="ctr">
-              <a:buNone/>
-            </a:pPr>
-            <a:r>
-              <a:rPr lang="en-US" sz="1100" dirty="0">
-                <a:solidFill>
-                  <a:schemeClr val="accent5"/>
-                </a:solidFill>
-              </a:rPr>
-              <a:t>Adjusted odds ratios with 95% CIs</a:t>
-            </a:r>
-            <a:endParaRPr lang="en-US" sz="1400" dirty="0"/>
           </a:p>
         </p:txBody>
       </p:sp>
@@ -3838,14 +4742,14 @@
           <p:nvPr>
             <p:extLst>
               <p:ext uri="{D42A27DB-BD31-4B8C-83A1-F6EECF244321}">
-                <p14:modId xmlns:p14="http://schemas.microsoft.com/office/powerpoint/2010/main" val="1579011935"/>
+                <p14:modId xmlns:p14="http://schemas.microsoft.com/office/powerpoint/2010/main" val="4055037273"/>
               </p:ext>
             </p:extLst>
           </p:nvPr>
         </p:nvGraphicFramePr>
         <p:xfrm>
-          <a:off x="5577840" y="1188720"/>
-          <a:ext cx="3108960" cy="914400"/>
+          <a:off x="5577840" y="1405467"/>
+          <a:ext cx="3108960" cy="1548384"/>
         </p:xfrm>
         <a:graphic>
           <a:graphicData uri="http://schemas.openxmlformats.org/drawingml/2006/table">
@@ -3874,7 +4778,7 @@
                   </a:extLst>
                 </a:gridCol>
               </a:tblGrid>
-              <a:tr h="320040">
+              <a:tr h="103293">
                 <a:tc>
                   <a:txBody>
                     <a:bodyPr/>
@@ -4198,7 +5102,7 @@
                             <a:srgbClr val="2B2330"/>
                           </a:solidFill>
                         </a:rPr>
-                        <a:t>0.36–0.81</a:t>
+                        <a:t>0.36 - 0.81</a:t>
                       </a:r>
                       <a:endParaRPr lang="en-US" sz="1100" dirty="0"/>
                     </a:p>
@@ -4382,7 +5286,7 @@
                             <a:srgbClr val="2B2330"/>
                           </a:solidFill>
                         </a:rPr>
-                        <a:t>0.46–1.60</a:t>
+                        <a:t>0.46 - 1.60</a:t>
                       </a:r>
                       <a:endParaRPr lang="en-US" sz="1100" dirty="0"/>
                     </a:p>
@@ -4566,7 +5470,7 @@
                             <a:srgbClr val="2B2330"/>
                           </a:solidFill>
                         </a:rPr>
-                        <a:t>0.32–0.97</a:t>
+                        <a:t>0.32 - 0.97</a:t>
                       </a:r>
                       <a:endParaRPr lang="en-US" sz="1100" dirty="0"/>
                     </a:p>
@@ -4672,7 +5576,7 @@
         </p:nvGraphicFramePr>
         <p:xfrm>
           <a:off x="5577840" y="3310128"/>
-          <a:ext cx="3108960" cy="914400"/>
+          <a:ext cx="3108960" cy="1231392"/>
         </p:xfrm>
         <a:graphic>
           <a:graphicData uri="http://schemas.openxmlformats.org/drawingml/2006/table">
@@ -5449,42 +6353,6 @@
       </p:graphicFrame>
       <p:sp>
         <p:nvSpPr>
-          <p:cNvPr id="8" name="Footer"/>
-          <p:cNvSpPr txBox="1"/>
-          <p:nvPr/>
-        </p:nvSpPr>
-        <p:spPr>
-          <a:xfrm>
-            <a:off x="457200" y="4681728"/>
-            <a:ext cx="7680960" cy="365760"/>
-          </a:xfrm>
-          <a:prstGeom prst="rect">
-            <a:avLst/>
-          </a:prstGeom>
-          <a:noFill/>
-          <a:ln/>
-        </p:spPr>
-        <p:txBody>
-          <a:bodyPr wrap="square" lIns="0" tIns="0" rIns="0" bIns="0" rtlCol="0" anchor="ctr"/>
-          <a:lstStyle/>
-          <a:p>
-            <a:pPr marL="0" indent="0">
-              <a:buNone/>
-            </a:pPr>
-            <a:r>
-              <a:rPr lang="en-US" sz="1100" dirty="0">
-                <a:solidFill>
-                  <a:schemeClr val="accent5"/>
-                </a:solidFill>
-              </a:rPr>
-              <a:t>Source: NSFG 2022–2023. Weighted estimates. Analysis n = 5,195. Confidence intervals account for survey strata and clusters.</a:t>
-            </a:r>
-            <a:endParaRPr lang="en-US" sz="1100" dirty="0"/>
-          </a:p>
-        </p:txBody>
-      </p:sp>
-      <p:sp>
-        <p:nvSpPr>
           <p:cNvPr id="25" name="Slide Number Placeholder 0"/>
           <p:cNvSpPr>
             <a:spLocks noGrp="1"/>
@@ -5503,7 +6371,7 @@
           </a:prstGeom>
           <a:extLst>
             <a:ext uri="{C572A759-6A51-4108-AA02-DFA0A04FC94B}">
-              <ma14:wrappingTextBoxFlag xmlns:ma14="http://schemas.microsoft.com/office/mac/drawingml/2011/main" xmlns="" val="0"/>
+              <ma14:wrappingTextBoxFlag xmlns="" xmlns:ma14="http://schemas.microsoft.com/office/mac/drawingml/2011/main" val="0"/>
             </a:ext>
           </a:extLst>
         </p:spPr>
@@ -5522,12 +6390,42 @@
             <a:pPr algn="l"/>
             <a:fld id="{F7021451-1387-4CA6-816F-3879F97B5CBC}" type="slidenum">
               <a:rPr lang="en-US" b="0"/>
-              <a:t>11</a:t>
+              <a:t>10</a:t>
             </a:fld>
             <a:endParaRPr lang="en-US"/>
           </a:p>
         </p:txBody>
       </p:sp>
+      <p:pic>
+        <p:nvPicPr>
+          <p:cNvPr id="7" name="Picture 6" descr="A graph of a number of people&#10;&#10;AI-generated content may be incorrect.">
+            <a:extLst>
+              <a:ext uri="{FF2B5EF4-FFF2-40B4-BE49-F238E27FC236}">
+                <a16:creationId xmlns:a16="http://schemas.microsoft.com/office/drawing/2014/main" id="{35BFC900-B069-743F-71C7-42D3ECF74787}"/>
+              </a:ext>
+            </a:extLst>
+          </p:cNvPr>
+          <p:cNvPicPr>
+            <a:picLocks noChangeAspect="1"/>
+          </p:cNvPicPr>
+          <p:nvPr/>
+        </p:nvPicPr>
+        <p:blipFill>
+          <a:blip r:embed="rId3"/>
+          <a:stretch>
+            <a:fillRect/>
+          </a:stretch>
+        </p:blipFill>
+        <p:spPr>
+          <a:xfrm>
+            <a:off x="457200" y="1905655"/>
+            <a:ext cx="4815840" cy="1874713"/>
+          </a:xfrm>
+          <a:prstGeom prst="rect">
+            <a:avLst/>
+          </a:prstGeom>
+        </p:spPr>
+      </p:pic>
     </p:spTree>
   </p:cSld>
   <p:clrMapOvr>
@@ -5536,7 +6434,7 @@
 </p:sld>
 </file>
 
-<file path=ppt/slides/slide12.xml><?xml version="1.0" encoding="utf-8"?>
+<file path=ppt/slides/slide11.xml><?xml version="1.0" encoding="utf-8"?>
 <p:sld xmlns:a="http://schemas.openxmlformats.org/drawingml/2006/main" xmlns:r="http://schemas.openxmlformats.org/officeDocument/2006/relationships" xmlns:p="http://schemas.openxmlformats.org/presentationml/2006/main">
   <p:cSld name="Slide 12">
     <p:spTree>
@@ -5565,7 +6463,7 @@
         </p:nvSpPr>
         <p:spPr>
           <a:xfrm>
-            <a:off x="457200" y="274320"/>
+            <a:off x="457200" y="706121"/>
             <a:ext cx="8229600" cy="868680"/>
           </a:xfrm>
           <a:prstGeom prst="rect">
@@ -5601,7 +6499,7 @@
         </p:nvSpPr>
         <p:spPr>
           <a:xfrm>
-            <a:off x="457200" y="1188720"/>
+            <a:off x="457200" y="1620521"/>
             <a:ext cx="4023360" cy="2743200"/>
           </a:xfrm>
           <a:prstGeom prst="roundRect">
@@ -5635,7 +6533,7 @@
         </p:nvSpPr>
         <p:spPr>
           <a:xfrm>
-            <a:off x="640080" y="1280160"/>
+            <a:off x="640080" y="1711961"/>
             <a:ext cx="3657600" cy="548640"/>
           </a:xfrm>
           <a:prstGeom prst="rect">
@@ -5671,8 +6569,8 @@
         </p:nvSpPr>
         <p:spPr>
           <a:xfrm>
-            <a:off x="640080" y="1874520"/>
-            <a:ext cx="3657600" cy="2286000"/>
+            <a:off x="640080" y="2306321"/>
+            <a:ext cx="3657600" cy="1689946"/>
           </a:xfrm>
           <a:prstGeom prst="rect">
             <a:avLst/>
@@ -5751,7 +6649,7 @@
                   <a:schemeClr val="tx1"/>
                 </a:solidFill>
               </a:rPr>
-              <a:t>Similar direction of the Medicaid–private disparity</a:t>
+              <a:t>Similar direction of the Medicaid - private disparity</a:t>
             </a:r>
             <a:endParaRPr lang="en-US" sz="1400" dirty="0"/>
           </a:p>
@@ -5765,7 +6663,7 @@
         </p:nvSpPr>
         <p:spPr>
           <a:xfrm>
-            <a:off x="4663440" y="1188720"/>
+            <a:off x="4663440" y="1620521"/>
             <a:ext cx="4023360" cy="2743200"/>
           </a:xfrm>
           <a:prstGeom prst="roundRect">
@@ -5799,7 +6697,7 @@
         </p:nvSpPr>
         <p:spPr>
           <a:xfrm>
-            <a:off x="4846320" y="1280160"/>
+            <a:off x="4846320" y="1711961"/>
             <a:ext cx="3657600" cy="548640"/>
           </a:xfrm>
           <a:prstGeom prst="rect">
@@ -5835,8 +6733,8 @@
         </p:nvSpPr>
         <p:spPr>
           <a:xfrm>
-            <a:off x="4846320" y="1874520"/>
-            <a:ext cx="3657600" cy="2286000"/>
+            <a:off x="4846320" y="2306321"/>
+            <a:ext cx="3657600" cy="1689946"/>
           </a:xfrm>
           <a:prstGeom prst="rect">
             <a:avLst/>
@@ -5900,42 +6798,6 @@
               <a:t>Observational data leave alternative explanations.</a:t>
             </a:r>
             <a:endParaRPr lang="en-US" sz="1400" dirty="0"/>
-          </a:p>
-        </p:txBody>
-      </p:sp>
-      <p:sp>
-        <p:nvSpPr>
-          <p:cNvPr id="9" name="Citation"/>
-          <p:cNvSpPr txBox="1"/>
-          <p:nvPr/>
-        </p:nvSpPr>
-        <p:spPr>
-          <a:xfrm>
-            <a:off x="457200" y="4114800"/>
-            <a:ext cx="7680960" cy="274320"/>
-          </a:xfrm>
-          <a:prstGeom prst="rect">
-            <a:avLst/>
-          </a:prstGeom>
-          <a:noFill/>
-          <a:ln/>
-        </p:spPr>
-        <p:txBody>
-          <a:bodyPr wrap="square" lIns="0" tIns="0" rIns="0" bIns="0" rtlCol="0" anchor="ctr"/>
-          <a:lstStyle/>
-          <a:p>
-            <a:pPr marL="0" indent="0">
-              <a:buNone/>
-            </a:pPr>
-            <a:r>
-              <a:rPr lang="en-US" sz="1100" dirty="0">
-                <a:solidFill>
-                  <a:schemeClr val="accent5"/>
-                </a:solidFill>
-              </a:rPr>
-              <a:t>Eliason, Thoma, &amp; Steenland (2023), Women’s Health Issues, 33(4), 367–373. DOI: 10.1016/j.whi.2023.03.003.</a:t>
-            </a:r>
-            <a:endParaRPr lang="en-US" sz="1100" dirty="0"/>
           </a:p>
         </p:txBody>
       </p:sp>
@@ -5951,7 +6813,7 @@
         </p:nvSpPr>
         <p:spPr>
           <a:xfrm>
-            <a:off x="8321040" y="4754880"/>
+            <a:off x="8321040" y="4638041"/>
             <a:ext cx="365760" cy="274320"/>
           </a:xfrm>
           <a:prstGeom prst="rect">
@@ -5959,7 +6821,7 @@
           </a:prstGeom>
           <a:extLst>
             <a:ext uri="{C572A759-6A51-4108-AA02-DFA0A04FC94B}">
-              <ma14:wrappingTextBoxFlag xmlns:ma14="http://schemas.microsoft.com/office/mac/drawingml/2011/main" xmlns="" val="0"/>
+              <ma14:wrappingTextBoxFlag xmlns="" xmlns:ma14="http://schemas.microsoft.com/office/mac/drawingml/2011/main" val="0"/>
             </a:ext>
           </a:extLst>
         </p:spPr>
@@ -5978,7 +6840,7 @@
             <a:pPr algn="l"/>
             <a:fld id="{F7021451-1387-4CA6-816F-3879F97B5CBC}" type="slidenum">
               <a:rPr lang="en-US" b="0"/>
-              <a:t>12</a:t>
+              <a:t>11</a:t>
             </a:fld>
             <a:endParaRPr lang="en-US"/>
           </a:p>
@@ -5992,7 +6854,7 @@
 </p:sld>
 </file>
 
-<file path=ppt/slides/slide13.xml><?xml version="1.0" encoding="utf-8"?>
+<file path=ppt/slides/slide12.xml><?xml version="1.0" encoding="utf-8"?>
 <p:sld xmlns:a="http://schemas.openxmlformats.org/drawingml/2006/main" xmlns:r="http://schemas.openxmlformats.org/officeDocument/2006/relationships" xmlns:p="http://schemas.openxmlformats.org/presentationml/2006/main">
   <p:cSld name="Slide 13">
     <p:spTree>
@@ -6441,6 +7303,415 @@
 
 <file path=ppt/slides/slide2.xml><?xml version="1.0" encoding="utf-8"?>
 <p:sld xmlns:a="http://schemas.openxmlformats.org/drawingml/2006/main" xmlns:r="http://schemas.openxmlformats.org/officeDocument/2006/relationships" xmlns:p="http://schemas.openxmlformats.org/presentationml/2006/main">
+  <p:cSld name="Slide 6">
+    <p:spTree>
+      <p:nvGrpSpPr>
+        <p:cNvPr id="1" name=""/>
+        <p:cNvGrpSpPr/>
+        <p:nvPr/>
+      </p:nvGrpSpPr>
+      <p:grpSpPr>
+        <a:xfrm>
+          <a:off x="0" y="0"/>
+          <a:ext cx="0" cy="0"/>
+          <a:chOff x="0" y="0"/>
+          <a:chExt cx="0" cy="0"/>
+        </a:xfrm>
+      </p:grpSpPr>
+      <p:sp>
+        <p:nvSpPr>
+          <p:cNvPr id="2" name="Text 0"/>
+          <p:cNvSpPr>
+            <a:spLocks noGrp="1"/>
+          </p:cNvSpPr>
+          <p:nvPr>
+            <p:ph type="title" idx="100" hasCustomPrompt="1"/>
+          </p:nvPr>
+        </p:nvSpPr>
+        <p:spPr>
+          <a:xfrm>
+            <a:off x="457200" y="274320"/>
+            <a:ext cx="8229600" cy="868680"/>
+          </a:xfrm>
+          <a:prstGeom prst="rect">
+            <a:avLst/>
+          </a:prstGeom>
+          <a:noFill/>
+          <a:ln/>
+        </p:spPr>
+        <p:txBody>
+          <a:bodyPr wrap="square" lIns="0" tIns="0" rIns="0" bIns="0" rtlCol="0" anchor="t"/>
+          <a:lstStyle/>
+          <a:p>
+            <a:pPr marL="0" indent="0" algn="l">
+              <a:buNone/>
+            </a:pPr>
+            <a:r>
+              <a:rPr lang="en-US" sz="2800" b="1" dirty="0">
+                <a:solidFill>
+                  <a:schemeClr val="tx2"/>
+                </a:solidFill>
+              </a:rPr>
+              <a:t>Help Receipt Differs Across Insurance Groups</a:t>
+            </a:r>
+            <a:endParaRPr lang="en-US" sz="2800" dirty="0"/>
+          </a:p>
+        </p:txBody>
+      </p:sp>
+      <p:sp>
+        <p:nvSpPr>
+          <p:cNvPr id="3" name="Chart heading"/>
+          <p:cNvSpPr txBox="1"/>
+          <p:nvPr/>
+        </p:nvSpPr>
+        <p:spPr>
+          <a:xfrm>
+            <a:off x="457200" y="1192756"/>
+            <a:ext cx="5303520" cy="320040"/>
+          </a:xfrm>
+          <a:prstGeom prst="rect">
+            <a:avLst/>
+          </a:prstGeom>
+          <a:noFill/>
+          <a:ln/>
+        </p:spPr>
+        <p:txBody>
+          <a:bodyPr wrap="square" lIns="0" tIns="0" rIns="0" bIns="0" rtlCol="0" anchor="ctr"/>
+          <a:lstStyle/>
+          <a:p>
+            <a:pPr marL="0" indent="0">
+              <a:buNone/>
+            </a:pPr>
+            <a:r>
+              <a:rPr lang="en-US" sz="1400" b="1" dirty="0">
+                <a:solidFill>
+                  <a:schemeClr val="tx2"/>
+                </a:solidFill>
+              </a:rPr>
+              <a:t>Weighted percentage ever receiving medical help</a:t>
+            </a:r>
+            <a:endParaRPr lang="en-US" sz="1400" dirty="0"/>
+          </a:p>
+        </p:txBody>
+      </p:sp>
+      <p:sp>
+        <p:nvSpPr>
+          <p:cNvPr id="6" name="Callout card"/>
+          <p:cNvSpPr/>
+          <p:nvPr/>
+        </p:nvSpPr>
+        <p:spPr>
+          <a:xfrm>
+            <a:off x="6035040" y="1512796"/>
+            <a:ext cx="2651760" cy="2926080"/>
+          </a:xfrm>
+          <a:prstGeom prst="roundRect">
+            <a:avLst>
+              <a:gd name="adj" fmla="val 4138"/>
+            </a:avLst>
+          </a:prstGeom>
+          <a:solidFill>
+            <a:schemeClr val="tx2"/>
+          </a:solidFill>
+          <a:ln w="12700">
+            <a:solidFill>
+              <a:schemeClr val="tx2"/>
+            </a:solidFill>
+            <a:prstDash val="solid"/>
+          </a:ln>
+        </p:spPr>
+        <p:txBody>
+          <a:bodyPr/>
+          <a:lstStyle/>
+          <a:p>
+            <a:endParaRPr lang="en-US"/>
+          </a:p>
+        </p:txBody>
+      </p:sp>
+      <p:sp>
+        <p:nvSpPr>
+          <p:cNvPr id="7" name="Callout label 1"/>
+          <p:cNvSpPr txBox="1"/>
+          <p:nvPr/>
+        </p:nvSpPr>
+        <p:spPr>
+          <a:xfrm>
+            <a:off x="6035040" y="1649956"/>
+            <a:ext cx="2651760" cy="274320"/>
+          </a:xfrm>
+          <a:prstGeom prst="rect">
+            <a:avLst/>
+          </a:prstGeom>
+          <a:noFill/>
+          <a:ln/>
+        </p:spPr>
+        <p:txBody>
+          <a:bodyPr wrap="square" lIns="0" tIns="0" rIns="0" bIns="0" rtlCol="0" anchor="ctr"/>
+          <a:lstStyle/>
+          <a:p>
+            <a:pPr marL="0" indent="0" algn="ctr">
+              <a:buNone/>
+            </a:pPr>
+            <a:r>
+              <a:rPr lang="en-US" sz="1400" dirty="0">
+                <a:solidFill>
+                  <a:schemeClr val="accent3"/>
+                </a:solidFill>
+              </a:rPr>
+              <a:t>Private</a:t>
+            </a:r>
+            <a:endParaRPr lang="en-US" sz="1400" dirty="0"/>
+          </a:p>
+        </p:txBody>
+      </p:sp>
+      <p:sp>
+        <p:nvSpPr>
+          <p:cNvPr id="8" name="Callout value 1"/>
+          <p:cNvSpPr txBox="1"/>
+          <p:nvPr/>
+        </p:nvSpPr>
+        <p:spPr>
+          <a:xfrm>
+            <a:off x="6035040" y="1924276"/>
+            <a:ext cx="2651760" cy="640080"/>
+          </a:xfrm>
+          <a:prstGeom prst="rect">
+            <a:avLst/>
+          </a:prstGeom>
+          <a:noFill/>
+          <a:ln/>
+        </p:spPr>
+        <p:txBody>
+          <a:bodyPr wrap="square" lIns="0" tIns="0" rIns="0" bIns="0" rtlCol="0" anchor="ctr"/>
+          <a:lstStyle/>
+          <a:p>
+            <a:pPr marL="0" indent="0" algn="ctr">
+              <a:buNone/>
+            </a:pPr>
+            <a:r>
+              <a:rPr lang="en-US" sz="2800" b="1" dirty="0">
+                <a:solidFill>
+                  <a:schemeClr val="bg1"/>
+                </a:solidFill>
+                <a:latin typeface="Georgia Pro" pitchFamily="34" charset="0"/>
+                <a:ea typeface="Georgia Pro" pitchFamily="34" charset="-122"/>
+                <a:cs typeface="Georgia Pro" pitchFamily="34" charset="-120"/>
+              </a:rPr>
+              <a:t>12.9%</a:t>
+            </a:r>
+            <a:endParaRPr lang="en-US" sz="2800" dirty="0"/>
+          </a:p>
+        </p:txBody>
+      </p:sp>
+      <p:sp>
+        <p:nvSpPr>
+          <p:cNvPr id="9" name="Callout label 2"/>
+          <p:cNvSpPr txBox="1"/>
+          <p:nvPr/>
+        </p:nvSpPr>
+        <p:spPr>
+          <a:xfrm>
+            <a:off x="6035040" y="2743200"/>
+            <a:ext cx="2651760" cy="274320"/>
+          </a:xfrm>
+          <a:prstGeom prst="rect">
+            <a:avLst/>
+          </a:prstGeom>
+          <a:noFill/>
+          <a:ln/>
+        </p:spPr>
+        <p:txBody>
+          <a:bodyPr wrap="square" lIns="0" tIns="0" rIns="0" bIns="0" rtlCol="0" anchor="ctr"/>
+          <a:lstStyle/>
+          <a:p>
+            <a:pPr marL="0" indent="0" algn="ctr">
+              <a:buNone/>
+            </a:pPr>
+            <a:r>
+              <a:rPr lang="en-US" sz="1400" dirty="0">
+                <a:solidFill>
+                  <a:schemeClr val="accent3"/>
+                </a:solidFill>
+              </a:rPr>
+              <a:t>Medicaid/CHIP/state</a:t>
+            </a:r>
+            <a:endParaRPr lang="en-US" sz="1400" dirty="0"/>
+          </a:p>
+        </p:txBody>
+      </p:sp>
+      <p:sp>
+        <p:nvSpPr>
+          <p:cNvPr id="10" name="Callout value 2"/>
+          <p:cNvSpPr txBox="1"/>
+          <p:nvPr/>
+        </p:nvSpPr>
+        <p:spPr>
+          <a:xfrm>
+            <a:off x="6035040" y="3017520"/>
+            <a:ext cx="2651760" cy="640080"/>
+          </a:xfrm>
+          <a:prstGeom prst="rect">
+            <a:avLst/>
+          </a:prstGeom>
+          <a:noFill/>
+          <a:ln/>
+        </p:spPr>
+        <p:txBody>
+          <a:bodyPr wrap="square" lIns="0" tIns="0" rIns="0" bIns="0" rtlCol="0" anchor="ctr"/>
+          <a:lstStyle/>
+          <a:p>
+            <a:pPr marL="0" indent="0" algn="ctr">
+              <a:buNone/>
+            </a:pPr>
+            <a:r>
+              <a:rPr lang="en-US" sz="2800" b="1" dirty="0">
+                <a:solidFill>
+                  <a:srgbClr val="FFB067"/>
+                </a:solidFill>
+                <a:latin typeface="Georgia Pro" pitchFamily="34" charset="0"/>
+                <a:ea typeface="Georgia Pro" pitchFamily="34" charset="-122"/>
+                <a:cs typeface="Georgia Pro" pitchFamily="34" charset="-120"/>
+              </a:rPr>
+              <a:t>4.3%</a:t>
+            </a:r>
+            <a:endParaRPr lang="en-US" sz="2800" dirty="0"/>
+          </a:p>
+        </p:txBody>
+      </p:sp>
+      <p:sp>
+        <p:nvSpPr>
+          <p:cNvPr id="11" name="Difference"/>
+          <p:cNvSpPr txBox="1"/>
+          <p:nvPr/>
+        </p:nvSpPr>
+        <p:spPr>
+          <a:xfrm>
+            <a:off x="6217920" y="3707356"/>
+            <a:ext cx="2286000" cy="594360"/>
+          </a:xfrm>
+          <a:prstGeom prst="rect">
+            <a:avLst/>
+          </a:prstGeom>
+          <a:noFill/>
+          <a:ln/>
+        </p:spPr>
+        <p:txBody>
+          <a:bodyPr wrap="square" lIns="0" tIns="0" rIns="0" bIns="0" rtlCol="0" anchor="ctr"/>
+          <a:lstStyle/>
+          <a:p>
+            <a:pPr marL="0" indent="0" algn="ctr">
+              <a:buNone/>
+            </a:pPr>
+            <a:r>
+              <a:rPr lang="en-US" sz="1400" dirty="0">
+                <a:solidFill>
+                  <a:srgbClr val="F5C9A6"/>
+                </a:solidFill>
+              </a:rPr>
+              <a:t>Difference: </a:t>
+            </a:r>
+          </a:p>
+          <a:p>
+            <a:pPr marL="0" indent="0" algn="ctr">
+              <a:buNone/>
+            </a:pPr>
+            <a:r>
+              <a:rPr lang="en-US" sz="1400" b="1" dirty="0">
+                <a:solidFill>
+                  <a:srgbClr val="FFFFFF"/>
+                </a:solidFill>
+              </a:rPr>
+              <a:t>~8.5 percentage points</a:t>
+            </a:r>
+            <a:endParaRPr lang="en-US" sz="1400" dirty="0"/>
+          </a:p>
+        </p:txBody>
+      </p:sp>
+      <p:sp>
+        <p:nvSpPr>
+          <p:cNvPr id="25" name="Slide Number Placeholder 0"/>
+          <p:cNvSpPr>
+            <a:spLocks noGrp="1"/>
+          </p:cNvSpPr>
+          <p:nvPr>
+            <p:ph type="sldNum" sz="quarter" idx="4294967295"/>
+          </p:nvPr>
+        </p:nvSpPr>
+        <p:spPr>
+          <a:xfrm>
+            <a:off x="8321040" y="4754880"/>
+            <a:ext cx="365760" cy="274320"/>
+          </a:xfrm>
+          <a:prstGeom prst="rect">
+            <a:avLst/>
+          </a:prstGeom>
+          <a:extLst>
+            <a:ext uri="{C572A759-6A51-4108-AA02-DFA0A04FC94B}">
+              <ma14:wrappingTextBoxFlag xmlns="" xmlns:ma14="http://schemas.microsoft.com/office/mac/drawingml/2011/main" val="0"/>
+            </a:ext>
+          </a:extLst>
+        </p:spPr>
+        <p:txBody>
+          <a:bodyPr/>
+          <a:lstStyle>
+            <a:lvl1pPr>
+              <a:defRPr sz="1100">
+                <a:solidFill>
+                  <a:srgbClr val="6B6068"/>
+                </a:solidFill>
+              </a:defRPr>
+            </a:lvl1pPr>
+          </a:lstStyle>
+          <a:p>
+            <a:pPr algn="l"/>
+            <a:fld id="{F7021451-1387-4CA6-816F-3879F97B5CBC}" type="slidenum">
+              <a:rPr lang="en-US" b="0"/>
+              <a:t>2</a:t>
+            </a:fld>
+            <a:endParaRPr lang="en-US"/>
+          </a:p>
+        </p:txBody>
+      </p:sp>
+      <p:pic>
+        <p:nvPicPr>
+          <p:cNvPr id="15" name="Picture 14" descr="A graph with blue rectangles&#10;&#10;AI-generated content may be incorrect.">
+            <a:extLst>
+              <a:ext uri="{FF2B5EF4-FFF2-40B4-BE49-F238E27FC236}">
+                <a16:creationId xmlns:a16="http://schemas.microsoft.com/office/drawing/2014/main" id="{223A0E60-FD70-A0F4-EB07-FC3126A3AD41}"/>
+              </a:ext>
+            </a:extLst>
+          </p:cNvPr>
+          <p:cNvPicPr>
+            <a:picLocks noChangeAspect="1"/>
+          </p:cNvPicPr>
+          <p:nvPr/>
+        </p:nvPicPr>
+        <p:blipFill>
+          <a:blip r:embed="rId3"/>
+          <a:stretch>
+            <a:fillRect/>
+          </a:stretch>
+        </p:blipFill>
+        <p:spPr>
+          <a:xfrm>
+            <a:off x="457200" y="1777330"/>
+            <a:ext cx="5303520" cy="2618098"/>
+          </a:xfrm>
+          <a:prstGeom prst="rect">
+            <a:avLst/>
+          </a:prstGeom>
+        </p:spPr>
+      </p:pic>
+    </p:spTree>
+  </p:cSld>
+  <p:clrMapOvr>
+    <a:masterClrMapping/>
+  </p:clrMapOvr>
+</p:sld>
+</file>
+
+<file path=ppt/slides/slide3.xml><?xml version="1.0" encoding="utf-8"?>
+<p:sld xmlns:a="http://schemas.openxmlformats.org/drawingml/2006/main" xmlns:r="http://schemas.openxmlformats.org/officeDocument/2006/relationships" xmlns:p="http://schemas.openxmlformats.org/presentationml/2006/main">
   <p:cSld name="Slide 2">
     <p:spTree>
       <p:nvGrpSpPr>
@@ -6538,8 +7809,8 @@
         </p:nvSpPr>
         <p:spPr>
           <a:xfrm>
-            <a:off x="822960" y="1371600"/>
-            <a:ext cx="7498080" cy="2834640"/>
+            <a:off x="640080" y="1810600"/>
+            <a:ext cx="7863840" cy="2038758"/>
           </a:xfrm>
           <a:prstGeom prst="rect">
             <a:avLst/>
@@ -6551,7 +7822,7 @@
           <a:bodyPr wrap="square" lIns="0" tIns="0" rIns="0" bIns="0" rtlCol="0" anchor="ctr"/>
           <a:lstStyle/>
           <a:p>
-            <a:pPr marL="0" indent="0">
+            <a:pPr marL="0" indent="0" algn="ctr">
               <a:buNone/>
             </a:pPr>
             <a:r>
@@ -6563,7 +7834,23 @@
                 <a:ea typeface="Georgia Pro" pitchFamily="34" charset="-122"/>
                 <a:cs typeface="Georgia Pro" pitchFamily="34" charset="-120"/>
               </a:rPr>
-              <a:t>Is current insurance type associated with ever receiving medical help to become pregnant, after accounting for age, income, and education?</a:t>
+              <a:t>Is current insurance type associated with ever receiving medical help to become pregnant, </a:t>
+            </a:r>
+          </a:p>
+          <a:p>
+            <a:pPr marL="0" indent="0" algn="ctr">
+              <a:buNone/>
+            </a:pPr>
+            <a:r>
+              <a:rPr lang="en-US" sz="2800" dirty="0">
+                <a:solidFill>
+                  <a:schemeClr val="bg1"/>
+                </a:solidFill>
+                <a:latin typeface="Georgia Pro" pitchFamily="34" charset="0"/>
+                <a:ea typeface="Georgia Pro" pitchFamily="34" charset="-122"/>
+                <a:cs typeface="Georgia Pro" pitchFamily="34" charset="-120"/>
+              </a:rPr>
+              <a:t>after accounting for age, income, and education?</a:t>
             </a:r>
             <a:endParaRPr lang="en-US" sz="2800" dirty="0"/>
           </a:p>
@@ -6589,7 +7876,7 @@
           </a:prstGeom>
           <a:extLst>
             <a:ext uri="{C572A759-6A51-4108-AA02-DFA0A04FC94B}">
-              <ma14:wrappingTextBoxFlag xmlns:ma14="http://schemas.microsoft.com/office/mac/drawingml/2011/main" xmlns="" val="0"/>
+              <ma14:wrappingTextBoxFlag xmlns="" xmlns:ma14="http://schemas.microsoft.com/office/mac/drawingml/2011/main" val="0"/>
             </a:ext>
           </a:extLst>
         </p:spPr>
@@ -6608,7 +7895,7 @@
             <a:pPr algn="l"/>
             <a:fld id="{F7021451-1387-4CA6-816F-3879F97B5CBC}" type="slidenum">
               <a:rPr lang="en-US" b="0"/>
-              <a:t>2</a:t>
+              <a:t>3</a:t>
             </a:fld>
             <a:endParaRPr lang="en-US"/>
           </a:p>
@@ -6622,7 +7909,7 @@
 </p:sld>
 </file>
 
-<file path=ppt/slides/slide3.xml><?xml version="1.0" encoding="utf-8"?>
+<file path=ppt/slides/slide4.xml><?xml version="1.0" encoding="utf-8"?>
 <p:sld xmlns:a="http://schemas.openxmlformats.org/drawingml/2006/main" xmlns:r="http://schemas.openxmlformats.org/officeDocument/2006/relationships" xmlns:p="http://schemas.openxmlformats.org/presentationml/2006/main">
   <p:cSld name="Slide 3">
     <p:spTree>
@@ -7191,7 +8478,7 @@
           </a:prstGeom>
           <a:extLst>
             <a:ext uri="{C572A759-6A51-4108-AA02-DFA0A04FC94B}">
-              <ma14:wrappingTextBoxFlag xmlns:ma14="http://schemas.microsoft.com/office/mac/drawingml/2011/main" xmlns="" val="0"/>
+              <ma14:wrappingTextBoxFlag xmlns="" xmlns:ma14="http://schemas.microsoft.com/office/mac/drawingml/2011/main" val="0"/>
             </a:ext>
           </a:extLst>
         </p:spPr>
@@ -7210,7 +8497,7 @@
             <a:pPr algn="l"/>
             <a:fld id="{F7021451-1387-4CA6-816F-3879F97B5CBC}" type="slidenum">
               <a:rPr lang="en-US" b="0"/>
-              <a:t>3</a:t>
+              <a:t>4</a:t>
             </a:fld>
             <a:endParaRPr lang="en-US"/>
           </a:p>
@@ -7224,7 +8511,7 @@
 </p:sld>
 </file>
 
-<file path=ppt/slides/slide4.xml><?xml version="1.0" encoding="utf-8"?>
+<file path=ppt/slides/slide5.xml><?xml version="1.0" encoding="utf-8"?>
 <p:sld xmlns:a="http://schemas.openxmlformats.org/drawingml/2006/main" xmlns:r="http://schemas.openxmlformats.org/officeDocument/2006/relationships" xmlns:p="http://schemas.openxmlformats.org/presentationml/2006/main">
   <p:cSld name="Slide 4">
     <p:spTree>
@@ -7311,7 +8598,7 @@
                   <a:schemeClr val="accent5"/>
                 </a:solidFill>
               </a:rPr>
-              <a:t>Source: CDC/NCHS, NSFG 2022–2023 Female Respondent Public-Use File</a:t>
+              <a:t>Source: CDC/NCHS, NSFG 2022-2023 Female Respondent Public-Use File</a:t>
             </a:r>
             <a:endParaRPr lang="en-US" sz="1400" dirty="0"/>
           </a:p>
@@ -7325,7 +8612,7 @@
         </p:nvSpPr>
         <p:spPr>
           <a:xfrm>
-            <a:off x="457200" y="1463040"/>
+            <a:off x="457200" y="1478280"/>
             <a:ext cx="2468880" cy="1280160"/>
           </a:xfrm>
           <a:prstGeom prst="roundRect">
@@ -7359,7 +8646,7 @@
         </p:nvSpPr>
         <p:spPr>
           <a:xfrm>
-            <a:off x="457200" y="1554480"/>
+            <a:off x="457200" y="1569720"/>
             <a:ext cx="2468880" cy="685800"/>
           </a:xfrm>
           <a:prstGeom prst="rect">
@@ -7398,7 +8685,7 @@
         </p:nvSpPr>
         <p:spPr>
           <a:xfrm>
-            <a:off x="548640" y="2240280"/>
+            <a:off x="548640" y="2255520"/>
             <a:ext cx="2286000" cy="365760"/>
           </a:xfrm>
           <a:prstGeom prst="rect">
@@ -7434,7 +8721,7 @@
         </p:nvSpPr>
         <p:spPr>
           <a:xfrm>
-            <a:off x="457200" y="2926080"/>
+            <a:off x="457200" y="2941320"/>
             <a:ext cx="2468880" cy="1280160"/>
           </a:xfrm>
           <a:prstGeom prst="roundRect">
@@ -7468,7 +8755,7 @@
         </p:nvSpPr>
         <p:spPr>
           <a:xfrm>
-            <a:off x="457200" y="3017520"/>
+            <a:off x="457200" y="3032760"/>
             <a:ext cx="2468880" cy="685800"/>
           </a:xfrm>
           <a:prstGeom prst="rect">
@@ -7507,7 +8794,7 @@
         </p:nvSpPr>
         <p:spPr>
           <a:xfrm>
-            <a:off x="548640" y="3703320"/>
+            <a:off x="548640" y="3718560"/>
             <a:ext cx="2286000" cy="365760"/>
           </a:xfrm>
           <a:prstGeom prst="rect">
@@ -7544,7 +8831,7 @@
           <p:nvPr>
             <p:extLst>
               <p:ext uri="{D42A27DB-BD31-4B8C-83A1-F6EECF244321}">
-                <p14:modId xmlns:p14="http://schemas.microsoft.com/office/powerpoint/2010/main" val="205057097"/>
+                <p14:modId xmlns:p14="http://schemas.microsoft.com/office/powerpoint/2010/main" val="3697009885"/>
               </p:ext>
             </p:extLst>
           </p:nvPr>
@@ -7558,14 +8845,14 @@
             <a:tbl>
               <a:tblPr/>
               <a:tblGrid>
-                <a:gridCol w="1554480">
+                <a:gridCol w="1684867">
                   <a:extLst>
                     <a:ext uri="{9D8B030D-6E8A-4147-A177-3AD203B41FA5}">
                       <a16:colId xmlns:a16="http://schemas.microsoft.com/office/drawing/2014/main" val="20000"/>
                     </a:ext>
                   </a:extLst>
                 </a:gridCol>
-                <a:gridCol w="3931920">
+                <a:gridCol w="3801533">
                   <a:extLst>
                     <a:ext uri="{9D8B030D-6E8A-4147-A177-3AD203B41FA5}">
                       <a16:colId xmlns:a16="http://schemas.microsoft.com/office/drawing/2014/main" val="20001"/>
@@ -8266,757 +9553,7 @@
           </a:prstGeom>
           <a:extLst>
             <a:ext uri="{C572A759-6A51-4108-AA02-DFA0A04FC94B}">
-              <ma14:wrappingTextBoxFlag xmlns:ma14="http://schemas.microsoft.com/office/mac/drawingml/2011/main" xmlns="" val="0"/>
-            </a:ext>
-          </a:extLst>
-        </p:spPr>
-        <p:txBody>
-          <a:bodyPr/>
-          <a:lstStyle>
-            <a:lvl1pPr>
-              <a:defRPr sz="1100">
-                <a:solidFill>
-                  <a:srgbClr val="6B6068"/>
-                </a:solidFill>
-              </a:defRPr>
-            </a:lvl1pPr>
-          </a:lstStyle>
-          <a:p>
-            <a:pPr algn="l"/>
-            <a:fld id="{F7021451-1387-4CA6-816F-3879F97B5CBC}" type="slidenum">
-              <a:rPr lang="en-US" b="0"/>
-              <a:t>4</a:t>
-            </a:fld>
-            <a:endParaRPr lang="en-US"/>
-          </a:p>
-        </p:txBody>
-      </p:sp>
-    </p:spTree>
-  </p:cSld>
-  <p:clrMapOvr>
-    <a:masterClrMapping/>
-  </p:clrMapOvr>
-</p:sld>
-</file>
-
-<file path=ppt/slides/slide5.xml><?xml version="1.0" encoding="utf-8"?>
-<p:sld xmlns:a="http://schemas.openxmlformats.org/drawingml/2006/main" xmlns:r="http://schemas.openxmlformats.org/officeDocument/2006/relationships" xmlns:p="http://schemas.openxmlformats.org/presentationml/2006/main">
-  <p:cSld name="Slide 5">
-    <p:spTree>
-      <p:nvGrpSpPr>
-        <p:cNvPr id="1" name=""/>
-        <p:cNvGrpSpPr/>
-        <p:nvPr/>
-      </p:nvGrpSpPr>
-      <p:grpSpPr>
-        <a:xfrm>
-          <a:off x="0" y="0"/>
-          <a:ext cx="0" cy="0"/>
-          <a:chOff x="0" y="0"/>
-          <a:chExt cx="0" cy="0"/>
-        </a:xfrm>
-      </p:grpSpPr>
-      <p:sp>
-        <p:nvSpPr>
-          <p:cNvPr id="2" name="Text 0"/>
-          <p:cNvSpPr>
-            <a:spLocks noGrp="1"/>
-          </p:cNvSpPr>
-          <p:nvPr>
-            <p:ph type="title" idx="100" hasCustomPrompt="1"/>
-          </p:nvPr>
-        </p:nvSpPr>
-        <p:spPr>
-          <a:xfrm>
-            <a:off x="457200" y="274320"/>
-            <a:ext cx="8229600" cy="868680"/>
-          </a:xfrm>
-          <a:prstGeom prst="rect">
-            <a:avLst/>
-          </a:prstGeom>
-          <a:noFill/>
-          <a:ln/>
-        </p:spPr>
-        <p:txBody>
-          <a:bodyPr wrap="square" lIns="0" tIns="0" rIns="0" bIns="0" rtlCol="0" anchor="t"/>
-          <a:lstStyle/>
-          <a:p>
-            <a:pPr marL="0" indent="0" algn="l">
-              <a:buNone/>
-            </a:pPr>
-            <a:r>
-              <a:rPr lang="en-US" sz="2800" b="1" dirty="0">
-                <a:solidFill>
-                  <a:schemeClr val="tx2"/>
-                </a:solidFill>
-              </a:rPr>
-              <a:t>Sample Overview</a:t>
-            </a:r>
-            <a:endParaRPr lang="en-US" sz="2800" dirty="0"/>
-          </a:p>
-        </p:txBody>
-      </p:sp>
-      <p:sp>
-        <p:nvSpPr>
-          <p:cNvPr id="3" name="Chart placeholder category_distributions.png"/>
-          <p:cNvSpPr/>
-          <p:nvPr/>
-        </p:nvSpPr>
-        <p:spPr>
-          <a:xfrm>
-            <a:off x="457200" y="1188720"/>
-            <a:ext cx="4023360" cy="2011680"/>
-          </a:xfrm>
-          <a:prstGeom prst="roundRect">
-            <a:avLst>
-              <a:gd name="adj" fmla="val 4545"/>
-            </a:avLst>
-          </a:prstGeom>
-          <a:solidFill>
-            <a:schemeClr val="bg2"/>
-          </a:solidFill>
-          <a:ln w="19050">
-            <a:solidFill>
-              <a:schemeClr val="accent1"/>
-            </a:solidFill>
-            <a:prstDash val="dash"/>
-          </a:ln>
-        </p:spPr>
-        <p:txBody>
-          <a:bodyPr/>
-          <a:lstStyle/>
-          <a:p>
-            <a:endParaRPr lang="en-US"/>
-          </a:p>
-        </p:txBody>
-      </p:sp>
-      <p:sp>
-        <p:nvSpPr>
-          <p:cNvPr id="4" name="Placeholder label category_distributions.png"/>
-          <p:cNvSpPr txBox="1"/>
-          <p:nvPr/>
-        </p:nvSpPr>
-        <p:spPr>
-          <a:xfrm>
-            <a:off x="457200" y="1188720"/>
-            <a:ext cx="4023360" cy="2011680"/>
-          </a:xfrm>
-          <a:prstGeom prst="rect">
-            <a:avLst/>
-          </a:prstGeom>
-          <a:noFill/>
-          <a:ln/>
-        </p:spPr>
-        <p:txBody>
-          <a:bodyPr wrap="square" lIns="1270" tIns="1270" rIns="1270" bIns="1270" rtlCol="0" anchor="ctr"/>
-          <a:lstStyle/>
-          <a:p>
-            <a:pPr marL="0" indent="0" algn="ctr">
-              <a:buNone/>
-            </a:pPr>
-            <a:r>
-              <a:rPr lang="en-US" sz="1400" b="1" dirty="0">
-                <a:solidFill>
-                  <a:schemeClr val="accent1"/>
-                </a:solidFill>
-              </a:rPr>
-              <a:t>category_distributions.png</a:t>
-            </a:r>
-            <a:endParaRPr lang="en-US" sz="1400" dirty="0"/>
-          </a:p>
-          <a:p>
-            <a:pPr marL="0" indent="0" algn="ctr">
-              <a:buNone/>
-            </a:pPr>
-            <a:r>
-              <a:rPr lang="en-US" sz="1100" dirty="0">
-                <a:solidFill>
-                  <a:schemeClr val="accent5"/>
-                </a:solidFill>
-              </a:rPr>
-              <a:t>Insurance panel</a:t>
-            </a:r>
-            <a:endParaRPr lang="en-US" sz="1400" dirty="0"/>
-          </a:p>
-        </p:txBody>
-      </p:sp>
-      <p:sp>
-        <p:nvSpPr>
-          <p:cNvPr id="5" name="Chart placeholder category_distributions.png"/>
-          <p:cNvSpPr/>
-          <p:nvPr/>
-        </p:nvSpPr>
-        <p:spPr>
-          <a:xfrm>
-            <a:off x="4663440" y="1188720"/>
-            <a:ext cx="4023360" cy="2011680"/>
-          </a:xfrm>
-          <a:prstGeom prst="roundRect">
-            <a:avLst>
-              <a:gd name="adj" fmla="val 4545"/>
-            </a:avLst>
-          </a:prstGeom>
-          <a:solidFill>
-            <a:schemeClr val="bg2"/>
-          </a:solidFill>
-          <a:ln w="19050">
-            <a:solidFill>
-              <a:schemeClr val="accent1"/>
-            </a:solidFill>
-            <a:prstDash val="dash"/>
-          </a:ln>
-        </p:spPr>
-        <p:txBody>
-          <a:bodyPr/>
-          <a:lstStyle/>
-          <a:p>
-            <a:endParaRPr lang="en-US"/>
-          </a:p>
-        </p:txBody>
-      </p:sp>
-      <p:sp>
-        <p:nvSpPr>
-          <p:cNvPr id="6" name="Placeholder label category_distributions.png"/>
-          <p:cNvSpPr txBox="1"/>
-          <p:nvPr/>
-        </p:nvSpPr>
-        <p:spPr>
-          <a:xfrm>
-            <a:off x="4663440" y="1188720"/>
-            <a:ext cx="4023360" cy="2011680"/>
-          </a:xfrm>
-          <a:prstGeom prst="rect">
-            <a:avLst/>
-          </a:prstGeom>
-          <a:noFill/>
-          <a:ln/>
-        </p:spPr>
-        <p:txBody>
-          <a:bodyPr wrap="square" lIns="1270" tIns="1270" rIns="1270" bIns="1270" rtlCol="0" anchor="ctr"/>
-          <a:lstStyle/>
-          <a:p>
-            <a:pPr marL="0" indent="0" algn="ctr">
-              <a:buNone/>
-            </a:pPr>
-            <a:r>
-              <a:rPr lang="en-US" sz="1400" b="1" dirty="0">
-                <a:solidFill>
-                  <a:schemeClr val="accent1"/>
-                </a:solidFill>
-              </a:rPr>
-              <a:t>category_distributions.png</a:t>
-            </a:r>
-            <a:endParaRPr lang="en-US" sz="1400" dirty="0"/>
-          </a:p>
-          <a:p>
-            <a:pPr marL="0" indent="0" algn="ctr">
-              <a:buNone/>
-            </a:pPr>
-            <a:r>
-              <a:rPr lang="en-US" sz="1100" dirty="0">
-                <a:solidFill>
-                  <a:schemeClr val="accent5"/>
-                </a:solidFill>
-              </a:rPr>
-              <a:t>Yes/no outcome panel</a:t>
-            </a:r>
-            <a:endParaRPr lang="en-US" sz="1400" dirty="0"/>
-          </a:p>
-        </p:txBody>
-      </p:sp>
-      <p:sp>
-        <p:nvSpPr>
-          <p:cNvPr id="7" name="Stat card 1"/>
-          <p:cNvSpPr/>
-          <p:nvPr/>
-        </p:nvSpPr>
-        <p:spPr>
-          <a:xfrm>
-            <a:off x="457200" y="3383280"/>
-            <a:ext cx="1920240" cy="1097280"/>
-          </a:xfrm>
-          <a:prstGeom prst="roundRect">
-            <a:avLst>
-              <a:gd name="adj" fmla="val 10000"/>
-            </a:avLst>
-          </a:prstGeom>
-          <a:solidFill>
-            <a:schemeClr val="bg2"/>
-          </a:solidFill>
-          <a:ln w="12700">
-            <a:solidFill>
-              <a:schemeClr val="bg2"/>
-            </a:solidFill>
-            <a:prstDash val="solid"/>
-          </a:ln>
-        </p:spPr>
-        <p:txBody>
-          <a:bodyPr/>
-          <a:lstStyle/>
-          <a:p>
-            <a:endParaRPr lang="en-US"/>
-          </a:p>
-        </p:txBody>
-      </p:sp>
-      <p:sp>
-        <p:nvSpPr>
-          <p:cNvPr id="8" name="Stat value 1"/>
-          <p:cNvSpPr txBox="1"/>
-          <p:nvPr/>
-        </p:nvSpPr>
-        <p:spPr>
-          <a:xfrm>
-            <a:off x="457200" y="3456432"/>
-            <a:ext cx="1920240" cy="594360"/>
-          </a:xfrm>
-          <a:prstGeom prst="rect">
-            <a:avLst/>
-          </a:prstGeom>
-          <a:noFill/>
-          <a:ln/>
-        </p:spPr>
-        <p:txBody>
-          <a:bodyPr wrap="square" lIns="0" tIns="0" rIns="0" bIns="0" rtlCol="0" anchor="ctr"/>
-          <a:lstStyle/>
-          <a:p>
-            <a:pPr marL="0" indent="0" algn="ctr">
-              <a:buNone/>
-            </a:pPr>
-            <a:r>
-              <a:rPr lang="en-US" sz="2800" b="1" dirty="0">
-                <a:solidFill>
-                  <a:schemeClr val="accent1"/>
-                </a:solidFill>
-                <a:latin typeface="Georgia Pro" pitchFamily="34" charset="0"/>
-                <a:ea typeface="Georgia Pro" pitchFamily="34" charset="-122"/>
-                <a:cs typeface="Georgia Pro" pitchFamily="34" charset="-120"/>
-              </a:rPr>
-              <a:t>5,195</a:t>
-            </a:r>
-            <a:endParaRPr lang="en-US" sz="2800" dirty="0"/>
-          </a:p>
-        </p:txBody>
-      </p:sp>
-      <p:sp>
-        <p:nvSpPr>
-          <p:cNvPr id="9" name="Stat label 1"/>
-          <p:cNvSpPr txBox="1"/>
-          <p:nvPr/>
-        </p:nvSpPr>
-        <p:spPr>
-          <a:xfrm>
-            <a:off x="457200" y="4050792"/>
-            <a:ext cx="1920240" cy="320040"/>
-          </a:xfrm>
-          <a:prstGeom prst="rect">
-            <a:avLst/>
-          </a:prstGeom>
-          <a:noFill/>
-          <a:ln/>
-        </p:spPr>
-        <p:txBody>
-          <a:bodyPr wrap="square" lIns="0" tIns="0" rIns="0" bIns="0" rtlCol="0" anchor="ctr"/>
-          <a:lstStyle/>
-          <a:p>
-            <a:pPr marL="0" indent="0" algn="ctr">
-              <a:buNone/>
-            </a:pPr>
-            <a:r>
-              <a:rPr lang="en-US" sz="1400" dirty="0">
-                <a:solidFill>
-                  <a:schemeClr val="tx1"/>
-                </a:solidFill>
-              </a:rPr>
-              <a:t>respondents</a:t>
-            </a:r>
-            <a:endParaRPr lang="en-US" sz="1400" dirty="0"/>
-          </a:p>
-        </p:txBody>
-      </p:sp>
-      <p:sp>
-        <p:nvSpPr>
-          <p:cNvPr id="10" name="Stat card 2"/>
-          <p:cNvSpPr/>
-          <p:nvPr/>
-        </p:nvSpPr>
-        <p:spPr>
-          <a:xfrm>
-            <a:off x="2542032" y="3383280"/>
-            <a:ext cx="1920240" cy="1097280"/>
-          </a:xfrm>
-          <a:prstGeom prst="roundRect">
-            <a:avLst>
-              <a:gd name="adj" fmla="val 10000"/>
-            </a:avLst>
-          </a:prstGeom>
-          <a:solidFill>
-            <a:schemeClr val="bg2"/>
-          </a:solidFill>
-          <a:ln w="12700">
-            <a:solidFill>
-              <a:schemeClr val="bg2"/>
-            </a:solidFill>
-            <a:prstDash val="solid"/>
-          </a:ln>
-        </p:spPr>
-        <p:txBody>
-          <a:bodyPr/>
-          <a:lstStyle/>
-          <a:p>
-            <a:endParaRPr lang="en-US"/>
-          </a:p>
-        </p:txBody>
-      </p:sp>
-      <p:sp>
-        <p:nvSpPr>
-          <p:cNvPr id="11" name="Stat value 2"/>
-          <p:cNvSpPr txBox="1"/>
-          <p:nvPr/>
-        </p:nvSpPr>
-        <p:spPr>
-          <a:xfrm>
-            <a:off x="2542032" y="3456432"/>
-            <a:ext cx="1920240" cy="594360"/>
-          </a:xfrm>
-          <a:prstGeom prst="rect">
-            <a:avLst/>
-          </a:prstGeom>
-          <a:noFill/>
-          <a:ln/>
-        </p:spPr>
-        <p:txBody>
-          <a:bodyPr wrap="square" lIns="0" tIns="0" rIns="0" bIns="0" rtlCol="0" anchor="ctr"/>
-          <a:lstStyle/>
-          <a:p>
-            <a:pPr marL="0" indent="0" algn="ctr">
-              <a:buNone/>
-            </a:pPr>
-            <a:r>
-              <a:rPr lang="en-US" sz="2800" b="1" dirty="0">
-                <a:solidFill>
-                  <a:schemeClr val="accent1"/>
-                </a:solidFill>
-                <a:latin typeface="Georgia Pro" pitchFamily="34" charset="0"/>
-                <a:ea typeface="Georgia Pro" pitchFamily="34" charset="-122"/>
-                <a:cs typeface="Georgia Pro" pitchFamily="34" charset="-120"/>
-              </a:rPr>
-              <a:t>60.9%</a:t>
-            </a:r>
-            <a:endParaRPr lang="en-US" sz="2800" dirty="0"/>
-          </a:p>
-        </p:txBody>
-      </p:sp>
-      <p:sp>
-        <p:nvSpPr>
-          <p:cNvPr id="12" name="Stat label 2"/>
-          <p:cNvSpPr txBox="1"/>
-          <p:nvPr/>
-        </p:nvSpPr>
-        <p:spPr>
-          <a:xfrm>
-            <a:off x="2542032" y="4050792"/>
-            <a:ext cx="1920240" cy="320040"/>
-          </a:xfrm>
-          <a:prstGeom prst="rect">
-            <a:avLst/>
-          </a:prstGeom>
-          <a:noFill/>
-          <a:ln/>
-        </p:spPr>
-        <p:txBody>
-          <a:bodyPr wrap="square" lIns="0" tIns="0" rIns="0" bIns="0" rtlCol="0" anchor="ctr"/>
-          <a:lstStyle/>
-          <a:p>
-            <a:pPr marL="0" indent="0" algn="ctr">
-              <a:buNone/>
-            </a:pPr>
-            <a:r>
-              <a:rPr lang="en-US" sz="1400" dirty="0">
-                <a:solidFill>
-                  <a:schemeClr val="tx1"/>
-                </a:solidFill>
-              </a:rPr>
-              <a:t>private/Medi-Gap</a:t>
-            </a:r>
-            <a:endParaRPr lang="en-US" sz="1400" dirty="0"/>
-          </a:p>
-        </p:txBody>
-      </p:sp>
-      <p:sp>
-        <p:nvSpPr>
-          <p:cNvPr id="13" name="Stat card 3"/>
-          <p:cNvSpPr/>
-          <p:nvPr/>
-        </p:nvSpPr>
-        <p:spPr>
-          <a:xfrm>
-            <a:off x="4626864" y="3383280"/>
-            <a:ext cx="1920240" cy="1097280"/>
-          </a:xfrm>
-          <a:prstGeom prst="roundRect">
-            <a:avLst>
-              <a:gd name="adj" fmla="val 10000"/>
-            </a:avLst>
-          </a:prstGeom>
-          <a:solidFill>
-            <a:schemeClr val="bg2"/>
-          </a:solidFill>
-          <a:ln w="12700">
-            <a:solidFill>
-              <a:schemeClr val="bg2"/>
-            </a:solidFill>
-            <a:prstDash val="solid"/>
-          </a:ln>
-        </p:spPr>
-        <p:txBody>
-          <a:bodyPr/>
-          <a:lstStyle/>
-          <a:p>
-            <a:endParaRPr lang="en-US"/>
-          </a:p>
-        </p:txBody>
-      </p:sp>
-      <p:sp>
-        <p:nvSpPr>
-          <p:cNvPr id="14" name="Stat value 3"/>
-          <p:cNvSpPr txBox="1"/>
-          <p:nvPr/>
-        </p:nvSpPr>
-        <p:spPr>
-          <a:xfrm>
-            <a:off x="4626864" y="3456432"/>
-            <a:ext cx="1920240" cy="594360"/>
-          </a:xfrm>
-          <a:prstGeom prst="rect">
-            <a:avLst/>
-          </a:prstGeom>
-          <a:noFill/>
-          <a:ln/>
-        </p:spPr>
-        <p:txBody>
-          <a:bodyPr wrap="square" lIns="0" tIns="0" rIns="0" bIns="0" rtlCol="0" anchor="ctr"/>
-          <a:lstStyle/>
-          <a:p>
-            <a:pPr marL="0" indent="0" algn="ctr">
-              <a:buNone/>
-            </a:pPr>
-            <a:r>
-              <a:rPr lang="en-US" sz="2800" b="1" dirty="0">
-                <a:solidFill>
-                  <a:schemeClr val="accent1"/>
-                </a:solidFill>
-                <a:latin typeface="Georgia Pro" pitchFamily="34" charset="0"/>
-                <a:ea typeface="Georgia Pro" pitchFamily="34" charset="-122"/>
-                <a:cs typeface="Georgia Pro" pitchFamily="34" charset="-120"/>
-              </a:rPr>
-              <a:t>21.7%</a:t>
-            </a:r>
-            <a:endParaRPr lang="en-US" sz="2800" dirty="0"/>
-          </a:p>
-        </p:txBody>
-      </p:sp>
-      <p:sp>
-        <p:nvSpPr>
-          <p:cNvPr id="15" name="Stat label 3"/>
-          <p:cNvSpPr txBox="1"/>
-          <p:nvPr/>
-        </p:nvSpPr>
-        <p:spPr>
-          <a:xfrm>
-            <a:off x="4626864" y="4050792"/>
-            <a:ext cx="1920240" cy="320040"/>
-          </a:xfrm>
-          <a:prstGeom prst="rect">
-            <a:avLst/>
-          </a:prstGeom>
-          <a:noFill/>
-          <a:ln/>
-        </p:spPr>
-        <p:txBody>
-          <a:bodyPr wrap="square" lIns="0" tIns="0" rIns="0" bIns="0" rtlCol="0" anchor="ctr"/>
-          <a:lstStyle/>
-          <a:p>
-            <a:pPr marL="0" indent="0" algn="ctr">
-              <a:buNone/>
-            </a:pPr>
-            <a:r>
-              <a:rPr lang="en-US" sz="1400" dirty="0">
-                <a:solidFill>
-                  <a:schemeClr val="tx1"/>
-                </a:solidFill>
-              </a:rPr>
-              <a:t>Medicaid/CHIP/state</a:t>
-            </a:r>
-            <a:endParaRPr lang="en-US" sz="1400" dirty="0"/>
-          </a:p>
-        </p:txBody>
-      </p:sp>
-      <p:sp>
-        <p:nvSpPr>
-          <p:cNvPr id="16" name="Stat card 4"/>
-          <p:cNvSpPr/>
-          <p:nvPr/>
-        </p:nvSpPr>
-        <p:spPr>
-          <a:xfrm>
-            <a:off x="6711696" y="3383280"/>
-            <a:ext cx="1920240" cy="1097280"/>
-          </a:xfrm>
-          <a:prstGeom prst="roundRect">
-            <a:avLst>
-              <a:gd name="adj" fmla="val 10000"/>
-            </a:avLst>
-          </a:prstGeom>
-          <a:solidFill>
-            <a:schemeClr val="bg2"/>
-          </a:solidFill>
-          <a:ln w="12700">
-            <a:solidFill>
-              <a:schemeClr val="bg2"/>
-            </a:solidFill>
-            <a:prstDash val="solid"/>
-          </a:ln>
-        </p:spPr>
-        <p:txBody>
-          <a:bodyPr/>
-          <a:lstStyle/>
-          <a:p>
-            <a:endParaRPr lang="en-US"/>
-          </a:p>
-        </p:txBody>
-      </p:sp>
-      <p:sp>
-        <p:nvSpPr>
-          <p:cNvPr id="17" name="Stat value 4"/>
-          <p:cNvSpPr txBox="1"/>
-          <p:nvPr/>
-        </p:nvSpPr>
-        <p:spPr>
-          <a:xfrm>
-            <a:off x="6711696" y="3456432"/>
-            <a:ext cx="1920240" cy="594360"/>
-          </a:xfrm>
-          <a:prstGeom prst="rect">
-            <a:avLst/>
-          </a:prstGeom>
-          <a:noFill/>
-          <a:ln/>
-        </p:spPr>
-        <p:txBody>
-          <a:bodyPr wrap="square" lIns="0" tIns="0" rIns="0" bIns="0" rtlCol="0" anchor="ctr"/>
-          <a:lstStyle/>
-          <a:p>
-            <a:pPr marL="0" indent="0" algn="ctr">
-              <a:buNone/>
-            </a:pPr>
-            <a:r>
-              <a:rPr lang="en-US" sz="2800" b="1" dirty="0">
-                <a:solidFill>
-                  <a:schemeClr val="accent1"/>
-                </a:solidFill>
-                <a:latin typeface="Georgia Pro" pitchFamily="34" charset="0"/>
-                <a:ea typeface="Georgia Pro" pitchFamily="34" charset="-122"/>
-                <a:cs typeface="Georgia Pro" pitchFamily="34" charset="-120"/>
-              </a:rPr>
-              <a:t>9.8%</a:t>
-            </a:r>
-            <a:endParaRPr lang="en-US" sz="2800" dirty="0"/>
-          </a:p>
-        </p:txBody>
-      </p:sp>
-      <p:sp>
-        <p:nvSpPr>
-          <p:cNvPr id="18" name="Stat label 4"/>
-          <p:cNvSpPr txBox="1"/>
-          <p:nvPr/>
-        </p:nvSpPr>
-        <p:spPr>
-          <a:xfrm>
-            <a:off x="6711696" y="4050792"/>
-            <a:ext cx="1920240" cy="320040"/>
-          </a:xfrm>
-          <a:prstGeom prst="rect">
-            <a:avLst/>
-          </a:prstGeom>
-          <a:noFill/>
-          <a:ln/>
-        </p:spPr>
-        <p:txBody>
-          <a:bodyPr wrap="square" lIns="0" tIns="0" rIns="0" bIns="0" rtlCol="0" anchor="ctr"/>
-          <a:lstStyle/>
-          <a:p>
-            <a:pPr marL="0" indent="0" algn="ctr">
-              <a:buNone/>
-            </a:pPr>
-            <a:r>
-              <a:rPr lang="en-US" sz="1400" dirty="0">
-                <a:solidFill>
-                  <a:schemeClr val="tx1"/>
-                </a:solidFill>
-              </a:rPr>
-              <a:t>ever received help</a:t>
-            </a:r>
-            <a:endParaRPr lang="en-US" sz="1400" dirty="0"/>
-          </a:p>
-        </p:txBody>
-      </p:sp>
-      <p:sp>
-        <p:nvSpPr>
-          <p:cNvPr id="19" name="Footer"/>
-          <p:cNvSpPr txBox="1"/>
-          <p:nvPr/>
-        </p:nvSpPr>
-        <p:spPr>
-          <a:xfrm>
-            <a:off x="457200" y="4681728"/>
-            <a:ext cx="7680960" cy="365760"/>
-          </a:xfrm>
-          <a:prstGeom prst="rect">
-            <a:avLst/>
-          </a:prstGeom>
-          <a:noFill/>
-          <a:ln/>
-        </p:spPr>
-        <p:txBody>
-          <a:bodyPr wrap="square" lIns="0" tIns="0" rIns="0" bIns="0" rtlCol="0" anchor="ctr"/>
-          <a:lstStyle/>
-          <a:p>
-            <a:pPr marL="0" indent="0">
-              <a:buNone/>
-            </a:pPr>
-            <a:r>
-              <a:rPr lang="en-US" sz="1100" dirty="0">
-                <a:solidFill>
-                  <a:schemeClr val="accent5"/>
-                </a:solidFill>
-              </a:rPr>
-              <a:t>Percentages use survey weights.</a:t>
-            </a:r>
-            <a:endParaRPr lang="en-US" sz="1100" dirty="0"/>
-          </a:p>
-        </p:txBody>
-      </p:sp>
-      <p:sp>
-        <p:nvSpPr>
-          <p:cNvPr id="25" name="Slide Number Placeholder 0"/>
-          <p:cNvSpPr>
-            <a:spLocks noGrp="1"/>
-          </p:cNvSpPr>
-          <p:nvPr>
-            <p:ph type="sldNum" sz="quarter" idx="4294967295"/>
-          </p:nvPr>
-        </p:nvSpPr>
-        <p:spPr>
-          <a:xfrm>
-            <a:off x="8321040" y="4754880"/>
-            <a:ext cx="365760" cy="274320"/>
-          </a:xfrm>
-          <a:prstGeom prst="rect">
-            <a:avLst/>
-          </a:prstGeom>
-          <a:extLst>
-            <a:ext uri="{C572A759-6A51-4108-AA02-DFA0A04FC94B}">
-              <ma14:wrappingTextBoxFlag xmlns:ma14="http://schemas.microsoft.com/office/mac/drawingml/2011/main" xmlns="" val="0"/>
+              <ma14:wrappingTextBoxFlag xmlns="" xmlns:ma14="http://schemas.microsoft.com/office/mac/drawingml/2011/main" val="0"/>
             </a:ext>
           </a:extLst>
         </p:spPr>
@@ -9050,536 +9587,6 @@
 </file>
 
 <file path=ppt/slides/slide6.xml><?xml version="1.0" encoding="utf-8"?>
-<p:sld xmlns:a="http://schemas.openxmlformats.org/drawingml/2006/main" xmlns:r="http://schemas.openxmlformats.org/officeDocument/2006/relationships" xmlns:p="http://schemas.openxmlformats.org/presentationml/2006/main">
-  <p:cSld name="Slide 6">
-    <p:spTree>
-      <p:nvGrpSpPr>
-        <p:cNvPr id="1" name=""/>
-        <p:cNvGrpSpPr/>
-        <p:nvPr/>
-      </p:nvGrpSpPr>
-      <p:grpSpPr>
-        <a:xfrm>
-          <a:off x="0" y="0"/>
-          <a:ext cx="0" cy="0"/>
-          <a:chOff x="0" y="0"/>
-          <a:chExt cx="0" cy="0"/>
-        </a:xfrm>
-      </p:grpSpPr>
-      <p:sp>
-        <p:nvSpPr>
-          <p:cNvPr id="2" name="Text 0"/>
-          <p:cNvSpPr>
-            <a:spLocks noGrp="1"/>
-          </p:cNvSpPr>
-          <p:nvPr>
-            <p:ph type="title" idx="100" hasCustomPrompt="1"/>
-          </p:nvPr>
-        </p:nvSpPr>
-        <p:spPr>
-          <a:xfrm>
-            <a:off x="457200" y="274320"/>
-            <a:ext cx="8229600" cy="868680"/>
-          </a:xfrm>
-          <a:prstGeom prst="rect">
-            <a:avLst/>
-          </a:prstGeom>
-          <a:noFill/>
-          <a:ln/>
-        </p:spPr>
-        <p:txBody>
-          <a:bodyPr wrap="square" lIns="0" tIns="0" rIns="0" bIns="0" rtlCol="0" anchor="t"/>
-          <a:lstStyle/>
-          <a:p>
-            <a:pPr marL="0" indent="0" algn="l">
-              <a:buNone/>
-            </a:pPr>
-            <a:r>
-              <a:rPr lang="en-US" sz="2800" b="1" dirty="0">
-                <a:solidFill>
-                  <a:schemeClr val="tx2"/>
-                </a:solidFill>
-              </a:rPr>
-              <a:t>Help Receipt Differs Across Insurance Groups</a:t>
-            </a:r>
-            <a:endParaRPr lang="en-US" sz="2800" dirty="0"/>
-          </a:p>
-        </p:txBody>
-      </p:sp>
-      <p:sp>
-        <p:nvSpPr>
-          <p:cNvPr id="3" name="Chart heading"/>
-          <p:cNvSpPr txBox="1"/>
-          <p:nvPr/>
-        </p:nvSpPr>
-        <p:spPr>
-          <a:xfrm>
-            <a:off x="457200" y="1280160"/>
-            <a:ext cx="5303520" cy="320040"/>
-          </a:xfrm>
-          <a:prstGeom prst="rect">
-            <a:avLst/>
-          </a:prstGeom>
-          <a:noFill/>
-          <a:ln/>
-        </p:spPr>
-        <p:txBody>
-          <a:bodyPr wrap="square" lIns="0" tIns="0" rIns="0" bIns="0" rtlCol="0" anchor="ctr"/>
-          <a:lstStyle/>
-          <a:p>
-            <a:pPr marL="0" indent="0">
-              <a:buNone/>
-            </a:pPr>
-            <a:r>
-              <a:rPr lang="en-US" sz="1400" b="1" dirty="0">
-                <a:solidFill>
-                  <a:schemeClr val="tx2"/>
-                </a:solidFill>
-              </a:rPr>
-              <a:t>Weighted percentage ever receiving medical help</a:t>
-            </a:r>
-            <a:endParaRPr lang="en-US" sz="1400" dirty="0"/>
-          </a:p>
-        </p:txBody>
-      </p:sp>
-      <p:sp>
-        <p:nvSpPr>
-          <p:cNvPr id="4" name="Chart placeholder help_received_by_insurance.png"/>
-          <p:cNvSpPr/>
-          <p:nvPr/>
-        </p:nvSpPr>
-        <p:spPr>
-          <a:xfrm>
-            <a:off x="457200" y="1691640"/>
-            <a:ext cx="5394960" cy="2514600"/>
-          </a:xfrm>
-          <a:prstGeom prst="roundRect">
-            <a:avLst>
-              <a:gd name="adj" fmla="val 3636"/>
-            </a:avLst>
-          </a:prstGeom>
-          <a:solidFill>
-            <a:schemeClr val="bg2"/>
-          </a:solidFill>
-          <a:ln w="19050">
-            <a:solidFill>
-              <a:schemeClr val="accent1"/>
-            </a:solidFill>
-            <a:prstDash val="dash"/>
-          </a:ln>
-        </p:spPr>
-        <p:txBody>
-          <a:bodyPr/>
-          <a:lstStyle/>
-          <a:p>
-            <a:endParaRPr lang="en-US"/>
-          </a:p>
-        </p:txBody>
-      </p:sp>
-      <p:sp>
-        <p:nvSpPr>
-          <p:cNvPr id="5" name="Placeholder label help_received_by_insurance.png"/>
-          <p:cNvSpPr txBox="1"/>
-          <p:nvPr/>
-        </p:nvSpPr>
-        <p:spPr>
-          <a:xfrm>
-            <a:off x="457200" y="1691640"/>
-            <a:ext cx="5394960" cy="2514600"/>
-          </a:xfrm>
-          <a:prstGeom prst="rect">
-            <a:avLst/>
-          </a:prstGeom>
-          <a:noFill/>
-          <a:ln/>
-        </p:spPr>
-        <p:txBody>
-          <a:bodyPr wrap="square" lIns="1270" tIns="1270" rIns="1270" bIns="1270" rtlCol="0" anchor="ctr"/>
-          <a:lstStyle/>
-          <a:p>
-            <a:pPr marL="0" indent="0" algn="ctr">
-              <a:buNone/>
-            </a:pPr>
-            <a:r>
-              <a:rPr lang="en-US" sz="1400" b="1" dirty="0">
-                <a:solidFill>
-                  <a:schemeClr val="accent1"/>
-                </a:solidFill>
-              </a:rPr>
-              <a:t>help_received_by_insurance.png</a:t>
-            </a:r>
-            <a:endParaRPr lang="en-US" sz="1400" dirty="0"/>
-          </a:p>
-          <a:p>
-            <a:pPr marL="0" indent="0" algn="ctr">
-              <a:buNone/>
-            </a:pPr>
-            <a:r>
-              <a:rPr lang="en-US" sz="1100" dirty="0">
-                <a:solidFill>
-                  <a:schemeClr val="accent5"/>
-                </a:solidFill>
-              </a:rPr>
-              <a:t>Weighted % ever receiving medical help, by insurance group</a:t>
-            </a:r>
-            <a:endParaRPr lang="en-US" sz="1400" dirty="0"/>
-          </a:p>
-        </p:txBody>
-      </p:sp>
-      <p:sp>
-        <p:nvSpPr>
-          <p:cNvPr id="6" name="Callout card"/>
-          <p:cNvSpPr/>
-          <p:nvPr/>
-        </p:nvSpPr>
-        <p:spPr>
-          <a:xfrm>
-            <a:off x="6035040" y="1280160"/>
-            <a:ext cx="2651760" cy="2926080"/>
-          </a:xfrm>
-          <a:prstGeom prst="roundRect">
-            <a:avLst>
-              <a:gd name="adj" fmla="val 4138"/>
-            </a:avLst>
-          </a:prstGeom>
-          <a:solidFill>
-            <a:schemeClr val="tx2"/>
-          </a:solidFill>
-          <a:ln w="12700">
-            <a:solidFill>
-              <a:schemeClr val="tx2"/>
-            </a:solidFill>
-            <a:prstDash val="solid"/>
-          </a:ln>
-        </p:spPr>
-        <p:txBody>
-          <a:bodyPr/>
-          <a:lstStyle/>
-          <a:p>
-            <a:endParaRPr lang="en-US"/>
-          </a:p>
-        </p:txBody>
-      </p:sp>
-      <p:sp>
-        <p:nvSpPr>
-          <p:cNvPr id="7" name="Callout label 1"/>
-          <p:cNvSpPr txBox="1"/>
-          <p:nvPr/>
-        </p:nvSpPr>
-        <p:spPr>
-          <a:xfrm>
-            <a:off x="6035040" y="1417320"/>
-            <a:ext cx="2651760" cy="274320"/>
-          </a:xfrm>
-          <a:prstGeom prst="rect">
-            <a:avLst/>
-          </a:prstGeom>
-          <a:noFill/>
-          <a:ln/>
-        </p:spPr>
-        <p:txBody>
-          <a:bodyPr wrap="square" lIns="0" tIns="0" rIns="0" bIns="0" rtlCol="0" anchor="ctr"/>
-          <a:lstStyle/>
-          <a:p>
-            <a:pPr marL="0" indent="0" algn="ctr">
-              <a:buNone/>
-            </a:pPr>
-            <a:r>
-              <a:rPr lang="en-US" sz="1400" dirty="0">
-                <a:solidFill>
-                  <a:schemeClr val="accent3"/>
-                </a:solidFill>
-              </a:rPr>
-              <a:t>Private</a:t>
-            </a:r>
-            <a:endParaRPr lang="en-US" sz="1400" dirty="0"/>
-          </a:p>
-        </p:txBody>
-      </p:sp>
-      <p:sp>
-        <p:nvSpPr>
-          <p:cNvPr id="8" name="Callout value 1"/>
-          <p:cNvSpPr txBox="1"/>
-          <p:nvPr/>
-        </p:nvSpPr>
-        <p:spPr>
-          <a:xfrm>
-            <a:off x="6035040" y="1691640"/>
-            <a:ext cx="2651760" cy="640080"/>
-          </a:xfrm>
-          <a:prstGeom prst="rect">
-            <a:avLst/>
-          </a:prstGeom>
-          <a:noFill/>
-          <a:ln/>
-        </p:spPr>
-        <p:txBody>
-          <a:bodyPr wrap="square" lIns="0" tIns="0" rIns="0" bIns="0" rtlCol="0" anchor="ctr"/>
-          <a:lstStyle/>
-          <a:p>
-            <a:pPr marL="0" indent="0" algn="ctr">
-              <a:buNone/>
-            </a:pPr>
-            <a:r>
-              <a:rPr lang="en-US" sz="2800" b="1" dirty="0">
-                <a:solidFill>
-                  <a:schemeClr val="bg1"/>
-                </a:solidFill>
-                <a:latin typeface="Georgia Pro" pitchFamily="34" charset="0"/>
-                <a:ea typeface="Georgia Pro" pitchFamily="34" charset="-122"/>
-                <a:cs typeface="Georgia Pro" pitchFamily="34" charset="-120"/>
-              </a:rPr>
-              <a:t>12.9%</a:t>
-            </a:r>
-            <a:endParaRPr lang="en-US" sz="2800" dirty="0"/>
-          </a:p>
-        </p:txBody>
-      </p:sp>
-      <p:sp>
-        <p:nvSpPr>
-          <p:cNvPr id="9" name="Callout label 2"/>
-          <p:cNvSpPr txBox="1"/>
-          <p:nvPr/>
-        </p:nvSpPr>
-        <p:spPr>
-          <a:xfrm>
-            <a:off x="6035040" y="2423160"/>
-            <a:ext cx="2651760" cy="274320"/>
-          </a:xfrm>
-          <a:prstGeom prst="rect">
-            <a:avLst/>
-          </a:prstGeom>
-          <a:noFill/>
-          <a:ln/>
-        </p:spPr>
-        <p:txBody>
-          <a:bodyPr wrap="square" lIns="0" tIns="0" rIns="0" bIns="0" rtlCol="0" anchor="ctr"/>
-          <a:lstStyle/>
-          <a:p>
-            <a:pPr marL="0" indent="0" algn="ctr">
-              <a:buNone/>
-            </a:pPr>
-            <a:r>
-              <a:rPr lang="en-US" sz="1400" dirty="0">
-                <a:solidFill>
-                  <a:schemeClr val="accent3"/>
-                </a:solidFill>
-              </a:rPr>
-              <a:t>Medicaid/CHIP/state</a:t>
-            </a:r>
-            <a:endParaRPr lang="en-US" sz="1400" dirty="0"/>
-          </a:p>
-        </p:txBody>
-      </p:sp>
-      <p:sp>
-        <p:nvSpPr>
-          <p:cNvPr id="10" name="Callout value 2"/>
-          <p:cNvSpPr txBox="1"/>
-          <p:nvPr/>
-        </p:nvSpPr>
-        <p:spPr>
-          <a:xfrm>
-            <a:off x="6035040" y="2697480"/>
-            <a:ext cx="2651760" cy="640080"/>
-          </a:xfrm>
-          <a:prstGeom prst="rect">
-            <a:avLst/>
-          </a:prstGeom>
-          <a:noFill/>
-          <a:ln/>
-        </p:spPr>
-        <p:txBody>
-          <a:bodyPr wrap="square" lIns="0" tIns="0" rIns="0" bIns="0" rtlCol="0" anchor="ctr"/>
-          <a:lstStyle/>
-          <a:p>
-            <a:pPr marL="0" indent="0" algn="ctr">
-              <a:buNone/>
-            </a:pPr>
-            <a:r>
-              <a:rPr lang="en-US" sz="2800" b="1" dirty="0">
-                <a:solidFill>
-                  <a:srgbClr val="FFB067"/>
-                </a:solidFill>
-                <a:latin typeface="Georgia Pro" pitchFamily="34" charset="0"/>
-                <a:ea typeface="Georgia Pro" pitchFamily="34" charset="-122"/>
-                <a:cs typeface="Georgia Pro" pitchFamily="34" charset="-120"/>
-              </a:rPr>
-              <a:t>4.3%</a:t>
-            </a:r>
-            <a:endParaRPr lang="en-US" sz="2800" dirty="0"/>
-          </a:p>
-        </p:txBody>
-      </p:sp>
-      <p:sp>
-        <p:nvSpPr>
-          <p:cNvPr id="11" name="Difference"/>
-          <p:cNvSpPr txBox="1"/>
-          <p:nvPr/>
-        </p:nvSpPr>
-        <p:spPr>
-          <a:xfrm>
-            <a:off x="6217920" y="3474720"/>
-            <a:ext cx="2286000" cy="594360"/>
-          </a:xfrm>
-          <a:prstGeom prst="rect">
-            <a:avLst/>
-          </a:prstGeom>
-          <a:noFill/>
-          <a:ln/>
-        </p:spPr>
-        <p:txBody>
-          <a:bodyPr wrap="square" lIns="0" tIns="0" rIns="0" bIns="0" rtlCol="0" anchor="ctr"/>
-          <a:lstStyle/>
-          <a:p>
-            <a:pPr marL="0" indent="0" algn="ctr">
-              <a:buNone/>
-            </a:pPr>
-            <a:r>
-              <a:rPr lang="en-US" sz="1400" dirty="0">
-                <a:solidFill>
-                  <a:srgbClr val="F5C9A6"/>
-                </a:solidFill>
-              </a:rPr>
-              <a:t>Difference: </a:t>
-            </a:r>
-            <a:r>
-              <a:rPr lang="en-US" sz="1400" b="1" dirty="0">
-                <a:solidFill>
-                  <a:srgbClr val="FFFFFF"/>
-                </a:solidFill>
-              </a:rPr>
-              <a:t>approximately 8.5 percentage points</a:t>
-            </a:r>
-            <a:endParaRPr lang="en-US" sz="1400" dirty="0"/>
-          </a:p>
-        </p:txBody>
-      </p:sp>
-      <p:sp>
-        <p:nvSpPr>
-          <p:cNvPr id="12" name="Takeaway"/>
-          <p:cNvSpPr txBox="1"/>
-          <p:nvPr/>
-        </p:nvSpPr>
-        <p:spPr>
-          <a:xfrm>
-            <a:off x="457200" y="4297680"/>
-            <a:ext cx="8229600" cy="320040"/>
-          </a:xfrm>
-          <a:prstGeom prst="rect">
-            <a:avLst/>
-          </a:prstGeom>
-          <a:noFill/>
-          <a:ln/>
-        </p:spPr>
-        <p:txBody>
-          <a:bodyPr wrap="square" lIns="0" tIns="0" rIns="0" bIns="0" rtlCol="0" anchor="ctr"/>
-          <a:lstStyle/>
-          <a:p>
-            <a:pPr marL="0" indent="0">
-              <a:buNone/>
-            </a:pPr>
-            <a:r>
-              <a:rPr lang="en-US" sz="1400" b="1" i="1" dirty="0">
-                <a:solidFill>
-                  <a:schemeClr val="tx2"/>
-                </a:solidFill>
-              </a:rPr>
-              <a:t>These rates are unadjusted.</a:t>
-            </a:r>
-            <a:endParaRPr lang="en-US" sz="1400" dirty="0"/>
-          </a:p>
-        </p:txBody>
-      </p:sp>
-      <p:sp>
-        <p:nvSpPr>
-          <p:cNvPr id="13" name="Footer"/>
-          <p:cNvSpPr txBox="1"/>
-          <p:nvPr/>
-        </p:nvSpPr>
-        <p:spPr>
-          <a:xfrm>
-            <a:off x="457200" y="4681728"/>
-            <a:ext cx="7680960" cy="365760"/>
-          </a:xfrm>
-          <a:prstGeom prst="rect">
-            <a:avLst/>
-          </a:prstGeom>
-          <a:noFill/>
-          <a:ln/>
-        </p:spPr>
-        <p:txBody>
-          <a:bodyPr wrap="square" lIns="0" tIns="0" rIns="0" bIns="0" rtlCol="0" anchor="ctr"/>
-          <a:lstStyle/>
-          <a:p>
-            <a:pPr marL="0" indent="0">
-              <a:buNone/>
-            </a:pPr>
-            <a:r>
-              <a:rPr lang="en-US" sz="1100" dirty="0">
-                <a:solidFill>
-                  <a:schemeClr val="accent5"/>
-                </a:solidFill>
-              </a:rPr>
-              <a:t>Source: NSFG 2022–2023. Weighted estimates. Analysis n = 5,195.</a:t>
-            </a:r>
-            <a:endParaRPr lang="en-US" sz="1100" dirty="0"/>
-          </a:p>
-        </p:txBody>
-      </p:sp>
-      <p:sp>
-        <p:nvSpPr>
-          <p:cNvPr id="25" name="Slide Number Placeholder 0"/>
-          <p:cNvSpPr>
-            <a:spLocks noGrp="1"/>
-          </p:cNvSpPr>
-          <p:nvPr>
-            <p:ph type="sldNum" sz="quarter" idx="4294967295"/>
-          </p:nvPr>
-        </p:nvSpPr>
-        <p:spPr>
-          <a:xfrm>
-            <a:off x="8321040" y="4754880"/>
-            <a:ext cx="365760" cy="274320"/>
-          </a:xfrm>
-          <a:prstGeom prst="rect">
-            <a:avLst/>
-          </a:prstGeom>
-          <a:extLst>
-            <a:ext uri="{C572A759-6A51-4108-AA02-DFA0A04FC94B}">
-              <ma14:wrappingTextBoxFlag xmlns:ma14="http://schemas.microsoft.com/office/mac/drawingml/2011/main" xmlns="" val="0"/>
-            </a:ext>
-          </a:extLst>
-        </p:spPr>
-        <p:txBody>
-          <a:bodyPr/>
-          <a:lstStyle>
-            <a:lvl1pPr>
-              <a:defRPr sz="1100">
-                <a:solidFill>
-                  <a:srgbClr val="6B6068"/>
-                </a:solidFill>
-              </a:defRPr>
-            </a:lvl1pPr>
-          </a:lstStyle>
-          <a:p>
-            <a:pPr algn="l"/>
-            <a:fld id="{F7021451-1387-4CA6-816F-3879F97B5CBC}" type="slidenum">
-              <a:rPr lang="en-US" b="0"/>
-              <a:t>6</a:t>
-            </a:fld>
-            <a:endParaRPr lang="en-US"/>
-          </a:p>
-        </p:txBody>
-      </p:sp>
-    </p:spTree>
-  </p:cSld>
-  <p:clrMapOvr>
-    <a:masterClrMapping/>
-  </p:clrMapOvr>
-</p:sld>
-</file>
-
-<file path=ppt/slides/slide7.xml><?xml version="1.0" encoding="utf-8"?>
 <p:sld xmlns:a="http://schemas.openxmlformats.org/drawingml/2006/main" xmlns:r="http://schemas.openxmlformats.org/officeDocument/2006/relationships" xmlns:p="http://schemas.openxmlformats.org/presentationml/2006/main">
   <p:cSld name="Slide 7">
     <p:spTree>
@@ -9621,186 +9628,14 @@
           <a:bodyPr wrap="square" lIns="0" tIns="0" rIns="0" bIns="0" rtlCol="0" anchor="t"/>
           <a:lstStyle/>
           <a:p>
-            <a:pPr marL="0" indent="0" algn="l">
-              <a:buNone/>
-            </a:pPr>
-            <a:r>
-              <a:rPr lang="en-US" sz="2800" b="1" dirty="0">
-                <a:solidFill>
-                  <a:schemeClr val="tx2"/>
-                </a:solidFill>
-              </a:rPr>
-              <a:t>Insurance Groups Have Different Characteristics</a:t>
-            </a:r>
-            <a:endParaRPr lang="en-US" sz="2800" dirty="0"/>
-          </a:p>
-        </p:txBody>
-      </p:sp>
-      <p:sp>
-        <p:nvSpPr>
-          <p:cNvPr id="3" name="Chart placeholder confounder_comparison.png"/>
-          <p:cNvSpPr/>
-          <p:nvPr/>
-        </p:nvSpPr>
-        <p:spPr>
-          <a:xfrm>
-            <a:off x="457200" y="1280160"/>
-            <a:ext cx="5120640" cy="1828800"/>
-          </a:xfrm>
-          <a:prstGeom prst="roundRect">
-            <a:avLst>
-              <a:gd name="adj" fmla="val 5000"/>
-            </a:avLst>
-          </a:prstGeom>
-          <a:solidFill>
-            <a:schemeClr val="bg2"/>
-          </a:solidFill>
-          <a:ln w="19050">
-            <a:solidFill>
-              <a:schemeClr val="accent1"/>
-            </a:solidFill>
-            <a:prstDash val="dash"/>
-          </a:ln>
-        </p:spPr>
-        <p:txBody>
-          <a:bodyPr/>
-          <a:lstStyle/>
-          <a:p>
-            <a:endParaRPr lang="en-US"/>
-          </a:p>
-        </p:txBody>
-      </p:sp>
-      <p:sp>
-        <p:nvSpPr>
-          <p:cNvPr id="4" name="Placeholder label confounder_comparison.png"/>
-          <p:cNvSpPr txBox="1"/>
-          <p:nvPr/>
-        </p:nvSpPr>
-        <p:spPr>
-          <a:xfrm>
-            <a:off x="457200" y="1280160"/>
-            <a:ext cx="5120640" cy="1828800"/>
-          </a:xfrm>
-          <a:prstGeom prst="rect">
-            <a:avLst/>
-          </a:prstGeom>
-          <a:noFill/>
-          <a:ln/>
-        </p:spPr>
-        <p:txBody>
-          <a:bodyPr wrap="square" lIns="1270" tIns="1270" rIns="1270" bIns="1270" rtlCol="0" anchor="ctr"/>
-          <a:lstStyle/>
-          <a:p>
-            <a:pPr marL="0" indent="0" algn="ctr">
-              <a:buNone/>
-            </a:pPr>
-            <a:r>
-              <a:rPr lang="en-US" sz="1400" b="1" dirty="0">
-                <a:solidFill>
-                  <a:schemeClr val="accent1"/>
-                </a:solidFill>
-              </a:rPr>
-              <a:t>confounder_comparison.png</a:t>
-            </a:r>
-            <a:endParaRPr lang="en-US" sz="1400" dirty="0"/>
-          </a:p>
-          <a:p>
-            <a:pPr marL="0" indent="0" algn="ctr">
-              <a:buNone/>
-            </a:pPr>
-            <a:r>
-              <a:rPr lang="en-US" sz="1100" dirty="0">
-                <a:solidFill>
-                  <a:schemeClr val="accent5"/>
-                </a:solidFill>
-              </a:rPr>
-              <a:t>Main visual</a:t>
-            </a:r>
-            <a:endParaRPr lang="en-US" sz="1400" dirty="0"/>
-          </a:p>
-        </p:txBody>
-      </p:sp>
-      <p:sp>
-        <p:nvSpPr>
-          <p:cNvPr id="5" name="Chart placeholder education_composition.png"/>
-          <p:cNvSpPr/>
-          <p:nvPr/>
-        </p:nvSpPr>
-        <p:spPr>
-          <a:xfrm>
-            <a:off x="5760720" y="1280160"/>
-            <a:ext cx="2926080" cy="1828800"/>
-          </a:xfrm>
-          <a:prstGeom prst="roundRect">
-            <a:avLst>
-              <a:gd name="adj" fmla="val 5000"/>
-            </a:avLst>
-          </a:prstGeom>
-          <a:solidFill>
-            <a:schemeClr val="bg2"/>
-          </a:solidFill>
-          <a:ln w="19050">
-            <a:solidFill>
-              <a:schemeClr val="accent1"/>
-            </a:solidFill>
-            <a:prstDash val="dash"/>
-          </a:ln>
-        </p:spPr>
-        <p:txBody>
-          <a:bodyPr/>
-          <a:lstStyle/>
-          <a:p>
-            <a:endParaRPr lang="en-US"/>
-          </a:p>
-        </p:txBody>
-      </p:sp>
-      <p:sp>
-        <p:nvSpPr>
-          <p:cNvPr id="6" name="Placeholder label education_composition.png"/>
-          <p:cNvSpPr txBox="1"/>
-          <p:nvPr/>
-        </p:nvSpPr>
-        <p:spPr>
-          <a:xfrm>
-            <a:off x="5760720" y="1280160"/>
-            <a:ext cx="2926080" cy="1828800"/>
-          </a:xfrm>
-          <a:prstGeom prst="rect">
-            <a:avLst/>
-          </a:prstGeom>
-          <a:noFill/>
-          <a:ln/>
-        </p:spPr>
-        <p:txBody>
-          <a:bodyPr wrap="square" lIns="1270" tIns="1270" rIns="1270" bIns="1270" rtlCol="0" anchor="ctr"/>
-          <a:lstStyle/>
-          <a:p>
-            <a:pPr marL="0" indent="0" algn="ctr">
-              <a:buNone/>
-            </a:pPr>
-            <a:r>
-              <a:rPr lang="en-US" sz="1400" b="1" dirty="0">
-                <a:solidFill>
-                  <a:schemeClr val="accent1"/>
-                </a:solidFill>
-              </a:rPr>
-              <a:t>education_composition.png</a:t>
-            </a:r>
-            <a:endParaRPr lang="en-US" sz="1400" dirty="0"/>
-          </a:p>
-          <a:p>
-            <a:pPr marL="0" indent="0" algn="ctr">
-              <a:buNone/>
-            </a:pPr>
-            <a:r>
-              <a:rPr lang="en-US" sz="1100" dirty="0">
-                <a:solidFill>
-                  <a:schemeClr val="accent5"/>
-                </a:solidFill>
-              </a:rPr>
-              <a:t>Reveal afterward, or crop education panel</a:t>
-            </a:r>
-            <a:endParaRPr lang="en-US" sz="1400" dirty="0"/>
+            <a:r>
+              <a:rPr lang="en-US" dirty="0"/>
+              <a:t>Could Differences in Age, Income, and Education Help Explain the Gap?</a:t>
+            </a:r>
+            <a:br>
+              <a:rPr lang="en-US" dirty="0"/>
+            </a:br>
+            <a:endParaRPr lang="en-US" dirty="0"/>
           </a:p>
         </p:txBody>
       </p:sp>
@@ -9813,14 +9648,14 @@
           <p:nvPr>
             <p:extLst>
               <p:ext uri="{D42A27DB-BD31-4B8C-83A1-F6EECF244321}">
-                <p14:modId xmlns:p14="http://schemas.microsoft.com/office/powerpoint/2010/main" val="1579011935"/>
+                <p14:modId xmlns:p14="http://schemas.microsoft.com/office/powerpoint/2010/main" val="4197732272"/>
               </p:ext>
             </p:extLst>
           </p:nvPr>
         </p:nvGraphicFramePr>
         <p:xfrm>
-          <a:off x="457200" y="3218688"/>
-          <a:ext cx="8229600" cy="914400"/>
+          <a:off x="457200" y="3479292"/>
+          <a:ext cx="8229600" cy="1024128"/>
         </p:xfrm>
         <a:graphic>
           <a:graphicData uri="http://schemas.openxmlformats.org/drawingml/2006/table">
@@ -10603,7 +10438,7 @@
         </p:nvSpPr>
         <p:spPr>
           <a:xfrm>
-            <a:off x="457200" y="4389120"/>
+            <a:off x="457200" y="4549140"/>
             <a:ext cx="8229600" cy="320040"/>
           </a:xfrm>
           <a:prstGeom prst="rect">
@@ -10628,42 +10463,6 @@
               <a:t>These differences motivate statistical adjustment.</a:t>
             </a:r>
             <a:endParaRPr lang="en-US" sz="1400" dirty="0"/>
-          </a:p>
-        </p:txBody>
-      </p:sp>
-      <p:sp>
-        <p:nvSpPr>
-          <p:cNvPr id="9" name="Footer"/>
-          <p:cNvSpPr txBox="1"/>
-          <p:nvPr/>
-        </p:nvSpPr>
-        <p:spPr>
-          <a:xfrm>
-            <a:off x="457200" y="4681728"/>
-            <a:ext cx="7680960" cy="365760"/>
-          </a:xfrm>
-          <a:prstGeom prst="rect">
-            <a:avLst/>
-          </a:prstGeom>
-          <a:noFill/>
-          <a:ln/>
-        </p:spPr>
-        <p:txBody>
-          <a:bodyPr wrap="square" lIns="0" tIns="0" rIns="0" bIns="0" rtlCol="0" anchor="ctr"/>
-          <a:lstStyle/>
-          <a:p>
-            <a:pPr marL="0" indent="0">
-              <a:buNone/>
-            </a:pPr>
-            <a:r>
-              <a:rPr lang="en-US" sz="1100" dirty="0">
-                <a:solidFill>
-                  <a:schemeClr val="accent5"/>
-                </a:solidFill>
-              </a:rPr>
-              <a:t>Source: NSFG 2022–2023. Weighted estimates. Analysis n = 5,195.</a:t>
-            </a:r>
-            <a:endParaRPr lang="en-US" sz="1100" dirty="0"/>
           </a:p>
         </p:txBody>
       </p:sp>
@@ -10687,7 +10486,7 @@
           </a:prstGeom>
           <a:extLst>
             <a:ext uri="{C572A759-6A51-4108-AA02-DFA0A04FC94B}">
-              <ma14:wrappingTextBoxFlag xmlns:ma14="http://schemas.microsoft.com/office/mac/drawingml/2011/main" xmlns="" val="0"/>
+              <ma14:wrappingTextBoxFlag xmlns="" xmlns:ma14="http://schemas.microsoft.com/office/mac/drawingml/2011/main" val="0"/>
             </a:ext>
           </a:extLst>
         </p:spPr>
@@ -10706,12 +10505,72 @@
             <a:pPr algn="l"/>
             <a:fld id="{F7021451-1387-4CA6-816F-3879F97B5CBC}" type="slidenum">
               <a:rPr lang="en-US" b="0"/>
-              <a:t>7</a:t>
+              <a:t>6</a:t>
             </a:fld>
             <a:endParaRPr lang="en-US"/>
           </a:p>
         </p:txBody>
       </p:sp>
+      <p:pic>
+        <p:nvPicPr>
+          <p:cNvPr id="11" name="Picture 10" descr="A comparison of a bar chart&#10;&#10;AI-generated content may be incorrect.">
+            <a:extLst>
+              <a:ext uri="{FF2B5EF4-FFF2-40B4-BE49-F238E27FC236}">
+                <a16:creationId xmlns:a16="http://schemas.microsoft.com/office/drawing/2014/main" id="{8309AC1A-33C4-5A90-045F-E9A55954AF4F}"/>
+              </a:ext>
+            </a:extLst>
+          </p:cNvPr>
+          <p:cNvPicPr>
+            <a:picLocks noChangeAspect="1"/>
+          </p:cNvPicPr>
+          <p:nvPr/>
+        </p:nvPicPr>
+        <p:blipFill>
+          <a:blip r:embed="rId3"/>
+          <a:stretch>
+            <a:fillRect/>
+          </a:stretch>
+        </p:blipFill>
+        <p:spPr>
+          <a:xfrm>
+            <a:off x="513348" y="1243584"/>
+            <a:ext cx="4781815" cy="2075688"/>
+          </a:xfrm>
+          <a:prstGeom prst="rect">
+            <a:avLst/>
+          </a:prstGeom>
+        </p:spPr>
+      </p:pic>
+      <p:pic>
+        <p:nvPicPr>
+          <p:cNvPr id="13" name="Picture 12" descr="A graph of blue squares&#10;&#10;AI-generated content may be incorrect.">
+            <a:extLst>
+              <a:ext uri="{FF2B5EF4-FFF2-40B4-BE49-F238E27FC236}">
+                <a16:creationId xmlns:a16="http://schemas.microsoft.com/office/drawing/2014/main" id="{7D4B351D-23DF-DD06-FE1C-9B2694B2B2B3}"/>
+              </a:ext>
+            </a:extLst>
+          </p:cNvPr>
+          <p:cNvPicPr>
+            <a:picLocks noChangeAspect="1"/>
+          </p:cNvPicPr>
+          <p:nvPr/>
+        </p:nvPicPr>
+        <p:blipFill>
+          <a:blip r:embed="rId4"/>
+          <a:stretch>
+            <a:fillRect/>
+          </a:stretch>
+        </p:blipFill>
+        <p:spPr>
+          <a:xfrm>
+            <a:off x="5498228" y="1348740"/>
+            <a:ext cx="3445245" cy="1707941"/>
+          </a:xfrm>
+          <a:prstGeom prst="rect">
+            <a:avLst/>
+          </a:prstGeom>
+        </p:spPr>
+      </p:pic>
     </p:spTree>
   </p:cSld>
   <p:clrMapOvr>
@@ -10720,12 +10579,18 @@
 </p:sld>
 </file>
 
-<file path=ppt/slides/slide8.xml><?xml version="1.0" encoding="utf-8"?>
+<file path=ppt/slides/slide7.xml><?xml version="1.0" encoding="utf-8"?>
 <p:sld xmlns:a="http://schemas.openxmlformats.org/drawingml/2006/main" xmlns:r="http://schemas.openxmlformats.org/officeDocument/2006/relationships" xmlns:p="http://schemas.openxmlformats.org/presentationml/2006/main">
-  <p:cSld name="Slide 8">
+  <p:cSld>
     <p:spTree>
       <p:nvGrpSpPr>
-        <p:cNvPr id="1" name=""/>
+        <p:cNvPr id="1" name="">
+          <a:extLst>
+            <a:ext uri="{FF2B5EF4-FFF2-40B4-BE49-F238E27FC236}">
+              <a16:creationId xmlns:a16="http://schemas.microsoft.com/office/drawing/2014/main" id="{DC16FA19-818E-FDE1-9B18-895E2E0B5B9B}"/>
+            </a:ext>
+          </a:extLst>
+        </p:cNvPr>
         <p:cNvGrpSpPr/>
         <p:nvPr/>
       </p:nvGrpSpPr>
@@ -10739,7 +10604,13 @@
       </p:grpSpPr>
       <p:sp>
         <p:nvSpPr>
-          <p:cNvPr id="2" name="Text 0"/>
+          <p:cNvPr id="2" name="Text 0">
+            <a:extLst>
+              <a:ext uri="{FF2B5EF4-FFF2-40B4-BE49-F238E27FC236}">
+                <a16:creationId xmlns:a16="http://schemas.microsoft.com/office/drawing/2014/main" id="{DEC63845-2B4E-798A-A928-F52B22B6DCC7}"/>
+              </a:ext>
+            </a:extLst>
+          </p:cNvPr>
           <p:cNvSpPr>
             <a:spLocks noGrp="1"/>
           </p:cNvSpPr>
@@ -10749,7 +10620,7 @@
         </p:nvSpPr>
         <p:spPr>
           <a:xfrm>
-            <a:off x="457200" y="274320"/>
+            <a:off x="457200" y="410008"/>
             <a:ext cx="8229600" cy="868680"/>
           </a:xfrm>
           <a:prstGeom prst="rect">
@@ -10762,7 +10633,7 @@
           <a:bodyPr wrap="square" lIns="0" tIns="0" rIns="0" bIns="0" rtlCol="0" anchor="t"/>
           <a:lstStyle/>
           <a:p>
-            <a:pPr marL="0" indent="0" algn="l">
+            <a:pPr marL="0" indent="0" algn="ctr">
               <a:buNone/>
             </a:pPr>
             <a:r>
@@ -10771,7 +10642,22 @@
                   <a:schemeClr val="tx2"/>
                 </a:solidFill>
               </a:rPr>
-              <a:t>Help Receipt Also Varies with Age, Income, and Education</a:t>
+              <a:t>Help Receipt Also Varies with </a:t>
+            </a:r>
+            <a:br>
+              <a:rPr lang="en-US" sz="2800" b="1" dirty="0">
+                <a:solidFill>
+                  <a:schemeClr val="tx2"/>
+                </a:solidFill>
+              </a:rPr>
+            </a:br>
+            <a:r>
+              <a:rPr lang="en-US" sz="2800" b="1" dirty="0">
+                <a:solidFill>
+                  <a:schemeClr val="tx2"/>
+                </a:solidFill>
+              </a:rPr>
+              <a:t>Age, Income, and Education</a:t>
             </a:r>
             <a:endParaRPr lang="en-US" sz="2800" dirty="0"/>
           </a:p>
@@ -10779,14 +10665,20 @@
       </p:sp>
       <p:sp>
         <p:nvSpPr>
-          <p:cNvPr id="3" name="Panel card 1"/>
+          <p:cNvPr id="3" name="Panel card 1">
+            <a:extLst>
+              <a:ext uri="{FF2B5EF4-FFF2-40B4-BE49-F238E27FC236}">
+                <a16:creationId xmlns:a16="http://schemas.microsoft.com/office/drawing/2014/main" id="{874883CF-BEBE-96E4-0D1A-38C7A22446B8}"/>
+              </a:ext>
+            </a:extLst>
+          </p:cNvPr>
           <p:cNvSpPr/>
           <p:nvPr/>
         </p:nvSpPr>
         <p:spPr>
           <a:xfrm>
-            <a:off x="457200" y="1234440"/>
-            <a:ext cx="2596896" cy="3200400"/>
+            <a:off x="177944" y="1606270"/>
+            <a:ext cx="2804128" cy="2584422"/>
           </a:xfrm>
           <a:prstGeom prst="roundRect">
             <a:avLst>
@@ -10813,13 +10705,19 @@
       </p:sp>
       <p:sp>
         <p:nvSpPr>
-          <p:cNvPr id="4" name="Panel heading 1"/>
+          <p:cNvPr id="4" name="Panel heading 1">
+            <a:extLst>
+              <a:ext uri="{FF2B5EF4-FFF2-40B4-BE49-F238E27FC236}">
+                <a16:creationId xmlns:a16="http://schemas.microsoft.com/office/drawing/2014/main" id="{0F7084C4-75F4-99AA-990B-9C182396A295}"/>
+              </a:ext>
+            </a:extLst>
+          </p:cNvPr>
           <p:cNvSpPr txBox="1"/>
           <p:nvPr/>
         </p:nvSpPr>
         <p:spPr>
           <a:xfrm>
-            <a:off x="594360" y="1307592"/>
+            <a:off x="447552" y="1669774"/>
             <a:ext cx="2322576" cy="365760"/>
           </a:xfrm>
           <a:prstGeom prst="rect">
@@ -10849,98 +10747,20 @@
       </p:sp>
       <p:sp>
         <p:nvSpPr>
-          <p:cNvPr id="5" name="Chart placeholder help_by_age_group.png"/>
-          <p:cNvSpPr/>
-          <p:nvPr/>
-        </p:nvSpPr>
-        <p:spPr>
-          <a:xfrm>
-            <a:off x="566928" y="1737360"/>
-            <a:ext cx="2377440" cy="1645920"/>
-          </a:xfrm>
-          <a:prstGeom prst="roundRect">
-            <a:avLst>
-              <a:gd name="adj" fmla="val 5556"/>
-            </a:avLst>
-          </a:prstGeom>
-          <a:solidFill>
-            <a:schemeClr val="bg2"/>
-          </a:solidFill>
-          <a:ln w="19050">
-            <a:solidFill>
-              <a:schemeClr val="accent1"/>
-            </a:solidFill>
-            <a:prstDash val="dash"/>
-          </a:ln>
-        </p:spPr>
-        <p:txBody>
-          <a:bodyPr/>
-          <a:lstStyle/>
-          <a:p>
-            <a:endParaRPr lang="en-US"/>
-          </a:p>
-        </p:txBody>
-      </p:sp>
-      <p:sp>
-        <p:nvSpPr>
-          <p:cNvPr id="6" name="Placeholder label help_by_age_group.png"/>
+          <p:cNvPr id="7" name="Panel annotation 1">
+            <a:extLst>
+              <a:ext uri="{FF2B5EF4-FFF2-40B4-BE49-F238E27FC236}">
+                <a16:creationId xmlns:a16="http://schemas.microsoft.com/office/drawing/2014/main" id="{2D6F9400-141D-8DC9-31FA-A9D54C382C08}"/>
+              </a:ext>
+            </a:extLst>
+          </p:cNvPr>
           <p:cNvSpPr txBox="1"/>
           <p:nvPr/>
         </p:nvSpPr>
         <p:spPr>
           <a:xfrm>
-            <a:off x="566928" y="1737360"/>
-            <a:ext cx="2377440" cy="1645920"/>
-          </a:xfrm>
-          <a:prstGeom prst="rect">
-            <a:avLst/>
-          </a:prstGeom>
-          <a:noFill/>
-          <a:ln/>
-        </p:spPr>
-        <p:txBody>
-          <a:bodyPr wrap="square" lIns="1270" tIns="1270" rIns="1270" bIns="1270" rtlCol="0" anchor="ctr"/>
-          <a:lstStyle/>
-          <a:p>
-            <a:pPr marL="0" indent="0" algn="ctr">
-              <a:buNone/>
-            </a:pPr>
-            <a:r>
-              <a:rPr lang="en-US" sz="1400" b="1" dirty="0">
-                <a:solidFill>
-                  <a:schemeClr val="accent1"/>
-                </a:solidFill>
-              </a:rPr>
-              <a:t>help_by_age_group.png</a:t>
-            </a:r>
-            <a:endParaRPr lang="en-US" sz="1400" dirty="0"/>
-          </a:p>
-          <a:p>
-            <a:pPr marL="0" indent="0" algn="ctr">
-              <a:buNone/>
-            </a:pPr>
-            <a:r>
-              <a:rPr lang="en-US" sz="1100" dirty="0">
-                <a:solidFill>
-                  <a:schemeClr val="accent5"/>
-                </a:solidFill>
-              </a:rPr>
-              <a:t>Chart placeholder</a:t>
-            </a:r>
-            <a:endParaRPr lang="en-US" sz="1400" dirty="0"/>
-          </a:p>
-        </p:txBody>
-      </p:sp>
-      <p:sp>
-        <p:nvSpPr>
-          <p:cNvPr id="7" name="Panel annotation 1"/>
-          <p:cNvSpPr txBox="1"/>
-          <p:nvPr/>
-        </p:nvSpPr>
-        <p:spPr>
-          <a:xfrm>
-            <a:off x="594360" y="3474720"/>
-            <a:ext cx="2322576" cy="868680"/>
+            <a:off x="418720" y="3683989"/>
+            <a:ext cx="2322576" cy="504305"/>
           </a:xfrm>
           <a:prstGeom prst="rect">
             <a:avLst/>
@@ -10952,6 +10772,19 @@
           <a:bodyPr wrap="square" lIns="0" tIns="0" rIns="0" bIns="0" rtlCol="0" anchor="t"/>
           <a:lstStyle/>
           <a:p>
+            <a:pPr marL="0" indent="0" algn="ctr">
+              <a:buNone/>
+            </a:pPr>
+            <a:r>
+              <a:rPr lang="en-US" sz="1400" dirty="0">
+                <a:solidFill>
+                  <a:schemeClr val="tx1"/>
+                </a:solidFill>
+              </a:rPr>
+              <a:t>1.5% at 15 - 24, </a:t>
+            </a:r>
+          </a:p>
+          <a:p>
             <a:pPr marL="0" indent="0">
               <a:buNone/>
             </a:pPr>
@@ -10961,7 +10794,7 @@
                   <a:schemeClr val="tx1"/>
                 </a:solidFill>
               </a:rPr>
-              <a:t>1.5% at 15–24, compared with 15.5% at 35–44</a:t>
+              <a:t>compared with 15.5% at 35 - 44</a:t>
             </a:r>
             <a:endParaRPr lang="en-US" sz="1400" dirty="0"/>
           </a:p>
@@ -10969,14 +10802,20 @@
       </p:sp>
       <p:sp>
         <p:nvSpPr>
-          <p:cNvPr id="8" name="Panel card 2"/>
+          <p:cNvPr id="8" name="Panel card 2">
+            <a:extLst>
+              <a:ext uri="{FF2B5EF4-FFF2-40B4-BE49-F238E27FC236}">
+                <a16:creationId xmlns:a16="http://schemas.microsoft.com/office/drawing/2014/main" id="{30AD1AEC-E0D9-0099-FB64-AC8853DA7EEC}"/>
+              </a:ext>
+            </a:extLst>
+          </p:cNvPr>
           <p:cNvSpPr/>
           <p:nvPr/>
         </p:nvSpPr>
         <p:spPr>
           <a:xfrm>
-            <a:off x="3273552" y="1234440"/>
-            <a:ext cx="2596896" cy="3200400"/>
+            <a:off x="3174196" y="1603873"/>
+            <a:ext cx="2804128" cy="2584422"/>
           </a:xfrm>
           <a:prstGeom prst="roundRect">
             <a:avLst>
@@ -11003,13 +10842,19 @@
       </p:sp>
       <p:sp>
         <p:nvSpPr>
-          <p:cNvPr id="9" name="Panel heading 2"/>
+          <p:cNvPr id="9" name="Panel heading 2">
+            <a:extLst>
+              <a:ext uri="{FF2B5EF4-FFF2-40B4-BE49-F238E27FC236}">
+                <a16:creationId xmlns:a16="http://schemas.microsoft.com/office/drawing/2014/main" id="{64EB0511-B993-DC81-0C0A-05145EE730AB}"/>
+              </a:ext>
+            </a:extLst>
+          </p:cNvPr>
           <p:cNvSpPr txBox="1"/>
           <p:nvPr/>
         </p:nvSpPr>
         <p:spPr>
           <a:xfrm>
-            <a:off x="3410712" y="1307592"/>
+            <a:off x="3542042" y="1652580"/>
             <a:ext cx="2322576" cy="365760"/>
           </a:xfrm>
           <a:prstGeom prst="rect">
@@ -11039,98 +10884,20 @@
       </p:sp>
       <p:sp>
         <p:nvSpPr>
-          <p:cNvPr id="10" name="Chart placeholder help_by_income_group.png"/>
-          <p:cNvSpPr/>
-          <p:nvPr/>
-        </p:nvSpPr>
-        <p:spPr>
-          <a:xfrm>
-            <a:off x="3383280" y="1737360"/>
-            <a:ext cx="2377440" cy="1645920"/>
-          </a:xfrm>
-          <a:prstGeom prst="roundRect">
-            <a:avLst>
-              <a:gd name="adj" fmla="val 5556"/>
-            </a:avLst>
-          </a:prstGeom>
-          <a:solidFill>
-            <a:schemeClr val="bg2"/>
-          </a:solidFill>
-          <a:ln w="19050">
-            <a:solidFill>
-              <a:schemeClr val="accent1"/>
-            </a:solidFill>
-            <a:prstDash val="dash"/>
-          </a:ln>
-        </p:spPr>
-        <p:txBody>
-          <a:bodyPr/>
-          <a:lstStyle/>
-          <a:p>
-            <a:endParaRPr lang="en-US"/>
-          </a:p>
-        </p:txBody>
-      </p:sp>
-      <p:sp>
-        <p:nvSpPr>
-          <p:cNvPr id="11" name="Placeholder label help_by_income_group.png"/>
+          <p:cNvPr id="12" name="Panel annotation 2">
+            <a:extLst>
+              <a:ext uri="{FF2B5EF4-FFF2-40B4-BE49-F238E27FC236}">
+                <a16:creationId xmlns:a16="http://schemas.microsoft.com/office/drawing/2014/main" id="{87F0816A-2CEE-251C-7B81-6DD9C81F3A00}"/>
+              </a:ext>
+            </a:extLst>
+          </p:cNvPr>
           <p:cNvSpPr txBox="1"/>
           <p:nvPr/>
         </p:nvSpPr>
         <p:spPr>
           <a:xfrm>
-            <a:off x="3383280" y="1737360"/>
-            <a:ext cx="2377440" cy="1645920"/>
-          </a:xfrm>
-          <a:prstGeom prst="rect">
-            <a:avLst/>
-          </a:prstGeom>
-          <a:noFill/>
-          <a:ln/>
-        </p:spPr>
-        <p:txBody>
-          <a:bodyPr wrap="square" lIns="1270" tIns="1270" rIns="1270" bIns="1270" rtlCol="0" anchor="ctr"/>
-          <a:lstStyle/>
-          <a:p>
-            <a:pPr marL="0" indent="0" algn="ctr">
-              <a:buNone/>
-            </a:pPr>
-            <a:r>
-              <a:rPr lang="en-US" sz="1400" b="1" dirty="0">
-                <a:solidFill>
-                  <a:schemeClr val="accent1"/>
-                </a:solidFill>
-              </a:rPr>
-              <a:t>help_by_income_group.png</a:t>
-            </a:r>
-            <a:endParaRPr lang="en-US" sz="1400" dirty="0"/>
-          </a:p>
-          <a:p>
-            <a:pPr marL="0" indent="0" algn="ctr">
-              <a:buNone/>
-            </a:pPr>
-            <a:r>
-              <a:rPr lang="en-US" sz="1100" dirty="0">
-                <a:solidFill>
-                  <a:schemeClr val="accent5"/>
-                </a:solidFill>
-              </a:rPr>
-              <a:t>Chart placeholder</a:t>
-            </a:r>
-            <a:endParaRPr lang="en-US" sz="1400" dirty="0"/>
-          </a:p>
-        </p:txBody>
-      </p:sp>
-      <p:sp>
-        <p:nvSpPr>
-          <p:cNvPr id="12" name="Panel annotation 2"/>
-          <p:cNvSpPr txBox="1"/>
-          <p:nvPr/>
-        </p:nvSpPr>
-        <p:spPr>
-          <a:xfrm>
-            <a:off x="3410712" y="3474720"/>
-            <a:ext cx="2322576" cy="868680"/>
+            <a:off x="3240420" y="3683990"/>
+            <a:ext cx="2624198" cy="504305"/>
           </a:xfrm>
           <a:prstGeom prst="rect">
             <a:avLst/>
@@ -11142,7 +10909,7 @@
           <a:bodyPr wrap="square" lIns="0" tIns="0" rIns="0" bIns="0" rtlCol="0" anchor="t"/>
           <a:lstStyle/>
           <a:p>
-            <a:pPr marL="0" indent="0">
+            <a:pPr marL="0" indent="0" algn="ctr">
               <a:buNone/>
             </a:pPr>
             <a:r>
@@ -11159,14 +10926,131 @@
       </p:sp>
       <p:sp>
         <p:nvSpPr>
-          <p:cNvPr id="13" name="Panel card 3"/>
+          <p:cNvPr id="25" name="Slide Number Placeholder 0">
+            <a:extLst>
+              <a:ext uri="{FF2B5EF4-FFF2-40B4-BE49-F238E27FC236}">
+                <a16:creationId xmlns:a16="http://schemas.microsoft.com/office/drawing/2014/main" id="{C526386D-4BCD-DFAA-8F80-83CBBCEAB5CE}"/>
+              </a:ext>
+            </a:extLst>
+          </p:cNvPr>
+          <p:cNvSpPr>
+            <a:spLocks noGrp="1"/>
+          </p:cNvSpPr>
+          <p:nvPr>
+            <p:ph type="sldNum" sz="quarter" idx="4294967295"/>
+          </p:nvPr>
+        </p:nvSpPr>
+        <p:spPr>
+          <a:xfrm>
+            <a:off x="8321040" y="4754880"/>
+            <a:ext cx="365760" cy="274320"/>
+          </a:xfrm>
+          <a:prstGeom prst="rect">
+            <a:avLst/>
+          </a:prstGeom>
+          <a:extLst>
+            <a:ext uri="{C572A759-6A51-4108-AA02-DFA0A04FC94B}">
+              <ma14:wrappingTextBoxFlag xmlns="" xmlns:ma14="http://schemas.microsoft.com/office/mac/drawingml/2011/main" val="0"/>
+            </a:ext>
+          </a:extLst>
+        </p:spPr>
+        <p:txBody>
+          <a:bodyPr/>
+          <a:lstStyle>
+            <a:lvl1pPr>
+              <a:defRPr sz="1100">
+                <a:solidFill>
+                  <a:srgbClr val="6B6068"/>
+                </a:solidFill>
+              </a:defRPr>
+            </a:lvl1pPr>
+          </a:lstStyle>
+          <a:p>
+            <a:pPr algn="l"/>
+            <a:fld id="{F7021451-1387-4CA6-816F-3879F97B5CBC}" type="slidenum">
+              <a:rPr lang="en-US" b="0"/>
+              <a:t>7</a:t>
+            </a:fld>
+            <a:endParaRPr lang="en-US"/>
+          </a:p>
+        </p:txBody>
+      </p:sp>
+      <p:pic>
+        <p:nvPicPr>
+          <p:cNvPr id="20" name="Picture 19" descr="A graph of a bar graph&#10;&#10;AI-generated content may be incorrect.">
+            <a:extLst>
+              <a:ext uri="{FF2B5EF4-FFF2-40B4-BE49-F238E27FC236}">
+                <a16:creationId xmlns:a16="http://schemas.microsoft.com/office/drawing/2014/main" id="{B8045F61-3E5B-2712-A65D-65E4DEF00AF5}"/>
+              </a:ext>
+            </a:extLst>
+          </p:cNvPr>
+          <p:cNvPicPr>
+            <a:picLocks noChangeAspect="1"/>
+          </p:cNvPicPr>
+          <p:nvPr/>
+        </p:nvPicPr>
+        <p:blipFill>
+          <a:blip r:embed="rId3"/>
+          <a:stretch>
+            <a:fillRect/>
+          </a:stretch>
+        </p:blipFill>
+        <p:spPr>
+          <a:xfrm>
+            <a:off x="246908" y="2063613"/>
+            <a:ext cx="2624199" cy="1439607"/>
+          </a:xfrm>
+          <a:prstGeom prst="rect">
+            <a:avLst/>
+          </a:prstGeom>
+        </p:spPr>
+      </p:pic>
+      <p:pic>
+        <p:nvPicPr>
+          <p:cNvPr id="24" name="Picture 23" descr="A graph of blue rectangles&#10;&#10;AI-generated content may be incorrect.">
+            <a:extLst>
+              <a:ext uri="{FF2B5EF4-FFF2-40B4-BE49-F238E27FC236}">
+                <a16:creationId xmlns:a16="http://schemas.microsoft.com/office/drawing/2014/main" id="{037C94B4-0F4F-3C4D-1A04-5AB00FEBEB2D}"/>
+              </a:ext>
+            </a:extLst>
+          </p:cNvPr>
+          <p:cNvPicPr>
+            <a:picLocks noChangeAspect="1"/>
+          </p:cNvPicPr>
+          <p:nvPr/>
+        </p:nvPicPr>
+        <p:blipFill>
+          <a:blip r:embed="rId4"/>
+          <a:stretch>
+            <a:fillRect/>
+          </a:stretch>
+        </p:blipFill>
+        <p:spPr>
+          <a:xfrm>
+            <a:off x="3240420" y="2054973"/>
+            <a:ext cx="2624199" cy="1439608"/>
+          </a:xfrm>
+          <a:prstGeom prst="rect">
+            <a:avLst/>
+          </a:prstGeom>
+        </p:spPr>
+      </p:pic>
+      <p:sp>
+        <p:nvSpPr>
+          <p:cNvPr id="19" name="Panel card 3">
+            <a:extLst>
+              <a:ext uri="{FF2B5EF4-FFF2-40B4-BE49-F238E27FC236}">
+                <a16:creationId xmlns:a16="http://schemas.microsoft.com/office/drawing/2014/main" id="{33461023-3BD4-DB93-1B40-8A5AB7643DB9}"/>
+              </a:ext>
+            </a:extLst>
+          </p:cNvPr>
           <p:cNvSpPr/>
           <p:nvPr/>
         </p:nvSpPr>
         <p:spPr>
           <a:xfrm>
-            <a:off x="6089904" y="1234440"/>
-            <a:ext cx="2596896" cy="3200400"/>
+            <a:off x="6170448" y="1603873"/>
+            <a:ext cx="2804128" cy="2584422"/>
           </a:xfrm>
           <a:prstGeom prst="roundRect">
             <a:avLst>
@@ -11193,13 +11077,19 @@
       </p:sp>
       <p:sp>
         <p:nvSpPr>
-          <p:cNvPr id="14" name="Panel heading 3"/>
+          <p:cNvPr id="21" name="Panel heading 3">
+            <a:extLst>
+              <a:ext uri="{FF2B5EF4-FFF2-40B4-BE49-F238E27FC236}">
+                <a16:creationId xmlns:a16="http://schemas.microsoft.com/office/drawing/2014/main" id="{F129CB31-016A-C650-E0B2-425B1C4C83A6}"/>
+              </a:ext>
+            </a:extLst>
+          </p:cNvPr>
           <p:cNvSpPr txBox="1"/>
           <p:nvPr/>
         </p:nvSpPr>
         <p:spPr>
           <a:xfrm>
-            <a:off x="6227064" y="1307592"/>
+            <a:off x="6720964" y="1669774"/>
             <a:ext cx="2322576" cy="365760"/>
           </a:xfrm>
           <a:prstGeom prst="rect">
@@ -11229,98 +11119,20 @@
       </p:sp>
       <p:sp>
         <p:nvSpPr>
-          <p:cNvPr id="15" name="Chart placeholder help_by_education.png"/>
-          <p:cNvSpPr/>
-          <p:nvPr/>
-        </p:nvSpPr>
-        <p:spPr>
-          <a:xfrm>
-            <a:off x="6199632" y="1737360"/>
-            <a:ext cx="2377440" cy="1645920"/>
-          </a:xfrm>
-          <a:prstGeom prst="roundRect">
-            <a:avLst>
-              <a:gd name="adj" fmla="val 5556"/>
-            </a:avLst>
-          </a:prstGeom>
-          <a:solidFill>
-            <a:schemeClr val="bg2"/>
-          </a:solidFill>
-          <a:ln w="19050">
-            <a:solidFill>
-              <a:schemeClr val="accent1"/>
-            </a:solidFill>
-            <a:prstDash val="dash"/>
-          </a:ln>
-        </p:spPr>
-        <p:txBody>
-          <a:bodyPr/>
-          <a:lstStyle/>
-          <a:p>
-            <a:endParaRPr lang="en-US"/>
-          </a:p>
-        </p:txBody>
-      </p:sp>
-      <p:sp>
-        <p:nvSpPr>
-          <p:cNvPr id="16" name="Placeholder label help_by_education.png"/>
+          <p:cNvPr id="23" name="Panel annotation 3">
+            <a:extLst>
+              <a:ext uri="{FF2B5EF4-FFF2-40B4-BE49-F238E27FC236}">
+                <a16:creationId xmlns:a16="http://schemas.microsoft.com/office/drawing/2014/main" id="{6748EC2F-03CB-532C-9A0F-87C8BF9F4829}"/>
+              </a:ext>
+            </a:extLst>
+          </p:cNvPr>
           <p:cNvSpPr txBox="1"/>
           <p:nvPr/>
         </p:nvSpPr>
         <p:spPr>
           <a:xfrm>
-            <a:off x="6199632" y="1737360"/>
-            <a:ext cx="2377440" cy="1645920"/>
-          </a:xfrm>
-          <a:prstGeom prst="rect">
-            <a:avLst/>
-          </a:prstGeom>
-          <a:noFill/>
-          <a:ln/>
-        </p:spPr>
-        <p:txBody>
-          <a:bodyPr wrap="square" lIns="1270" tIns="1270" rIns="1270" bIns="1270" rtlCol="0" anchor="ctr"/>
-          <a:lstStyle/>
-          <a:p>
-            <a:pPr marL="0" indent="0" algn="ctr">
-              <a:buNone/>
-            </a:pPr>
-            <a:r>
-              <a:rPr lang="en-US" sz="1400" b="1" dirty="0">
-                <a:solidFill>
-                  <a:schemeClr val="accent1"/>
-                </a:solidFill>
-              </a:rPr>
-              <a:t>help_by_education.png</a:t>
-            </a:r>
-            <a:endParaRPr lang="en-US" sz="1400" dirty="0"/>
-          </a:p>
-          <a:p>
-            <a:pPr marL="0" indent="0" algn="ctr">
-              <a:buNone/>
-            </a:pPr>
-            <a:r>
-              <a:rPr lang="en-US" sz="1100" dirty="0">
-                <a:solidFill>
-                  <a:schemeClr val="accent5"/>
-                </a:solidFill>
-              </a:rPr>
-              <a:t>Chart placeholder</a:t>
-            </a:r>
-            <a:endParaRPr lang="en-US" sz="1400" dirty="0"/>
-          </a:p>
-        </p:txBody>
-      </p:sp>
-      <p:sp>
-        <p:nvSpPr>
-          <p:cNvPr id="17" name="Panel annotation 3"/>
-          <p:cNvSpPr txBox="1"/>
-          <p:nvPr/>
-        </p:nvSpPr>
-        <p:spPr>
-          <a:xfrm>
-            <a:off x="6227064" y="3474720"/>
-            <a:ext cx="2322576" cy="868680"/>
+            <a:off x="6281471" y="3689917"/>
+            <a:ext cx="2693105" cy="411978"/>
           </a:xfrm>
           <a:prstGeom prst="rect">
             <a:avLst/>
@@ -11332,7 +11144,7 @@
           <a:bodyPr wrap="square" lIns="0" tIns="0" rIns="0" bIns="0" rtlCol="0" anchor="t"/>
           <a:lstStyle/>
           <a:p>
-            <a:pPr marL="0" indent="0">
+            <a:pPr marL="0" indent="0" algn="ctr">
               <a:buNone/>
             </a:pPr>
             <a:r>
@@ -11347,88 +11159,42 @@
           </a:p>
         </p:txBody>
       </p:sp>
-      <p:sp>
-        <p:nvSpPr>
-          <p:cNvPr id="18" name="Footer"/>
-          <p:cNvSpPr txBox="1"/>
+      <p:pic>
+        <p:nvPicPr>
+          <p:cNvPr id="26" name="Picture 25" descr="A graph of a bar graph&#10;&#10;AI-generated content may be incorrect.">
+            <a:extLst>
+              <a:ext uri="{FF2B5EF4-FFF2-40B4-BE49-F238E27FC236}">
+                <a16:creationId xmlns:a16="http://schemas.microsoft.com/office/drawing/2014/main" id="{DE36A22E-F3FB-8488-9CBB-9B8A8894E96A}"/>
+              </a:ext>
+            </a:extLst>
+          </p:cNvPr>
+          <p:cNvPicPr>
+            <a:picLocks noChangeAspect="1"/>
+          </p:cNvPicPr>
           <p:nvPr/>
-        </p:nvSpPr>
+        </p:nvPicPr>
+        <p:blipFill>
+          <a:blip r:embed="rId5"/>
+          <a:stretch>
+            <a:fillRect/>
+          </a:stretch>
+        </p:blipFill>
         <p:spPr>
           <a:xfrm>
-            <a:off x="457200" y="4681728"/>
-            <a:ext cx="7680960" cy="365760"/>
+            <a:off x="6288349" y="2060900"/>
+            <a:ext cx="2620087" cy="1439608"/>
           </a:xfrm>
           <a:prstGeom prst="rect">
             <a:avLst/>
           </a:prstGeom>
-          <a:noFill/>
-          <a:ln/>
         </p:spPr>
-        <p:txBody>
-          <a:bodyPr wrap="square" lIns="0" tIns="0" rIns="0" bIns="0" rtlCol="0" anchor="ctr"/>
-          <a:lstStyle/>
-          <a:p>
-            <a:pPr marL="0" indent="0">
-              <a:buNone/>
-            </a:pPr>
-            <a:r>
-              <a:rPr lang="en-US" sz="1100" dirty="0">
-                <a:solidFill>
-                  <a:schemeClr val="accent5"/>
-                </a:solidFill>
-              </a:rPr>
-              <a:t>Source: NSFG 2022–2023. Weighted estimates. Analysis n = 5,195.</a:t>
-            </a:r>
-            <a:endParaRPr lang="en-US" sz="1100" dirty="0"/>
-          </a:p>
-        </p:txBody>
-      </p:sp>
-      <p:sp>
-        <p:nvSpPr>
-          <p:cNvPr id="25" name="Slide Number Placeholder 0"/>
-          <p:cNvSpPr>
-            <a:spLocks noGrp="1"/>
-          </p:cNvSpPr>
-          <p:nvPr>
-            <p:ph type="sldNum" sz="quarter" idx="4294967295"/>
-          </p:nvPr>
-        </p:nvSpPr>
-        <p:spPr>
-          <a:xfrm>
-            <a:off x="8321040" y="4754880"/>
-            <a:ext cx="365760" cy="274320"/>
-          </a:xfrm>
-          <a:prstGeom prst="rect">
-            <a:avLst/>
-          </a:prstGeom>
-          <a:extLst>
-            <a:ext uri="{C572A759-6A51-4108-AA02-DFA0A04FC94B}">
-              <ma14:wrappingTextBoxFlag xmlns:ma14="http://schemas.microsoft.com/office/mac/drawingml/2011/main" xmlns="" val="0"/>
-            </a:ext>
-          </a:extLst>
-        </p:spPr>
-        <p:txBody>
-          <a:bodyPr/>
-          <a:lstStyle>
-            <a:lvl1pPr>
-              <a:defRPr sz="1100">
-                <a:solidFill>
-                  <a:srgbClr val="6B6068"/>
-                </a:solidFill>
-              </a:defRPr>
-            </a:lvl1pPr>
-          </a:lstStyle>
-          <a:p>
-            <a:pPr algn="l"/>
-            <a:fld id="{F7021451-1387-4CA6-816F-3879F97B5CBC}" type="slidenum">
-              <a:rPr lang="en-US" b="0"/>
-              <a:t>8</a:t>
-            </a:fld>
-            <a:endParaRPr lang="en-US"/>
-          </a:p>
-        </p:txBody>
-      </p:sp>
+      </p:pic>
     </p:spTree>
+    <p:extLst>
+      <p:ext uri="{BB962C8B-B14F-4D97-AF65-F5344CB8AC3E}">
+        <p14:creationId xmlns:p14="http://schemas.microsoft.com/office/powerpoint/2010/main" val="174808631"/>
+      </p:ext>
+    </p:extLst>
   </p:cSld>
   <p:clrMapOvr>
     <a:masterClrMapping/>
@@ -11436,7 +11202,7 @@
 </p:sld>
 </file>
 
-<file path=ppt/slides/slide9.xml><?xml version="1.0" encoding="utf-8"?>
+<file path=ppt/slides/slide8.xml><?xml version="1.0" encoding="utf-8"?>
 <p:sld xmlns:a="http://schemas.openxmlformats.org/drawingml/2006/main" xmlns:r="http://schemas.openxmlformats.org/officeDocument/2006/relationships" xmlns:p="http://schemas.openxmlformats.org/presentationml/2006/main">
   <p:cSld name="Slide 9">
     <p:spTree>
@@ -11465,7 +11231,7 @@
         </p:nvSpPr>
         <p:spPr>
           <a:xfrm>
-            <a:off x="457200" y="274320"/>
+            <a:off x="457200" y="460756"/>
             <a:ext cx="8229600" cy="868680"/>
           </a:xfrm>
           <a:prstGeom prst="rect">
@@ -11493,90 +11259,6 @@
           </a:p>
         </p:txBody>
       </p:sp>
-      <p:sp>
-        <p:nvSpPr>
-          <p:cNvPr id="3" name="Chart placeholder insurance_age_heatmap.png"/>
-          <p:cNvSpPr/>
-          <p:nvPr/>
-        </p:nvSpPr>
-        <p:spPr>
-          <a:xfrm>
-            <a:off x="457200" y="1325880"/>
-            <a:ext cx="4663440" cy="2880360"/>
-          </a:xfrm>
-          <a:prstGeom prst="roundRect">
-            <a:avLst>
-              <a:gd name="adj" fmla="val 3175"/>
-            </a:avLst>
-          </a:prstGeom>
-          <a:solidFill>
-            <a:schemeClr val="bg2"/>
-          </a:solidFill>
-          <a:ln w="19050">
-            <a:solidFill>
-              <a:schemeClr val="accent1"/>
-            </a:solidFill>
-            <a:prstDash val="dash"/>
-          </a:ln>
-        </p:spPr>
-        <p:txBody>
-          <a:bodyPr/>
-          <a:lstStyle/>
-          <a:p>
-            <a:endParaRPr lang="en-US"/>
-          </a:p>
-        </p:txBody>
-      </p:sp>
-      <p:sp>
-        <p:nvSpPr>
-          <p:cNvPr id="4" name="Placeholder label insurance_age_heatmap.png"/>
-          <p:cNvSpPr txBox="1"/>
-          <p:nvPr/>
-        </p:nvSpPr>
-        <p:spPr>
-          <a:xfrm>
-            <a:off x="457200" y="1325880"/>
-            <a:ext cx="4663440" cy="2880360"/>
-          </a:xfrm>
-          <a:prstGeom prst="rect">
-            <a:avLst/>
-          </a:prstGeom>
-          <a:noFill/>
-          <a:ln/>
-        </p:spPr>
-        <p:txBody>
-          <a:bodyPr wrap="square" lIns="1270" tIns="1270" rIns="1270" bIns="1270" rtlCol="0" anchor="ctr"/>
-          <a:lstStyle/>
-          <a:p>
-            <a:pPr marL="0" indent="0" algn="ctr">
-              <a:buNone/>
-            </a:pPr>
-            <a:r>
-              <a:rPr lang="en-US" sz="1400" b="1" dirty="0">
-                <a:solidFill>
-                  <a:schemeClr val="accent1"/>
-                </a:solidFill>
-              </a:rPr>
-              <a:t>insurance_age_heatmap.png</a:t>
-            </a:r>
-            <a:endParaRPr lang="en-US" sz="1400" dirty="0"/>
-          </a:p>
-          <a:p>
-            <a:pPr marL="0" indent="0" algn="ctr">
-              <a:buNone/>
-            </a:pPr>
-            <a:r>
-              <a:rPr lang="en-US" sz="1100" dirty="0">
-                <a:solidFill>
-                  <a:schemeClr val="accent5"/>
-                </a:solidFill>
-              </a:rPr>
-              <a:t>Highlight the private and Medicaid rows</a:t>
-            </a:r>
-            <a:endParaRPr lang="en-US" sz="1400" dirty="0"/>
-          </a:p>
-        </p:txBody>
-      </p:sp>
       <p:graphicFrame>
         <p:nvGraphicFramePr>
           <p:cNvPr id="10" name="Table 0"/>
@@ -11586,14 +11268,14 @@
           <p:nvPr>
             <p:extLst>
               <p:ext uri="{D42A27DB-BD31-4B8C-83A1-F6EECF244321}">
-                <p14:modId xmlns:p14="http://schemas.microsoft.com/office/powerpoint/2010/main" val="1579011935"/>
+                <p14:modId xmlns:p14="http://schemas.microsoft.com/office/powerpoint/2010/main" val="1671775674"/>
               </p:ext>
             </p:extLst>
           </p:nvPr>
         </p:nvGraphicFramePr>
         <p:xfrm>
           <a:off x="5394960" y="1325880"/>
-          <a:ext cx="3291840" cy="914400"/>
+          <a:ext cx="3291840" cy="1874520"/>
         </p:xfrm>
         <a:graphic>
           <a:graphicData uri="http://schemas.openxmlformats.org/drawingml/2006/table">
@@ -11827,7 +11509,7 @@
                             <a:srgbClr val="3A1F3D"/>
                           </a:solidFill>
                         </a:rPr>
-                        <a:t>25–34</a:t>
+                        <a:t>25 - 34</a:t>
                       </a:r>
                       <a:endParaRPr lang="en-US" sz="1100" dirty="0"/>
                     </a:p>
@@ -12011,7 +11693,7 @@
                             <a:srgbClr val="3A1F3D"/>
                           </a:solidFill>
                         </a:rPr>
-                        <a:t>35–44</a:t>
+                        <a:t>35 - 44</a:t>
                       </a:r>
                       <a:endParaRPr lang="en-US" sz="1100" dirty="0"/>
                     </a:p>
@@ -12195,7 +11877,7 @@
                             <a:srgbClr val="3A1F3D"/>
                           </a:solidFill>
                         </a:rPr>
-                        <a:t>45–50</a:t>
+                        <a:t>45 - 50</a:t>
                       </a:r>
                       <a:endParaRPr lang="en-US" sz="1100" dirty="0"/>
                     </a:p>
@@ -12432,7 +12114,7 @@
                   <a:srgbClr val="7B3F6E"/>
                 </a:solidFill>
               </a:rPr>
-              <a:t>Exception at 15–24: </a:t>
+              <a:t>Exception at 15 - 24: </a:t>
             </a:r>
             <a:r>
               <a:rPr lang="en-US" sz="1400" dirty="0">
@@ -12484,14 +12166,154 @@
       </p:sp>
       <p:sp>
         <p:nvSpPr>
-          <p:cNvPr id="9" name="Footer"/>
+          <p:cNvPr id="25" name="Slide Number Placeholder 0"/>
+          <p:cNvSpPr>
+            <a:spLocks noGrp="1"/>
+          </p:cNvSpPr>
+          <p:nvPr>
+            <p:ph type="sldNum" sz="quarter" idx="4294967295"/>
+          </p:nvPr>
+        </p:nvSpPr>
+        <p:spPr>
+          <a:xfrm>
+            <a:off x="8321040" y="4754880"/>
+            <a:ext cx="365760" cy="274320"/>
+          </a:xfrm>
+          <a:prstGeom prst="rect">
+            <a:avLst/>
+          </a:prstGeom>
+          <a:extLst>
+            <a:ext uri="{C572A759-6A51-4108-AA02-DFA0A04FC94B}">
+              <ma14:wrappingTextBoxFlag xmlns="" xmlns:ma14="http://schemas.microsoft.com/office/mac/drawingml/2011/main" val="0"/>
+            </a:ext>
+          </a:extLst>
+        </p:spPr>
+        <p:txBody>
+          <a:bodyPr/>
+          <a:lstStyle>
+            <a:lvl1pPr>
+              <a:defRPr sz="1100">
+                <a:solidFill>
+                  <a:srgbClr val="6B6068"/>
+                </a:solidFill>
+              </a:defRPr>
+            </a:lvl1pPr>
+          </a:lstStyle>
+          <a:p>
+            <a:pPr algn="l"/>
+            <a:fld id="{F7021451-1387-4CA6-816F-3879F97B5CBC}" type="slidenum">
+              <a:rPr lang="en-US" b="0"/>
+              <a:t>8</a:t>
+            </a:fld>
+            <a:endParaRPr lang="en-US"/>
+          </a:p>
+        </p:txBody>
+      </p:sp>
+      <p:pic>
+        <p:nvPicPr>
+          <p:cNvPr id="11" name="Picture 10" descr="A blue squares with white text&#10;&#10;AI-generated content may be incorrect.">
+            <a:extLst>
+              <a:ext uri="{FF2B5EF4-FFF2-40B4-BE49-F238E27FC236}">
+                <a16:creationId xmlns:a16="http://schemas.microsoft.com/office/drawing/2014/main" id="{66F0CC79-D5C2-7A3C-165C-02F0835DEF0D}"/>
+              </a:ext>
+            </a:extLst>
+          </p:cNvPr>
+          <p:cNvPicPr>
+            <a:picLocks noChangeAspect="1"/>
+          </p:cNvPicPr>
+          <p:nvPr/>
+        </p:nvPicPr>
+        <p:blipFill>
+          <a:blip r:embed="rId3"/>
+          <a:stretch>
+            <a:fillRect/>
+          </a:stretch>
+        </p:blipFill>
+        <p:spPr>
+          <a:xfrm>
+            <a:off x="213040" y="1361440"/>
+            <a:ext cx="5044760" cy="2799080"/>
+          </a:xfrm>
+          <a:prstGeom prst="rect">
+            <a:avLst/>
+          </a:prstGeom>
+        </p:spPr>
+      </p:pic>
+    </p:spTree>
+  </p:cSld>
+  <p:clrMapOvr>
+    <a:masterClrMapping/>
+  </p:clrMapOvr>
+</p:sld>
+</file>
+
+<file path=ppt/slides/slide9.xml><?xml version="1.0" encoding="utf-8"?>
+<p:sld xmlns:a="http://schemas.openxmlformats.org/drawingml/2006/main" xmlns:r="http://schemas.openxmlformats.org/officeDocument/2006/relationships" xmlns:p="http://schemas.openxmlformats.org/presentationml/2006/main">
+  <p:cSld name="Slide 10">
+    <p:spTree>
+      <p:nvGrpSpPr>
+        <p:cNvPr id="1" name=""/>
+        <p:cNvGrpSpPr/>
+        <p:nvPr/>
+      </p:nvGrpSpPr>
+      <p:grpSpPr>
+        <a:xfrm>
+          <a:off x="0" y="0"/>
+          <a:ext cx="0" cy="0"/>
+          <a:chOff x="0" y="0"/>
+          <a:chExt cx="0" cy="0"/>
+        </a:xfrm>
+      </p:grpSpPr>
+      <p:sp>
+        <p:nvSpPr>
+          <p:cNvPr id="2" name="Text 0"/>
+          <p:cNvSpPr>
+            <a:spLocks noGrp="1"/>
+          </p:cNvSpPr>
+          <p:nvPr>
+            <p:ph type="title" idx="100" hasCustomPrompt="1"/>
+          </p:nvPr>
+        </p:nvSpPr>
+        <p:spPr>
+          <a:xfrm>
+            <a:off x="457200" y="388620"/>
+            <a:ext cx="8229600" cy="868680"/>
+          </a:xfrm>
+          <a:prstGeom prst="rect">
+            <a:avLst/>
+          </a:prstGeom>
+          <a:noFill/>
+          <a:ln/>
+        </p:spPr>
+        <p:txBody>
+          <a:bodyPr wrap="square" lIns="0" tIns="0" rIns="0" bIns="0" rtlCol="0" anchor="t"/>
+          <a:lstStyle/>
+          <a:p>
+            <a:pPr marL="0" indent="0" algn="l">
+              <a:buNone/>
+            </a:pPr>
+            <a:r>
+              <a:rPr lang="en-US" sz="2800" b="1" dirty="0">
+                <a:solidFill>
+                  <a:schemeClr val="tx2"/>
+                </a:solidFill>
+              </a:rPr>
+              <a:t>Statistical Approach</a:t>
+            </a:r>
+            <a:endParaRPr lang="en-US" sz="2800" dirty="0"/>
+          </a:p>
+        </p:txBody>
+      </p:sp>
+      <p:sp>
+        <p:nvSpPr>
+          <p:cNvPr id="3" name="Method subtitle"/>
           <p:cNvSpPr txBox="1"/>
           <p:nvPr/>
         </p:nvSpPr>
         <p:spPr>
           <a:xfrm>
-            <a:off x="457200" y="4681728"/>
-            <a:ext cx="7680960" cy="365760"/>
+            <a:off x="457200" y="777240"/>
+            <a:ext cx="2844800" cy="365760"/>
           </a:xfrm>
           <a:prstGeom prst="rect">
             <a:avLst/>
@@ -12507,14 +12329,1265 @@
               <a:buNone/>
             </a:pPr>
             <a:r>
-              <a:rPr lang="en-US" sz="1100" dirty="0">
-                <a:solidFill>
-                  <a:schemeClr val="accent5"/>
-                </a:solidFill>
-              </a:rPr>
-              <a:t>Source: NSFG 2022–2023. Weighted estimates. Analysis n = 5,195.</a:t>
-            </a:r>
-            <a:endParaRPr lang="en-US" sz="1100" dirty="0"/>
+              <a:rPr lang="en-US" sz="1400" b="1" dirty="0">
+                <a:solidFill>
+                  <a:schemeClr val="accent1"/>
+                </a:solidFill>
+              </a:rPr>
+              <a:t>Survey-weighted logistic regression</a:t>
+            </a:r>
+            <a:endParaRPr lang="en-US" sz="1400" dirty="0"/>
+          </a:p>
+        </p:txBody>
+      </p:sp>
+      <p:graphicFrame>
+        <p:nvGraphicFramePr>
+          <p:cNvPr id="11" name="Table 0"/>
+          <p:cNvGraphicFramePr>
+            <a:graphicFrameLocks noGrp="1"/>
+          </p:cNvGraphicFramePr>
+          <p:nvPr>
+            <p:extLst>
+              <p:ext uri="{D42A27DB-BD31-4B8C-83A1-F6EECF244321}">
+                <p14:modId xmlns:p14="http://schemas.microsoft.com/office/powerpoint/2010/main" val="1902882308"/>
+              </p:ext>
+            </p:extLst>
+          </p:nvPr>
+        </p:nvGraphicFramePr>
+        <p:xfrm>
+          <a:off x="457200" y="1325880"/>
+          <a:ext cx="5212080" cy="2697480"/>
+        </p:xfrm>
+        <a:graphic>
+          <a:graphicData uri="http://schemas.openxmlformats.org/drawingml/2006/table">
+            <a:tbl>
+              <a:tblPr/>
+              <a:tblGrid>
+                <a:gridCol w="1921933">
+                  <a:extLst>
+                    <a:ext uri="{9D8B030D-6E8A-4147-A177-3AD203B41FA5}">
+                      <a16:colId xmlns:a16="http://schemas.microsoft.com/office/drawing/2014/main" val="20000"/>
+                    </a:ext>
+                  </a:extLst>
+                </a:gridCol>
+                <a:gridCol w="3290147">
+                  <a:extLst>
+                    <a:ext uri="{9D8B030D-6E8A-4147-A177-3AD203B41FA5}">
+                      <a16:colId xmlns:a16="http://schemas.microsoft.com/office/drawing/2014/main" val="20001"/>
+                    </a:ext>
+                  </a:extLst>
+                </a:gridCol>
+              </a:tblGrid>
+              <a:tr h="365760">
+                <a:tc>
+                  <a:txBody>
+                    <a:bodyPr/>
+                    <a:lstStyle/>
+                    <a:p>
+                      <a:pPr marL="0" indent="0">
+                        <a:buNone/>
+                      </a:pPr>
+                      <a:r>
+                        <a:rPr lang="en-US" sz="1400" b="1" dirty="0">
+                          <a:solidFill>
+                            <a:srgbClr val="FFFFFF"/>
+                          </a:solidFill>
+                        </a:rPr>
+                        <a:t>Model component</a:t>
+                      </a:r>
+                      <a:endParaRPr lang="en-US" sz="1400" dirty="0"/>
+                    </a:p>
+                  </a:txBody>
+                  <a:tcPr marL="109728" marR="109728" marT="36576" marB="36576" anchor="ctr">
+                    <a:lnL w="9525" cap="flat" cmpd="sng" algn="ctr">
+                      <a:solidFill>
+                        <a:srgbClr val="EBD8CB"/>
+                      </a:solidFill>
+                      <a:prstDash val="solid"/>
+                      <a:round/>
+                      <a:headEnd type="none" w="med" len="med"/>
+                      <a:tailEnd type="none" w="med" len="med"/>
+                    </a:lnL>
+                    <a:lnR w="9525" cap="flat" cmpd="sng" algn="ctr">
+                      <a:solidFill>
+                        <a:srgbClr val="EBD8CB"/>
+                      </a:solidFill>
+                      <a:prstDash val="solid"/>
+                      <a:round/>
+                      <a:headEnd type="none" w="med" len="med"/>
+                      <a:tailEnd type="none" w="med" len="med"/>
+                    </a:lnR>
+                    <a:lnT w="9525" cap="flat" cmpd="sng" algn="ctr">
+                      <a:solidFill>
+                        <a:srgbClr val="EBD8CB"/>
+                      </a:solidFill>
+                      <a:prstDash val="solid"/>
+                      <a:round/>
+                      <a:headEnd type="none" w="med" len="med"/>
+                      <a:tailEnd type="none" w="med" len="med"/>
+                    </a:lnT>
+                    <a:lnB w="9525" cap="flat" cmpd="sng" algn="ctr">
+                      <a:solidFill>
+                        <a:srgbClr val="EBD8CB"/>
+                      </a:solidFill>
+                      <a:prstDash val="solid"/>
+                      <a:round/>
+                      <a:headEnd type="none" w="med" len="med"/>
+                      <a:tailEnd type="none" w="med" len="med"/>
+                    </a:lnB>
+                    <a:solidFill>
+                      <a:srgbClr val="3A1F3D"/>
+                    </a:solidFill>
+                  </a:tcPr>
+                </a:tc>
+                <a:tc>
+                  <a:txBody>
+                    <a:bodyPr/>
+                    <a:lstStyle/>
+                    <a:p>
+                      <a:pPr marL="0" indent="0">
+                        <a:buNone/>
+                      </a:pPr>
+                      <a:r>
+                        <a:rPr lang="en-US" sz="1400" b="1" dirty="0">
+                          <a:solidFill>
+                            <a:srgbClr val="FFFFFF"/>
+                          </a:solidFill>
+                        </a:rPr>
+                        <a:t>Specification</a:t>
+                      </a:r>
+                      <a:endParaRPr lang="en-US" sz="1400" dirty="0"/>
+                    </a:p>
+                  </a:txBody>
+                  <a:tcPr marL="109728" marR="109728" marT="36576" marB="36576" anchor="ctr">
+                    <a:lnL w="9525" cap="flat" cmpd="sng" algn="ctr">
+                      <a:solidFill>
+                        <a:srgbClr val="EBD8CB"/>
+                      </a:solidFill>
+                      <a:prstDash val="solid"/>
+                      <a:round/>
+                      <a:headEnd type="none" w="med" len="med"/>
+                      <a:tailEnd type="none" w="med" len="med"/>
+                    </a:lnL>
+                    <a:lnR w="9525" cap="flat" cmpd="sng" algn="ctr">
+                      <a:solidFill>
+                        <a:srgbClr val="EBD8CB"/>
+                      </a:solidFill>
+                      <a:prstDash val="solid"/>
+                      <a:round/>
+                      <a:headEnd type="none" w="med" len="med"/>
+                      <a:tailEnd type="none" w="med" len="med"/>
+                    </a:lnR>
+                    <a:lnT w="9525" cap="flat" cmpd="sng" algn="ctr">
+                      <a:solidFill>
+                        <a:srgbClr val="EBD8CB"/>
+                      </a:solidFill>
+                      <a:prstDash val="solid"/>
+                      <a:round/>
+                      <a:headEnd type="none" w="med" len="med"/>
+                      <a:tailEnd type="none" w="med" len="med"/>
+                    </a:lnT>
+                    <a:lnB w="9525" cap="flat" cmpd="sng" algn="ctr">
+                      <a:solidFill>
+                        <a:srgbClr val="EBD8CB"/>
+                      </a:solidFill>
+                      <a:prstDash val="solid"/>
+                      <a:round/>
+                      <a:headEnd type="none" w="med" len="med"/>
+                      <a:tailEnd type="none" w="med" len="med"/>
+                    </a:lnB>
+                    <a:solidFill>
+                      <a:srgbClr val="3A1F3D"/>
+                    </a:solidFill>
+                  </a:tcPr>
+                </a:tc>
+                <a:extLst>
+                  <a:ext uri="{0D108BD9-81ED-4DB2-BD59-A6C34878D82A}">
+                    <a16:rowId xmlns:a16="http://schemas.microsoft.com/office/drawing/2014/main" val="10000"/>
+                  </a:ext>
+                </a:extLst>
+              </a:tr>
+              <a:tr h="502920">
+                <a:tc>
+                  <a:txBody>
+                    <a:bodyPr/>
+                    <a:lstStyle/>
+                    <a:p>
+                      <a:pPr marL="0" indent="0">
+                        <a:buNone/>
+                      </a:pPr>
+                      <a:r>
+                        <a:rPr lang="en-US" sz="1400" b="1" dirty="0">
+                          <a:solidFill>
+                            <a:srgbClr val="C8540F"/>
+                          </a:solidFill>
+                        </a:rPr>
+                        <a:t>Outcome</a:t>
+                      </a:r>
+                      <a:endParaRPr lang="en-US" sz="1400" dirty="0"/>
+                    </a:p>
+                  </a:txBody>
+                  <a:tcPr marL="109728" marR="109728" marT="36576" marB="36576" anchor="ctr">
+                    <a:lnL w="9525" cap="flat" cmpd="sng" algn="ctr">
+                      <a:solidFill>
+                        <a:srgbClr val="EBD8CB"/>
+                      </a:solidFill>
+                      <a:prstDash val="solid"/>
+                      <a:round/>
+                      <a:headEnd type="none" w="med" len="med"/>
+                      <a:tailEnd type="none" w="med" len="med"/>
+                    </a:lnL>
+                    <a:lnR w="9525" cap="flat" cmpd="sng" algn="ctr">
+                      <a:solidFill>
+                        <a:srgbClr val="EBD8CB"/>
+                      </a:solidFill>
+                      <a:prstDash val="solid"/>
+                      <a:round/>
+                      <a:headEnd type="none" w="med" len="med"/>
+                      <a:tailEnd type="none" w="med" len="med"/>
+                    </a:lnR>
+                    <a:lnT w="9525" cap="flat" cmpd="sng" algn="ctr">
+                      <a:solidFill>
+                        <a:srgbClr val="EBD8CB"/>
+                      </a:solidFill>
+                      <a:prstDash val="solid"/>
+                      <a:round/>
+                      <a:headEnd type="none" w="med" len="med"/>
+                      <a:tailEnd type="none" w="med" len="med"/>
+                    </a:lnT>
+                    <a:lnB w="9525" cap="flat" cmpd="sng" algn="ctr">
+                      <a:solidFill>
+                        <a:srgbClr val="EBD8CB"/>
+                      </a:solidFill>
+                      <a:prstDash val="solid"/>
+                      <a:round/>
+                      <a:headEnd type="none" w="med" len="med"/>
+                      <a:tailEnd type="none" w="med" len="med"/>
+                    </a:lnB>
+                    <a:solidFill>
+                      <a:srgbClr val="FBEFE6"/>
+                    </a:solidFill>
+                  </a:tcPr>
+                </a:tc>
+                <a:tc>
+                  <a:txBody>
+                    <a:bodyPr/>
+                    <a:lstStyle/>
+                    <a:p>
+                      <a:pPr marL="0" indent="0">
+                        <a:buNone/>
+                      </a:pPr>
+                      <a:r>
+                        <a:rPr lang="en-US" sz="1400" dirty="0">
+                          <a:solidFill>
+                            <a:srgbClr val="2B2330"/>
+                          </a:solidFill>
+                        </a:rPr>
+                        <a:t>Ever received medical help: 1 = yes, 0 = no</a:t>
+                      </a:r>
+                      <a:endParaRPr lang="en-US" sz="1400" dirty="0"/>
+                    </a:p>
+                  </a:txBody>
+                  <a:tcPr marL="109728" marR="109728" marT="36576" marB="36576" anchor="ctr">
+                    <a:lnL w="9525" cap="flat" cmpd="sng" algn="ctr">
+                      <a:solidFill>
+                        <a:srgbClr val="EBD8CB"/>
+                      </a:solidFill>
+                      <a:prstDash val="solid"/>
+                      <a:round/>
+                      <a:headEnd type="none" w="med" len="med"/>
+                      <a:tailEnd type="none" w="med" len="med"/>
+                    </a:lnL>
+                    <a:lnR w="9525" cap="flat" cmpd="sng" algn="ctr">
+                      <a:solidFill>
+                        <a:srgbClr val="EBD8CB"/>
+                      </a:solidFill>
+                      <a:prstDash val="solid"/>
+                      <a:round/>
+                      <a:headEnd type="none" w="med" len="med"/>
+                      <a:tailEnd type="none" w="med" len="med"/>
+                    </a:lnR>
+                    <a:lnT w="9525" cap="flat" cmpd="sng" algn="ctr">
+                      <a:solidFill>
+                        <a:srgbClr val="EBD8CB"/>
+                      </a:solidFill>
+                      <a:prstDash val="solid"/>
+                      <a:round/>
+                      <a:headEnd type="none" w="med" len="med"/>
+                      <a:tailEnd type="none" w="med" len="med"/>
+                    </a:lnT>
+                    <a:lnB w="9525" cap="flat" cmpd="sng" algn="ctr">
+                      <a:solidFill>
+                        <a:srgbClr val="EBD8CB"/>
+                      </a:solidFill>
+                      <a:prstDash val="solid"/>
+                      <a:round/>
+                      <a:headEnd type="none" w="med" len="med"/>
+                      <a:tailEnd type="none" w="med" len="med"/>
+                    </a:lnB>
+                  </a:tcPr>
+                </a:tc>
+                <a:extLst>
+                  <a:ext uri="{0D108BD9-81ED-4DB2-BD59-A6C34878D82A}">
+                    <a16:rowId xmlns:a16="http://schemas.microsoft.com/office/drawing/2014/main" val="10001"/>
+                  </a:ext>
+                </a:extLst>
+              </a:tr>
+              <a:tr h="457200">
+                <a:tc>
+                  <a:txBody>
+                    <a:bodyPr/>
+                    <a:lstStyle/>
+                    <a:p>
+                      <a:pPr marL="0" indent="0">
+                        <a:buNone/>
+                      </a:pPr>
+                      <a:r>
+                        <a:rPr lang="en-US" sz="1400" b="1" dirty="0">
+                          <a:solidFill>
+                            <a:srgbClr val="C8540F"/>
+                          </a:solidFill>
+                        </a:rPr>
+                        <a:t>Main predictor</a:t>
+                      </a:r>
+                      <a:endParaRPr lang="en-US" sz="1400" dirty="0"/>
+                    </a:p>
+                  </a:txBody>
+                  <a:tcPr marL="109728" marR="109728" marT="36576" marB="36576" anchor="ctr">
+                    <a:lnL w="9525" cap="flat" cmpd="sng" algn="ctr">
+                      <a:solidFill>
+                        <a:srgbClr val="EBD8CB"/>
+                      </a:solidFill>
+                      <a:prstDash val="solid"/>
+                      <a:round/>
+                      <a:headEnd type="none" w="med" len="med"/>
+                      <a:tailEnd type="none" w="med" len="med"/>
+                    </a:lnL>
+                    <a:lnR w="9525" cap="flat" cmpd="sng" algn="ctr">
+                      <a:solidFill>
+                        <a:srgbClr val="EBD8CB"/>
+                      </a:solidFill>
+                      <a:prstDash val="solid"/>
+                      <a:round/>
+                      <a:headEnd type="none" w="med" len="med"/>
+                      <a:tailEnd type="none" w="med" len="med"/>
+                    </a:lnR>
+                    <a:lnT w="9525" cap="flat" cmpd="sng" algn="ctr">
+                      <a:solidFill>
+                        <a:srgbClr val="EBD8CB"/>
+                      </a:solidFill>
+                      <a:prstDash val="solid"/>
+                      <a:round/>
+                      <a:headEnd type="none" w="med" len="med"/>
+                      <a:tailEnd type="none" w="med" len="med"/>
+                    </a:lnT>
+                    <a:lnB w="9525" cap="flat" cmpd="sng" algn="ctr">
+                      <a:solidFill>
+                        <a:srgbClr val="EBD8CB"/>
+                      </a:solidFill>
+                      <a:prstDash val="solid"/>
+                      <a:round/>
+                      <a:headEnd type="none" w="med" len="med"/>
+                      <a:tailEnd type="none" w="med" len="med"/>
+                    </a:lnB>
+                    <a:solidFill>
+                      <a:srgbClr val="FBEFE6"/>
+                    </a:solidFill>
+                  </a:tcPr>
+                </a:tc>
+                <a:tc>
+                  <a:txBody>
+                    <a:bodyPr/>
+                    <a:lstStyle/>
+                    <a:p>
+                      <a:pPr marL="0" indent="0">
+                        <a:buNone/>
+                      </a:pPr>
+                      <a:r>
+                        <a:rPr lang="en-US" sz="1400" dirty="0">
+                          <a:solidFill>
+                            <a:srgbClr val="2B2330"/>
+                          </a:solidFill>
+                        </a:rPr>
+                        <a:t>Current insurance category</a:t>
+                      </a:r>
+                      <a:endParaRPr lang="en-US" sz="1400" dirty="0"/>
+                    </a:p>
+                  </a:txBody>
+                  <a:tcPr marL="109728" marR="109728" marT="36576" marB="36576" anchor="ctr">
+                    <a:lnL w="9525" cap="flat" cmpd="sng" algn="ctr">
+                      <a:solidFill>
+                        <a:srgbClr val="EBD8CB"/>
+                      </a:solidFill>
+                      <a:prstDash val="solid"/>
+                      <a:round/>
+                      <a:headEnd type="none" w="med" len="med"/>
+                      <a:tailEnd type="none" w="med" len="med"/>
+                    </a:lnL>
+                    <a:lnR w="9525" cap="flat" cmpd="sng" algn="ctr">
+                      <a:solidFill>
+                        <a:srgbClr val="EBD8CB"/>
+                      </a:solidFill>
+                      <a:prstDash val="solid"/>
+                      <a:round/>
+                      <a:headEnd type="none" w="med" len="med"/>
+                      <a:tailEnd type="none" w="med" len="med"/>
+                    </a:lnR>
+                    <a:lnT w="9525" cap="flat" cmpd="sng" algn="ctr">
+                      <a:solidFill>
+                        <a:srgbClr val="EBD8CB"/>
+                      </a:solidFill>
+                      <a:prstDash val="solid"/>
+                      <a:round/>
+                      <a:headEnd type="none" w="med" len="med"/>
+                      <a:tailEnd type="none" w="med" len="med"/>
+                    </a:lnT>
+                    <a:lnB w="9525" cap="flat" cmpd="sng" algn="ctr">
+                      <a:solidFill>
+                        <a:srgbClr val="EBD8CB"/>
+                      </a:solidFill>
+                      <a:prstDash val="solid"/>
+                      <a:round/>
+                      <a:headEnd type="none" w="med" len="med"/>
+                      <a:tailEnd type="none" w="med" len="med"/>
+                    </a:lnB>
+                  </a:tcPr>
+                </a:tc>
+                <a:extLst>
+                  <a:ext uri="{0D108BD9-81ED-4DB2-BD59-A6C34878D82A}">
+                    <a16:rowId xmlns:a16="http://schemas.microsoft.com/office/drawing/2014/main" val="10002"/>
+                  </a:ext>
+                </a:extLst>
+              </a:tr>
+              <a:tr h="457200">
+                <a:tc>
+                  <a:txBody>
+                    <a:bodyPr/>
+                    <a:lstStyle/>
+                    <a:p>
+                      <a:pPr marL="0" indent="0">
+                        <a:buNone/>
+                      </a:pPr>
+                      <a:r>
+                        <a:rPr lang="en-US" sz="1400" b="1" dirty="0">
+                          <a:solidFill>
+                            <a:srgbClr val="C8540F"/>
+                          </a:solidFill>
+                        </a:rPr>
+                        <a:t>Controls</a:t>
+                      </a:r>
+                      <a:endParaRPr lang="en-US" sz="1400" dirty="0"/>
+                    </a:p>
+                  </a:txBody>
+                  <a:tcPr marL="109728" marR="109728" marT="36576" marB="36576" anchor="ctr">
+                    <a:lnL w="9525" cap="flat" cmpd="sng" algn="ctr">
+                      <a:solidFill>
+                        <a:srgbClr val="EBD8CB"/>
+                      </a:solidFill>
+                      <a:prstDash val="solid"/>
+                      <a:round/>
+                      <a:headEnd type="none" w="med" len="med"/>
+                      <a:tailEnd type="none" w="med" len="med"/>
+                    </a:lnL>
+                    <a:lnR w="9525" cap="flat" cmpd="sng" algn="ctr">
+                      <a:solidFill>
+                        <a:srgbClr val="EBD8CB"/>
+                      </a:solidFill>
+                      <a:prstDash val="solid"/>
+                      <a:round/>
+                      <a:headEnd type="none" w="med" len="med"/>
+                      <a:tailEnd type="none" w="med" len="med"/>
+                    </a:lnR>
+                    <a:lnT w="9525" cap="flat" cmpd="sng" algn="ctr">
+                      <a:solidFill>
+                        <a:srgbClr val="EBD8CB"/>
+                      </a:solidFill>
+                      <a:prstDash val="solid"/>
+                      <a:round/>
+                      <a:headEnd type="none" w="med" len="med"/>
+                      <a:tailEnd type="none" w="med" len="med"/>
+                    </a:lnT>
+                    <a:lnB w="9525" cap="flat" cmpd="sng" algn="ctr">
+                      <a:solidFill>
+                        <a:srgbClr val="EBD8CB"/>
+                      </a:solidFill>
+                      <a:prstDash val="solid"/>
+                      <a:round/>
+                      <a:headEnd type="none" w="med" len="med"/>
+                      <a:tailEnd type="none" w="med" len="med"/>
+                    </a:lnB>
+                    <a:solidFill>
+                      <a:srgbClr val="FBEFE6"/>
+                    </a:solidFill>
+                  </a:tcPr>
+                </a:tc>
+                <a:tc>
+                  <a:txBody>
+                    <a:bodyPr/>
+                    <a:lstStyle/>
+                    <a:p>
+                      <a:pPr marL="0" indent="0">
+                        <a:buNone/>
+                      </a:pPr>
+                      <a:r>
+                        <a:rPr lang="en-US" sz="1400" dirty="0">
+                          <a:solidFill>
+                            <a:srgbClr val="2B2330"/>
+                          </a:solidFill>
+                        </a:rPr>
+                        <a:t>Age, income, education</a:t>
+                      </a:r>
+                      <a:endParaRPr lang="en-US" sz="1400" dirty="0"/>
+                    </a:p>
+                  </a:txBody>
+                  <a:tcPr marL="109728" marR="109728" marT="36576" marB="36576" anchor="ctr">
+                    <a:lnL w="9525" cap="flat" cmpd="sng" algn="ctr">
+                      <a:solidFill>
+                        <a:srgbClr val="EBD8CB"/>
+                      </a:solidFill>
+                      <a:prstDash val="solid"/>
+                      <a:round/>
+                      <a:headEnd type="none" w="med" len="med"/>
+                      <a:tailEnd type="none" w="med" len="med"/>
+                    </a:lnL>
+                    <a:lnR w="9525" cap="flat" cmpd="sng" algn="ctr">
+                      <a:solidFill>
+                        <a:srgbClr val="EBD8CB"/>
+                      </a:solidFill>
+                      <a:prstDash val="solid"/>
+                      <a:round/>
+                      <a:headEnd type="none" w="med" len="med"/>
+                      <a:tailEnd type="none" w="med" len="med"/>
+                    </a:lnR>
+                    <a:lnT w="9525" cap="flat" cmpd="sng" algn="ctr">
+                      <a:solidFill>
+                        <a:srgbClr val="EBD8CB"/>
+                      </a:solidFill>
+                      <a:prstDash val="solid"/>
+                      <a:round/>
+                      <a:headEnd type="none" w="med" len="med"/>
+                      <a:tailEnd type="none" w="med" len="med"/>
+                    </a:lnT>
+                    <a:lnB w="9525" cap="flat" cmpd="sng" algn="ctr">
+                      <a:solidFill>
+                        <a:srgbClr val="EBD8CB"/>
+                      </a:solidFill>
+                      <a:prstDash val="solid"/>
+                      <a:round/>
+                      <a:headEnd type="none" w="med" len="med"/>
+                      <a:tailEnd type="none" w="med" len="med"/>
+                    </a:lnB>
+                  </a:tcPr>
+                </a:tc>
+                <a:extLst>
+                  <a:ext uri="{0D108BD9-81ED-4DB2-BD59-A6C34878D82A}">
+                    <a16:rowId xmlns:a16="http://schemas.microsoft.com/office/drawing/2014/main" val="10003"/>
+                  </a:ext>
+                </a:extLst>
+              </a:tr>
+              <a:tr h="457200">
+                <a:tc>
+                  <a:txBody>
+                    <a:bodyPr/>
+                    <a:lstStyle/>
+                    <a:p>
+                      <a:pPr marL="0" indent="0">
+                        <a:buNone/>
+                      </a:pPr>
+                      <a:r>
+                        <a:rPr lang="en-US" sz="1400" b="1" dirty="0">
+                          <a:solidFill>
+                            <a:srgbClr val="C8540F"/>
+                          </a:solidFill>
+                        </a:rPr>
+                        <a:t>Insurance reference</a:t>
+                      </a:r>
+                      <a:endParaRPr lang="en-US" sz="1400" dirty="0"/>
+                    </a:p>
+                  </a:txBody>
+                  <a:tcPr marL="109728" marR="109728" marT="36576" marB="36576" anchor="ctr">
+                    <a:lnL w="9525" cap="flat" cmpd="sng" algn="ctr">
+                      <a:solidFill>
+                        <a:srgbClr val="EBD8CB"/>
+                      </a:solidFill>
+                      <a:prstDash val="solid"/>
+                      <a:round/>
+                      <a:headEnd type="none" w="med" len="med"/>
+                      <a:tailEnd type="none" w="med" len="med"/>
+                    </a:lnL>
+                    <a:lnR w="9525" cap="flat" cmpd="sng" algn="ctr">
+                      <a:solidFill>
+                        <a:srgbClr val="EBD8CB"/>
+                      </a:solidFill>
+                      <a:prstDash val="solid"/>
+                      <a:round/>
+                      <a:headEnd type="none" w="med" len="med"/>
+                      <a:tailEnd type="none" w="med" len="med"/>
+                    </a:lnR>
+                    <a:lnT w="9525" cap="flat" cmpd="sng" algn="ctr">
+                      <a:solidFill>
+                        <a:srgbClr val="EBD8CB"/>
+                      </a:solidFill>
+                      <a:prstDash val="solid"/>
+                      <a:round/>
+                      <a:headEnd type="none" w="med" len="med"/>
+                      <a:tailEnd type="none" w="med" len="med"/>
+                    </a:lnT>
+                    <a:lnB w="9525" cap="flat" cmpd="sng" algn="ctr">
+                      <a:solidFill>
+                        <a:srgbClr val="EBD8CB"/>
+                      </a:solidFill>
+                      <a:prstDash val="solid"/>
+                      <a:round/>
+                      <a:headEnd type="none" w="med" len="med"/>
+                      <a:tailEnd type="none" w="med" len="med"/>
+                    </a:lnB>
+                    <a:solidFill>
+                      <a:srgbClr val="FBEFE6"/>
+                    </a:solidFill>
+                  </a:tcPr>
+                </a:tc>
+                <a:tc>
+                  <a:txBody>
+                    <a:bodyPr/>
+                    <a:lstStyle/>
+                    <a:p>
+                      <a:pPr marL="0" indent="0">
+                        <a:buNone/>
+                      </a:pPr>
+                      <a:r>
+                        <a:rPr lang="en-US" sz="1400" dirty="0">
+                          <a:solidFill>
+                            <a:srgbClr val="2B2330"/>
+                          </a:solidFill>
+                        </a:rPr>
+                        <a:t>Private/Medi-Gap</a:t>
+                      </a:r>
+                      <a:endParaRPr lang="en-US" sz="1400" dirty="0"/>
+                    </a:p>
+                  </a:txBody>
+                  <a:tcPr marL="109728" marR="109728" marT="36576" marB="36576" anchor="ctr">
+                    <a:lnL w="9525" cap="flat" cmpd="sng" algn="ctr">
+                      <a:solidFill>
+                        <a:srgbClr val="EBD8CB"/>
+                      </a:solidFill>
+                      <a:prstDash val="solid"/>
+                      <a:round/>
+                      <a:headEnd type="none" w="med" len="med"/>
+                      <a:tailEnd type="none" w="med" len="med"/>
+                    </a:lnL>
+                    <a:lnR w="9525" cap="flat" cmpd="sng" algn="ctr">
+                      <a:solidFill>
+                        <a:srgbClr val="EBD8CB"/>
+                      </a:solidFill>
+                      <a:prstDash val="solid"/>
+                      <a:round/>
+                      <a:headEnd type="none" w="med" len="med"/>
+                      <a:tailEnd type="none" w="med" len="med"/>
+                    </a:lnR>
+                    <a:lnT w="9525" cap="flat" cmpd="sng" algn="ctr">
+                      <a:solidFill>
+                        <a:srgbClr val="EBD8CB"/>
+                      </a:solidFill>
+                      <a:prstDash val="solid"/>
+                      <a:round/>
+                      <a:headEnd type="none" w="med" len="med"/>
+                      <a:tailEnd type="none" w="med" len="med"/>
+                    </a:lnT>
+                    <a:lnB w="9525" cap="flat" cmpd="sng" algn="ctr">
+                      <a:solidFill>
+                        <a:srgbClr val="EBD8CB"/>
+                      </a:solidFill>
+                      <a:prstDash val="solid"/>
+                      <a:round/>
+                      <a:headEnd type="none" w="med" len="med"/>
+                      <a:tailEnd type="none" w="med" len="med"/>
+                    </a:lnB>
+                  </a:tcPr>
+                </a:tc>
+                <a:extLst>
+                  <a:ext uri="{0D108BD9-81ED-4DB2-BD59-A6C34878D82A}">
+                    <a16:rowId xmlns:a16="http://schemas.microsoft.com/office/drawing/2014/main" val="10004"/>
+                  </a:ext>
+                </a:extLst>
+              </a:tr>
+              <a:tr h="457200">
+                <a:tc>
+                  <a:txBody>
+                    <a:bodyPr/>
+                    <a:lstStyle/>
+                    <a:p>
+                      <a:pPr marL="0" indent="0">
+                        <a:buNone/>
+                      </a:pPr>
+                      <a:r>
+                        <a:rPr lang="en-US" sz="1400" b="1" dirty="0">
+                          <a:solidFill>
+                            <a:srgbClr val="C8540F"/>
+                          </a:solidFill>
+                        </a:rPr>
+                        <a:t>Education reference</a:t>
+                      </a:r>
+                      <a:endParaRPr lang="en-US" sz="1400" dirty="0"/>
+                    </a:p>
+                  </a:txBody>
+                  <a:tcPr marL="109728" marR="109728" marT="36576" marB="36576" anchor="ctr">
+                    <a:lnL w="9525" cap="flat" cmpd="sng" algn="ctr">
+                      <a:solidFill>
+                        <a:srgbClr val="EBD8CB"/>
+                      </a:solidFill>
+                      <a:prstDash val="solid"/>
+                      <a:round/>
+                      <a:headEnd type="none" w="med" len="med"/>
+                      <a:tailEnd type="none" w="med" len="med"/>
+                    </a:lnL>
+                    <a:lnR w="9525" cap="flat" cmpd="sng" algn="ctr">
+                      <a:solidFill>
+                        <a:srgbClr val="EBD8CB"/>
+                      </a:solidFill>
+                      <a:prstDash val="solid"/>
+                      <a:round/>
+                      <a:headEnd type="none" w="med" len="med"/>
+                      <a:tailEnd type="none" w="med" len="med"/>
+                    </a:lnR>
+                    <a:lnT w="9525" cap="flat" cmpd="sng" algn="ctr">
+                      <a:solidFill>
+                        <a:srgbClr val="EBD8CB"/>
+                      </a:solidFill>
+                      <a:prstDash val="solid"/>
+                      <a:round/>
+                      <a:headEnd type="none" w="med" len="med"/>
+                      <a:tailEnd type="none" w="med" len="med"/>
+                    </a:lnT>
+                    <a:lnB w="9525" cap="flat" cmpd="sng" algn="ctr">
+                      <a:solidFill>
+                        <a:srgbClr val="EBD8CB"/>
+                      </a:solidFill>
+                      <a:prstDash val="solid"/>
+                      <a:round/>
+                      <a:headEnd type="none" w="med" len="med"/>
+                      <a:tailEnd type="none" w="med" len="med"/>
+                    </a:lnB>
+                    <a:solidFill>
+                      <a:srgbClr val="FBEFE6"/>
+                    </a:solidFill>
+                  </a:tcPr>
+                </a:tc>
+                <a:tc>
+                  <a:txBody>
+                    <a:bodyPr/>
+                    <a:lstStyle/>
+                    <a:p>
+                      <a:pPr marL="0" indent="0">
+                        <a:buNone/>
+                      </a:pPr>
+                      <a:r>
+                        <a:rPr lang="en-US" sz="1400" dirty="0">
+                          <a:solidFill>
+                            <a:srgbClr val="2B2330"/>
+                          </a:solidFill>
+                        </a:rPr>
+                        <a:t>Less than high school</a:t>
+                      </a:r>
+                      <a:endParaRPr lang="en-US" sz="1400" dirty="0"/>
+                    </a:p>
+                  </a:txBody>
+                  <a:tcPr marL="109728" marR="109728" marT="36576" marB="36576" anchor="ctr">
+                    <a:lnL w="9525" cap="flat" cmpd="sng" algn="ctr">
+                      <a:solidFill>
+                        <a:srgbClr val="EBD8CB"/>
+                      </a:solidFill>
+                      <a:prstDash val="solid"/>
+                      <a:round/>
+                      <a:headEnd type="none" w="med" len="med"/>
+                      <a:tailEnd type="none" w="med" len="med"/>
+                    </a:lnL>
+                    <a:lnR w="9525" cap="flat" cmpd="sng" algn="ctr">
+                      <a:solidFill>
+                        <a:srgbClr val="EBD8CB"/>
+                      </a:solidFill>
+                      <a:prstDash val="solid"/>
+                      <a:round/>
+                      <a:headEnd type="none" w="med" len="med"/>
+                      <a:tailEnd type="none" w="med" len="med"/>
+                    </a:lnR>
+                    <a:lnT w="9525" cap="flat" cmpd="sng" algn="ctr">
+                      <a:solidFill>
+                        <a:srgbClr val="EBD8CB"/>
+                      </a:solidFill>
+                      <a:prstDash val="solid"/>
+                      <a:round/>
+                      <a:headEnd type="none" w="med" len="med"/>
+                      <a:tailEnd type="none" w="med" len="med"/>
+                    </a:lnT>
+                    <a:lnB w="9525" cap="flat" cmpd="sng" algn="ctr">
+                      <a:solidFill>
+                        <a:srgbClr val="EBD8CB"/>
+                      </a:solidFill>
+                      <a:prstDash val="solid"/>
+                      <a:round/>
+                      <a:headEnd type="none" w="med" len="med"/>
+                      <a:tailEnd type="none" w="med" len="med"/>
+                    </a:lnB>
+                  </a:tcPr>
+                </a:tc>
+                <a:extLst>
+                  <a:ext uri="{0D108BD9-81ED-4DB2-BD59-A6C34878D82A}">
+                    <a16:rowId xmlns:a16="http://schemas.microsoft.com/office/drawing/2014/main" val="10005"/>
+                  </a:ext>
+                </a:extLst>
+              </a:tr>
+            </a:tbl>
+          </a:graphicData>
+        </a:graphic>
+      </p:graphicFrame>
+      <p:sp>
+        <p:nvSpPr>
+          <p:cNvPr id="5" name="OR heading"/>
+          <p:cNvSpPr txBox="1"/>
+          <p:nvPr/>
+        </p:nvSpPr>
+        <p:spPr>
+          <a:xfrm>
+            <a:off x="5989320" y="777240"/>
+            <a:ext cx="2697480" cy="365760"/>
+          </a:xfrm>
+          <a:prstGeom prst="rect">
+            <a:avLst/>
+          </a:prstGeom>
+          <a:noFill/>
+          <a:ln/>
+        </p:spPr>
+        <p:txBody>
+          <a:bodyPr wrap="square" lIns="0" tIns="0" rIns="0" bIns="0" rtlCol="0" anchor="ctr"/>
+          <a:lstStyle/>
+          <a:p>
+            <a:pPr marL="0" indent="0">
+              <a:buNone/>
+            </a:pPr>
+            <a:r>
+              <a:rPr lang="en-US" sz="1400" b="1" dirty="0">
+                <a:solidFill>
+                  <a:schemeClr val="tx2"/>
+                </a:solidFill>
+              </a:rPr>
+              <a:t>Odds ratio interpretation</a:t>
+            </a:r>
+            <a:endParaRPr lang="en-US" sz="1400" dirty="0"/>
+          </a:p>
+        </p:txBody>
+      </p:sp>
+      <p:sp>
+        <p:nvSpPr>
+          <p:cNvPr id="6" name="OR card 1"/>
+          <p:cNvSpPr/>
+          <p:nvPr/>
+        </p:nvSpPr>
+        <p:spPr>
+          <a:xfrm>
+            <a:off x="5989320" y="1234440"/>
+            <a:ext cx="2697480" cy="731520"/>
+          </a:xfrm>
+          <a:prstGeom prst="roundRect">
+            <a:avLst>
+              <a:gd name="adj" fmla="val 15000"/>
+            </a:avLst>
+          </a:prstGeom>
+          <a:solidFill>
+            <a:schemeClr val="bg2"/>
+          </a:solidFill>
+          <a:ln w="12700">
+            <a:solidFill>
+              <a:schemeClr val="bg2"/>
+            </a:solidFill>
+            <a:prstDash val="solid"/>
+          </a:ln>
+        </p:spPr>
+        <p:txBody>
+          <a:bodyPr/>
+          <a:lstStyle/>
+          <a:p>
+            <a:endParaRPr lang="en-US"/>
+          </a:p>
+        </p:txBody>
+      </p:sp>
+      <p:sp>
+        <p:nvSpPr>
+          <p:cNvPr id="7" name="OR badge 1"/>
+          <p:cNvSpPr/>
+          <p:nvPr/>
+        </p:nvSpPr>
+        <p:spPr>
+          <a:xfrm>
+            <a:off x="6080760" y="1325880"/>
+            <a:ext cx="548640" cy="548640"/>
+          </a:xfrm>
+          <a:prstGeom prst="ellipse">
+            <a:avLst/>
+          </a:prstGeom>
+          <a:solidFill>
+            <a:schemeClr val="accent5"/>
+          </a:solidFill>
+          <a:ln w="12700">
+            <a:solidFill>
+              <a:schemeClr val="accent5"/>
+            </a:solidFill>
+            <a:prstDash val="solid"/>
+          </a:ln>
+        </p:spPr>
+        <p:txBody>
+          <a:bodyPr/>
+          <a:lstStyle/>
+          <a:p>
+            <a:endParaRPr lang="en-US"/>
+          </a:p>
+        </p:txBody>
+      </p:sp>
+      <p:sp>
+        <p:nvSpPr>
+          <p:cNvPr id="8" name="OR badge text 1"/>
+          <p:cNvSpPr txBox="1"/>
+          <p:nvPr/>
+        </p:nvSpPr>
+        <p:spPr>
+          <a:xfrm>
+            <a:off x="6080760" y="1325880"/>
+            <a:ext cx="548640" cy="548640"/>
+          </a:xfrm>
+          <a:prstGeom prst="rect">
+            <a:avLst/>
+          </a:prstGeom>
+          <a:noFill/>
+          <a:ln/>
+        </p:spPr>
+        <p:txBody>
+          <a:bodyPr wrap="square" lIns="0" tIns="0" rIns="0" bIns="0" rtlCol="0" anchor="ctr"/>
+          <a:lstStyle/>
+          <a:p>
+            <a:pPr marL="0" indent="0" algn="ctr">
+              <a:buNone/>
+            </a:pPr>
+            <a:r>
+              <a:rPr lang="en-US" sz="1400" b="1" dirty="0">
+                <a:solidFill>
+                  <a:schemeClr val="bg1"/>
+                </a:solidFill>
+              </a:rPr>
+              <a:t>1</a:t>
+            </a:r>
+            <a:endParaRPr lang="en-US" sz="1400" dirty="0"/>
+          </a:p>
+        </p:txBody>
+      </p:sp>
+      <p:sp>
+        <p:nvSpPr>
+          <p:cNvPr id="9" name="OR text 1"/>
+          <p:cNvSpPr txBox="1"/>
+          <p:nvPr/>
+        </p:nvSpPr>
+        <p:spPr>
+          <a:xfrm>
+            <a:off x="6720840" y="1280160"/>
+            <a:ext cx="1874520" cy="640080"/>
+          </a:xfrm>
+          <a:prstGeom prst="rect">
+            <a:avLst/>
+          </a:prstGeom>
+          <a:noFill/>
+          <a:ln/>
+        </p:spPr>
+        <p:txBody>
+          <a:bodyPr wrap="square" lIns="0" tIns="0" rIns="0" bIns="0" rtlCol="0" anchor="ctr"/>
+          <a:lstStyle/>
+          <a:p>
+            <a:pPr marL="0" indent="0">
+              <a:buNone/>
+            </a:pPr>
+            <a:r>
+              <a:rPr lang="en-US" sz="1400" dirty="0">
+                <a:solidFill>
+                  <a:schemeClr val="tx1"/>
+                </a:solidFill>
+              </a:rPr>
+              <a:t>Equal odds relative to the reference</a:t>
+            </a:r>
+            <a:endParaRPr lang="en-US" sz="1400" dirty="0"/>
+          </a:p>
+        </p:txBody>
+      </p:sp>
+      <p:sp>
+        <p:nvSpPr>
+          <p:cNvPr id="10" name="OR card 2"/>
+          <p:cNvSpPr/>
+          <p:nvPr/>
+        </p:nvSpPr>
+        <p:spPr>
+          <a:xfrm>
+            <a:off x="5989320" y="2103120"/>
+            <a:ext cx="2697480" cy="731520"/>
+          </a:xfrm>
+          <a:prstGeom prst="roundRect">
+            <a:avLst>
+              <a:gd name="adj" fmla="val 15000"/>
+            </a:avLst>
+          </a:prstGeom>
+          <a:solidFill>
+            <a:schemeClr val="bg2"/>
+          </a:solidFill>
+          <a:ln w="12700">
+            <a:solidFill>
+              <a:schemeClr val="bg2"/>
+            </a:solidFill>
+            <a:prstDash val="solid"/>
+          </a:ln>
+        </p:spPr>
+        <p:txBody>
+          <a:bodyPr/>
+          <a:lstStyle/>
+          <a:p>
+            <a:endParaRPr lang="en-US"/>
+          </a:p>
+        </p:txBody>
+      </p:sp>
+      <p:sp>
+        <p:nvSpPr>
+          <p:cNvPr id="4" name="OR badge 2"/>
+          <p:cNvSpPr/>
+          <p:nvPr/>
+        </p:nvSpPr>
+        <p:spPr>
+          <a:xfrm>
+            <a:off x="6080760" y="2194560"/>
+            <a:ext cx="548640" cy="548640"/>
+          </a:xfrm>
+          <a:prstGeom prst="ellipse">
+            <a:avLst/>
+          </a:prstGeom>
+          <a:solidFill>
+            <a:schemeClr val="accent2"/>
+          </a:solidFill>
+          <a:ln w="12700">
+            <a:solidFill>
+              <a:schemeClr val="accent2"/>
+            </a:solidFill>
+            <a:prstDash val="solid"/>
+          </a:ln>
+        </p:spPr>
+        <p:txBody>
+          <a:bodyPr/>
+          <a:lstStyle/>
+          <a:p>
+            <a:endParaRPr lang="en-US"/>
+          </a:p>
+        </p:txBody>
+      </p:sp>
+      <p:sp>
+        <p:nvSpPr>
+          <p:cNvPr id="12" name="OR badge text 2"/>
+          <p:cNvSpPr txBox="1"/>
+          <p:nvPr/>
+        </p:nvSpPr>
+        <p:spPr>
+          <a:xfrm>
+            <a:off x="6080760" y="2194560"/>
+            <a:ext cx="548640" cy="548640"/>
+          </a:xfrm>
+          <a:prstGeom prst="rect">
+            <a:avLst/>
+          </a:prstGeom>
+          <a:noFill/>
+          <a:ln/>
+        </p:spPr>
+        <p:txBody>
+          <a:bodyPr wrap="square" lIns="0" tIns="0" rIns="0" bIns="0" rtlCol="0" anchor="ctr"/>
+          <a:lstStyle/>
+          <a:p>
+            <a:pPr marL="0" indent="0" algn="ctr">
+              <a:buNone/>
+            </a:pPr>
+            <a:r>
+              <a:rPr lang="en-US" sz="1400" b="1" dirty="0">
+                <a:solidFill>
+                  <a:schemeClr val="bg1"/>
+                </a:solidFill>
+              </a:rPr>
+              <a:t>&lt; 1</a:t>
+            </a:r>
+            <a:endParaRPr lang="en-US" sz="1400" dirty="0"/>
+          </a:p>
+        </p:txBody>
+      </p:sp>
+      <p:sp>
+        <p:nvSpPr>
+          <p:cNvPr id="13" name="OR text 2"/>
+          <p:cNvSpPr txBox="1"/>
+          <p:nvPr/>
+        </p:nvSpPr>
+        <p:spPr>
+          <a:xfrm>
+            <a:off x="6720840" y="2148840"/>
+            <a:ext cx="1874520" cy="640080"/>
+          </a:xfrm>
+          <a:prstGeom prst="rect">
+            <a:avLst/>
+          </a:prstGeom>
+          <a:noFill/>
+          <a:ln/>
+        </p:spPr>
+        <p:txBody>
+          <a:bodyPr wrap="square" lIns="0" tIns="0" rIns="0" bIns="0" rtlCol="0" anchor="ctr"/>
+          <a:lstStyle/>
+          <a:p>
+            <a:pPr marL="0" indent="0">
+              <a:buNone/>
+            </a:pPr>
+            <a:r>
+              <a:rPr lang="en-US" sz="1400" dirty="0">
+                <a:solidFill>
+                  <a:schemeClr val="tx1"/>
+                </a:solidFill>
+              </a:rPr>
+              <a:t>Lower odds</a:t>
+            </a:r>
+            <a:endParaRPr lang="en-US" sz="1400" dirty="0"/>
+          </a:p>
+        </p:txBody>
+      </p:sp>
+      <p:sp>
+        <p:nvSpPr>
+          <p:cNvPr id="14" name="OR card 3"/>
+          <p:cNvSpPr/>
+          <p:nvPr/>
+        </p:nvSpPr>
+        <p:spPr>
+          <a:xfrm>
+            <a:off x="5989320" y="2971800"/>
+            <a:ext cx="2697480" cy="731520"/>
+          </a:xfrm>
+          <a:prstGeom prst="roundRect">
+            <a:avLst>
+              <a:gd name="adj" fmla="val 15000"/>
+            </a:avLst>
+          </a:prstGeom>
+          <a:solidFill>
+            <a:schemeClr val="bg2"/>
+          </a:solidFill>
+          <a:ln w="12700">
+            <a:solidFill>
+              <a:schemeClr val="bg2"/>
+            </a:solidFill>
+            <a:prstDash val="solid"/>
+          </a:ln>
+        </p:spPr>
+        <p:txBody>
+          <a:bodyPr/>
+          <a:lstStyle/>
+          <a:p>
+            <a:endParaRPr lang="en-US"/>
+          </a:p>
+        </p:txBody>
+      </p:sp>
+      <p:sp>
+        <p:nvSpPr>
+          <p:cNvPr id="15" name="OR badge 3"/>
+          <p:cNvSpPr/>
+          <p:nvPr/>
+        </p:nvSpPr>
+        <p:spPr>
+          <a:xfrm>
+            <a:off x="6080760" y="3063240"/>
+            <a:ext cx="548640" cy="548640"/>
+          </a:xfrm>
+          <a:prstGeom prst="ellipse">
+            <a:avLst/>
+          </a:prstGeom>
+          <a:solidFill>
+            <a:schemeClr val="accent1"/>
+          </a:solidFill>
+          <a:ln w="12700">
+            <a:solidFill>
+              <a:schemeClr val="accent1"/>
+            </a:solidFill>
+            <a:prstDash val="solid"/>
+          </a:ln>
+        </p:spPr>
+        <p:txBody>
+          <a:bodyPr/>
+          <a:lstStyle/>
+          <a:p>
+            <a:endParaRPr lang="en-US"/>
+          </a:p>
+        </p:txBody>
+      </p:sp>
+      <p:sp>
+        <p:nvSpPr>
+          <p:cNvPr id="16" name="OR badge text 3"/>
+          <p:cNvSpPr txBox="1"/>
+          <p:nvPr/>
+        </p:nvSpPr>
+        <p:spPr>
+          <a:xfrm>
+            <a:off x="6080760" y="3063240"/>
+            <a:ext cx="548640" cy="548640"/>
+          </a:xfrm>
+          <a:prstGeom prst="rect">
+            <a:avLst/>
+          </a:prstGeom>
+          <a:noFill/>
+          <a:ln/>
+        </p:spPr>
+        <p:txBody>
+          <a:bodyPr wrap="square" lIns="0" tIns="0" rIns="0" bIns="0" rtlCol="0" anchor="ctr"/>
+          <a:lstStyle/>
+          <a:p>
+            <a:pPr marL="0" indent="0" algn="ctr">
+              <a:buNone/>
+            </a:pPr>
+            <a:r>
+              <a:rPr lang="en-US" sz="1400" b="1" dirty="0">
+                <a:solidFill>
+                  <a:schemeClr val="bg1"/>
+                </a:solidFill>
+              </a:rPr>
+              <a:t>&gt; 1</a:t>
+            </a:r>
+            <a:endParaRPr lang="en-US" sz="1400" dirty="0"/>
+          </a:p>
+        </p:txBody>
+      </p:sp>
+      <p:sp>
+        <p:nvSpPr>
+          <p:cNvPr id="17" name="OR text 3"/>
+          <p:cNvSpPr txBox="1"/>
+          <p:nvPr/>
+        </p:nvSpPr>
+        <p:spPr>
+          <a:xfrm>
+            <a:off x="6720840" y="3017520"/>
+            <a:ext cx="1874520" cy="640080"/>
+          </a:xfrm>
+          <a:prstGeom prst="rect">
+            <a:avLst/>
+          </a:prstGeom>
+          <a:noFill/>
+          <a:ln/>
+        </p:spPr>
+        <p:txBody>
+          <a:bodyPr wrap="square" lIns="0" tIns="0" rIns="0" bIns="0" rtlCol="0" anchor="ctr"/>
+          <a:lstStyle/>
+          <a:p>
+            <a:pPr marL="0" indent="0">
+              <a:buNone/>
+            </a:pPr>
+            <a:r>
+              <a:rPr lang="en-US" sz="1400" dirty="0">
+                <a:solidFill>
+                  <a:schemeClr val="tx1"/>
+                </a:solidFill>
+              </a:rPr>
+              <a:t>Higher odds</a:t>
+            </a:r>
+            <a:endParaRPr lang="en-US" sz="1400" dirty="0"/>
           </a:p>
         </p:txBody>
       </p:sp>
@@ -12538,7 +13611,7 @@
           </a:prstGeom>
           <a:extLst>
             <a:ext uri="{C572A759-6A51-4108-AA02-DFA0A04FC94B}">
-              <ma14:wrappingTextBoxFlag xmlns:ma14="http://schemas.microsoft.com/office/mac/drawingml/2011/main" xmlns="" val="0"/>
+              <ma14:wrappingTextBoxFlag xmlns="" xmlns:ma14="http://schemas.microsoft.com/office/mac/drawingml/2011/main" val="0"/>
             </a:ext>
           </a:extLst>
         </p:spPr>
@@ -12560,6 +13633,57 @@
               <a:t>9</a:t>
             </a:fld>
             <a:endParaRPr lang="en-US"/>
+          </a:p>
+        </p:txBody>
+      </p:sp>
+      <p:sp>
+        <p:nvSpPr>
+          <p:cNvPr id="20" name="TextBox 19">
+            <a:extLst>
+              <a:ext uri="{FF2B5EF4-FFF2-40B4-BE49-F238E27FC236}">
+                <a16:creationId xmlns:a16="http://schemas.microsoft.com/office/drawing/2014/main" id="{1BFC5980-8A55-7013-F59D-FE65EFC39064}"/>
+              </a:ext>
+            </a:extLst>
+          </p:cNvPr>
+          <p:cNvSpPr txBox="1"/>
+          <p:nvPr/>
+        </p:nvSpPr>
+        <p:spPr>
+          <a:xfrm>
+            <a:off x="5989321" y="3833515"/>
+            <a:ext cx="2697480" cy="830997"/>
+          </a:xfrm>
+          <a:prstGeom prst="rect">
+            <a:avLst/>
+          </a:prstGeom>
+          <a:noFill/>
+        </p:spPr>
+        <p:txBody>
+          <a:bodyPr wrap="square">
+            <a:spAutoFit/>
+          </a:bodyPr>
+          <a:lstStyle/>
+          <a:p>
+            <a:pPr algn="l">
+              <a:buNone/>
+            </a:pPr>
+            <a:r>
+              <a:rPr lang="en-US" sz="1200" dirty="0">
+                <a:solidFill>
+                  <a:srgbClr val="000000"/>
+                </a:solidFill>
+              </a:rPr>
+              <a:t>For example, </a:t>
+            </a:r>
+            <a:r>
+              <a:rPr lang="en-US" sz="1200" b="0" i="0" u="none" strike="noStrike" dirty="0">
+                <a:solidFill>
+                  <a:srgbClr val="000000"/>
+                </a:solidFill>
+                <a:effectLst/>
+              </a:rPr>
+              <a:t>value below one indicates that a respondent is less likely to report receiving help, conditional on the model’s other variables.</a:t>
+            </a:r>
           </a:p>
         </p:txBody>
       </p:sp>

--- a/presentation/insurance fertility.pptx
+++ b/presentation/insurance fertility.pptx
@@ -324,93 +324,6 @@
           <a:bodyPr/>
           <a:lstStyle/>
           <a:p>
-            <a:r>
-              <a:rPr lang="en-US" sz="1200" b="1" kern="1200" dirty="0">
-                <a:solidFill>
-                  <a:schemeClr val="tx1"/>
-                </a:solidFill>
-                <a:effectLst/>
-                <a:latin typeface="+mn-lt"/>
-                <a:ea typeface="+mn-ea"/>
-                <a:cs typeface="+mn-cs"/>
-              </a:rPr>
-              <a:t>Slide 1: Insurance Coverage and Fertility-Related Medical Help</a:t>
-            </a:r>
-            <a:endParaRPr lang="en-US" sz="1200" kern="1200" dirty="0">
-              <a:solidFill>
-                <a:schemeClr val="tx1"/>
-              </a:solidFill>
-              <a:effectLst/>
-              <a:latin typeface="+mn-lt"/>
-              <a:ea typeface="+mn-ea"/>
-              <a:cs typeface="+mn-cs"/>
-            </a:endParaRPr>
-          </a:p>
-          <a:p>
-            <a:r>
-              <a:rPr lang="en-US" sz="1200" kern="1200" dirty="0">
-                <a:solidFill>
-                  <a:schemeClr val="tx1"/>
-                </a:solidFill>
-                <a:effectLst/>
-                <a:latin typeface="+mn-lt"/>
-                <a:ea typeface="+mn-ea"/>
-                <a:cs typeface="+mn-cs"/>
-              </a:rPr>
-              <a:t>Today, I’m examining the relationship between insurance coverage and receiving medical help to become pregnant.</a:t>
-            </a:r>
-          </a:p>
-          <a:p>
-            <a:br>
-              <a:rPr lang="en-US" sz="1200" kern="1200" dirty="0">
-                <a:solidFill>
-                  <a:schemeClr val="tx1"/>
-                </a:solidFill>
-                <a:effectLst/>
-                <a:latin typeface="+mn-lt"/>
-                <a:ea typeface="+mn-ea"/>
-                <a:cs typeface="+mn-cs"/>
-              </a:rPr>
-            </a:br>
-            <a:endParaRPr lang="en-US" sz="1200" kern="1200" dirty="0">
-              <a:solidFill>
-                <a:schemeClr val="tx1"/>
-              </a:solidFill>
-              <a:effectLst/>
-              <a:latin typeface="+mn-lt"/>
-              <a:ea typeface="+mn-ea"/>
-              <a:cs typeface="+mn-cs"/>
-            </a:endParaRPr>
-          </a:p>
-          <a:p>
-            <a:r>
-              <a:rPr lang="en-US" sz="1200" kern="1200" dirty="0">
-                <a:solidFill>
-                  <a:schemeClr val="tx1"/>
-                </a:solidFill>
-                <a:effectLst/>
-                <a:latin typeface="+mn-lt"/>
-                <a:ea typeface="+mn-ea"/>
-                <a:cs typeface="+mn-cs"/>
-              </a:rPr>
-              <a:t>I use data from the 2022–2023 National Survey of Family Growth.</a:t>
-            </a:r>
-          </a:p>
-          <a:p>
-            <a:r>
-              <a:rPr lang="en-US" sz="1200" kern="1200" dirty="0">
-                <a:solidFill>
-                  <a:schemeClr val="tx1"/>
-                </a:solidFill>
-                <a:effectLst/>
-                <a:latin typeface="+mn-lt"/>
-                <a:ea typeface="+mn-ea"/>
-                <a:cs typeface="+mn-cs"/>
-              </a:rPr>
-              <a:t>I’ll begin with the difference that motivated this analysis. Then I’ll explore possible explanations and show what happens when I account for those characteristics together.</a:t>
-            </a:r>
-          </a:p>
-          <a:p>
             <a:endParaRPr lang="en-US" dirty="0"/>
           </a:p>
         </p:txBody>
@@ -495,426 +408,6 @@
           <a:bodyPr/>
           <a:lstStyle/>
           <a:p>
-            <a:r>
-              <a:rPr lang="en-US" sz="1200" b="1" kern="1200" dirty="0">
-                <a:solidFill>
-                  <a:schemeClr val="tx1"/>
-                </a:solidFill>
-                <a:effectLst/>
-                <a:latin typeface="+mn-lt"/>
-                <a:ea typeface="+mn-ea"/>
-                <a:cs typeface="+mn-cs"/>
-              </a:rPr>
-              <a:t>Slide 10: The Insurance Difference Becomes Smaller, but Remains</a:t>
-            </a:r>
-            <a:endParaRPr lang="en-US" sz="1200" kern="1200" dirty="0">
-              <a:solidFill>
-                <a:schemeClr val="tx1"/>
-              </a:solidFill>
-              <a:effectLst/>
-              <a:latin typeface="+mn-lt"/>
-              <a:ea typeface="+mn-ea"/>
-              <a:cs typeface="+mn-cs"/>
-            </a:endParaRPr>
-          </a:p>
-          <a:p>
-            <a:r>
-              <a:rPr lang="en-US" sz="1200" kern="1200" dirty="0">
-                <a:solidFill>
-                  <a:schemeClr val="tx1"/>
-                </a:solidFill>
-                <a:effectLst/>
-                <a:latin typeface="+mn-lt"/>
-                <a:ea typeface="+mn-ea"/>
-                <a:cs typeface="+mn-cs"/>
-              </a:rPr>
-              <a:t>This slide answers our main question: </a:t>
-            </a:r>
-            <a:r>
-              <a:rPr lang="en-US" sz="1200" b="1" kern="1200" dirty="0">
-                <a:solidFill>
-                  <a:schemeClr val="tx1"/>
-                </a:solidFill>
-                <a:effectLst/>
-                <a:latin typeface="+mn-lt"/>
-                <a:ea typeface="+mn-ea"/>
-                <a:cs typeface="+mn-cs"/>
-              </a:rPr>
-              <a:t>does the insurance difference remain after accounting for age, income, and education?</a:t>
-            </a:r>
-            <a:endParaRPr lang="en-US" sz="1200" kern="1200" dirty="0">
-              <a:solidFill>
-                <a:schemeClr val="tx1"/>
-              </a:solidFill>
-              <a:effectLst/>
-              <a:latin typeface="+mn-lt"/>
-              <a:ea typeface="+mn-ea"/>
-              <a:cs typeface="+mn-cs"/>
-            </a:endParaRPr>
-          </a:p>
-          <a:p>
-            <a:r>
-              <a:rPr lang="en-US" sz="1200" kern="1200" dirty="0">
-                <a:solidFill>
-                  <a:schemeClr val="tx1"/>
-                </a:solidFill>
-                <a:effectLst/>
-                <a:latin typeface="+mn-lt"/>
-                <a:ea typeface="+mn-ea"/>
-                <a:cs typeface="+mn-cs"/>
-              </a:rPr>
-              <a:t>First, look at the chart and the upper table.</a:t>
-            </a:r>
-          </a:p>
-          <a:p>
-            <a:r>
-              <a:rPr lang="en-US" sz="1200" kern="1200" dirty="0">
-                <a:solidFill>
-                  <a:schemeClr val="tx1"/>
-                </a:solidFill>
-                <a:effectLst/>
-                <a:latin typeface="+mn-lt"/>
-                <a:ea typeface="+mn-ea"/>
-                <a:cs typeface="+mn-cs"/>
-              </a:rPr>
-              <a:t>Each dot represents an adjusted estimate. The horizontal line shows its 95% confidence interval. The vertical line at one represents equal odds compared with private coverage.</a:t>
-            </a:r>
-          </a:p>
-          <a:p>
-            <a:br>
-              <a:rPr lang="en-US" sz="1200" kern="1200" dirty="0">
-                <a:solidFill>
-                  <a:schemeClr val="tx1"/>
-                </a:solidFill>
-                <a:effectLst/>
-                <a:latin typeface="+mn-lt"/>
-                <a:ea typeface="+mn-ea"/>
-                <a:cs typeface="+mn-cs"/>
-              </a:rPr>
-            </a:br>
-            <a:endParaRPr lang="en-US" sz="1200" kern="1200" dirty="0">
-              <a:solidFill>
-                <a:schemeClr val="tx1"/>
-              </a:solidFill>
-              <a:effectLst/>
-              <a:latin typeface="+mn-lt"/>
-              <a:ea typeface="+mn-ea"/>
-              <a:cs typeface="+mn-cs"/>
-            </a:endParaRPr>
-          </a:p>
-          <a:p>
-            <a:r>
-              <a:rPr lang="en-US" sz="1200" b="1" kern="1200" dirty="0">
-                <a:solidFill>
-                  <a:schemeClr val="tx1"/>
-                </a:solidFill>
-                <a:effectLst/>
-                <a:latin typeface="+mn-lt"/>
-                <a:ea typeface="+mn-ea"/>
-                <a:cs typeface="+mn-cs"/>
-              </a:rPr>
-              <a:t>“If the whole interval is on the left side of the dashed line, that tells us the group is significantly less likely to receive help than the private insurance group.”</a:t>
-            </a:r>
-            <a:endParaRPr lang="en-US" sz="1200" kern="1200" dirty="0">
-              <a:solidFill>
-                <a:schemeClr val="tx1"/>
-              </a:solidFill>
-              <a:effectLst/>
-              <a:latin typeface="+mn-lt"/>
-              <a:ea typeface="+mn-ea"/>
-              <a:cs typeface="+mn-cs"/>
-            </a:endParaRPr>
-          </a:p>
-          <a:p>
-            <a:br>
-              <a:rPr lang="en-US" sz="1200" kern="1200" dirty="0">
-                <a:solidFill>
-                  <a:schemeClr val="tx1"/>
-                </a:solidFill>
-                <a:effectLst/>
-                <a:latin typeface="+mn-lt"/>
-                <a:ea typeface="+mn-ea"/>
-                <a:cs typeface="+mn-cs"/>
-              </a:rPr>
-            </a:br>
-            <a:endParaRPr lang="en-US" sz="1200" kern="1200" dirty="0">
-              <a:solidFill>
-                <a:schemeClr val="tx1"/>
-              </a:solidFill>
-              <a:effectLst/>
-              <a:latin typeface="+mn-lt"/>
-              <a:ea typeface="+mn-ea"/>
-              <a:cs typeface="+mn-cs"/>
-            </a:endParaRPr>
-          </a:p>
-          <a:p>
-            <a:r>
-              <a:rPr lang="en-US" sz="1200" kern="1200" dirty="0">
-                <a:solidFill>
-                  <a:schemeClr val="tx1"/>
-                </a:solidFill>
-                <a:effectLst/>
-                <a:latin typeface="+mn-lt"/>
-                <a:ea typeface="+mn-ea"/>
-                <a:cs typeface="+mn-cs"/>
-              </a:rPr>
-              <a:t>For Medicaid, CHIP, or state coverage, the estimate is </a:t>
-            </a:r>
-            <a:r>
-              <a:rPr lang="en-US" sz="1200" b="1" kern="1200" dirty="0">
-                <a:solidFill>
-                  <a:schemeClr val="tx1"/>
-                </a:solidFill>
-                <a:effectLst/>
-                <a:latin typeface="+mn-lt"/>
-                <a:ea typeface="+mn-ea"/>
-                <a:cs typeface="+mn-cs"/>
-              </a:rPr>
-              <a:t>0.54</a:t>
-            </a:r>
-            <a:r>
-              <a:rPr lang="en-US" sz="1200" kern="1200" dirty="0">
-                <a:solidFill>
-                  <a:schemeClr val="tx1"/>
-                </a:solidFill>
-                <a:effectLst/>
-                <a:latin typeface="+mn-lt"/>
-                <a:ea typeface="+mn-ea"/>
-                <a:cs typeface="+mn-cs"/>
-              </a:rPr>
-              <a:t>, with an interval from approximately </a:t>
-            </a:r>
-            <a:r>
-              <a:rPr lang="en-US" sz="1200" b="1" kern="1200" dirty="0">
-                <a:solidFill>
-                  <a:schemeClr val="tx1"/>
-                </a:solidFill>
-                <a:effectLst/>
-                <a:latin typeface="+mn-lt"/>
-                <a:ea typeface="+mn-ea"/>
-                <a:cs typeface="+mn-cs"/>
-              </a:rPr>
-              <a:t>0.36 to 0.81</a:t>
-            </a:r>
-            <a:r>
-              <a:rPr lang="en-US" sz="1200" kern="1200" dirty="0">
-                <a:solidFill>
-                  <a:schemeClr val="tx1"/>
-                </a:solidFill>
-                <a:effectLst/>
-                <a:latin typeface="+mn-lt"/>
-                <a:ea typeface="+mn-ea"/>
-                <a:cs typeface="+mn-cs"/>
-              </a:rPr>
-              <a:t>.</a:t>
-            </a:r>
-          </a:p>
-          <a:p>
-            <a:r>
-              <a:rPr lang="en-US" sz="1200" kern="1200" dirty="0">
-                <a:solidFill>
-                  <a:schemeClr val="tx1"/>
-                </a:solidFill>
-                <a:effectLst/>
-                <a:latin typeface="+mn-lt"/>
-                <a:ea typeface="+mn-ea"/>
-                <a:cs typeface="+mn-cs"/>
-              </a:rPr>
-              <a:t>In everyday language, the model still shows that Medicaid respondents are less likely to report having received help after accounting for the selected characteristics. The entire interval is below one, which provides statistical evidence of that association.</a:t>
-            </a:r>
-          </a:p>
-          <a:p>
-            <a:r>
-              <a:rPr lang="en-US" sz="1200" kern="1200" dirty="0">
-                <a:solidFill>
-                  <a:schemeClr val="tx1"/>
-                </a:solidFill>
-                <a:effectLst/>
-                <a:latin typeface="+mn-lt"/>
-                <a:ea typeface="+mn-ea"/>
-                <a:cs typeface="+mn-cs"/>
-              </a:rPr>
-              <a:t>The single-service, IHS, or uninsured category also has an estimate below one: </a:t>
-            </a:r>
-            <a:r>
-              <a:rPr lang="en-US" sz="1200" b="1" kern="1200" dirty="0">
-                <a:solidFill>
-                  <a:schemeClr val="tx1"/>
-                </a:solidFill>
-                <a:effectLst/>
-                <a:latin typeface="+mn-lt"/>
-                <a:ea typeface="+mn-ea"/>
-                <a:cs typeface="+mn-cs"/>
-              </a:rPr>
-              <a:t>0.56</a:t>
-            </a:r>
-            <a:r>
-              <a:rPr lang="en-US" sz="1200" kern="1200" dirty="0">
-                <a:solidFill>
-                  <a:schemeClr val="tx1"/>
-                </a:solidFill>
-                <a:effectLst/>
-                <a:latin typeface="+mn-lt"/>
-                <a:ea typeface="+mn-ea"/>
-                <a:cs typeface="+mn-cs"/>
-              </a:rPr>
-              <a:t>, with an interval from </a:t>
-            </a:r>
-            <a:r>
-              <a:rPr lang="en-US" sz="1200" b="1" kern="1200" dirty="0">
-                <a:solidFill>
-                  <a:schemeClr val="tx1"/>
-                </a:solidFill>
-                <a:effectLst/>
-                <a:latin typeface="+mn-lt"/>
-                <a:ea typeface="+mn-ea"/>
-                <a:cs typeface="+mn-cs"/>
-              </a:rPr>
-              <a:t>0.32 to 0.97</a:t>
-            </a:r>
-            <a:r>
-              <a:rPr lang="en-US" sz="1200" kern="1200" dirty="0">
-                <a:solidFill>
-                  <a:schemeClr val="tx1"/>
-                </a:solidFill>
-                <a:effectLst/>
-                <a:latin typeface="+mn-lt"/>
-                <a:ea typeface="+mn-ea"/>
-                <a:cs typeface="+mn-cs"/>
-              </a:rPr>
-              <a:t>. This also provides evidence of an association, although its interval comes closer to one.</a:t>
-            </a:r>
-          </a:p>
-          <a:p>
-            <a:r>
-              <a:rPr lang="en-US" sz="1200" kern="1200" dirty="0">
-                <a:solidFill>
-                  <a:schemeClr val="tx1"/>
-                </a:solidFill>
-                <a:effectLst/>
-                <a:latin typeface="+mn-lt"/>
-                <a:ea typeface="+mn-ea"/>
-                <a:cs typeface="+mn-cs"/>
-              </a:rPr>
-              <a:t>For other-government coverage, the interval crosses one. The evidence does not clearly establish a difference from private coverage.</a:t>
-            </a:r>
-          </a:p>
-          <a:p>
-            <a:r>
-              <a:rPr lang="en-US" sz="1200" kern="1200" dirty="0">
-                <a:solidFill>
-                  <a:schemeClr val="tx1"/>
-                </a:solidFill>
-                <a:effectLst/>
-                <a:latin typeface="+mn-lt"/>
-                <a:ea typeface="+mn-ea"/>
-                <a:cs typeface="+mn-cs"/>
-              </a:rPr>
-              <a:t>Now look at the lower table.</a:t>
-            </a:r>
-          </a:p>
-          <a:p>
-            <a:r>
-              <a:rPr lang="en-US" sz="1200" kern="1200" dirty="0">
-                <a:solidFill>
-                  <a:schemeClr val="tx1"/>
-                </a:solidFill>
-                <a:effectLst/>
-                <a:latin typeface="+mn-lt"/>
-                <a:ea typeface="+mn-ea"/>
-                <a:cs typeface="+mn-cs"/>
-              </a:rPr>
-              <a:t>“Before” means the model includes insurance alone. “After” means it also includes age, income, and education.</a:t>
-            </a:r>
-          </a:p>
-          <a:p>
-            <a:r>
-              <a:rPr lang="en-US" sz="1200" kern="1200" dirty="0">
-                <a:solidFill>
-                  <a:schemeClr val="tx1"/>
-                </a:solidFill>
-                <a:effectLst/>
-                <a:latin typeface="+mn-lt"/>
-                <a:ea typeface="+mn-ea"/>
-                <a:cs typeface="+mn-cs"/>
-              </a:rPr>
-              <a:t>For Medicaid, the estimate moves from </a:t>
-            </a:r>
-            <a:r>
-              <a:rPr lang="en-US" sz="1200" b="1" kern="1200" dirty="0">
-                <a:solidFill>
-                  <a:schemeClr val="tx1"/>
-                </a:solidFill>
-                <a:effectLst/>
-                <a:latin typeface="+mn-lt"/>
-                <a:ea typeface="+mn-ea"/>
-                <a:cs typeface="+mn-cs"/>
-              </a:rPr>
-              <a:t>0.31 to 0.54</a:t>
-            </a:r>
-            <a:r>
-              <a:rPr lang="en-US" sz="1200" kern="1200" dirty="0">
-                <a:solidFill>
-                  <a:schemeClr val="tx1"/>
-                </a:solidFill>
-                <a:effectLst/>
-                <a:latin typeface="+mn-lt"/>
-                <a:ea typeface="+mn-ea"/>
-                <a:cs typeface="+mn-cs"/>
-              </a:rPr>
-              <a:t>. All three estimates move closer to one after adjustment.</a:t>
-            </a:r>
-          </a:p>
-          <a:p>
-            <a:r>
-              <a:rPr lang="en-US" sz="1200" kern="1200" dirty="0">
-                <a:solidFill>
-                  <a:schemeClr val="tx1"/>
-                </a:solidFill>
-                <a:effectLst/>
-                <a:latin typeface="+mn-lt"/>
-                <a:ea typeface="+mn-ea"/>
-                <a:cs typeface="+mn-cs"/>
-              </a:rPr>
-              <a:t>So the main story is: </a:t>
-            </a:r>
-            <a:r>
-              <a:rPr lang="en-US" sz="1200" b="1" kern="1200" dirty="0">
-                <a:solidFill>
-                  <a:schemeClr val="tx1"/>
-                </a:solidFill>
-                <a:effectLst/>
-                <a:latin typeface="+mn-lt"/>
-                <a:ea typeface="+mn-ea"/>
-                <a:cs typeface="+mn-cs"/>
-              </a:rPr>
-              <a:t>the estimated insurance association becomes smaller after adjustment, but it remains for Medicaid and the fourth category.</a:t>
-            </a:r>
-            <a:endParaRPr lang="en-US" sz="1200" kern="1200" dirty="0">
-              <a:solidFill>
-                <a:schemeClr val="tx1"/>
-              </a:solidFill>
-              <a:effectLst/>
-              <a:latin typeface="+mn-lt"/>
-              <a:ea typeface="+mn-ea"/>
-              <a:cs typeface="+mn-cs"/>
-            </a:endParaRPr>
-          </a:p>
-          <a:p>
-            <a:r>
-              <a:rPr lang="en-US" sz="1200" kern="1200" dirty="0">
-                <a:solidFill>
-                  <a:schemeClr val="tx1"/>
-                </a:solidFill>
-                <a:effectLst/>
-                <a:latin typeface="+mn-lt"/>
-                <a:ea typeface="+mn-ea"/>
-                <a:cs typeface="+mn-cs"/>
-              </a:rPr>
-              <a:t>The groups’ different characteristics matter to the comparison. However, this change does not let me calculate an exact percentage of the disparity that those characteristics explain.</a:t>
-            </a:r>
-          </a:p>
-          <a:p>
             <a:endParaRPr lang="en-US" dirty="0"/>
           </a:p>
         </p:txBody>
@@ -999,141 +492,6 @@
           <a:bodyPr/>
           <a:lstStyle/>
           <a:p>
-            <a:r>
-              <a:rPr lang="en-US" sz="1200" b="1" kern="1200" dirty="0">
-                <a:solidFill>
-                  <a:schemeClr val="tx1"/>
-                </a:solidFill>
-                <a:effectLst/>
-                <a:latin typeface="+mn-lt"/>
-                <a:ea typeface="+mn-ea"/>
-                <a:cs typeface="+mn-cs"/>
-              </a:rPr>
-              <a:t>Slide 11: Prior Research and Study Limitations</a:t>
-            </a:r>
-            <a:endParaRPr lang="en-US" sz="1200" kern="1200" dirty="0">
-              <a:solidFill>
-                <a:schemeClr val="tx1"/>
-              </a:solidFill>
-              <a:effectLst/>
-              <a:latin typeface="+mn-lt"/>
-              <a:ea typeface="+mn-ea"/>
-              <a:cs typeface="+mn-cs"/>
-            </a:endParaRPr>
-          </a:p>
-          <a:p>
-            <a:r>
-              <a:rPr lang="en-US" sz="1200" kern="1200" dirty="0">
-                <a:solidFill>
-                  <a:schemeClr val="tx1"/>
-                </a:solidFill>
-                <a:effectLst/>
-                <a:latin typeface="+mn-lt"/>
-                <a:ea typeface="+mn-ea"/>
-                <a:cs typeface="+mn-cs"/>
-              </a:rPr>
-              <a:t>The direction of the Medicaid–private association is consistent with the earlier study by Eliason and colleagues.</a:t>
-            </a:r>
-          </a:p>
-          <a:p>
-            <a:r>
-              <a:rPr lang="en-US" sz="1200" kern="1200" dirty="0">
-                <a:solidFill>
-                  <a:schemeClr val="tx1"/>
-                </a:solidFill>
-                <a:effectLst/>
-                <a:latin typeface="+mn-lt"/>
-                <a:ea typeface="+mn-ea"/>
-                <a:cs typeface="+mn-cs"/>
-              </a:rPr>
-              <a:t>However, their primary analysis examined past-year fertility-service use among respondents currently trying to conceive. My analysis examines lifetime help receipt in a broader sample.</a:t>
-            </a:r>
-          </a:p>
-          <a:p>
-            <a:r>
-              <a:rPr lang="en-US" sz="1200" kern="1200" dirty="0">
-                <a:solidFill>
-                  <a:schemeClr val="tx1"/>
-                </a:solidFill>
-                <a:effectLst/>
-                <a:latin typeface="+mn-lt"/>
-                <a:ea typeface="+mn-ea"/>
-                <a:cs typeface="+mn-cs"/>
-              </a:rPr>
-              <a:t>Because the outcomes and populations differ, I cannot interpret the estimates as showing how the disparity changed over time.</a:t>
-            </a:r>
-          </a:p>
-          <a:p>
-            <a:r>
-              <a:rPr lang="en-US" sz="1200" kern="1200" dirty="0">
-                <a:solidFill>
-                  <a:schemeClr val="tx1"/>
-                </a:solidFill>
-                <a:effectLst/>
-                <a:latin typeface="+mn-lt"/>
-                <a:ea typeface="+mn-ea"/>
-                <a:cs typeface="+mn-cs"/>
-              </a:rPr>
-              <a:t>There are also important limits to my findings.</a:t>
-            </a:r>
-          </a:p>
-          <a:p>
-            <a:r>
-              <a:rPr lang="en-US" sz="1200" kern="1200" dirty="0">
-                <a:solidFill>
-                  <a:schemeClr val="tx1"/>
-                </a:solidFill>
-                <a:effectLst/>
-                <a:latin typeface="+mn-lt"/>
-                <a:ea typeface="+mn-ea"/>
-                <a:cs typeface="+mn-cs"/>
-              </a:rPr>
-              <a:t>First, current insurance may differ from coverage at the time someone received care.</a:t>
-            </a:r>
-          </a:p>
-          <a:p>
-            <a:r>
-              <a:rPr lang="en-US" sz="1200" kern="1200" dirty="0">
-                <a:solidFill>
-                  <a:schemeClr val="tx1"/>
-                </a:solidFill>
-                <a:effectLst/>
-                <a:latin typeface="+mn-lt"/>
-                <a:ea typeface="+mn-ea"/>
-                <a:cs typeface="+mn-cs"/>
-              </a:rPr>
-              <a:t>Second, respondents have different fertility needs and intentions. Someone who never received help may never have needed or wanted it.</a:t>
-            </a:r>
-          </a:p>
-          <a:p>
-            <a:r>
-              <a:rPr lang="en-US" sz="1200" kern="1200" dirty="0">
-                <a:solidFill>
-                  <a:schemeClr val="tx1"/>
-                </a:solidFill>
-                <a:effectLst/>
-                <a:latin typeface="+mn-lt"/>
-                <a:ea typeface="+mn-ea"/>
-                <a:cs typeface="+mn-cs"/>
-              </a:rPr>
-              <a:t>Third, the data are observational. Accounting for age, income, and education does not remove every possible alternative explanation.</a:t>
-            </a:r>
-          </a:p>
-          <a:p>
-            <a:r>
-              <a:rPr lang="en-US" sz="1200" kern="1200" dirty="0">
-                <a:solidFill>
-                  <a:schemeClr val="tx1"/>
-                </a:solidFill>
-                <a:effectLst/>
-                <a:latin typeface="+mn-lt"/>
-                <a:ea typeface="+mn-ea"/>
-                <a:cs typeface="+mn-cs"/>
-              </a:rPr>
-              <a:t>The results therefore establish an association in reported care receipt. They cannot establish that insurance caused the difference or directly measure unmet need.</a:t>
-            </a:r>
-          </a:p>
-          <a:p>
             <a:endParaRPr lang="en-US" dirty="0"/>
           </a:p>
         </p:txBody>
@@ -1218,161 +576,6 @@
           <a:bodyPr/>
           <a:lstStyle/>
           <a:p>
-            <a:r>
-              <a:rPr lang="en-US" sz="1200" b="1" kern="1200" dirty="0">
-                <a:solidFill>
-                  <a:schemeClr val="tx1"/>
-                </a:solidFill>
-                <a:effectLst/>
-                <a:latin typeface="+mn-lt"/>
-                <a:ea typeface="+mn-ea"/>
-                <a:cs typeface="+mn-cs"/>
-              </a:rPr>
-              <a:t>Slide 12: Insurance Differences Remain After Selected Controls</a:t>
-            </a:r>
-            <a:endParaRPr lang="en-US" sz="1200" kern="1200" dirty="0">
-              <a:solidFill>
-                <a:schemeClr val="tx1"/>
-              </a:solidFill>
-              <a:effectLst/>
-              <a:latin typeface="+mn-lt"/>
-              <a:ea typeface="+mn-ea"/>
-              <a:cs typeface="+mn-cs"/>
-            </a:endParaRPr>
-          </a:p>
-          <a:p>
-            <a:r>
-              <a:rPr lang="en-US" sz="1200" kern="1200" dirty="0">
-                <a:solidFill>
-                  <a:schemeClr val="tx1"/>
-                </a:solidFill>
-                <a:effectLst/>
-                <a:latin typeface="+mn-lt"/>
-                <a:ea typeface="+mn-ea"/>
-                <a:cs typeface="+mn-cs"/>
-              </a:rPr>
-              <a:t>I began with a large descriptive difference: approximately </a:t>
-            </a:r>
-            <a:r>
-              <a:rPr lang="en-US" sz="1200" b="1" kern="1200" dirty="0">
-                <a:solidFill>
-                  <a:schemeClr val="tx1"/>
-                </a:solidFill>
-                <a:effectLst/>
-                <a:latin typeface="+mn-lt"/>
-                <a:ea typeface="+mn-ea"/>
-                <a:cs typeface="+mn-cs"/>
-              </a:rPr>
-              <a:t>13% of privately insured respondents reported receiving help, compared with 4% of Medicaid respondents</a:t>
-            </a:r>
-            <a:r>
-              <a:rPr lang="en-US" sz="1200" kern="1200" dirty="0">
-                <a:solidFill>
-                  <a:schemeClr val="tx1"/>
-                </a:solidFill>
-                <a:effectLst/>
-                <a:latin typeface="+mn-lt"/>
-                <a:ea typeface="+mn-ea"/>
-                <a:cs typeface="+mn-cs"/>
-              </a:rPr>
-              <a:t>.</a:t>
-            </a:r>
-          </a:p>
-          <a:p>
-            <a:r>
-              <a:rPr lang="en-US" sz="1200" kern="1200" dirty="0">
-                <a:solidFill>
-                  <a:schemeClr val="tx1"/>
-                </a:solidFill>
-                <a:effectLst/>
-                <a:latin typeface="+mn-lt"/>
-                <a:ea typeface="+mn-ea"/>
-                <a:cs typeface="+mn-cs"/>
-              </a:rPr>
-              <a:t>Then I asked whether the groups differed in other relevant ways. They did: private respondents were generally older, had higher income, and had more education.</a:t>
-            </a:r>
-          </a:p>
-          <a:p>
-            <a:r>
-              <a:rPr lang="en-US" sz="1200" kern="1200" dirty="0">
-                <a:solidFill>
-                  <a:schemeClr val="tx1"/>
-                </a:solidFill>
-                <a:effectLst/>
-                <a:latin typeface="+mn-lt"/>
-                <a:ea typeface="+mn-ea"/>
-                <a:cs typeface="+mn-cs"/>
-              </a:rPr>
-              <a:t>After accounting for those characteristics, the estimated insurance association became smaller. However, the Medicaid–private difference remained, as did the association for the single-service, IHS, or uninsured category.</a:t>
-            </a:r>
-          </a:p>
-          <a:p>
-            <a:r>
-              <a:rPr lang="en-US" sz="1200" kern="1200" dirty="0">
-                <a:solidFill>
-                  <a:schemeClr val="tx1"/>
-                </a:solidFill>
-                <a:effectLst/>
-                <a:latin typeface="+mn-lt"/>
-                <a:ea typeface="+mn-ea"/>
-                <a:cs typeface="+mn-cs"/>
-              </a:rPr>
-              <a:t>My conclusion is that </a:t>
-            </a:r>
-            <a:r>
-              <a:rPr lang="en-US" sz="1200" b="1" kern="1200" dirty="0">
-                <a:solidFill>
-                  <a:schemeClr val="tx1"/>
-                </a:solidFill>
-                <a:effectLst/>
-                <a:latin typeface="+mn-lt"/>
-                <a:ea typeface="+mn-ea"/>
-                <a:cs typeface="+mn-cs"/>
-              </a:rPr>
-              <a:t>differences in the selected characteristics do not eliminate the insurance association in this model</a:t>
-            </a:r>
-            <a:r>
-              <a:rPr lang="en-US" sz="1200" kern="1200" dirty="0">
-                <a:solidFill>
-                  <a:schemeClr val="tx1"/>
-                </a:solidFill>
-                <a:effectLst/>
-                <a:latin typeface="+mn-lt"/>
-                <a:ea typeface="+mn-ea"/>
-                <a:cs typeface="+mn-cs"/>
-              </a:rPr>
-              <a:t>.</a:t>
-            </a:r>
-          </a:p>
-          <a:p>
-            <a:r>
-              <a:rPr lang="en-US" sz="1200" kern="1200" dirty="0">
-                <a:solidFill>
-                  <a:schemeClr val="tx1"/>
-                </a:solidFill>
-                <a:effectLst/>
-                <a:latin typeface="+mn-lt"/>
-                <a:ea typeface="+mn-ea"/>
-                <a:cs typeface="+mn-cs"/>
-              </a:rPr>
-              <a:t>To understand the reasons behind that association, further research should examine insurance at the time of care and respondents’ fertility needs.</a:t>
-            </a:r>
-          </a:p>
-          <a:p>
-            <a:r>
-              <a:rPr lang="en-US" sz="1200" kern="1200" dirty="0">
-                <a:solidFill>
-                  <a:schemeClr val="tx1"/>
-                </a:solidFill>
-                <a:effectLst/>
-                <a:latin typeface="+mn-lt"/>
-                <a:ea typeface="+mn-ea"/>
-                <a:cs typeface="+mn-cs"/>
-              </a:rPr>
-              <a:t>The remaining association gives researchers a reason to investigate coverage and care receipt more closely. However, these findings alone cannot tell policymakers which coverage change would improve access.</a:t>
-            </a:r>
-          </a:p>
-          <a:p>
             <a:endParaRPr lang="en-US" dirty="0"/>
           </a:p>
         </p:txBody>
@@ -1457,206 +660,6 @@
           <a:bodyPr/>
           <a:lstStyle/>
           <a:p>
-            <a:r>
-              <a:rPr lang="en-US" sz="1200" b="1" kern="1200" dirty="0">
-                <a:solidFill>
-                  <a:schemeClr val="tx1"/>
-                </a:solidFill>
-                <a:effectLst/>
-                <a:latin typeface="+mn-lt"/>
-                <a:ea typeface="+mn-ea"/>
-                <a:cs typeface="+mn-cs"/>
-              </a:rPr>
-              <a:t>Slide 2: Help Receipt Differs Across Insurance Groups</a:t>
-            </a:r>
-            <a:endParaRPr lang="en-US" sz="1200" kern="1200" dirty="0">
-              <a:solidFill>
-                <a:schemeClr val="tx1"/>
-              </a:solidFill>
-              <a:effectLst/>
-              <a:latin typeface="+mn-lt"/>
-              <a:ea typeface="+mn-ea"/>
-              <a:cs typeface="+mn-cs"/>
-            </a:endParaRPr>
-          </a:p>
-          <a:p>
-            <a:r>
-              <a:rPr lang="en-US" sz="1200" kern="1200" dirty="0">
-                <a:solidFill>
-                  <a:schemeClr val="tx1"/>
-                </a:solidFill>
-                <a:effectLst/>
-                <a:latin typeface="+mn-lt"/>
-                <a:ea typeface="+mn-ea"/>
-                <a:cs typeface="+mn-cs"/>
-              </a:rPr>
-              <a:t>The starting point is this chart. It shows the weighted percentage of respondents who reported ever receiving medical help to become pregnant.</a:t>
-            </a:r>
-          </a:p>
-          <a:p>
-            <a:r>
-              <a:rPr lang="en-US" sz="1200" kern="1200" dirty="0">
-                <a:solidFill>
-                  <a:schemeClr val="tx1"/>
-                </a:solidFill>
-                <a:effectLst/>
-                <a:latin typeface="+mn-lt"/>
-                <a:ea typeface="+mn-ea"/>
-                <a:cs typeface="+mn-cs"/>
-              </a:rPr>
-              <a:t>Approximately </a:t>
-            </a:r>
-            <a:r>
-              <a:rPr lang="en-US" sz="1200" b="1" kern="1200" dirty="0">
-                <a:solidFill>
-                  <a:schemeClr val="tx1"/>
-                </a:solidFill>
-                <a:effectLst/>
-                <a:latin typeface="+mn-lt"/>
-                <a:ea typeface="+mn-ea"/>
-                <a:cs typeface="+mn-cs"/>
-              </a:rPr>
-              <a:t>12.9% of respondents with private coverage</a:t>
-            </a:r>
-            <a:r>
-              <a:rPr lang="en-US" sz="1200" kern="1200" dirty="0">
-                <a:solidFill>
-                  <a:schemeClr val="tx1"/>
-                </a:solidFill>
-                <a:effectLst/>
-                <a:latin typeface="+mn-lt"/>
-                <a:ea typeface="+mn-ea"/>
-                <a:cs typeface="+mn-cs"/>
-              </a:rPr>
-              <a:t> reported receiving help, compared with </a:t>
-            </a:r>
-            <a:r>
-              <a:rPr lang="en-US" sz="1200" b="1" kern="1200" dirty="0">
-                <a:solidFill>
-                  <a:schemeClr val="tx1"/>
-                </a:solidFill>
-                <a:effectLst/>
-                <a:latin typeface="+mn-lt"/>
-                <a:ea typeface="+mn-ea"/>
-                <a:cs typeface="+mn-cs"/>
-              </a:rPr>
-              <a:t>4.3% with Medicaid, CHIP, or state coverage</a:t>
-            </a:r>
-            <a:r>
-              <a:rPr lang="en-US" sz="1200" kern="1200" dirty="0">
-                <a:solidFill>
-                  <a:schemeClr val="tx1"/>
-                </a:solidFill>
-                <a:effectLst/>
-                <a:latin typeface="+mn-lt"/>
-                <a:ea typeface="+mn-ea"/>
-                <a:cs typeface="+mn-cs"/>
-              </a:rPr>
-              <a:t>.</a:t>
-            </a:r>
-          </a:p>
-          <a:p>
-            <a:r>
-              <a:rPr lang="en-US" sz="1200" kern="1200" dirty="0">
-                <a:solidFill>
-                  <a:schemeClr val="tx1"/>
-                </a:solidFill>
-                <a:effectLst/>
-                <a:latin typeface="+mn-lt"/>
-                <a:ea typeface="+mn-ea"/>
-                <a:cs typeface="+mn-cs"/>
-              </a:rPr>
-              <a:t>That is a difference of approximately </a:t>
-            </a:r>
-            <a:r>
-              <a:rPr lang="en-US" sz="1200" b="1" kern="1200" dirty="0">
-                <a:solidFill>
-                  <a:schemeClr val="tx1"/>
-                </a:solidFill>
-                <a:effectLst/>
-                <a:latin typeface="+mn-lt"/>
-                <a:ea typeface="+mn-ea"/>
-                <a:cs typeface="+mn-cs"/>
-              </a:rPr>
-              <a:t>8.5 percentage points</a:t>
-            </a:r>
-            <a:r>
-              <a:rPr lang="en-US" sz="1200" kern="1200" dirty="0">
-                <a:solidFill>
-                  <a:schemeClr val="tx1"/>
-                </a:solidFill>
-                <a:effectLst/>
-                <a:latin typeface="+mn-lt"/>
-                <a:ea typeface="+mn-ea"/>
-                <a:cs typeface="+mn-cs"/>
-              </a:rPr>
-              <a:t>. Put more simply, about 13 out of every 100 privately insured respondents reported receiving help, compared with about 4 out of every 100 Medicaid respondents.</a:t>
-            </a:r>
-          </a:p>
-          <a:p>
-            <a:r>
-              <a:rPr lang="en-US" sz="1200" kern="1200" dirty="0">
-                <a:solidFill>
-                  <a:schemeClr val="tx1"/>
-                </a:solidFill>
-                <a:effectLst/>
-                <a:latin typeface="+mn-lt"/>
-                <a:ea typeface="+mn-ea"/>
-                <a:cs typeface="+mn-cs"/>
-              </a:rPr>
-              <a:t>The other two insurance groups also have lower reported rates than the private group.</a:t>
-            </a:r>
-          </a:p>
-          <a:p>
-            <a:r>
-              <a:rPr lang="en-US" sz="1200" kern="1200" dirty="0">
-                <a:solidFill>
-                  <a:schemeClr val="tx1"/>
-                </a:solidFill>
-                <a:effectLst/>
-                <a:latin typeface="+mn-lt"/>
-                <a:ea typeface="+mn-ea"/>
-                <a:cs typeface="+mn-cs"/>
-              </a:rPr>
-              <a:t>This is a clear descriptive pattern, but it leaves an important question: </a:t>
-            </a:r>
-            <a:r>
-              <a:rPr lang="en-US" sz="1200" b="1" kern="1200" dirty="0">
-                <a:solidFill>
-                  <a:schemeClr val="tx1"/>
-                </a:solidFill>
-                <a:effectLst/>
-                <a:latin typeface="+mn-lt"/>
-                <a:ea typeface="+mn-ea"/>
-                <a:cs typeface="+mn-cs"/>
-              </a:rPr>
-              <a:t>what could explain the difference?</a:t>
-            </a:r>
-            <a:endParaRPr lang="en-US" sz="1200" kern="1200" dirty="0">
-              <a:solidFill>
-                <a:schemeClr val="tx1"/>
-              </a:solidFill>
-              <a:effectLst/>
-              <a:latin typeface="+mn-lt"/>
-              <a:ea typeface="+mn-ea"/>
-              <a:cs typeface="+mn-cs"/>
-            </a:endParaRPr>
-          </a:p>
-          <a:p>
-            <a:r>
-              <a:rPr lang="en-US" sz="1200" kern="1200" dirty="0">
-                <a:solidFill>
-                  <a:schemeClr val="tx1"/>
-                </a:solidFill>
-                <a:effectLst/>
-                <a:latin typeface="+mn-lt"/>
-                <a:ea typeface="+mn-ea"/>
-                <a:cs typeface="+mn-cs"/>
-              </a:rPr>
-              <a:t>Insurance might be relevant, but the people in these groups may also differ in other ways. For example, one group may be older, have higher income, or have more education.</a:t>
-            </a:r>
-          </a:p>
-          <a:p>
             <a:endParaRPr lang="en-US" dirty="0"/>
           </a:p>
         </p:txBody>
@@ -1741,108 +744,6 @@
           <a:bodyPr/>
           <a:lstStyle/>
           <a:p>
-            <a:r>
-              <a:rPr lang="en-US" sz="1200" b="1" kern="1200" dirty="0">
-                <a:solidFill>
-                  <a:schemeClr val="tx1"/>
-                </a:solidFill>
-                <a:effectLst/>
-                <a:latin typeface="+mn-lt"/>
-                <a:ea typeface="+mn-ea"/>
-                <a:cs typeface="+mn-cs"/>
-              </a:rPr>
-              <a:t>Slide 3: Research Question</a:t>
-            </a:r>
-            <a:endParaRPr lang="en-US" sz="1200" kern="1200" dirty="0">
-              <a:solidFill>
-                <a:schemeClr val="tx1"/>
-              </a:solidFill>
-              <a:effectLst/>
-              <a:latin typeface="+mn-lt"/>
-              <a:ea typeface="+mn-ea"/>
-              <a:cs typeface="+mn-cs"/>
-            </a:endParaRPr>
-          </a:p>
-          <a:p>
-            <a:r>
-              <a:rPr lang="en-US" sz="1200" kern="1200" dirty="0">
-                <a:solidFill>
-                  <a:schemeClr val="tx1"/>
-                </a:solidFill>
-                <a:effectLst/>
-                <a:latin typeface="+mn-lt"/>
-                <a:ea typeface="+mn-ea"/>
-                <a:cs typeface="+mn-cs"/>
-              </a:rPr>
-              <a:t>That brings us to my research question:</a:t>
-            </a:r>
-          </a:p>
-          <a:p>
-            <a:r>
-              <a:rPr lang="en-US" sz="1200" b="1" kern="1200" dirty="0">
-                <a:solidFill>
-                  <a:schemeClr val="tx1"/>
-                </a:solidFill>
-                <a:effectLst/>
-                <a:latin typeface="+mn-lt"/>
-                <a:ea typeface="+mn-ea"/>
-                <a:cs typeface="+mn-cs"/>
-              </a:rPr>
-              <a:t>Is current insurance type associated with ever receiving medical help to become pregnant, after accounting for age, income, and education?</a:t>
-            </a:r>
-            <a:endParaRPr lang="en-US" sz="1200" kern="1200" dirty="0">
-              <a:solidFill>
-                <a:schemeClr val="tx1"/>
-              </a:solidFill>
-              <a:effectLst/>
-              <a:latin typeface="+mn-lt"/>
-              <a:ea typeface="+mn-ea"/>
-              <a:cs typeface="+mn-cs"/>
-            </a:endParaRPr>
-          </a:p>
-          <a:p>
-            <a:r>
-              <a:rPr lang="en-US" sz="1200" kern="1200" dirty="0">
-                <a:solidFill>
-                  <a:schemeClr val="tx1"/>
-                </a:solidFill>
-                <a:effectLst/>
-                <a:latin typeface="+mn-lt"/>
-                <a:ea typeface="+mn-ea"/>
-                <a:cs typeface="+mn-cs"/>
-              </a:rPr>
-              <a:t>The phrase “after accounting for” is important here.</a:t>
-            </a:r>
-          </a:p>
-          <a:p>
-            <a:r>
-              <a:rPr lang="en-US" sz="1200" kern="1200" dirty="0">
-                <a:solidFill>
-                  <a:schemeClr val="tx1"/>
-                </a:solidFill>
-                <a:effectLst/>
-                <a:latin typeface="+mn-lt"/>
-                <a:ea typeface="+mn-ea"/>
-                <a:cs typeface="+mn-cs"/>
-              </a:rPr>
-              <a:t>I want to know whether the insurance difference remains when the model also considers these other characteristics.</a:t>
-            </a:r>
-          </a:p>
-          <a:p>
-            <a:r>
-              <a:rPr lang="en-US" sz="1200" kern="1200" dirty="0">
-                <a:solidFill>
-                  <a:schemeClr val="tx1"/>
-                </a:solidFill>
-                <a:effectLst/>
-                <a:latin typeface="+mn-lt"/>
-                <a:ea typeface="+mn-ea"/>
-                <a:cs typeface="+mn-cs"/>
-              </a:rPr>
-              <a:t>Throughout the presentation, I’ll focus mainly on the private–Medicaid comparison because it gives us a clear thread to follow. However, the analysis includes all four insurance categories.</a:t>
-            </a:r>
-          </a:p>
-          <a:p>
             <a:endParaRPr lang="en-US" dirty="0"/>
           </a:p>
         </p:txBody>
@@ -1927,134 +828,6 @@
           <a:bodyPr/>
           <a:lstStyle/>
           <a:p>
-            <a:r>
-              <a:rPr lang="en-US" sz="1200" b="1" kern="1200" dirty="0">
-                <a:solidFill>
-                  <a:schemeClr val="tx1"/>
-                </a:solidFill>
-                <a:effectLst/>
-                <a:latin typeface="+mn-lt"/>
-                <a:ea typeface="+mn-ea"/>
-                <a:cs typeface="+mn-cs"/>
-              </a:rPr>
-              <a:t>Slide 4: Why This Question Matters</a:t>
-            </a:r>
-            <a:endParaRPr lang="en-US" sz="1200" kern="1200" dirty="0">
-              <a:solidFill>
-                <a:schemeClr val="tx1"/>
-              </a:solidFill>
-              <a:effectLst/>
-              <a:latin typeface="+mn-lt"/>
-              <a:ea typeface="+mn-ea"/>
-              <a:cs typeface="+mn-cs"/>
-            </a:endParaRPr>
-          </a:p>
-          <a:p>
-            <a:r>
-              <a:rPr lang="en-US" sz="1200" kern="1200" dirty="0">
-                <a:solidFill>
-                  <a:schemeClr val="tx1"/>
-                </a:solidFill>
-                <a:effectLst/>
-                <a:latin typeface="+mn-lt"/>
-                <a:ea typeface="+mn-ea"/>
-                <a:cs typeface="+mn-cs"/>
-              </a:rPr>
-              <a:t>This question matters because insurance coverage may be related to the affordability of medical care.</a:t>
-            </a:r>
-          </a:p>
-          <a:p>
-            <a:r>
-              <a:rPr lang="en-US" sz="1200" kern="1200" dirty="0">
-                <a:solidFill>
-                  <a:schemeClr val="tx1"/>
-                </a:solidFill>
-                <a:effectLst/>
-                <a:latin typeface="+mn-lt"/>
-                <a:ea typeface="+mn-ea"/>
-                <a:cs typeface="+mn-cs"/>
-              </a:rPr>
-              <a:t>However, insurance also connects with other characteristics. Income and education may be related both to the coverage someone has and to their experience of receiving care.</a:t>
-            </a:r>
-          </a:p>
-          <a:p>
-            <a:r>
-              <a:rPr lang="en-US" sz="1200" kern="1200" dirty="0">
-                <a:solidFill>
-                  <a:schemeClr val="tx1"/>
-                </a:solidFill>
-                <a:effectLst/>
-                <a:latin typeface="+mn-lt"/>
-                <a:ea typeface="+mn-ea"/>
-                <a:cs typeface="+mn-cs"/>
-              </a:rPr>
-              <a:t>That makes the initial difference interesting, but also difficult to interpret.</a:t>
-            </a:r>
-          </a:p>
-          <a:p>
-            <a:r>
-              <a:rPr lang="en-US" sz="1200" kern="1200" dirty="0">
-                <a:solidFill>
-                  <a:schemeClr val="tx1"/>
-                </a:solidFill>
-                <a:effectLst/>
-                <a:latin typeface="+mn-lt"/>
-                <a:ea typeface="+mn-ea"/>
-                <a:cs typeface="+mn-cs"/>
-              </a:rPr>
-              <a:t>The goal of this project is to investigate that difference more carefully: </a:t>
-            </a:r>
-            <a:r>
-              <a:rPr lang="en-US" sz="1200" b="1" kern="1200" dirty="0">
-                <a:solidFill>
-                  <a:schemeClr val="tx1"/>
-                </a:solidFill>
-                <a:effectLst/>
-                <a:latin typeface="+mn-lt"/>
-                <a:ea typeface="+mn-ea"/>
-                <a:cs typeface="+mn-cs"/>
-              </a:rPr>
-              <a:t>does the association remain once I account for selected characteristics?</a:t>
-            </a:r>
-            <a:endParaRPr lang="en-US" sz="1200" kern="1200" dirty="0">
-              <a:solidFill>
-                <a:schemeClr val="tx1"/>
-              </a:solidFill>
-              <a:effectLst/>
-              <a:latin typeface="+mn-lt"/>
-              <a:ea typeface="+mn-ea"/>
-              <a:cs typeface="+mn-cs"/>
-            </a:endParaRPr>
-          </a:p>
-          <a:p>
-            <a:r>
-              <a:rPr lang="en-US" sz="1200" kern="1200" dirty="0">
-                <a:solidFill>
-                  <a:schemeClr val="tx1"/>
-                </a:solidFill>
-                <a:effectLst/>
-                <a:latin typeface="+mn-lt"/>
-                <a:ea typeface="+mn-ea"/>
-                <a:cs typeface="+mn-cs"/>
-              </a:rPr>
-              <a:t>One distinction will be important throughout. The outcome measures whether someone reported receiving help. It does not tell us whether they needed help, wanted help, or experienced difficulty obtaining it.</a:t>
-            </a:r>
-          </a:p>
-          <a:p>
-            <a:r>
-              <a:rPr lang="en-US" sz="1200" kern="1200" dirty="0">
-                <a:solidFill>
-                  <a:schemeClr val="tx1"/>
-                </a:solidFill>
-                <a:effectLst/>
-                <a:latin typeface="+mn-lt"/>
-                <a:ea typeface="+mn-ea"/>
-                <a:cs typeface="+mn-cs"/>
-              </a:rPr>
-              <a:t>These findings may interest reproductive-health researchers, healthcare providers, and policymakers examining differences in fertility-related care receipt. They can help identify patterns that deserve further investigation</a:t>
-            </a:r>
-          </a:p>
-          <a:p>
             <a:endParaRPr lang="en-US" dirty="0"/>
           </a:p>
         </p:txBody>
@@ -2139,311 +912,6 @@
           <a:bodyPr/>
           <a:lstStyle/>
           <a:p>
-            <a:r>
-              <a:rPr lang="en-US" sz="1200" b="1" kern="1200" dirty="0">
-                <a:solidFill>
-                  <a:schemeClr val="tx1"/>
-                </a:solidFill>
-                <a:effectLst/>
-                <a:latin typeface="+mn-lt"/>
-                <a:ea typeface="+mn-ea"/>
-                <a:cs typeface="+mn-cs"/>
-              </a:rPr>
-              <a:t>Slide 5: Data and Measures</a:t>
-            </a:r>
-            <a:endParaRPr lang="en-US" sz="1200" kern="1200" dirty="0">
-              <a:solidFill>
-                <a:schemeClr val="tx1"/>
-              </a:solidFill>
-              <a:effectLst/>
-              <a:latin typeface="+mn-lt"/>
-              <a:ea typeface="+mn-ea"/>
-              <a:cs typeface="+mn-cs"/>
-            </a:endParaRPr>
-          </a:p>
-          <a:p>
-            <a:r>
-              <a:rPr lang="en-US" sz="1200" kern="1200" dirty="0">
-                <a:solidFill>
-                  <a:schemeClr val="tx1"/>
-                </a:solidFill>
-                <a:effectLst/>
-                <a:latin typeface="+mn-lt"/>
-                <a:ea typeface="+mn-ea"/>
-                <a:cs typeface="+mn-cs"/>
-              </a:rPr>
-              <a:t>I use the NSFG 2022–2023 female respondent public-use file.</a:t>
-            </a:r>
-          </a:p>
-          <a:p>
-            <a:r>
-              <a:rPr lang="en-US" sz="1200" kern="1200" dirty="0">
-                <a:solidFill>
-                  <a:schemeClr val="tx1"/>
-                </a:solidFill>
-                <a:effectLst/>
-                <a:latin typeface="+mn-lt"/>
-                <a:ea typeface="+mn-ea"/>
-                <a:cs typeface="+mn-cs"/>
-              </a:rPr>
-              <a:t>The original file contains </a:t>
-            </a:r>
-            <a:r>
-              <a:rPr lang="en-US" sz="1200" b="1" kern="1200" dirty="0">
-                <a:solidFill>
-                  <a:schemeClr val="tx1"/>
-                </a:solidFill>
-                <a:effectLst/>
-                <a:latin typeface="+mn-lt"/>
-                <a:ea typeface="+mn-ea"/>
-                <a:cs typeface="+mn-cs"/>
-              </a:rPr>
-              <a:t>5,586 respondents</a:t>
-            </a:r>
-            <a:r>
-              <a:rPr lang="en-US" sz="1200" kern="1200" dirty="0">
-                <a:solidFill>
-                  <a:schemeClr val="tx1"/>
-                </a:solidFill>
-                <a:effectLst/>
-                <a:latin typeface="+mn-lt"/>
-                <a:ea typeface="+mn-ea"/>
-                <a:cs typeface="+mn-cs"/>
-              </a:rPr>
-              <a:t>, and the analysis includes </a:t>
-            </a:r>
-            <a:r>
-              <a:rPr lang="en-US" sz="1200" b="1" kern="1200" dirty="0">
-                <a:solidFill>
-                  <a:schemeClr val="tx1"/>
-                </a:solidFill>
-                <a:effectLst/>
-                <a:latin typeface="+mn-lt"/>
-                <a:ea typeface="+mn-ea"/>
-                <a:cs typeface="+mn-cs"/>
-              </a:rPr>
-              <a:t>5,195 respondents</a:t>
-            </a:r>
-            <a:r>
-              <a:rPr lang="en-US" sz="1200" kern="1200" dirty="0">
-                <a:solidFill>
-                  <a:schemeClr val="tx1"/>
-                </a:solidFill>
-                <a:effectLst/>
-                <a:latin typeface="+mn-lt"/>
-                <a:ea typeface="+mn-ea"/>
-                <a:cs typeface="+mn-cs"/>
-              </a:rPr>
-              <a:t> with valid responses for the variables used. Each observation represents one respondent. I excluded 391 respondents whose outcome response was inapplicable, refused, or ‘don’t know,’ because those responses cannot be treated as ‘no.’</a:t>
-            </a:r>
-          </a:p>
-          <a:p>
-            <a:br>
-              <a:rPr lang="en-US" sz="1200" kern="1200" dirty="0">
-                <a:solidFill>
-                  <a:schemeClr val="tx1"/>
-                </a:solidFill>
-                <a:effectLst/>
-                <a:latin typeface="+mn-lt"/>
-                <a:ea typeface="+mn-ea"/>
-                <a:cs typeface="+mn-cs"/>
-              </a:rPr>
-            </a:br>
-            <a:endParaRPr lang="en-US" sz="1200" kern="1200" dirty="0">
-              <a:solidFill>
-                <a:schemeClr val="tx1"/>
-              </a:solidFill>
-              <a:effectLst/>
-              <a:latin typeface="+mn-lt"/>
-              <a:ea typeface="+mn-ea"/>
-              <a:cs typeface="+mn-cs"/>
-            </a:endParaRPr>
-          </a:p>
-          <a:p>
-            <a:r>
-              <a:rPr lang="en-US" sz="1200" kern="1200" dirty="0">
-                <a:solidFill>
-                  <a:schemeClr val="tx1"/>
-                </a:solidFill>
-                <a:effectLst/>
-                <a:latin typeface="+mn-lt"/>
-                <a:ea typeface="+mn-ea"/>
-                <a:cs typeface="+mn-cs"/>
-              </a:rPr>
-              <a:t>The outcome is whether the respondent </a:t>
-            </a:r>
-            <a:r>
-              <a:rPr lang="en-US" sz="1200" b="1" kern="1200" dirty="0">
-                <a:solidFill>
-                  <a:schemeClr val="tx1"/>
-                </a:solidFill>
-                <a:effectLst/>
-                <a:latin typeface="+mn-lt"/>
-                <a:ea typeface="+mn-ea"/>
-                <a:cs typeface="+mn-cs"/>
-              </a:rPr>
-              <a:t>ever received medical help to become pregnant</a:t>
-            </a:r>
-            <a:r>
-              <a:rPr lang="en-US" sz="1200" kern="1200" dirty="0">
-                <a:solidFill>
-                  <a:schemeClr val="tx1"/>
-                </a:solidFill>
-                <a:effectLst/>
-                <a:latin typeface="+mn-lt"/>
-                <a:ea typeface="+mn-ea"/>
-                <a:cs typeface="+mn-cs"/>
-              </a:rPr>
-              <a:t>. This is a yes-or-no measure of lifetime experience.</a:t>
-            </a:r>
-          </a:p>
-          <a:p>
-            <a:r>
-              <a:rPr lang="en-US" sz="1200" kern="1200" dirty="0">
-                <a:solidFill>
-                  <a:schemeClr val="tx1"/>
-                </a:solidFill>
-                <a:effectLst/>
-                <a:latin typeface="+mn-lt"/>
-                <a:ea typeface="+mn-ea"/>
-                <a:cs typeface="+mn-cs"/>
-              </a:rPr>
-              <a:t>The main predictor is </a:t>
-            </a:r>
-            <a:r>
-              <a:rPr lang="en-US" sz="1200" b="1" kern="1200" dirty="0">
-                <a:solidFill>
-                  <a:schemeClr val="tx1"/>
-                </a:solidFill>
-                <a:effectLst/>
-                <a:latin typeface="+mn-lt"/>
-                <a:ea typeface="+mn-ea"/>
-                <a:cs typeface="+mn-cs"/>
-              </a:rPr>
-              <a:t>current insurance coverage</a:t>
-            </a:r>
-            <a:r>
-              <a:rPr lang="en-US" sz="1200" kern="1200" dirty="0">
-                <a:solidFill>
-                  <a:schemeClr val="tx1"/>
-                </a:solidFill>
-                <a:effectLst/>
-                <a:latin typeface="+mn-lt"/>
-                <a:ea typeface="+mn-ea"/>
-                <a:cs typeface="+mn-cs"/>
-              </a:rPr>
-              <a:t>, divided into four categories. </a:t>
-            </a:r>
-          </a:p>
-          <a:p>
-            <a:r>
-              <a:rPr lang="en-US" sz="1200" kern="1200" dirty="0">
-                <a:solidFill>
-                  <a:schemeClr val="tx1"/>
-                </a:solidFill>
-                <a:effectLst/>
-                <a:latin typeface="+mn-lt"/>
-                <a:ea typeface="+mn-ea"/>
-                <a:cs typeface="+mn-cs"/>
-              </a:rPr>
-              <a:t>The model also includes age, income relative to the poverty threshold, and education.</a:t>
-            </a:r>
-          </a:p>
-          <a:p>
-            <a:r>
-              <a:rPr lang="en-US" sz="1200" kern="1200" dirty="0">
-                <a:solidFill>
-                  <a:schemeClr val="tx1"/>
-                </a:solidFill>
-                <a:effectLst/>
-                <a:latin typeface="+mn-lt"/>
-                <a:ea typeface="+mn-ea"/>
-                <a:cs typeface="+mn-cs"/>
-              </a:rPr>
-              <a:t>I use survey weights to account for unequal representation in the sample. For the statistical model, I also account for the survey’s strata and clusters when calculating uncertainty.</a:t>
-            </a:r>
-          </a:p>
-          <a:p>
-            <a:r>
-              <a:rPr lang="en-US" sz="1200" kern="1200" dirty="0">
-                <a:solidFill>
-                  <a:schemeClr val="tx1"/>
-                </a:solidFill>
-                <a:effectLst/>
-                <a:latin typeface="+mn-lt"/>
-                <a:ea typeface="+mn-ea"/>
-                <a:cs typeface="+mn-cs"/>
-              </a:rPr>
-              <a:t>There is an important timing limitation: </a:t>
-            </a:r>
-            <a:r>
-              <a:rPr lang="en-US" sz="1200" b="1" kern="1200" dirty="0">
-                <a:solidFill>
-                  <a:schemeClr val="tx1"/>
-                </a:solidFill>
-                <a:effectLst/>
-                <a:latin typeface="+mn-lt"/>
-                <a:ea typeface="+mn-ea"/>
-                <a:cs typeface="+mn-cs"/>
-              </a:rPr>
-              <a:t>current insurance may differ from the insurance someone had when they received help</a:t>
-            </a:r>
-            <a:r>
-              <a:rPr lang="en-US" sz="1200" kern="1200" dirty="0">
-                <a:solidFill>
-                  <a:schemeClr val="tx1"/>
-                </a:solidFill>
-                <a:effectLst/>
-                <a:latin typeface="+mn-lt"/>
-                <a:ea typeface="+mn-ea"/>
-                <a:cs typeface="+mn-cs"/>
-              </a:rPr>
-              <a:t>. I’ll return to that when discussing the conclusions.</a:t>
-            </a:r>
-          </a:p>
-          <a:p>
-            <a:r>
-              <a:rPr lang="en-US" sz="1200" kern="1200" dirty="0">
-                <a:solidFill>
-                  <a:schemeClr val="tx1"/>
-                </a:solidFill>
-                <a:effectLst/>
-                <a:latin typeface="+mn-lt"/>
-                <a:ea typeface="+mn-ea"/>
-                <a:cs typeface="+mn-cs"/>
-              </a:rPr>
-              <a:t>CHIP: Children's Health Insurance Program</a:t>
-            </a:r>
-          </a:p>
-          <a:p>
-            <a:r>
-              <a:rPr lang="en-US" sz="1200" kern="1200" dirty="0">
-                <a:solidFill>
-                  <a:schemeClr val="tx1"/>
-                </a:solidFill>
-                <a:effectLst/>
-                <a:latin typeface="+mn-lt"/>
-                <a:ea typeface="+mn-ea"/>
-                <a:cs typeface="+mn-cs"/>
-              </a:rPr>
-              <a:t>IHS: Indian Health Service </a:t>
-            </a:r>
-          </a:p>
-          <a:p>
-            <a:r>
-              <a:rPr lang="en-US" sz="1200" kern="1200" dirty="0">
-                <a:solidFill>
-                  <a:schemeClr val="tx1"/>
-                </a:solidFill>
-                <a:effectLst/>
-                <a:latin typeface="+mn-lt"/>
-                <a:ea typeface="+mn-ea"/>
-                <a:cs typeface="+mn-cs"/>
-              </a:rPr>
-              <a:t>400% of the Federal Poverty Level (FPL) means a household's annual income is four times the base poverty guideline set for their household size</a:t>
-            </a:r>
-          </a:p>
-          <a:p>
             <a:endParaRPr lang="en-US" dirty="0"/>
           </a:p>
         </p:txBody>
@@ -2527,311 +995,6 @@
         <p:txBody>
           <a:bodyPr/>
           <a:lstStyle/>
-          <a:p>
-            <a:r>
-              <a:rPr lang="en-US" sz="1200" b="1" kern="1200" dirty="0">
-                <a:solidFill>
-                  <a:schemeClr val="tx1"/>
-                </a:solidFill>
-                <a:effectLst/>
-                <a:latin typeface="+mn-lt"/>
-                <a:ea typeface="+mn-ea"/>
-                <a:cs typeface="+mn-cs"/>
-              </a:rPr>
-              <a:t>Slide 6: Could Differences in Age, Income, and Education Help Explain the Gap?</a:t>
-            </a:r>
-            <a:endParaRPr lang="en-US" sz="1200" kern="1200" dirty="0">
-              <a:solidFill>
-                <a:schemeClr val="tx1"/>
-              </a:solidFill>
-              <a:effectLst/>
-              <a:latin typeface="+mn-lt"/>
-              <a:ea typeface="+mn-ea"/>
-              <a:cs typeface="+mn-cs"/>
-            </a:endParaRPr>
-          </a:p>
-          <a:p>
-            <a:r>
-              <a:rPr lang="en-US" sz="1200" kern="1200" dirty="0">
-                <a:solidFill>
-                  <a:schemeClr val="tx1"/>
-                </a:solidFill>
-                <a:effectLst/>
-                <a:latin typeface="+mn-lt"/>
-                <a:ea typeface="+mn-ea"/>
-                <a:cs typeface="+mn-cs"/>
-              </a:rPr>
-              <a:t>Earlier, we saw that privately insured respondents reported receiving help more often than Medicaid respondents.</a:t>
-            </a:r>
-          </a:p>
-          <a:p>
-            <a:r>
-              <a:rPr lang="en-US" sz="1200" kern="1200" dirty="0">
-                <a:solidFill>
-                  <a:schemeClr val="tx1"/>
-                </a:solidFill>
-                <a:effectLst/>
-                <a:latin typeface="+mn-lt"/>
-                <a:ea typeface="+mn-ea"/>
-                <a:cs typeface="+mn-cs"/>
-              </a:rPr>
-              <a:t>But insurance is not the only difference between these groups.</a:t>
-            </a:r>
-          </a:p>
-          <a:p>
-            <a:r>
-              <a:rPr lang="en-US" sz="1200" kern="1200" dirty="0">
-                <a:solidFill>
-                  <a:schemeClr val="tx1"/>
-                </a:solidFill>
-                <a:effectLst/>
-                <a:latin typeface="+mn-lt"/>
-                <a:ea typeface="+mn-ea"/>
-                <a:cs typeface="+mn-cs"/>
-              </a:rPr>
-              <a:t>Privately insured respondents are older on average: </a:t>
-            </a:r>
-            <a:r>
-              <a:rPr lang="en-US" sz="1200" b="1" kern="1200" dirty="0">
-                <a:solidFill>
-                  <a:schemeClr val="tx1"/>
-                </a:solidFill>
-                <a:effectLst/>
-                <a:latin typeface="+mn-lt"/>
-                <a:ea typeface="+mn-ea"/>
-                <a:cs typeface="+mn-cs"/>
-              </a:rPr>
-              <a:t>34.1 years, compared with 30.9 years</a:t>
-            </a:r>
-            <a:r>
-              <a:rPr lang="en-US" sz="1200" kern="1200" dirty="0">
-                <a:solidFill>
-                  <a:schemeClr val="tx1"/>
-                </a:solidFill>
-                <a:effectLst/>
-                <a:latin typeface="+mn-lt"/>
-                <a:ea typeface="+mn-ea"/>
-                <a:cs typeface="+mn-cs"/>
-              </a:rPr>
-              <a:t> for Medicaid respondents. They also have higher income and are more likely to have a bachelor’s degree.</a:t>
-            </a:r>
-          </a:p>
-          <a:p>
-            <a:r>
-              <a:rPr lang="en-US" sz="1200" kern="1200" dirty="0">
-                <a:solidFill>
-                  <a:schemeClr val="tx1"/>
-                </a:solidFill>
-                <a:effectLst/>
-                <a:latin typeface="+mn-lt"/>
-                <a:ea typeface="+mn-ea"/>
-                <a:cs typeface="+mn-cs"/>
-              </a:rPr>
-              <a:t>The income numbers need some explanation. </a:t>
-            </a:r>
-            <a:r>
-              <a:rPr lang="en-US" sz="1200" b="1" kern="1200" dirty="0">
-                <a:solidFill>
-                  <a:schemeClr val="tx1"/>
-                </a:solidFill>
-                <a:effectLst/>
-                <a:latin typeface="+mn-lt"/>
-                <a:ea typeface="+mn-ea"/>
-                <a:cs typeface="+mn-cs"/>
-              </a:rPr>
-              <a:t>100% of the poverty threshold means income at that threshold.</a:t>
-            </a:r>
-            <a:r>
-              <a:rPr lang="en-US" sz="1200" kern="1200" dirty="0">
-                <a:solidFill>
-                  <a:schemeClr val="tx1"/>
-                </a:solidFill>
-                <a:effectLst/>
-                <a:latin typeface="+mn-lt"/>
-                <a:ea typeface="+mn-ea"/>
-                <a:cs typeface="+mn-cs"/>
-              </a:rPr>
-              <a:t> The private group’s average is about </a:t>
-            </a:r>
-            <a:r>
-              <a:rPr lang="en-US" sz="1200" b="1" kern="1200" dirty="0">
-                <a:solidFill>
-                  <a:schemeClr val="tx1"/>
-                </a:solidFill>
-                <a:effectLst/>
-                <a:latin typeface="+mn-lt"/>
-                <a:ea typeface="+mn-ea"/>
-                <a:cs typeface="+mn-cs"/>
-              </a:rPr>
-              <a:t>4.1 times the threshold</a:t>
-            </a:r>
-            <a:r>
-              <a:rPr lang="en-US" sz="1200" kern="1200" dirty="0">
-                <a:solidFill>
-                  <a:schemeClr val="tx1"/>
-                </a:solidFill>
-                <a:effectLst/>
-                <a:latin typeface="+mn-lt"/>
-                <a:ea typeface="+mn-ea"/>
-                <a:cs typeface="+mn-cs"/>
-              </a:rPr>
-              <a:t>, compared with about </a:t>
-            </a:r>
-            <a:r>
-              <a:rPr lang="en-US" sz="1200" b="1" kern="1200" dirty="0">
-                <a:solidFill>
-                  <a:schemeClr val="tx1"/>
-                </a:solidFill>
-                <a:effectLst/>
-                <a:latin typeface="+mn-lt"/>
-                <a:ea typeface="+mn-ea"/>
-                <a:cs typeface="+mn-cs"/>
-              </a:rPr>
-              <a:t>1.7 times</a:t>
-            </a:r>
-            <a:r>
-              <a:rPr lang="en-US" sz="1200" kern="1200" dirty="0">
-                <a:solidFill>
-                  <a:schemeClr val="tx1"/>
-                </a:solidFill>
-                <a:effectLst/>
-                <a:latin typeface="+mn-lt"/>
-                <a:ea typeface="+mn-ea"/>
-                <a:cs typeface="+mn-cs"/>
-              </a:rPr>
-              <a:t> for the Medicaid group.</a:t>
-            </a:r>
-          </a:p>
-          <a:p>
-            <a:r>
-              <a:rPr lang="en-US" sz="1200" kern="1200" dirty="0">
-                <a:solidFill>
-                  <a:schemeClr val="tx1"/>
-                </a:solidFill>
-                <a:effectLst/>
-                <a:latin typeface="+mn-lt"/>
-                <a:ea typeface="+mn-ea"/>
-                <a:cs typeface="+mn-cs"/>
-              </a:rPr>
-              <a:t>For education, about </a:t>
-            </a:r>
-            <a:r>
-              <a:rPr lang="en-US" sz="1200" b="1" kern="1200" dirty="0">
-                <a:solidFill>
-                  <a:schemeClr val="tx1"/>
-                </a:solidFill>
-                <a:effectLst/>
-                <a:latin typeface="+mn-lt"/>
-                <a:ea typeface="+mn-ea"/>
-                <a:cs typeface="+mn-cs"/>
-              </a:rPr>
-              <a:t>54% of the private group has a bachelor’s degree or higher</a:t>
-            </a:r>
-            <a:r>
-              <a:rPr lang="en-US" sz="1200" kern="1200" dirty="0">
-                <a:solidFill>
-                  <a:schemeClr val="tx1"/>
-                </a:solidFill>
-                <a:effectLst/>
-                <a:latin typeface="+mn-lt"/>
-                <a:ea typeface="+mn-ea"/>
-                <a:cs typeface="+mn-cs"/>
-              </a:rPr>
-              <a:t>, compared with about </a:t>
-            </a:r>
-            <a:r>
-              <a:rPr lang="en-US" sz="1200" b="1" kern="1200" dirty="0">
-                <a:solidFill>
-                  <a:schemeClr val="tx1"/>
-                </a:solidFill>
-                <a:effectLst/>
-                <a:latin typeface="+mn-lt"/>
-                <a:ea typeface="+mn-ea"/>
-                <a:cs typeface="+mn-cs"/>
-              </a:rPr>
-              <a:t>12% of the Medicaid group</a:t>
-            </a:r>
-            <a:r>
-              <a:rPr lang="en-US" sz="1200" kern="1200" dirty="0">
-                <a:solidFill>
-                  <a:schemeClr val="tx1"/>
-                </a:solidFill>
-                <a:effectLst/>
-                <a:latin typeface="+mn-lt"/>
-                <a:ea typeface="+mn-ea"/>
-                <a:cs typeface="+mn-cs"/>
-              </a:rPr>
-              <a:t>.</a:t>
-            </a:r>
-          </a:p>
-          <a:p>
-            <a:r>
-              <a:rPr lang="en-US" sz="1200" kern="1200" dirty="0">
-                <a:solidFill>
-                  <a:schemeClr val="tx1"/>
-                </a:solidFill>
-                <a:effectLst/>
-                <a:latin typeface="+mn-lt"/>
-                <a:ea typeface="+mn-ea"/>
-                <a:cs typeface="+mn-cs"/>
-              </a:rPr>
-              <a:t>Why does this matter? If age, income, or education also relates to receiving help, then part of the difference we first saw could be related to these characteristics.</a:t>
-            </a:r>
-          </a:p>
-          <a:p>
-            <a:r>
-              <a:rPr lang="en-US" sz="1200" kern="1200" dirty="0">
-                <a:solidFill>
-                  <a:schemeClr val="tx1"/>
-                </a:solidFill>
-                <a:effectLst/>
-                <a:latin typeface="+mn-lt"/>
-                <a:ea typeface="+mn-ea"/>
-                <a:cs typeface="+mn-cs"/>
-              </a:rPr>
-              <a:t>So before interpreting the insurance association, we need to consider these differences.</a:t>
-            </a:r>
-          </a:p>
-          <a:p>
-            <a:r>
-              <a:rPr lang="en-US" sz="1200" kern="1200" dirty="0">
-                <a:solidFill>
-                  <a:schemeClr val="tx1"/>
-                </a:solidFill>
-                <a:effectLst/>
-                <a:latin typeface="+mn-lt"/>
-                <a:ea typeface="+mn-ea"/>
-                <a:cs typeface="+mn-cs"/>
-              </a:rPr>
-              <a:t>The next slide checks whether respondents of different ages, income levels, and education levels report different rates of receiving help.</a:t>
-            </a:r>
-          </a:p>
-          <a:p>
-            <a:r>
-              <a:rPr lang="en-US" sz="1200" b="1" kern="1200" dirty="0">
-                <a:solidFill>
-                  <a:schemeClr val="tx1"/>
-                </a:solidFill>
-                <a:effectLst/>
-                <a:latin typeface="+mn-lt"/>
-                <a:ea typeface="+mn-ea"/>
-                <a:cs typeface="+mn-cs"/>
-              </a:rPr>
-              <a:t>The takeaway:</a:t>
-            </a:r>
-            <a:r>
-              <a:rPr lang="en-US" sz="1200" kern="1200" dirty="0">
-                <a:solidFill>
-                  <a:schemeClr val="tx1"/>
-                </a:solidFill>
-                <a:effectLst/>
-                <a:latin typeface="+mn-lt"/>
-                <a:ea typeface="+mn-ea"/>
-                <a:cs typeface="+mn-cs"/>
-              </a:rPr>
-              <a:t> The initial chart compares groups that differ in several ways. That is why we later include age, income, and education in the model.</a:t>
-            </a:r>
-          </a:p>
           <a:p>
             <a:endParaRPr lang="en-US" dirty="0"/>
           </a:p>
@@ -2935,271 +1098,6 @@
           <a:bodyPr/>
           <a:lstStyle/>
           <a:p>
-            <a:r>
-              <a:rPr lang="en-US" sz="1200" b="1" kern="1200" dirty="0">
-                <a:solidFill>
-                  <a:schemeClr val="tx1"/>
-                </a:solidFill>
-                <a:effectLst/>
-                <a:latin typeface="+mn-lt"/>
-                <a:ea typeface="+mn-ea"/>
-                <a:cs typeface="+mn-cs"/>
-              </a:rPr>
-              <a:t>Slide 7: Help Receipt Also Varies with Age, Income, and Education</a:t>
-            </a:r>
-            <a:endParaRPr lang="en-US" sz="1200" kern="1200" dirty="0">
-              <a:solidFill>
-                <a:schemeClr val="tx1"/>
-              </a:solidFill>
-              <a:effectLst/>
-              <a:latin typeface="+mn-lt"/>
-              <a:ea typeface="+mn-ea"/>
-              <a:cs typeface="+mn-cs"/>
-            </a:endParaRPr>
-          </a:p>
-          <a:p>
-            <a:r>
-              <a:rPr lang="en-US" sz="1200" kern="1200" dirty="0">
-                <a:solidFill>
-                  <a:schemeClr val="tx1"/>
-                </a:solidFill>
-                <a:effectLst/>
-                <a:latin typeface="+mn-lt"/>
-                <a:ea typeface="+mn-ea"/>
-                <a:cs typeface="+mn-cs"/>
-              </a:rPr>
-              <a:t>These charts show that help receipt varies with each of the characteristics we just discussed.</a:t>
-            </a:r>
-          </a:p>
-          <a:p>
-            <a:r>
-              <a:rPr lang="en-US" sz="1200" kern="1200" dirty="0">
-                <a:solidFill>
-                  <a:schemeClr val="tx1"/>
-                </a:solidFill>
-                <a:effectLst/>
-                <a:latin typeface="+mn-lt"/>
-                <a:ea typeface="+mn-ea"/>
-                <a:cs typeface="+mn-cs"/>
-              </a:rPr>
-              <a:t>For age, the rate is approximately </a:t>
-            </a:r>
-            <a:r>
-              <a:rPr lang="en-US" sz="1200" b="1" kern="1200" dirty="0">
-                <a:solidFill>
-                  <a:schemeClr val="tx1"/>
-                </a:solidFill>
-                <a:effectLst/>
-                <a:latin typeface="+mn-lt"/>
-                <a:ea typeface="+mn-ea"/>
-                <a:cs typeface="+mn-cs"/>
-              </a:rPr>
-              <a:t>1.5% among respondents aged 15–24</a:t>
-            </a:r>
-            <a:r>
-              <a:rPr lang="en-US" sz="1200" kern="1200" dirty="0">
-                <a:solidFill>
-                  <a:schemeClr val="tx1"/>
-                </a:solidFill>
-                <a:effectLst/>
-                <a:latin typeface="+mn-lt"/>
-                <a:ea typeface="+mn-ea"/>
-                <a:cs typeface="+mn-cs"/>
-              </a:rPr>
-              <a:t>, compared with </a:t>
-            </a:r>
-            <a:r>
-              <a:rPr lang="en-US" sz="1200" b="1" kern="1200" dirty="0">
-                <a:solidFill>
-                  <a:schemeClr val="tx1"/>
-                </a:solidFill>
-                <a:effectLst/>
-                <a:latin typeface="+mn-lt"/>
-                <a:ea typeface="+mn-ea"/>
-                <a:cs typeface="+mn-cs"/>
-              </a:rPr>
-              <a:t>15.5% among those aged 35–44</a:t>
-            </a:r>
-            <a:r>
-              <a:rPr lang="en-US" sz="1200" kern="1200" dirty="0">
-                <a:solidFill>
-                  <a:schemeClr val="tx1"/>
-                </a:solidFill>
-                <a:effectLst/>
-                <a:latin typeface="+mn-lt"/>
-                <a:ea typeface="+mn-ea"/>
-                <a:cs typeface="+mn-cs"/>
-              </a:rPr>
-              <a:t>.</a:t>
-            </a:r>
-          </a:p>
-          <a:p>
-            <a:r>
-              <a:rPr lang="en-US" sz="1200" kern="1200" dirty="0">
-                <a:solidFill>
-                  <a:schemeClr val="tx1"/>
-                </a:solidFill>
-                <a:effectLst/>
-                <a:latin typeface="+mn-lt"/>
-                <a:ea typeface="+mn-ea"/>
-                <a:cs typeface="+mn-cs"/>
-              </a:rPr>
-              <a:t>Age is especially relevant because the outcome asks about lifetime experience. Older respondents have had more time to receive help.</a:t>
-            </a:r>
-          </a:p>
-          <a:p>
-            <a:r>
-              <a:rPr lang="en-US" sz="1200" kern="1200" dirty="0">
-                <a:solidFill>
-                  <a:schemeClr val="tx1"/>
-                </a:solidFill>
-                <a:effectLst/>
-                <a:latin typeface="+mn-lt"/>
-                <a:ea typeface="+mn-ea"/>
-                <a:cs typeface="+mn-cs"/>
-              </a:rPr>
-              <a:t>For income, approximately </a:t>
-            </a:r>
-            <a:r>
-              <a:rPr lang="en-US" sz="1200" b="1" kern="1200" dirty="0">
-                <a:solidFill>
-                  <a:schemeClr val="tx1"/>
-                </a:solidFill>
-                <a:effectLst/>
-                <a:latin typeface="+mn-lt"/>
-                <a:ea typeface="+mn-ea"/>
-                <a:cs typeface="+mn-cs"/>
-              </a:rPr>
-              <a:t>4.5% of respondents at or below the poverty threshold</a:t>
-            </a:r>
-            <a:r>
-              <a:rPr lang="en-US" sz="1200" kern="1200" dirty="0">
-                <a:solidFill>
-                  <a:schemeClr val="tx1"/>
-                </a:solidFill>
-                <a:effectLst/>
-                <a:latin typeface="+mn-lt"/>
-                <a:ea typeface="+mn-ea"/>
-                <a:cs typeface="+mn-cs"/>
-              </a:rPr>
-              <a:t> report receiving help, compared with </a:t>
-            </a:r>
-            <a:r>
-              <a:rPr lang="en-US" sz="1200" b="1" kern="1200" dirty="0">
-                <a:solidFill>
-                  <a:schemeClr val="tx1"/>
-                </a:solidFill>
-                <a:effectLst/>
-                <a:latin typeface="+mn-lt"/>
-                <a:ea typeface="+mn-ea"/>
-                <a:cs typeface="+mn-cs"/>
-              </a:rPr>
-              <a:t>13.9% above 400% of the threshold</a:t>
-            </a:r>
-            <a:r>
-              <a:rPr lang="en-US" sz="1200" kern="1200" dirty="0">
-                <a:solidFill>
-                  <a:schemeClr val="tx1"/>
-                </a:solidFill>
-                <a:effectLst/>
-                <a:latin typeface="+mn-lt"/>
-                <a:ea typeface="+mn-ea"/>
-                <a:cs typeface="+mn-cs"/>
-              </a:rPr>
-              <a:t>.</a:t>
-            </a:r>
-          </a:p>
-          <a:p>
-            <a:r>
-              <a:rPr lang="en-US" sz="1200" kern="1200" dirty="0">
-                <a:solidFill>
-                  <a:schemeClr val="tx1"/>
-                </a:solidFill>
-                <a:effectLst/>
-                <a:latin typeface="+mn-lt"/>
-                <a:ea typeface="+mn-ea"/>
-                <a:cs typeface="+mn-cs"/>
-              </a:rPr>
-              <a:t>For education, the rate is approximately </a:t>
-            </a:r>
-            <a:r>
-              <a:rPr lang="en-US" sz="1200" b="1" kern="1200" dirty="0">
-                <a:solidFill>
-                  <a:schemeClr val="tx1"/>
-                </a:solidFill>
-                <a:effectLst/>
-                <a:latin typeface="+mn-lt"/>
-                <a:ea typeface="+mn-ea"/>
-                <a:cs typeface="+mn-cs"/>
-              </a:rPr>
-              <a:t>4.3% among respondents with less than high school education</a:t>
-            </a:r>
-            <a:r>
-              <a:rPr lang="en-US" sz="1200" kern="1200" dirty="0">
-                <a:solidFill>
-                  <a:schemeClr val="tx1"/>
-                </a:solidFill>
-                <a:effectLst/>
-                <a:latin typeface="+mn-lt"/>
-                <a:ea typeface="+mn-ea"/>
-                <a:cs typeface="+mn-cs"/>
-              </a:rPr>
-              <a:t>, compared with </a:t>
-            </a:r>
-            <a:r>
-              <a:rPr lang="en-US" sz="1200" b="1" kern="1200" dirty="0">
-                <a:solidFill>
-                  <a:schemeClr val="tx1"/>
-                </a:solidFill>
-                <a:effectLst/>
-                <a:latin typeface="+mn-lt"/>
-                <a:ea typeface="+mn-ea"/>
-                <a:cs typeface="+mn-cs"/>
-              </a:rPr>
-              <a:t>15.1% among those with a bachelor’s degree or higher</a:t>
-            </a:r>
-            <a:r>
-              <a:rPr lang="en-US" sz="1200" kern="1200" dirty="0">
-                <a:solidFill>
-                  <a:schemeClr val="tx1"/>
-                </a:solidFill>
-                <a:effectLst/>
-                <a:latin typeface="+mn-lt"/>
-                <a:ea typeface="+mn-ea"/>
-                <a:cs typeface="+mn-cs"/>
-              </a:rPr>
-              <a:t>.</a:t>
-            </a:r>
-          </a:p>
-          <a:p>
-            <a:r>
-              <a:rPr lang="en-US" sz="1200" kern="1200" dirty="0">
-                <a:solidFill>
-                  <a:schemeClr val="tx1"/>
-                </a:solidFill>
-                <a:effectLst/>
-                <a:latin typeface="+mn-lt"/>
-                <a:ea typeface="+mn-ea"/>
-                <a:cs typeface="+mn-cs"/>
-              </a:rPr>
-              <a:t>Together, these charts make the alternative explanation more plausible. Private respondents tend to have characteristics that also correspond with higher reported help receipt.</a:t>
-            </a:r>
-          </a:p>
-          <a:p>
-            <a:r>
-              <a:rPr lang="en-US" sz="1200" kern="1200" dirty="0">
-                <a:solidFill>
-                  <a:schemeClr val="tx1"/>
-                </a:solidFill>
-                <a:effectLst/>
-                <a:latin typeface="+mn-lt"/>
-                <a:ea typeface="+mn-ea"/>
-                <a:cs typeface="+mn-cs"/>
-              </a:rPr>
-              <a:t>These are still descriptive comparisons. To investigate further, I first look within age groups, then account for all three characteristics together.</a:t>
-            </a:r>
-          </a:p>
-          <a:p>
             <a:endParaRPr lang="en-US" dirty="0"/>
           </a:p>
         </p:txBody>
@@ -3290,272 +1188,6 @@
           <a:bodyPr/>
           <a:lstStyle/>
           <a:p>
-            <a:r>
-              <a:rPr lang="en-US" sz="1200" b="1" kern="1200" dirty="0">
-                <a:solidFill>
-                  <a:schemeClr val="tx1"/>
-                </a:solidFill>
-                <a:effectLst/>
-                <a:latin typeface="+mn-lt"/>
-                <a:ea typeface="+mn-ea"/>
-                <a:cs typeface="+mn-cs"/>
-              </a:rPr>
-              <a:t>Slide 8: The Insurance Pattern Within Age Groups</a:t>
-            </a:r>
-            <a:endParaRPr lang="en-US" sz="1200" kern="1200" dirty="0">
-              <a:solidFill>
-                <a:schemeClr val="tx1"/>
-              </a:solidFill>
-              <a:effectLst/>
-              <a:latin typeface="+mn-lt"/>
-              <a:ea typeface="+mn-ea"/>
-              <a:cs typeface="+mn-cs"/>
-            </a:endParaRPr>
-          </a:p>
-          <a:p>
-            <a:r>
-              <a:rPr lang="en-US" sz="1200" kern="1200" dirty="0">
-                <a:solidFill>
-                  <a:schemeClr val="tx1"/>
-                </a:solidFill>
-                <a:effectLst/>
-                <a:latin typeface="+mn-lt"/>
-                <a:ea typeface="+mn-ea"/>
-                <a:cs typeface="+mn-cs"/>
-              </a:rPr>
-              <a:t>This heatmap asks a narrower question: </a:t>
-            </a:r>
-            <a:r>
-              <a:rPr lang="en-US" sz="1200" b="1" kern="1200" dirty="0">
-                <a:solidFill>
-                  <a:schemeClr val="tx1"/>
-                </a:solidFill>
-                <a:effectLst/>
-                <a:latin typeface="+mn-lt"/>
-                <a:ea typeface="+mn-ea"/>
-                <a:cs typeface="+mn-cs"/>
-              </a:rPr>
-              <a:t>does the insurance pattern remain when we compare respondents within the same broad age group?</a:t>
-            </a:r>
-            <a:endParaRPr lang="en-US" sz="1200" kern="1200" dirty="0">
-              <a:solidFill>
-                <a:schemeClr val="tx1"/>
-              </a:solidFill>
-              <a:effectLst/>
-              <a:latin typeface="+mn-lt"/>
-              <a:ea typeface="+mn-ea"/>
-              <a:cs typeface="+mn-cs"/>
-            </a:endParaRPr>
-          </a:p>
-          <a:p>
-            <a:r>
-              <a:rPr lang="en-US" sz="1200" kern="1200" dirty="0">
-                <a:solidFill>
-                  <a:schemeClr val="tx1"/>
-                </a:solidFill>
-                <a:effectLst/>
-                <a:latin typeface="+mn-lt"/>
-                <a:ea typeface="+mn-ea"/>
-                <a:cs typeface="+mn-cs"/>
-              </a:rPr>
-              <a:t>Rows represent insurance categories, and columns represent age groups. Darker cells indicate higher reported help-receipt rates.</a:t>
-            </a:r>
-          </a:p>
-          <a:p>
-            <a:r>
-              <a:rPr lang="en-US" sz="1200" kern="1200" dirty="0">
-                <a:solidFill>
-                  <a:schemeClr val="tx1"/>
-                </a:solidFill>
-                <a:effectLst/>
-                <a:latin typeface="+mn-lt"/>
-                <a:ea typeface="+mn-ea"/>
-                <a:cs typeface="+mn-cs"/>
-              </a:rPr>
-              <a:t>Focus on the private and Medicaid rows.</a:t>
-            </a:r>
-          </a:p>
-          <a:p>
-            <a:r>
-              <a:rPr lang="en-US" sz="1200" kern="1200" dirty="0">
-                <a:solidFill>
-                  <a:schemeClr val="tx1"/>
-                </a:solidFill>
-                <a:effectLst/>
-                <a:latin typeface="+mn-lt"/>
-                <a:ea typeface="+mn-ea"/>
-                <a:cs typeface="+mn-cs"/>
-              </a:rPr>
-              <a:t>Among respondents aged </a:t>
-            </a:r>
-            <a:r>
-              <a:rPr lang="en-US" sz="1200" b="1" kern="1200" dirty="0">
-                <a:solidFill>
-                  <a:schemeClr val="tx1"/>
-                </a:solidFill>
-                <a:effectLst/>
-                <a:latin typeface="+mn-lt"/>
-                <a:ea typeface="+mn-ea"/>
-                <a:cs typeface="+mn-cs"/>
-              </a:rPr>
-              <a:t>25–34</a:t>
-            </a:r>
-            <a:r>
-              <a:rPr lang="en-US" sz="1200" kern="1200" dirty="0">
-                <a:solidFill>
-                  <a:schemeClr val="tx1"/>
-                </a:solidFill>
-                <a:effectLst/>
-                <a:latin typeface="+mn-lt"/>
-                <a:ea typeface="+mn-ea"/>
-                <a:cs typeface="+mn-cs"/>
-              </a:rPr>
-              <a:t>, the rates are approximately </a:t>
-            </a:r>
-            <a:r>
-              <a:rPr lang="en-US" sz="1200" b="1" kern="1200" dirty="0">
-                <a:solidFill>
-                  <a:schemeClr val="tx1"/>
-                </a:solidFill>
-                <a:effectLst/>
-                <a:latin typeface="+mn-lt"/>
-                <a:ea typeface="+mn-ea"/>
-                <a:cs typeface="+mn-cs"/>
-              </a:rPr>
-              <a:t>11.1% for private coverage and 2.8% for Medicaid</a:t>
-            </a:r>
-            <a:r>
-              <a:rPr lang="en-US" sz="1200" kern="1200" dirty="0">
-                <a:solidFill>
-                  <a:schemeClr val="tx1"/>
-                </a:solidFill>
-                <a:effectLst/>
-                <a:latin typeface="+mn-lt"/>
-                <a:ea typeface="+mn-ea"/>
-                <a:cs typeface="+mn-cs"/>
-              </a:rPr>
-              <a:t>.</a:t>
-            </a:r>
-          </a:p>
-          <a:p>
-            <a:r>
-              <a:rPr lang="en-US" sz="1200" kern="1200" dirty="0">
-                <a:solidFill>
-                  <a:schemeClr val="tx1"/>
-                </a:solidFill>
-                <a:effectLst/>
-                <a:latin typeface="+mn-lt"/>
-                <a:ea typeface="+mn-ea"/>
-                <a:cs typeface="+mn-cs"/>
-              </a:rPr>
-              <a:t>Among those aged </a:t>
-            </a:r>
-            <a:r>
-              <a:rPr lang="en-US" sz="1200" b="1" kern="1200" dirty="0">
-                <a:solidFill>
-                  <a:schemeClr val="tx1"/>
-                </a:solidFill>
-                <a:effectLst/>
-                <a:latin typeface="+mn-lt"/>
-                <a:ea typeface="+mn-ea"/>
-                <a:cs typeface="+mn-cs"/>
-              </a:rPr>
-              <a:t>35–44</a:t>
-            </a:r>
-            <a:r>
-              <a:rPr lang="en-US" sz="1200" kern="1200" dirty="0">
-                <a:solidFill>
-                  <a:schemeClr val="tx1"/>
-                </a:solidFill>
-                <a:effectLst/>
-                <a:latin typeface="+mn-lt"/>
-                <a:ea typeface="+mn-ea"/>
-                <a:cs typeface="+mn-cs"/>
-              </a:rPr>
-              <a:t>, they are approximately </a:t>
-            </a:r>
-            <a:r>
-              <a:rPr lang="en-US" sz="1200" b="1" kern="1200" dirty="0">
-                <a:solidFill>
-                  <a:schemeClr val="tx1"/>
-                </a:solidFill>
-                <a:effectLst/>
-                <a:latin typeface="+mn-lt"/>
-                <a:ea typeface="+mn-ea"/>
-                <a:cs typeface="+mn-cs"/>
-              </a:rPr>
-              <a:t>18.4% and 6.3%</a:t>
-            </a:r>
-            <a:r>
-              <a:rPr lang="en-US" sz="1200" kern="1200" dirty="0">
-                <a:solidFill>
-                  <a:schemeClr val="tx1"/>
-                </a:solidFill>
-                <a:effectLst/>
-                <a:latin typeface="+mn-lt"/>
-                <a:ea typeface="+mn-ea"/>
-                <a:cs typeface="+mn-cs"/>
-              </a:rPr>
-              <a:t>.</a:t>
-            </a:r>
-          </a:p>
-          <a:p>
-            <a:r>
-              <a:rPr lang="en-US" sz="1200" kern="1200" dirty="0">
-                <a:solidFill>
-                  <a:schemeClr val="tx1"/>
-                </a:solidFill>
-                <a:effectLst/>
-                <a:latin typeface="+mn-lt"/>
-                <a:ea typeface="+mn-ea"/>
-                <a:cs typeface="+mn-cs"/>
-              </a:rPr>
-              <a:t>The private group also has a higher rate among respondents aged 45–50.</a:t>
-            </a:r>
-          </a:p>
-          <a:p>
-            <a:r>
-              <a:rPr lang="en-US" sz="1200" kern="1200" dirty="0">
-                <a:solidFill>
-                  <a:schemeClr val="tx1"/>
-                </a:solidFill>
-                <a:effectLst/>
-                <a:latin typeface="+mn-lt"/>
-                <a:ea typeface="+mn-ea"/>
-                <a:cs typeface="+mn-cs"/>
-              </a:rPr>
-              <a:t>There is an exception in the youngest group, where Medicaid has the higher rate. Some cells also contain small samples.</a:t>
-            </a:r>
-          </a:p>
-          <a:p>
-            <a:r>
-              <a:rPr lang="en-US" sz="1200" kern="1200" dirty="0">
-                <a:solidFill>
-                  <a:schemeClr val="tx1"/>
-                </a:solidFill>
-                <a:effectLst/>
-                <a:latin typeface="+mn-lt"/>
-                <a:ea typeface="+mn-ea"/>
-                <a:cs typeface="+mn-cs"/>
-              </a:rPr>
-              <a:t>The takeaway is that the private–Medicaid pattern remains within the older age groups. This suggests that broad age composition alone may not account for the entire pattern.</a:t>
-            </a:r>
-          </a:p>
-          <a:p>
-            <a:r>
-              <a:rPr lang="en-US" sz="1200" kern="1200" dirty="0">
-                <a:solidFill>
-                  <a:schemeClr val="tx1"/>
-                </a:solidFill>
-                <a:effectLst/>
-                <a:latin typeface="+mn-lt"/>
-                <a:ea typeface="+mn-ea"/>
-                <a:cs typeface="+mn-cs"/>
-              </a:rPr>
-              <a:t>However, this comparison does not account for income or education. That is why I use a model next.</a:t>
-            </a:r>
-          </a:p>
-          <a:p>
             <a:endParaRPr lang="en-US" dirty="0"/>
           </a:p>
         </p:txBody>
@@ -3639,221 +1271,6 @@
         <p:txBody>
           <a:bodyPr/>
           <a:lstStyle/>
-          <a:p>
-            <a:br>
-              <a:rPr lang="en-US" sz="1200" kern="1200" dirty="0">
-                <a:solidFill>
-                  <a:schemeClr val="tx1"/>
-                </a:solidFill>
-                <a:effectLst/>
-                <a:latin typeface="+mn-lt"/>
-                <a:ea typeface="+mn-ea"/>
-                <a:cs typeface="+mn-cs"/>
-              </a:rPr>
-            </a:br>
-            <a:endParaRPr lang="en-US" sz="1200" kern="1200" dirty="0">
-              <a:solidFill>
-                <a:schemeClr val="tx1"/>
-              </a:solidFill>
-              <a:effectLst/>
-              <a:latin typeface="+mn-lt"/>
-              <a:ea typeface="+mn-ea"/>
-              <a:cs typeface="+mn-cs"/>
-            </a:endParaRPr>
-          </a:p>
-          <a:p>
-            <a:r>
-              <a:rPr lang="en-US" sz="1200" b="1" kern="1200" dirty="0">
-                <a:solidFill>
-                  <a:schemeClr val="tx1"/>
-                </a:solidFill>
-                <a:effectLst/>
-                <a:latin typeface="+mn-lt"/>
-                <a:ea typeface="+mn-ea"/>
-                <a:cs typeface="+mn-cs"/>
-              </a:rPr>
-              <a:t>Slide 9: Statistical Approach</a:t>
-            </a:r>
-            <a:endParaRPr lang="en-US" sz="1200" kern="1200" dirty="0">
-              <a:solidFill>
-                <a:schemeClr val="tx1"/>
-              </a:solidFill>
-              <a:effectLst/>
-              <a:latin typeface="+mn-lt"/>
-              <a:ea typeface="+mn-ea"/>
-              <a:cs typeface="+mn-cs"/>
-            </a:endParaRPr>
-          </a:p>
-          <a:p>
-            <a:r>
-              <a:rPr lang="en-US" sz="1200" kern="1200" dirty="0">
-                <a:solidFill>
-                  <a:schemeClr val="tx1"/>
-                </a:solidFill>
-                <a:effectLst/>
-                <a:latin typeface="+mn-lt"/>
-                <a:ea typeface="+mn-ea"/>
-                <a:cs typeface="+mn-cs"/>
-              </a:rPr>
-              <a:t>The model considers insurance, age, income, and education together.</a:t>
-            </a:r>
-          </a:p>
-          <a:p>
-            <a:r>
-              <a:rPr lang="en-US" sz="1200" kern="1200" dirty="0">
-                <a:solidFill>
-                  <a:schemeClr val="tx1"/>
-                </a:solidFill>
-                <a:effectLst/>
-                <a:latin typeface="+mn-lt"/>
-                <a:ea typeface="+mn-ea"/>
-                <a:cs typeface="+mn-cs"/>
-              </a:rPr>
-              <a:t>I use </a:t>
-            </a:r>
-            <a:r>
-              <a:rPr lang="en-US" sz="1200" b="1" kern="1200" dirty="0">
-                <a:solidFill>
-                  <a:schemeClr val="tx1"/>
-                </a:solidFill>
-                <a:effectLst/>
-                <a:latin typeface="+mn-lt"/>
-                <a:ea typeface="+mn-ea"/>
-                <a:cs typeface="+mn-cs"/>
-              </a:rPr>
-              <a:t>survey-weighted logistic regression</a:t>
-            </a:r>
-            <a:r>
-              <a:rPr lang="en-US" sz="1200" kern="1200" dirty="0">
-                <a:solidFill>
-                  <a:schemeClr val="tx1"/>
-                </a:solidFill>
-                <a:effectLst/>
-                <a:latin typeface="+mn-lt"/>
-                <a:ea typeface="+mn-ea"/>
-                <a:cs typeface="+mn-cs"/>
-              </a:rPr>
-              <a:t> because the outcome is yes or no: whether someone reported ever receiving medical help to become pregnant.</a:t>
-            </a:r>
-          </a:p>
-          <a:p>
-            <a:r>
-              <a:rPr lang="en-US" sz="1200" kern="1200" dirty="0">
-                <a:solidFill>
-                  <a:schemeClr val="tx1"/>
-                </a:solidFill>
-                <a:effectLst/>
-                <a:latin typeface="+mn-lt"/>
-                <a:ea typeface="+mn-ea"/>
-                <a:cs typeface="+mn-cs"/>
-              </a:rPr>
-              <a:t>Private coverage is the reference group. The model compares each other insurance category with that group while accounting for the selected characteristics.</a:t>
-            </a:r>
-          </a:p>
-          <a:p>
-            <a:r>
-              <a:rPr lang="en-US" sz="1200" kern="1200" dirty="0">
-                <a:solidFill>
-                  <a:schemeClr val="tx1"/>
-                </a:solidFill>
-                <a:effectLst/>
-                <a:latin typeface="+mn-lt"/>
-                <a:ea typeface="+mn-ea"/>
-                <a:cs typeface="+mn-cs"/>
-              </a:rPr>
-              <a:t>The results use a measure called an </a:t>
-            </a:r>
-            <a:r>
-              <a:rPr lang="en-US" sz="1200" b="1" kern="1200" dirty="0">
-                <a:solidFill>
-                  <a:schemeClr val="tx1"/>
-                </a:solidFill>
-                <a:effectLst/>
-                <a:latin typeface="+mn-lt"/>
-                <a:ea typeface="+mn-ea"/>
-                <a:cs typeface="+mn-cs"/>
-              </a:rPr>
-              <a:t>odds ratio</a:t>
-            </a:r>
-            <a:r>
-              <a:rPr lang="en-US" sz="1200" kern="1200" dirty="0">
-                <a:solidFill>
-                  <a:schemeClr val="tx1"/>
-                </a:solidFill>
-                <a:effectLst/>
-                <a:latin typeface="+mn-lt"/>
-                <a:ea typeface="+mn-ea"/>
-                <a:cs typeface="+mn-cs"/>
-              </a:rPr>
-              <a:t>.</a:t>
-            </a:r>
-          </a:p>
-          <a:p>
-            <a:r>
-              <a:rPr lang="en-US" sz="1200" kern="1200" dirty="0">
-                <a:solidFill>
-                  <a:schemeClr val="tx1"/>
-                </a:solidFill>
-                <a:effectLst/>
-                <a:latin typeface="+mn-lt"/>
-                <a:ea typeface="+mn-ea"/>
-                <a:cs typeface="+mn-cs"/>
-              </a:rPr>
-              <a:t>For reading the next chart, the main number to remember is </a:t>
-            </a:r>
-            <a:r>
-              <a:rPr lang="en-US" sz="1200" b="1" kern="1200" dirty="0">
-                <a:solidFill>
-                  <a:schemeClr val="tx1"/>
-                </a:solidFill>
-                <a:effectLst/>
-                <a:latin typeface="+mn-lt"/>
-                <a:ea typeface="+mn-ea"/>
-                <a:cs typeface="+mn-cs"/>
-              </a:rPr>
-              <a:t>one</a:t>
-            </a:r>
-            <a:r>
-              <a:rPr lang="en-US" sz="1200" kern="1200" dirty="0">
-                <a:solidFill>
-                  <a:schemeClr val="tx1"/>
-                </a:solidFill>
-                <a:effectLst/>
-                <a:latin typeface="+mn-lt"/>
-                <a:ea typeface="+mn-ea"/>
-                <a:cs typeface="+mn-cs"/>
-              </a:rPr>
-              <a:t>. A value of one means equal odds compared with private coverage. A value below one indicates a lower tendency to report receiving help, and a value above one indicates a higher tendency.</a:t>
-            </a:r>
-          </a:p>
-          <a:p>
-            <a:r>
-              <a:rPr lang="en-US" sz="1200" kern="1200" dirty="0">
-                <a:solidFill>
-                  <a:schemeClr val="tx1"/>
-                </a:solidFill>
-                <a:effectLst/>
-                <a:latin typeface="+mn-lt"/>
-                <a:ea typeface="+mn-ea"/>
-                <a:cs typeface="+mn-cs"/>
-              </a:rPr>
-              <a:t>The confidence interval shows the uncertainty around each estimate.</a:t>
-            </a:r>
-          </a:p>
-          <a:p>
-            <a:r>
-              <a:rPr lang="en-US" sz="1200" kern="1200" dirty="0">
-                <a:solidFill>
-                  <a:schemeClr val="tx1"/>
-                </a:solidFill>
-                <a:effectLst/>
-                <a:latin typeface="+mn-lt"/>
-                <a:ea typeface="+mn-ea"/>
-                <a:cs typeface="+mn-cs"/>
-              </a:rPr>
-              <a:t>These numbers are not percentage-point differences. I’ll use them to explain the direction of the adjusted association and how clear the evidence is.</a:t>
-            </a:r>
-          </a:p>
           <a:p>
             <a:endParaRPr lang="en-US" dirty="0"/>
           </a:p>
@@ -4159,7 +1576,7 @@
           </a:prstGeom>
           <a:extLst>
             <a:ext uri="{C572A759-6A51-4108-AA02-DFA0A04FC94B}">
-              <ma14:wrappingTextBoxFlag xmlns="" xmlns:ma14="http://schemas.microsoft.com/office/mac/drawingml/2011/main" val="0"/>
+              <ma14:wrappingTextBoxFlag xmlns:ma14="http://schemas.microsoft.com/office/mac/drawingml/2011/main" xmlns="" val="0"/>
             </a:ext>
           </a:extLst>
         </p:spPr>
@@ -4234,7 +1651,7 @@
           </a:prstGeom>
           <a:extLst>
             <a:ext uri="{C572A759-6A51-4108-AA02-DFA0A04FC94B}">
-              <ma14:wrappingTextBoxFlag xmlns="" xmlns:ma14="http://schemas.microsoft.com/office/mac/drawingml/2011/main" val="0"/>
+              <ma14:wrappingTextBoxFlag xmlns:ma14="http://schemas.microsoft.com/office/mac/drawingml/2011/main" xmlns="" val="0"/>
             </a:ext>
           </a:extLst>
         </p:spPr>
@@ -6371,7 +3788,7 @@
           </a:prstGeom>
           <a:extLst>
             <a:ext uri="{C572A759-6A51-4108-AA02-DFA0A04FC94B}">
-              <ma14:wrappingTextBoxFlag xmlns="" xmlns:ma14="http://schemas.microsoft.com/office/mac/drawingml/2011/main" val="0"/>
+              <ma14:wrappingTextBoxFlag xmlns:ma14="http://schemas.microsoft.com/office/mac/drawingml/2011/main" xmlns="" val="0"/>
             </a:ext>
           </a:extLst>
         </p:spPr>
@@ -6821,7 +4238,7 @@
           </a:prstGeom>
           <a:extLst>
             <a:ext uri="{C572A759-6A51-4108-AA02-DFA0A04FC94B}">
-              <ma14:wrappingTextBoxFlag xmlns="" xmlns:ma14="http://schemas.microsoft.com/office/mac/drawingml/2011/main" val="0"/>
+              <ma14:wrappingTextBoxFlag xmlns:ma14="http://schemas.microsoft.com/office/mac/drawingml/2011/main" xmlns="" val="0"/>
             </a:ext>
           </a:extLst>
         </p:spPr>
@@ -7647,7 +5064,7 @@
           </a:prstGeom>
           <a:extLst>
             <a:ext uri="{C572A759-6A51-4108-AA02-DFA0A04FC94B}">
-              <ma14:wrappingTextBoxFlag xmlns="" xmlns:ma14="http://schemas.microsoft.com/office/mac/drawingml/2011/main" val="0"/>
+              <ma14:wrappingTextBoxFlag xmlns:ma14="http://schemas.microsoft.com/office/mac/drawingml/2011/main" xmlns="" val="0"/>
             </a:ext>
           </a:extLst>
         </p:spPr>
@@ -7876,7 +5293,7 @@
           </a:prstGeom>
           <a:extLst>
             <a:ext uri="{C572A759-6A51-4108-AA02-DFA0A04FC94B}">
-              <ma14:wrappingTextBoxFlag xmlns="" xmlns:ma14="http://schemas.microsoft.com/office/mac/drawingml/2011/main" val="0"/>
+              <ma14:wrappingTextBoxFlag xmlns:ma14="http://schemas.microsoft.com/office/mac/drawingml/2011/main" xmlns="" val="0"/>
             </a:ext>
           </a:extLst>
         </p:spPr>
@@ -8478,7 +5895,7 @@
           </a:prstGeom>
           <a:extLst>
             <a:ext uri="{C572A759-6A51-4108-AA02-DFA0A04FC94B}">
-              <ma14:wrappingTextBoxFlag xmlns="" xmlns:ma14="http://schemas.microsoft.com/office/mac/drawingml/2011/main" val="0"/>
+              <ma14:wrappingTextBoxFlag xmlns:ma14="http://schemas.microsoft.com/office/mac/drawingml/2011/main" xmlns="" val="0"/>
             </a:ext>
           </a:extLst>
         </p:spPr>
@@ -9553,7 +6970,7 @@
           </a:prstGeom>
           <a:extLst>
             <a:ext uri="{C572A759-6A51-4108-AA02-DFA0A04FC94B}">
-              <ma14:wrappingTextBoxFlag xmlns="" xmlns:ma14="http://schemas.microsoft.com/office/mac/drawingml/2011/main" val="0"/>
+              <ma14:wrappingTextBoxFlag xmlns:ma14="http://schemas.microsoft.com/office/mac/drawingml/2011/main" xmlns="" val="0"/>
             </a:ext>
           </a:extLst>
         </p:spPr>
@@ -10486,7 +7903,7 @@
           </a:prstGeom>
           <a:extLst>
             <a:ext uri="{C572A759-6A51-4108-AA02-DFA0A04FC94B}">
-              <ma14:wrappingTextBoxFlag xmlns="" xmlns:ma14="http://schemas.microsoft.com/office/mac/drawingml/2011/main" val="0"/>
+              <ma14:wrappingTextBoxFlag xmlns:ma14="http://schemas.microsoft.com/office/mac/drawingml/2011/main" xmlns="" val="0"/>
             </a:ext>
           </a:extLst>
         </p:spPr>
@@ -10950,7 +8367,7 @@
           </a:prstGeom>
           <a:extLst>
             <a:ext uri="{C572A759-6A51-4108-AA02-DFA0A04FC94B}">
-              <ma14:wrappingTextBoxFlag xmlns="" xmlns:ma14="http://schemas.microsoft.com/office/mac/drawingml/2011/main" val="0"/>
+              <ma14:wrappingTextBoxFlag xmlns:ma14="http://schemas.microsoft.com/office/mac/drawingml/2011/main" xmlns="" val="0"/>
             </a:ext>
           </a:extLst>
         </p:spPr>
@@ -12184,7 +9601,7 @@
           </a:prstGeom>
           <a:extLst>
             <a:ext uri="{C572A759-6A51-4108-AA02-DFA0A04FC94B}">
-              <ma14:wrappingTextBoxFlag xmlns="" xmlns:ma14="http://schemas.microsoft.com/office/mac/drawingml/2011/main" val="0"/>
+              <ma14:wrappingTextBoxFlag xmlns:ma14="http://schemas.microsoft.com/office/mac/drawingml/2011/main" xmlns="" val="0"/>
             </a:ext>
           </a:extLst>
         </p:spPr>
@@ -13611,7 +11028,7 @@
           </a:prstGeom>
           <a:extLst>
             <a:ext uri="{C572A759-6A51-4108-AA02-DFA0A04FC94B}">
-              <ma14:wrappingTextBoxFlag xmlns="" xmlns:ma14="http://schemas.microsoft.com/office/mac/drawingml/2011/main" val="0"/>
+              <ma14:wrappingTextBoxFlag xmlns:ma14="http://schemas.microsoft.com/office/mac/drawingml/2011/main" xmlns="" val="0"/>
             </a:ext>
           </a:extLst>
         </p:spPr>
